--- a/вкр/практика/преза.pptx
+++ b/вкр/практика/преза.pptx
@@ -5253,12 +5253,12 @@
               <a:buNone/>
             </a:pPr>
             <a:r>
-              <a:rPr lang="ru-RU" sz="1600" dirty="0">
+              <a:rPr lang="ru-RU" sz="1400" dirty="0">
                 <a:effectLst/>
                 <a:ea typeface="Calibri" panose="020F0502020204030204" pitchFamily="34" charset="0"/>
                 <a:cs typeface="Times New Roman" panose="02020603050405020304" pitchFamily="18" charset="0"/>
               </a:rPr>
-              <a:t>Цель:</a:t>
+              <a:t>Цель практики:</a:t>
             </a:r>
           </a:p>
           <a:p>
@@ -5269,12 +5269,12 @@
               <a:buNone/>
             </a:pPr>
             <a:r>
-              <a:rPr lang="ru-RU" sz="1600" dirty="0">
+              <a:rPr lang="ru-RU" sz="1400" dirty="0">
                 <a:effectLst/>
                 <a:ea typeface="Calibri" panose="020F0502020204030204" pitchFamily="34" charset="0"/>
                 <a:cs typeface="Times New Roman" panose="02020603050405020304" pitchFamily="18" charset="0"/>
               </a:rPr>
-              <a:t>Разработать программную часть системы распознавания эмоций человека на основе ИНС с использованием методов компьютерного зрения и глубокого обучения</a:t>
+              <a:t>Разработать программную часть системы распознавания эмоций человека на основе искусственной нейронной сети с использованием методов компьютерного зрения и глубокого обучения, включая обработку видеопотока, обучение модели и интеграцию с базой данных.</a:t>
             </a:r>
           </a:p>
           <a:p>
@@ -5285,117 +5285,140 @@
               <a:buNone/>
             </a:pPr>
             <a:r>
-              <a:rPr lang="ru-RU" sz="1600" dirty="0">
+              <a:rPr lang="ru-RU" sz="1400" dirty="0">
                 <a:effectLst/>
                 <a:ea typeface="Calibri" panose="020F0502020204030204" pitchFamily="34" charset="0"/>
                 <a:cs typeface="Times New Roman" panose="02020603050405020304" pitchFamily="18" charset="0"/>
               </a:rPr>
-              <a:t>Задачи:</a:t>
-            </a:r>
-          </a:p>
-          <a:p>
-            <a:pPr marL="514350" indent="-285750" algn="just">
+              <a:t>Задачи практики:</a:t>
+            </a:r>
+          </a:p>
+          <a:p>
+            <a:pPr indent="0" algn="just">
               <a:lnSpc>
                 <a:spcPct val="150000"/>
               </a:lnSpc>
+              <a:buNone/>
             </a:pPr>
             <a:r>
-              <a:rPr lang="ru-RU" sz="1600" dirty="0">
+              <a:rPr lang="ru-RU" sz="1400" dirty="0">
                 <a:effectLst/>
                 <a:ea typeface="Calibri" panose="020F0502020204030204" pitchFamily="34" charset="0"/>
                 <a:cs typeface="Times New Roman" panose="02020603050405020304" pitchFamily="18" charset="0"/>
               </a:rPr>
-              <a:t>Изучить предметную область и современные методы распознавания эмоций</a:t>
-            </a:r>
-          </a:p>
-          <a:p>
-            <a:pPr marL="514350" indent="-285750" algn="just">
+              <a:t>Описание средств и технологий разработки</a:t>
+            </a:r>
+          </a:p>
+          <a:p>
+            <a:pPr indent="0" algn="just">
               <a:lnSpc>
                 <a:spcPct val="150000"/>
               </a:lnSpc>
+              <a:buNone/>
             </a:pPr>
             <a:r>
-              <a:rPr lang="ru-RU" sz="1600" dirty="0">
+              <a:rPr lang="ru-RU" sz="1400" dirty="0">
                 <a:effectLst/>
                 <a:ea typeface="Calibri" panose="020F0502020204030204" pitchFamily="34" charset="0"/>
                 <a:cs typeface="Times New Roman" panose="02020603050405020304" pitchFamily="18" charset="0"/>
               </a:rPr>
-              <a:t>Разработать архитектуру системы и схему взаимодействия модулей</a:t>
-            </a:r>
-          </a:p>
-          <a:p>
-            <a:pPr marL="514350" indent="-285750" algn="just">
+              <a:t>Проработка видов обеспечения: информационное обеспечение, программное обеспечение, алгоритмическое обеспечение, математическое обеспечение, техническое обеспечение</a:t>
+            </a:r>
+          </a:p>
+          <a:p>
+            <a:pPr indent="0" algn="just">
               <a:lnSpc>
                 <a:spcPct val="150000"/>
               </a:lnSpc>
+              <a:buNone/>
             </a:pPr>
             <a:r>
-              <a:rPr lang="ru-RU" sz="1600" dirty="0">
+              <a:rPr lang="ru-RU" sz="1400" dirty="0">
                 <a:effectLst/>
                 <a:ea typeface="Calibri" panose="020F0502020204030204" pitchFamily="34" charset="0"/>
                 <a:cs typeface="Times New Roman" panose="02020603050405020304" pitchFamily="18" charset="0"/>
               </a:rPr>
-              <a:t>Реализовать модуль предобработки видеоданных и детекции лица</a:t>
-            </a:r>
-          </a:p>
-          <a:p>
-            <a:pPr marL="514350" indent="-285750" algn="just">
-              <a:lnSpc>
-                <a:spcPct val="150000"/>
-              </a:lnSpc>
-            </a:pPr>
-            <a:r>
-              <a:rPr lang="ru-RU" sz="1600" dirty="0">
+              <a:t>Реализация модуля анализа лица и эмоций на основе </a:t>
+            </a:r>
+            <a:r>
+              <a:rPr lang="ru-RU" sz="1400" dirty="0" err="1">
                 <a:effectLst/>
                 <a:ea typeface="Calibri" panose="020F0502020204030204" pitchFamily="34" charset="0"/>
                 <a:cs typeface="Times New Roman" panose="02020603050405020304" pitchFamily="18" charset="0"/>
               </a:rPr>
-              <a:t>Разработать и обучить модель ИНС для классификации эмоций</a:t>
-            </a:r>
-          </a:p>
-          <a:p>
-            <a:pPr marL="514350" indent="-285750" algn="just">
-              <a:lnSpc>
-                <a:spcPct val="150000"/>
-              </a:lnSpc>
-            </a:pPr>
-            <a:r>
-              <a:rPr lang="ru-RU" sz="1600" dirty="0">
+              <a:t>сверточных</a:t>
+            </a:r>
+            <a:r>
+              <a:rPr lang="ru-RU" sz="1400" dirty="0">
                 <a:effectLst/>
                 <a:ea typeface="Calibri" panose="020F0502020204030204" pitchFamily="34" charset="0"/>
                 <a:cs typeface="Times New Roman" panose="02020603050405020304" pitchFamily="18" charset="0"/>
               </a:rPr>
-              <a:t>Реализовать модуль взаимодействия с БД</a:t>
-            </a:r>
-          </a:p>
-          <a:p>
-            <a:pPr marL="514350" indent="-285750" algn="just">
+              <a:t> нейронных сетей</a:t>
+            </a:r>
+          </a:p>
+          <a:p>
+            <a:pPr indent="0" algn="just">
               <a:lnSpc>
                 <a:spcPct val="150000"/>
               </a:lnSpc>
+              <a:buNone/>
             </a:pPr>
             <a:r>
-              <a:rPr lang="ru-RU" sz="1600" dirty="0">
+              <a:rPr lang="ru-RU" sz="1400" dirty="0">
                 <a:effectLst/>
                 <a:ea typeface="Calibri" panose="020F0502020204030204" pitchFamily="34" charset="0"/>
                 <a:cs typeface="Times New Roman" panose="02020603050405020304" pitchFamily="18" charset="0"/>
               </a:rPr>
-              <a:t>Разработать пользовательский интерфейс</a:t>
-            </a:r>
-          </a:p>
-          <a:p>
-            <a:pPr marL="514350" indent="-285750" algn="just">
+              <a:t>Реализация модуля распознавания речи и анализа аудиопотока</a:t>
+            </a:r>
+          </a:p>
+          <a:p>
+            <a:pPr indent="0" algn="just">
               <a:lnSpc>
                 <a:spcPct val="150000"/>
               </a:lnSpc>
+              <a:buNone/>
             </a:pPr>
             <a:r>
-              <a:rPr lang="ru-RU" sz="1600" dirty="0">
+              <a:rPr lang="ru-RU" sz="1400" dirty="0">
                 <a:effectLst/>
                 <a:ea typeface="Calibri" panose="020F0502020204030204" pitchFamily="34" charset="0"/>
                 <a:cs typeface="Times New Roman" panose="02020603050405020304" pitchFamily="18" charset="0"/>
               </a:rPr>
-              <a:t>Провести тестирование системы</a:t>
+              <a:t>Разработка пользовательского интерфейса программного комплекса</a:t>
+            </a:r>
+          </a:p>
+          <a:p>
+            <a:pPr indent="0" algn="just">
+              <a:lnSpc>
+                <a:spcPct val="150000"/>
+              </a:lnSpc>
+              <a:buNone/>
+            </a:pPr>
+            <a:r>
+              <a:rPr lang="ru-RU" sz="1400" dirty="0">
+                <a:effectLst/>
+                <a:ea typeface="Calibri" panose="020F0502020204030204" pitchFamily="34" charset="0"/>
+                <a:cs typeface="Times New Roman" panose="02020603050405020304" pitchFamily="18" charset="0"/>
+              </a:rPr>
+              <a:t>Интеграция модулей искусственного интеллекта в единую систему</a:t>
+            </a:r>
+          </a:p>
+          <a:p>
+            <a:pPr indent="0" algn="just">
+              <a:lnSpc>
+                <a:spcPct val="150000"/>
+              </a:lnSpc>
+              <a:buNone/>
+            </a:pPr>
+            <a:r>
+              <a:rPr lang="ru-RU" sz="1400" dirty="0">
+                <a:effectLst/>
+                <a:ea typeface="Calibri" panose="020F0502020204030204" pitchFamily="34" charset="0"/>
+                <a:cs typeface="Times New Roman" panose="02020603050405020304" pitchFamily="18" charset="0"/>
+              </a:rPr>
+              <a:t>Подготовка отчета по преддипломной практике</a:t>
             </a:r>
           </a:p>
         </p:txBody>
@@ -5527,7 +5550,7 @@
         </p:spPr>
         <p:txBody>
           <a:bodyPr>
-            <a:normAutofit/>
+            <a:normAutofit fontScale="77500" lnSpcReduction="20000"/>
           </a:bodyPr>
           <a:lstStyle/>
           <a:p>
@@ -5536,7 +5559,7 @@
             </a:pPr>
             <a:r>
               <a:rPr lang="ru-RU" dirty="0"/>
-              <a:t>Рост значимости эмоционального интеллекта в HR</a:t>
+              <a:t>Рост значимости эмоционального интеллекта в HR: Современные подходы к управлению персоналом подчеркивают важность учёта эмоционального состояния сотрудников для повышения производительности и снижения текучести кадров. Эмоции влияют на мотивацию, вовлечённость и качество работы.</a:t>
             </a:r>
           </a:p>
           <a:p>
@@ -5545,7 +5568,7 @@
             </a:pPr>
             <a:r>
               <a:rPr lang="ru-RU" dirty="0"/>
-              <a:t>Традиционные методы (анкетирование) — низкая точность и оперативность</a:t>
+              <a:t>Ограниченность традиционных методов: Субъективные оценки и анкетирование не обеспечивают высокой точности и оперативности, что затрудняет своевременное выявление проблем, таких как профессиональное выгорание или снижение вовлечённости.</a:t>
             </a:r>
           </a:p>
           <a:p>
@@ -5554,7 +5577,7 @@
             </a:pPr>
             <a:r>
               <a:rPr lang="ru-RU" dirty="0"/>
-              <a:t>Необходимость объективной оценки эмоционального состояния</a:t>
+              <a:t>Развитие технологий ИИ: Прогресс в области компьютерного зрения, обработки аудиосигналов и глубокого обучения создаёт основу для разработки автоматизированных систем анализа эмоций в реальном времени.</a:t>
             </a:r>
           </a:p>
           <a:p>
@@ -5563,7 +5586,7 @@
             </a:pPr>
             <a:r>
               <a:rPr lang="ru-RU" dirty="0"/>
-              <a:t>Отсутствие систем, адаптированных под РФ и ФЗ-152</a:t>
+              <a:t>Потребность в мультимодальном анализе: Комплексный подход, объединяющий видео- и аудиоданные, позволяет учитывать разнообразные аспекты эмоционального состояния, повышая точность классификации до 85% и выше.</a:t>
             </a:r>
           </a:p>
           <a:p>
@@ -5572,7 +5595,16 @@
             </a:pPr>
             <a:r>
               <a:rPr lang="ru-RU" dirty="0"/>
-              <a:t>Система снизит нагрузку на HR и повысит качество оценки</a:t>
+              <a:t>Экономическая эффективность: Автоматизация анализа эмоций способствует снижению затрат на HR-процессы, таких как подбор персонала и мониторинг вовлечённости, за счёт оперативного предоставления данных для принятия управленческих решений.</a:t>
+            </a:r>
+          </a:p>
+          <a:p>
+            <a:pPr marL="0" indent="0">
+              <a:buNone/>
+            </a:pPr>
+            <a:r>
+              <a:rPr lang="ru-RU" dirty="0"/>
+              <a:t>Соответствие законодательству: Разрабатываемая система обеспечивает соответствие требованиям ФЗ-152 о защите персональных данных за счёт локальной обработки информации и шифрования.</a:t>
             </a:r>
           </a:p>
         </p:txBody>

--- a/вкр/практика/преза.pptx
+++ b/вкр/практика/преза.pptx
@@ -11,19 +11,21 @@
     <p:sldId id="282" r:id="rId5"/>
     <p:sldId id="259" r:id="rId6"/>
     <p:sldId id="260" r:id="rId7"/>
-    <p:sldId id="261" r:id="rId8"/>
-    <p:sldId id="262" r:id="rId9"/>
-    <p:sldId id="264" r:id="rId10"/>
-    <p:sldId id="265" r:id="rId11"/>
-    <p:sldId id="266" r:id="rId12"/>
-    <p:sldId id="267" r:id="rId13"/>
-    <p:sldId id="268" r:id="rId14"/>
-    <p:sldId id="269" r:id="rId15"/>
-    <p:sldId id="272" r:id="rId16"/>
-    <p:sldId id="274" r:id="rId17"/>
-    <p:sldId id="276" r:id="rId18"/>
-    <p:sldId id="277" r:id="rId19"/>
-    <p:sldId id="280" r:id="rId20"/>
+    <p:sldId id="283" r:id="rId8"/>
+    <p:sldId id="284" r:id="rId9"/>
+    <p:sldId id="262" r:id="rId10"/>
+    <p:sldId id="261" r:id="rId11"/>
+    <p:sldId id="285" r:id="rId12"/>
+    <p:sldId id="264" r:id="rId13"/>
+    <p:sldId id="266" r:id="rId14"/>
+    <p:sldId id="267" r:id="rId15"/>
+    <p:sldId id="268" r:id="rId16"/>
+    <p:sldId id="269" r:id="rId17"/>
+    <p:sldId id="272" r:id="rId18"/>
+    <p:sldId id="274" r:id="rId19"/>
+    <p:sldId id="276" r:id="rId20"/>
+    <p:sldId id="277" r:id="rId21"/>
+    <p:sldId id="280" r:id="rId22"/>
   </p:sldIdLst>
   <p:sldSz cx="12192000" cy="6858000"/>
   <p:notesSz cx="6858000" cy="9144000"/>
@@ -3457,7 +3459,7 @@
           <p:cNvPr id="2" name="Заголовок 1">
             <a:extLst>
               <a:ext uri="{FF2B5EF4-FFF2-40B4-BE49-F238E27FC236}">
-                <a16:creationId xmlns:a16="http://schemas.microsoft.com/office/drawing/2014/main" id="{4AB9A0AA-10E7-4050-98DE-0F44F58FFB2D}"/>
+                <a16:creationId xmlns:a16="http://schemas.microsoft.com/office/drawing/2014/main" id="{975598A4-2CEB-4A01-98CC-B4D5443A0519}"/>
               </a:ext>
             </a:extLst>
           </p:cNvPr>
@@ -3466,45 +3468,50 @@
           </p:cNvSpPr>
           <p:nvPr>
             <p:ph type="title"/>
-          </p:nvPr>
-        </p:nvSpPr>
-        <p:spPr/>
-        <p:txBody>
-          <a:bodyPr/>
-          <a:lstStyle/>
-          <a:p>
-            <a:r>
-              <a:rPr lang="ru-RU" dirty="0"/>
-              <a:t>Средство разработки пользовательского интерфейса</a:t>
-            </a:r>
-          </a:p>
-        </p:txBody>
-      </p:sp>
-      <p:sp>
-        <p:nvSpPr>
-          <p:cNvPr id="3" name="Объект 2">
-            <a:extLst>
-              <a:ext uri="{FF2B5EF4-FFF2-40B4-BE49-F238E27FC236}">
-                <a16:creationId xmlns:a16="http://schemas.microsoft.com/office/drawing/2014/main" id="{77443656-0DAB-4754-98A4-FD307F476442}"/>
-              </a:ext>
-            </a:extLst>
-          </p:cNvPr>
-          <p:cNvSpPr>
-            <a:spLocks noGrp="1"/>
-          </p:cNvSpPr>
-          <p:nvPr>
-            <p:ph idx="1"/>
           </p:nvPr>
         </p:nvSpPr>
         <p:spPr>
           <a:xfrm>
-            <a:off x="270029" y="1825625"/>
-            <a:ext cx="5500456" cy="4351338"/>
+            <a:off x="838200" y="85987"/>
+            <a:ext cx="10515600" cy="1325563"/>
           </a:xfrm>
         </p:spPr>
         <p:txBody>
+          <a:bodyPr/>
+          <a:lstStyle/>
+          <a:p>
+            <a:r>
+              <a:rPr lang="ru-RU" dirty="0"/>
+              <a:t>Модуль распознавания речи</a:t>
+            </a:r>
+          </a:p>
+        </p:txBody>
+      </p:sp>
+      <p:sp>
+        <p:nvSpPr>
+          <p:cNvPr id="3" name="Объект 2">
+            <a:extLst>
+              <a:ext uri="{FF2B5EF4-FFF2-40B4-BE49-F238E27FC236}">
+                <a16:creationId xmlns:a16="http://schemas.microsoft.com/office/drawing/2014/main" id="{3F58553F-6F10-47A7-90AD-8A548C4AE47D}"/>
+              </a:ext>
+            </a:extLst>
+          </p:cNvPr>
+          <p:cNvSpPr>
+            <a:spLocks noGrp="1"/>
+          </p:cNvSpPr>
+          <p:nvPr>
+            <p:ph idx="1"/>
+          </p:nvPr>
+        </p:nvSpPr>
+        <p:spPr>
+          <a:xfrm>
+            <a:off x="838200" y="1100831"/>
+            <a:ext cx="10515600" cy="5592932"/>
+          </a:xfrm>
+        </p:spPr>
+        <p:txBody>
           <a:bodyPr>
-            <a:normAutofit/>
+            <a:normAutofit lnSpcReduction="10000"/>
           </a:bodyPr>
           <a:lstStyle/>
           <a:p>
@@ -3512,84 +3519,100 @@
               <a:buNone/>
             </a:pPr>
             <a:r>
-              <a:rPr lang="en-US" b="1" dirty="0"/>
-              <a:t>React 18 + TypeScript + </a:t>
-            </a:r>
-            <a:r>
-              <a:rPr lang="en-US" b="1" dirty="0" err="1"/>
-              <a:t>Vite</a:t>
-            </a:r>
-            <a:endParaRPr lang="en-US" b="1" dirty="0"/>
+              <a:rPr lang="ru-RU" dirty="0"/>
+              <a:t>Модель </a:t>
+            </a:r>
+            <a:r>
+              <a:rPr lang="ru-RU" dirty="0" err="1"/>
+              <a:t>Whisper</a:t>
+            </a:r>
+            <a:r>
+              <a:rPr lang="ru-RU" dirty="0"/>
+              <a:t> (OpenAI):</a:t>
+            </a:r>
+          </a:p>
+          <a:p>
+            <a:r>
+              <a:rPr lang="ru-RU" dirty="0" err="1"/>
+              <a:t>Encoder-decoder</a:t>
+            </a:r>
+            <a:r>
+              <a:rPr lang="ru-RU" dirty="0"/>
+              <a:t> трансформер, обученный на 680 000 часов аудиоданных</a:t>
+            </a:r>
+          </a:p>
+          <a:p>
+            <a:r>
+              <a:rPr lang="ru-RU" dirty="0"/>
+              <a:t>Поддержка 99 языков, устойчивость к акцентам и шуму</a:t>
+            </a:r>
           </a:p>
           <a:p>
             <a:pPr marL="0" indent="0">
               <a:buNone/>
             </a:pPr>
             <a:r>
-              <a:rPr lang="ru-RU" b="1" dirty="0"/>
-              <a:t>Компонентная архитектура</a:t>
-            </a:r>
-          </a:p>
-          <a:p>
-            <a:pPr marL="0" indent="0">
-              <a:buNone/>
-            </a:pPr>
-            <a:r>
-              <a:rPr lang="en-US" b="1" dirty="0"/>
-              <a:t>WebSocket </a:t>
-            </a:r>
-            <a:r>
-              <a:rPr lang="ru-RU" b="1" dirty="0"/>
-              <a:t>для </a:t>
-            </a:r>
-            <a:r>
-              <a:rPr lang="en-US" b="1" dirty="0"/>
-              <a:t>real-time</a:t>
-            </a:r>
-          </a:p>
-          <a:p>
-            <a:pPr marL="0" indent="0">
-              <a:buNone/>
-            </a:pPr>
-            <a:r>
-              <a:rPr lang="ru-RU" b="1" dirty="0"/>
-              <a:t>Адаптивный дизайн</a:t>
-            </a:r>
-          </a:p>
-          <a:p>
-            <a:pPr marL="0" indent="0">
-              <a:buNone/>
-            </a:pPr>
-            <a:r>
-              <a:rPr lang="ru-RU" b="1" dirty="0"/>
-              <a:t>Браузерные </a:t>
-            </a:r>
-            <a:r>
-              <a:rPr lang="en-US" b="1" dirty="0"/>
-              <a:t>Media API </a:t>
-            </a:r>
-            <a:r>
-              <a:rPr lang="ru-RU" b="1" dirty="0"/>
-              <a:t>для захвата</a:t>
-            </a:r>
-          </a:p>
-          <a:p>
-            <a:pPr marL="0" indent="0">
-              <a:buNone/>
-            </a:pPr>
-            <a:r>
-              <a:rPr lang="ru-RU" b="1" dirty="0"/>
-              <a:t>Картинка: Рисунок 7 из отчёта (интерфейс системы)</a:t>
-            </a:r>
-          </a:p>
-        </p:txBody>
-      </p:sp>
-      <p:sp>
-        <p:nvSpPr>
-          <p:cNvPr id="5" name="TextBox 4">
-            <a:extLst>
-              <a:ext uri="{FF2B5EF4-FFF2-40B4-BE49-F238E27FC236}">
-                <a16:creationId xmlns:a16="http://schemas.microsoft.com/office/drawing/2014/main" id="{7A5D21C4-ABD9-41FB-B81E-16DC30531647}"/>
+              <a:rPr lang="ru-RU" dirty="0"/>
+              <a:t>Архитектура обработки:</a:t>
+            </a:r>
+          </a:p>
+          <a:p>
+            <a:r>
+              <a:rPr lang="ru-RU" dirty="0"/>
+              <a:t>Предобработка: аудиосигнал 16 кГц преобразуется в мел-спектрограмму (80 каналов)</a:t>
+            </a:r>
+          </a:p>
+          <a:p>
+            <a:r>
+              <a:rPr lang="ru-RU" dirty="0" err="1"/>
+              <a:t>Энкодер</a:t>
+            </a:r>
+            <a:r>
+              <a:rPr lang="ru-RU" dirty="0"/>
+              <a:t> извлекает контекстуальные признаки через механизм </a:t>
+            </a:r>
+            <a:r>
+              <a:rPr lang="ru-RU" dirty="0" err="1"/>
+              <a:t>самовнимания</a:t>
+            </a:r>
+            <a:endParaRPr lang="ru-RU" dirty="0"/>
+          </a:p>
+          <a:p>
+            <a:r>
+              <a:rPr lang="ru-RU" dirty="0"/>
+              <a:t>Декодер генерирует текстовые токены </a:t>
+            </a:r>
+            <a:r>
+              <a:rPr lang="ru-RU" dirty="0" err="1"/>
+              <a:t>авторегрессионно</a:t>
+            </a:r>
+            <a:r>
+              <a:rPr lang="ru-RU" dirty="0"/>
+              <a:t> с учётом кросс-внимания</a:t>
+            </a:r>
+          </a:p>
+          <a:p>
+            <a:r>
+              <a:rPr lang="ru-RU" dirty="0"/>
+              <a:t>Оптимизация: Библиотека </a:t>
+            </a:r>
+            <a:r>
+              <a:rPr lang="ru-RU" dirty="0" err="1"/>
+              <a:t>faster-whisper</a:t>
+            </a:r>
+            <a:r>
+              <a:rPr lang="ru-RU" dirty="0"/>
+              <a:t> с квантованием весов, пакетной обработкой и поддержкой GPU</a:t>
+            </a:r>
+          </a:p>
+        </p:txBody>
+      </p:sp>
+      <p:sp>
+        <p:nvSpPr>
+          <p:cNvPr id="4" name="TextBox 3">
+            <a:extLst>
+              <a:ext uri="{FF2B5EF4-FFF2-40B4-BE49-F238E27FC236}">
+                <a16:creationId xmlns:a16="http://schemas.microsoft.com/office/drawing/2014/main" id="{C06811B9-633B-4D7E-9477-717C2159737D}"/>
               </a:ext>
             </a:extLst>
           </p:cNvPr>
@@ -3614,7 +3637,7 @@
           <a:p>
             <a:r>
               <a:rPr lang="en-US" dirty="0"/>
-              <a:t>10/22</a:t>
+              <a:t>6/22</a:t>
             </a:r>
             <a:endParaRPr lang="ru-RU" dirty="0"/>
           </a:p>
@@ -3623,7 +3646,7 @@
     </p:spTree>
     <p:extLst>
       <p:ext uri="{BB962C8B-B14F-4D97-AF65-F5344CB8AC3E}">
-        <p14:creationId xmlns:p14="http://schemas.microsoft.com/office/powerpoint/2010/main" val="2683828131"/>
+        <p14:creationId xmlns:p14="http://schemas.microsoft.com/office/powerpoint/2010/main" val="1912452483"/>
       </p:ext>
     </p:extLst>
   </p:cSld>
@@ -3655,7 +3678,7 @@
           <p:cNvPr id="2" name="Заголовок 1">
             <a:extLst>
               <a:ext uri="{FF2B5EF4-FFF2-40B4-BE49-F238E27FC236}">
-                <a16:creationId xmlns:a16="http://schemas.microsoft.com/office/drawing/2014/main" id="{554A4237-7384-4D65-B40A-9F7802E2C2BF}"/>
+                <a16:creationId xmlns:a16="http://schemas.microsoft.com/office/drawing/2014/main" id="{975598A4-2CEB-4A01-98CC-B4D5443A0519}"/>
               </a:ext>
             </a:extLst>
           </p:cNvPr>
@@ -3666,119 +3689,29 @@
             <p:ph type="title"/>
           </p:nvPr>
         </p:nvSpPr>
-        <p:spPr/>
+        <p:spPr>
+          <a:xfrm>
+            <a:off x="838200" y="85987"/>
+            <a:ext cx="10515600" cy="1325563"/>
+          </a:xfrm>
+        </p:spPr>
         <p:txBody>
           <a:bodyPr/>
           <a:lstStyle/>
           <a:p>
             <a:r>
               <a:rPr lang="ru-RU" dirty="0"/>
-              <a:t>Информационное обеспечение</a:t>
-            </a:r>
-          </a:p>
-        </p:txBody>
-      </p:sp>
-      <p:sp>
-        <p:nvSpPr>
-          <p:cNvPr id="3" name="Объект 2">
-            <a:extLst>
-              <a:ext uri="{FF2B5EF4-FFF2-40B4-BE49-F238E27FC236}">
-                <a16:creationId xmlns:a16="http://schemas.microsoft.com/office/drawing/2014/main" id="{A03513E5-CE54-4AB7-8986-EBEFE16031CF}"/>
-              </a:ext>
-            </a:extLst>
-          </p:cNvPr>
-          <p:cNvSpPr>
-            <a:spLocks noGrp="1"/>
-          </p:cNvSpPr>
-          <p:nvPr>
-            <p:ph idx="1"/>
-          </p:nvPr>
-        </p:nvSpPr>
-        <p:spPr/>
-        <p:txBody>
-          <a:bodyPr>
-            <a:normAutofit/>
-          </a:bodyPr>
-          <a:lstStyle/>
-          <a:p>
-            <a:pPr marL="0" indent="0">
-              <a:buNone/>
-            </a:pPr>
-            <a:r>
-              <a:rPr lang="ru-RU" dirty="0"/>
-              <a:t>Входные данные:</a:t>
-            </a:r>
-          </a:p>
-          <a:p>
-            <a:r>
-              <a:rPr lang="ru-RU" dirty="0"/>
-              <a:t>Видеопоток с веб-камеры (анализ лица)</a:t>
-            </a:r>
-          </a:p>
-          <a:p>
-            <a:r>
-              <a:rPr lang="ru-RU" dirty="0"/>
-              <a:t>Аудиопоток с микрофона (распознавание речи)</a:t>
-            </a:r>
-          </a:p>
-          <a:p>
-            <a:pPr marL="0" indent="0">
-              <a:buNone/>
-            </a:pPr>
-            <a:r>
-              <a:rPr lang="ru-RU" dirty="0"/>
-              <a:t>Обучающие данные:</a:t>
-            </a:r>
-          </a:p>
-          <a:p>
-            <a:r>
-              <a:rPr lang="ru-RU" dirty="0"/>
-              <a:t>Датасеты эмоций: FER-2013, </a:t>
-            </a:r>
-            <a:r>
-              <a:rPr lang="ru-RU" dirty="0" err="1"/>
-              <a:t>AffectNet</a:t>
-            </a:r>
-            <a:r>
-              <a:rPr lang="ru-RU" dirty="0"/>
-              <a:t>, RAF-DB</a:t>
-            </a:r>
-          </a:p>
-          <a:p>
-            <a:r>
-              <a:rPr lang="ru-RU" dirty="0" err="1"/>
-              <a:t>Аудиодатасеты</a:t>
-            </a:r>
-            <a:r>
-              <a:rPr lang="ru-RU" dirty="0"/>
-              <a:t> для ASR: </a:t>
-            </a:r>
-            <a:r>
-              <a:rPr lang="ru-RU" dirty="0" err="1"/>
-              <a:t>LibriSpeech</a:t>
-            </a:r>
-            <a:r>
-              <a:rPr lang="ru-RU" dirty="0"/>
-              <a:t>, Common Voice</a:t>
-            </a:r>
-          </a:p>
-          <a:p>
-            <a:pPr marL="0" indent="0">
-              <a:buNone/>
-            </a:pPr>
-            <a:r>
-              <a:rPr lang="ru-RU" dirty="0"/>
-              <a:t>Картинка: Схема потоков данных (можно сделать в draw.io)</a:t>
-            </a:r>
-          </a:p>
-        </p:txBody>
-      </p:sp>
-      <p:sp>
-        <p:nvSpPr>
-          <p:cNvPr id="6" name="TextBox 5">
-            <a:extLst>
-              <a:ext uri="{FF2B5EF4-FFF2-40B4-BE49-F238E27FC236}">
-                <a16:creationId xmlns:a16="http://schemas.microsoft.com/office/drawing/2014/main" id="{4B50098F-7052-48E4-A34F-402D8BB81F7F}"/>
+              <a:t>Модуль распознавания речи</a:t>
+            </a:r>
+          </a:p>
+        </p:txBody>
+      </p:sp>
+      <p:sp>
+        <p:nvSpPr>
+          <p:cNvPr id="4" name="TextBox 3">
+            <a:extLst>
+              <a:ext uri="{FF2B5EF4-FFF2-40B4-BE49-F238E27FC236}">
+                <a16:creationId xmlns:a16="http://schemas.microsoft.com/office/drawing/2014/main" id="{C06811B9-633B-4D7E-9477-717C2159737D}"/>
               </a:ext>
             </a:extLst>
           </p:cNvPr>
@@ -3803,16 +3736,46 @@
           <a:p>
             <a:r>
               <a:rPr lang="en-US" dirty="0"/>
-              <a:t>11/22</a:t>
+              <a:t>6/22</a:t>
             </a:r>
             <a:endParaRPr lang="ru-RU" dirty="0"/>
           </a:p>
         </p:txBody>
       </p:sp>
+      <p:pic>
+        <p:nvPicPr>
+          <p:cNvPr id="7" name="Рисунок 6">
+            <a:extLst>
+              <a:ext uri="{FF2B5EF4-FFF2-40B4-BE49-F238E27FC236}">
+                <a16:creationId xmlns:a16="http://schemas.microsoft.com/office/drawing/2014/main" id="{B38D79AC-165D-FB25-7588-89E4A91E88A1}"/>
+              </a:ext>
+            </a:extLst>
+          </p:cNvPr>
+          <p:cNvPicPr>
+            <a:picLocks noChangeAspect="1"/>
+          </p:cNvPicPr>
+          <p:nvPr/>
+        </p:nvPicPr>
+        <p:blipFill>
+          <a:blip r:embed="rId2"/>
+          <a:stretch>
+            <a:fillRect/>
+          </a:stretch>
+        </p:blipFill>
+        <p:spPr>
+          <a:xfrm>
+            <a:off x="838199" y="1411550"/>
+            <a:ext cx="10511501" cy="4724074"/>
+          </a:xfrm>
+          <a:prstGeom prst="rect">
+            <a:avLst/>
+          </a:prstGeom>
+        </p:spPr>
+      </p:pic>
     </p:spTree>
     <p:extLst>
       <p:ext uri="{BB962C8B-B14F-4D97-AF65-F5344CB8AC3E}">
-        <p14:creationId xmlns:p14="http://schemas.microsoft.com/office/powerpoint/2010/main" val="2287653594"/>
+        <p14:creationId xmlns:p14="http://schemas.microsoft.com/office/powerpoint/2010/main" val="4231230440"/>
       </p:ext>
     </p:extLst>
   </p:cSld>
@@ -3844,7 +3807,7 @@
           <p:cNvPr id="2" name="Заголовок 1">
             <a:extLst>
               <a:ext uri="{FF2B5EF4-FFF2-40B4-BE49-F238E27FC236}">
-                <a16:creationId xmlns:a16="http://schemas.microsoft.com/office/drawing/2014/main" id="{6AE47E73-D877-4497-A30F-9D6C2A470274}"/>
+                <a16:creationId xmlns:a16="http://schemas.microsoft.com/office/drawing/2014/main" id="{1EBAAD23-B9AF-47EB-97C4-C8F7C47862D2}"/>
               </a:ext>
             </a:extLst>
           </p:cNvPr>
@@ -3855,19 +3818,14 @@
             <p:ph type="title"/>
           </p:nvPr>
         </p:nvSpPr>
-        <p:spPr>
-          <a:xfrm>
-            <a:off x="838200" y="18255"/>
-            <a:ext cx="10515600" cy="1325563"/>
-          </a:xfrm>
-        </p:spPr>
+        <p:spPr/>
         <p:txBody>
           <a:bodyPr/>
           <a:lstStyle/>
           <a:p>
             <a:r>
               <a:rPr lang="ru-RU" dirty="0"/>
-              <a:t>Пример обработки видеопотока</a:t>
+              <a:t>Средство разработки пользовательского интерфейса</a:t>
             </a:r>
           </a:p>
         </p:txBody>
@@ -3877,7 +3835,7 @@
           <p:cNvPr id="3" name="Объект 2">
             <a:extLst>
               <a:ext uri="{FF2B5EF4-FFF2-40B4-BE49-F238E27FC236}">
-                <a16:creationId xmlns:a16="http://schemas.microsoft.com/office/drawing/2014/main" id="{0EC84FC0-D965-4180-9E61-13CDF03E77C5}"/>
+                <a16:creationId xmlns:a16="http://schemas.microsoft.com/office/drawing/2014/main" id="{EA95FAD0-980E-4610-98D5-906FF259B027}"/>
               </a:ext>
             </a:extLst>
           </p:cNvPr>
@@ -3888,67 +3846,116 @@
             <p:ph idx="1"/>
           </p:nvPr>
         </p:nvSpPr>
-        <p:spPr>
-          <a:xfrm>
-            <a:off x="374904" y="1038686"/>
-            <a:ext cx="11558016" cy="5819313"/>
-          </a:xfrm>
-        </p:spPr>
+        <p:spPr/>
         <p:txBody>
           <a:bodyPr>
-            <a:normAutofit/>
+            <a:normAutofit fontScale="85000" lnSpcReduction="10000"/>
           </a:bodyPr>
           <a:lstStyle/>
           <a:p>
-            <a:r>
-              <a:rPr lang="ru-RU" dirty="0"/>
-              <a:t>Детекция лица → выравнивание → извлечение признаков → классификация эмоции</a:t>
-            </a:r>
-          </a:p>
-          <a:p>
-            <a:r>
-              <a:rPr lang="ru-RU" dirty="0"/>
-              <a:t>Пример: кадр → </a:t>
-            </a:r>
-            <a:r>
-              <a:rPr lang="en-US" dirty="0"/>
-              <a:t>bounding box → landmarks → emotion: "happiness (0.87)"</a:t>
-            </a:r>
-          </a:p>
-          <a:p>
-            <a:r>
-              <a:rPr lang="ru-RU" dirty="0"/>
-              <a:t>Картинки:</a:t>
-            </a:r>
-          </a:p>
-          <a:p>
-            <a:r>
-              <a:rPr lang="ru-RU" dirty="0"/>
-              <a:t>Скриншот работы детекции (если есть)</a:t>
-            </a:r>
-          </a:p>
-          <a:p>
-            <a:r>
-              <a:rPr lang="ru-RU" dirty="0"/>
-              <a:t>ИЛИ схема </a:t>
-            </a:r>
-            <a:r>
-              <a:rPr lang="en-US" dirty="0"/>
-              <a:t>pipeline </a:t>
-            </a:r>
-            <a:r>
-              <a:rPr lang="ru-RU" dirty="0"/>
-              <a:t>обработки</a:t>
-            </a:r>
-          </a:p>
-        </p:txBody>
-      </p:sp>
-      <p:sp>
-        <p:nvSpPr>
-          <p:cNvPr id="5" name="TextBox 4">
-            <a:extLst>
-              <a:ext uri="{FF2B5EF4-FFF2-40B4-BE49-F238E27FC236}">
-                <a16:creationId xmlns:a16="http://schemas.microsoft.com/office/drawing/2014/main" id="{B956DD11-6E19-4DE8-AAA6-BECB7A79B558}"/>
+            <a:pPr marL="0" indent="0">
+              <a:buNone/>
+            </a:pPr>
+            <a:r>
+              <a:rPr lang="ru-RU" dirty="0"/>
+              <a:t>Технологии: </a:t>
+            </a:r>
+            <a:r>
+              <a:rPr lang="ru-RU" dirty="0" err="1"/>
+              <a:t>React</a:t>
+            </a:r>
+            <a:r>
+              <a:rPr lang="ru-RU" dirty="0"/>
+              <a:t> 18 + </a:t>
+            </a:r>
+            <a:r>
+              <a:rPr lang="ru-RU" dirty="0" err="1"/>
+              <a:t>TypeScript</a:t>
+            </a:r>
+            <a:r>
+              <a:rPr lang="ru-RU" dirty="0"/>
+              <a:t> + </a:t>
+            </a:r>
+            <a:r>
+              <a:rPr lang="ru-RU" dirty="0" err="1"/>
+              <a:t>Vite</a:t>
+            </a:r>
+            <a:endParaRPr lang="ru-RU" dirty="0"/>
+          </a:p>
+          <a:p>
+            <a:pPr marL="0" indent="0">
+              <a:buNone/>
+            </a:pPr>
+            <a:r>
+              <a:rPr lang="ru-RU" dirty="0"/>
+              <a:t>Архитектура:</a:t>
+            </a:r>
+          </a:p>
+          <a:p>
+            <a:r>
+              <a:rPr lang="ru-RU" dirty="0"/>
+              <a:t>Компонентный подход с </a:t>
+            </a:r>
+            <a:r>
+              <a:rPr lang="ru-RU" dirty="0" err="1"/>
+              <a:t>переиспользуемыми</a:t>
+            </a:r>
+            <a:r>
+              <a:rPr lang="ru-RU" dirty="0"/>
+              <a:t> элементами интерфейса</a:t>
+            </a:r>
+          </a:p>
+          <a:p>
+            <a:r>
+              <a:rPr lang="ru-RU" dirty="0"/>
+              <a:t>Virtual DOM обеспечивает минимизацию перерисовок</a:t>
+            </a:r>
+          </a:p>
+          <a:p>
+            <a:r>
+              <a:rPr lang="ru-RU" dirty="0" err="1"/>
+              <a:t>WebSocket</a:t>
+            </a:r>
+            <a:r>
+              <a:rPr lang="ru-RU" dirty="0"/>
+              <a:t> для автоматического обновления данных в реальном времени</a:t>
+            </a:r>
+          </a:p>
+          <a:p>
+            <a:pPr marL="0" indent="0">
+              <a:buNone/>
+            </a:pPr>
+            <a:r>
+              <a:rPr lang="ru-RU" dirty="0"/>
+              <a:t>Управление состоянием:</a:t>
+            </a:r>
+          </a:p>
+          <a:p>
+            <a:r>
+              <a:rPr lang="ru-RU" dirty="0"/>
+              <a:t>Глобальное серверное состояние кэшируется специализированной библиотекой запросов</a:t>
+            </a:r>
+          </a:p>
+          <a:p>
+            <a:r>
+              <a:rPr lang="ru-RU" dirty="0"/>
+              <a:t>Локальное состояние встречи управляется через легковесное хранилище</a:t>
+            </a:r>
+          </a:p>
+          <a:p>
+            <a:r>
+              <a:rPr lang="ru-RU" dirty="0"/>
+              <a:t>Адаптивность: Интерфейс корректно отображается на десктопах, планшетах и мобильных устройствах</a:t>
+            </a:r>
+          </a:p>
+        </p:txBody>
+      </p:sp>
+      <p:sp>
+        <p:nvSpPr>
+          <p:cNvPr id="4" name="TextBox 3">
+            <a:extLst>
+              <a:ext uri="{FF2B5EF4-FFF2-40B4-BE49-F238E27FC236}">
+                <a16:creationId xmlns:a16="http://schemas.microsoft.com/office/drawing/2014/main" id="{57D9155A-5477-428A-B594-4DE38D5D9805}"/>
               </a:ext>
             </a:extLst>
           </p:cNvPr>
@@ -3973,15 +3980,7 @@
           <a:p>
             <a:r>
               <a:rPr lang="en-US" dirty="0"/>
-              <a:t>1</a:t>
-            </a:r>
-            <a:r>
-              <a:rPr lang="ru-RU" dirty="0"/>
-              <a:t>2</a:t>
-            </a:r>
-            <a:r>
-              <a:rPr lang="en-US" dirty="0"/>
-              <a:t>/22</a:t>
+              <a:t>9/22</a:t>
             </a:r>
             <a:endParaRPr lang="ru-RU" dirty="0"/>
           </a:p>
@@ -3990,7 +3989,7 @@
     </p:spTree>
     <p:extLst>
       <p:ext uri="{BB962C8B-B14F-4D97-AF65-F5344CB8AC3E}">
-        <p14:creationId xmlns:p14="http://schemas.microsoft.com/office/powerpoint/2010/main" val="2338647298"/>
+        <p14:creationId xmlns:p14="http://schemas.microsoft.com/office/powerpoint/2010/main" val="276913619"/>
       </p:ext>
     </p:extLst>
   </p:cSld>
@@ -4022,7 +4021,7 @@
           <p:cNvPr id="2" name="Заголовок 1">
             <a:extLst>
               <a:ext uri="{FF2B5EF4-FFF2-40B4-BE49-F238E27FC236}">
-                <a16:creationId xmlns:a16="http://schemas.microsoft.com/office/drawing/2014/main" id="{07D815F8-363A-4FDD-BF3E-513F73DA662A}"/>
+                <a16:creationId xmlns:a16="http://schemas.microsoft.com/office/drawing/2014/main" id="{554A4237-7384-4D65-B40A-9F7802E2C2BF}"/>
               </a:ext>
             </a:extLst>
           </p:cNvPr>
@@ -4040,7 +4039,7 @@
           <a:p>
             <a:r>
               <a:rPr lang="ru-RU" dirty="0"/>
-              <a:t>Пример обработки аудиопотока</a:t>
+              <a:t>Информационное обеспечение</a:t>
             </a:r>
           </a:p>
         </p:txBody>
@@ -4050,7 +4049,7 @@
           <p:cNvPr id="3" name="Объект 2">
             <a:extLst>
               <a:ext uri="{FF2B5EF4-FFF2-40B4-BE49-F238E27FC236}">
-                <a16:creationId xmlns:a16="http://schemas.microsoft.com/office/drawing/2014/main" id="{CEBD09E6-48D2-4C1B-A424-71AEB12D05E6}"/>
+                <a16:creationId xmlns:a16="http://schemas.microsoft.com/office/drawing/2014/main" id="{A03513E5-CE54-4AB7-8986-EBEFE16031CF}"/>
               </a:ext>
             </a:extLst>
           </p:cNvPr>
@@ -4063,66 +4062,98 @@
         </p:nvSpPr>
         <p:spPr/>
         <p:txBody>
-          <a:bodyPr/>
-          <a:lstStyle/>
-          <a:p>
-            <a:r>
-              <a:rPr lang="ru-RU" dirty="0"/>
-              <a:t>Запись аудио → мел-спектрограмма → </a:t>
-            </a:r>
-            <a:r>
-              <a:rPr lang="en-US" dirty="0"/>
-              <a:t>encoder → decoder → </a:t>
-            </a:r>
-            <a:r>
-              <a:rPr lang="ru-RU" dirty="0"/>
-              <a:t>текст + эмоция</a:t>
-            </a:r>
-          </a:p>
-          <a:p>
-            <a:r>
-              <a:rPr lang="ru-RU" dirty="0"/>
-              <a:t>Пример: "фрагмент речи" → транскрипт → тон: "</a:t>
-            </a:r>
-            <a:r>
-              <a:rPr lang="en-US" dirty="0"/>
-              <a:t>neutral → stress"</a:t>
-            </a:r>
-          </a:p>
-          <a:p>
-            <a:r>
-              <a:rPr lang="ru-RU" dirty="0"/>
-              <a:t>Картинки:</a:t>
-            </a:r>
-          </a:p>
-          <a:p>
-            <a:r>
-              <a:rPr lang="ru-RU" dirty="0"/>
-              <a:t>Схема работы </a:t>
-            </a:r>
-            <a:r>
-              <a:rPr lang="en-US" dirty="0"/>
-              <a:t>Whisper (</a:t>
-            </a:r>
-            <a:r>
-              <a:rPr lang="ru-RU" dirty="0"/>
-              <a:t>рисунок 13)</a:t>
-            </a:r>
-          </a:p>
-          <a:p>
-            <a:r>
-              <a:rPr lang="ru-RU" dirty="0"/>
-              <a:t>ИЛИ пример спектрограммы</a:t>
-            </a:r>
-          </a:p>
-        </p:txBody>
-      </p:sp>
-      <p:sp>
-        <p:nvSpPr>
-          <p:cNvPr id="4" name="TextBox 3">
-            <a:extLst>
-              <a:ext uri="{FF2B5EF4-FFF2-40B4-BE49-F238E27FC236}">
-                <a16:creationId xmlns:a16="http://schemas.microsoft.com/office/drawing/2014/main" id="{BD401ADA-F907-446F-A529-8B6A4967B58D}"/>
+          <a:bodyPr>
+            <a:normAutofit fontScale="92500" lnSpcReduction="10000"/>
+          </a:bodyPr>
+          <a:lstStyle/>
+          <a:p>
+            <a:pPr marL="0" indent="0">
+              <a:buNone/>
+            </a:pPr>
+            <a:r>
+              <a:rPr lang="ru-RU" dirty="0"/>
+              <a:t>Определение: Совокупность системно-ориентированных данных, описывающих словарь базовых описаний и актуализируемых данных о состоянии информационной модели.</a:t>
+            </a:r>
+          </a:p>
+          <a:p>
+            <a:pPr marL="0" indent="0">
+              <a:buNone/>
+            </a:pPr>
+            <a:r>
+              <a:rPr lang="ru-RU" dirty="0"/>
+              <a:t>Входные данные:</a:t>
+            </a:r>
+          </a:p>
+          <a:p>
+            <a:r>
+              <a:rPr lang="ru-RU" dirty="0"/>
+              <a:t>Видеопоток: 640×480+, 15–30 кадров/с, формат JPEG через </a:t>
+            </a:r>
+            <a:r>
+              <a:rPr lang="ru-RU" dirty="0" err="1"/>
+              <a:t>WebSocket</a:t>
+            </a:r>
+            <a:endParaRPr lang="ru-RU" dirty="0"/>
+          </a:p>
+          <a:p>
+            <a:r>
+              <a:rPr lang="ru-RU" dirty="0"/>
+              <a:t>Аудиопоток: 16 кГц, моно, формат </a:t>
+            </a:r>
+            <a:r>
+              <a:rPr lang="ru-RU" dirty="0" err="1"/>
+              <a:t>WebM</a:t>
+            </a:r>
+            <a:r>
+              <a:rPr lang="ru-RU" dirty="0"/>
+              <a:t>/Opus</a:t>
+            </a:r>
+          </a:p>
+          <a:p>
+            <a:pPr marL="0" indent="0">
+              <a:buNone/>
+            </a:pPr>
+            <a:r>
+              <a:rPr lang="ru-RU" dirty="0"/>
+              <a:t>Обучающие датасеты:</a:t>
+            </a:r>
+          </a:p>
+          <a:p>
+            <a:r>
+              <a:rPr lang="ru-RU" dirty="0"/>
+              <a:t>Для эмоций: FER-2013 (35 000 изображений), </a:t>
+            </a:r>
+            <a:r>
+              <a:rPr lang="ru-RU" dirty="0" err="1"/>
+              <a:t>AffectNet</a:t>
+            </a:r>
+            <a:r>
+              <a:rPr lang="ru-RU" dirty="0"/>
+              <a:t> (1 000 000+), RAF-DB</a:t>
+            </a:r>
+          </a:p>
+          <a:p>
+            <a:r>
+              <a:rPr lang="ru-RU" dirty="0"/>
+              <a:t>Для речи: </a:t>
+            </a:r>
+            <a:r>
+              <a:rPr lang="ru-RU" dirty="0" err="1"/>
+              <a:t>LibriSpeech</a:t>
+            </a:r>
+            <a:r>
+              <a:rPr lang="ru-RU" dirty="0"/>
+              <a:t> (1000 часов), Common Voice (многоязычный)</a:t>
+            </a:r>
+          </a:p>
+        </p:txBody>
+      </p:sp>
+      <p:sp>
+        <p:nvSpPr>
+          <p:cNvPr id="6" name="TextBox 5">
+            <a:extLst>
+              <a:ext uri="{FF2B5EF4-FFF2-40B4-BE49-F238E27FC236}">
+                <a16:creationId xmlns:a16="http://schemas.microsoft.com/office/drawing/2014/main" id="{4B50098F-7052-48E4-A34F-402D8BB81F7F}"/>
               </a:ext>
             </a:extLst>
           </p:cNvPr>
@@ -4147,7 +4178,7 @@
           <a:p>
             <a:r>
               <a:rPr lang="en-US" dirty="0"/>
-              <a:t>13/22</a:t>
+              <a:t>11/22</a:t>
             </a:r>
             <a:endParaRPr lang="ru-RU" dirty="0"/>
           </a:p>
@@ -4156,7 +4187,7 @@
     </p:spTree>
     <p:extLst>
       <p:ext uri="{BB962C8B-B14F-4D97-AF65-F5344CB8AC3E}">
-        <p14:creationId xmlns:p14="http://schemas.microsoft.com/office/powerpoint/2010/main" val="1647174813"/>
+        <p14:creationId xmlns:p14="http://schemas.microsoft.com/office/powerpoint/2010/main" val="2287653594"/>
       </p:ext>
     </p:extLst>
   </p:cSld>
@@ -4188,7 +4219,7 @@
           <p:cNvPr id="2" name="Заголовок 1">
             <a:extLst>
               <a:ext uri="{FF2B5EF4-FFF2-40B4-BE49-F238E27FC236}">
-                <a16:creationId xmlns:a16="http://schemas.microsoft.com/office/drawing/2014/main" id="{7F1BFD6B-99D2-42D5-806B-5AF98D60157D}"/>
+                <a16:creationId xmlns:a16="http://schemas.microsoft.com/office/drawing/2014/main" id="{6AE47E73-D877-4497-A30F-9D6C2A470274}"/>
               </a:ext>
             </a:extLst>
           </p:cNvPr>
@@ -4201,19 +4232,147 @@
         </p:nvSpPr>
         <p:spPr>
           <a:xfrm>
-            <a:off x="305540" y="758193"/>
-            <a:ext cx="4905652" cy="1496735"/>
+            <a:off x="838200" y="18255"/>
+            <a:ext cx="10515600" cy="1325563"/>
           </a:xfrm>
         </p:spPr>
         <p:txBody>
+          <a:bodyPr/>
+          <a:lstStyle/>
+          <a:p>
+            <a:r>
+              <a:rPr lang="ru-RU" dirty="0"/>
+              <a:t>Пример обработки видеопотока</a:t>
+            </a:r>
+          </a:p>
+        </p:txBody>
+      </p:sp>
+      <p:sp>
+        <p:nvSpPr>
+          <p:cNvPr id="3" name="Объект 2">
+            <a:extLst>
+              <a:ext uri="{FF2B5EF4-FFF2-40B4-BE49-F238E27FC236}">
+                <a16:creationId xmlns:a16="http://schemas.microsoft.com/office/drawing/2014/main" id="{0EC84FC0-D965-4180-9E61-13CDF03E77C5}"/>
+              </a:ext>
+            </a:extLst>
+          </p:cNvPr>
+          <p:cNvSpPr>
+            <a:spLocks noGrp="1"/>
+          </p:cNvSpPr>
+          <p:nvPr>
+            <p:ph idx="1"/>
+          </p:nvPr>
+        </p:nvSpPr>
+        <p:spPr>
+          <a:xfrm>
+            <a:off x="374904" y="1038686"/>
+            <a:ext cx="11558016" cy="5819313"/>
+          </a:xfrm>
+        </p:spPr>
+        <p:txBody>
           <a:bodyPr>
-            <a:normAutofit/>
+            <a:normAutofit fontScale="92500" lnSpcReduction="10000"/>
           </a:bodyPr>
           <a:lstStyle/>
           <a:p>
-            <a:r>
-              <a:rPr lang="ru-RU" dirty="0"/>
-              <a:t>Алгоритм работы системы</a:t>
+            <a:pPr marL="0" indent="0">
+              <a:buNone/>
+            </a:pPr>
+            <a:r>
+              <a:rPr lang="ru-RU" dirty="0"/>
+              <a:t>Захват и передача:</a:t>
+            </a:r>
+          </a:p>
+          <a:p>
+            <a:r>
+              <a:rPr lang="ru-RU" dirty="0"/>
+              <a:t>Клиент извлекает кадры через </a:t>
+            </a:r>
+            <a:r>
+              <a:rPr lang="ru-RU" dirty="0" err="1"/>
+              <a:t>canvas</a:t>
+            </a:r>
+            <a:r>
+              <a:rPr lang="ru-RU" dirty="0"/>
+              <a:t> с интервалом 200–500 мс</a:t>
+            </a:r>
+          </a:p>
+          <a:p>
+            <a:r>
+              <a:rPr lang="ru-RU" dirty="0"/>
+              <a:t>Изображение конвертируется в JPEG Base64 и передаётся через </a:t>
+            </a:r>
+            <a:r>
+              <a:rPr lang="ru-RU" dirty="0" err="1"/>
+              <a:t>WebSocket</a:t>
+            </a:r>
+            <a:endParaRPr lang="ru-RU" dirty="0"/>
+          </a:p>
+          <a:p>
+            <a:pPr marL="0" indent="0">
+              <a:buNone/>
+            </a:pPr>
+            <a:r>
+              <a:rPr lang="ru-RU" dirty="0"/>
+              <a:t>Детекция на сервере:</a:t>
+            </a:r>
+          </a:p>
+          <a:p>
+            <a:r>
+              <a:rPr lang="ru-RU" dirty="0"/>
+              <a:t>AI-шлюз декодирует изображение и передаёт в модуль MTCNN</a:t>
+            </a:r>
+          </a:p>
+          <a:p>
+            <a:r>
+              <a:rPr lang="ru-RU" dirty="0"/>
+              <a:t>Каскадная сеть последовательно обрабатывает кадр через P-Net, R-Net, O-Net</a:t>
+            </a:r>
+          </a:p>
+          <a:p>
+            <a:r>
+              <a:rPr lang="ru-RU" dirty="0"/>
+              <a:t>Определяются 5 ключевых точек для выравнивания лица</a:t>
+            </a:r>
+          </a:p>
+          <a:p>
+            <a:pPr marL="0" indent="0">
+              <a:buNone/>
+            </a:pPr>
+            <a:r>
+              <a:rPr lang="ru-RU" dirty="0"/>
+              <a:t>Классификация:</a:t>
+            </a:r>
+          </a:p>
+          <a:p>
+            <a:r>
+              <a:rPr lang="ru-RU" dirty="0"/>
+              <a:t>Выровненное изображение подаётся на вход модели </a:t>
+            </a:r>
+            <a:r>
+              <a:rPr lang="ru-RU" dirty="0" err="1"/>
+              <a:t>DeepFace</a:t>
+            </a:r>
+            <a:endParaRPr lang="ru-RU" dirty="0"/>
+          </a:p>
+          <a:p>
+            <a:r>
+              <a:rPr lang="ru-RU" dirty="0"/>
+              <a:t>Возвращаются вероятности принадлежности к 6 базовым эмоциям и нейтральному состоянию</a:t>
+            </a:r>
+          </a:p>
+          <a:p>
+            <a:r>
+              <a:rPr lang="ru-RU" dirty="0"/>
+              <a:t>Сохранение: Результаты записываются в </a:t>
+            </a:r>
+            <a:r>
+              <a:rPr lang="ru-RU" dirty="0" err="1"/>
+              <a:t>PostgreSQL</a:t>
+            </a:r>
+            <a:r>
+              <a:rPr lang="ru-RU" dirty="0"/>
+              <a:t> и транслируются клиентам в реальном времени</a:t>
             </a:r>
           </a:p>
         </p:txBody>
@@ -4223,7 +4382,7 @@
           <p:cNvPr id="5" name="TextBox 4">
             <a:extLst>
               <a:ext uri="{FF2B5EF4-FFF2-40B4-BE49-F238E27FC236}">
-                <a16:creationId xmlns:a16="http://schemas.microsoft.com/office/drawing/2014/main" id="{1C1068E4-64AA-4881-9003-243658ECFBBE}"/>
+                <a16:creationId xmlns:a16="http://schemas.microsoft.com/office/drawing/2014/main" id="{B956DD11-6E19-4DE8-AAA6-BECB7A79B558}"/>
               </a:ext>
             </a:extLst>
           </p:cNvPr>
@@ -4248,128 +4407,24 @@
           <a:p>
             <a:r>
               <a:rPr lang="en-US" dirty="0"/>
-              <a:t>14/22</a:t>
+              <a:t>1</a:t>
+            </a:r>
+            <a:r>
+              <a:rPr lang="ru-RU" dirty="0"/>
+              <a:t>2</a:t>
+            </a:r>
+            <a:r>
+              <a:rPr lang="en-US" dirty="0"/>
+              <a:t>/22</a:t>
             </a:r>
             <a:endParaRPr lang="ru-RU" dirty="0"/>
-          </a:p>
-        </p:txBody>
-      </p:sp>
-      <p:sp>
-        <p:nvSpPr>
-          <p:cNvPr id="6" name="TextBox 5">
-            <a:extLst>
-              <a:ext uri="{FF2B5EF4-FFF2-40B4-BE49-F238E27FC236}">
-                <a16:creationId xmlns:a16="http://schemas.microsoft.com/office/drawing/2014/main" id="{61830C30-DFFB-B5DE-EE03-CA29D77B4CCF}"/>
-              </a:ext>
-            </a:extLst>
-          </p:cNvPr>
-          <p:cNvSpPr txBox="1"/>
-          <p:nvPr/>
-        </p:nvSpPr>
-        <p:spPr>
-          <a:xfrm>
-            <a:off x="3047238" y="2274838"/>
-            <a:ext cx="6094476" cy="2308324"/>
-          </a:xfrm>
-          <a:prstGeom prst="rect">
-            <a:avLst/>
-          </a:prstGeom>
-          <a:noFill/>
-        </p:spPr>
-        <p:txBody>
-          <a:bodyPr wrap="square">
-            <a:spAutoFit/>
-          </a:bodyPr>
-          <a:lstStyle/>
-          <a:p>
-            <a:pPr algn="l">
-              <a:buFont typeface="+mj-lt"/>
-              <a:buAutoNum type="arabicPeriod"/>
-            </a:pPr>
-            <a:r>
-              <a:rPr lang="ru-RU" dirty="0"/>
-              <a:t>Авторизация пользователя</a:t>
-            </a:r>
-          </a:p>
-          <a:p>
-            <a:pPr algn="l">
-              <a:buFont typeface="+mj-lt"/>
-              <a:buAutoNum type="arabicPeriod"/>
-            </a:pPr>
-            <a:r>
-              <a:rPr lang="ru-RU" dirty="0"/>
-              <a:t>Создание/присоединение к сессии</a:t>
-            </a:r>
-          </a:p>
-          <a:p>
-            <a:pPr algn="l">
-              <a:buFont typeface="+mj-lt"/>
-              <a:buAutoNum type="arabicPeriod"/>
-            </a:pPr>
-            <a:r>
-              <a:rPr lang="ru-RU" dirty="0"/>
-              <a:t>Захват медиа (видео + аудио)</a:t>
-            </a:r>
-          </a:p>
-          <a:p>
-            <a:pPr algn="l">
-              <a:buFont typeface="+mj-lt"/>
-              <a:buAutoNum type="arabicPeriod"/>
-            </a:pPr>
-            <a:r>
-              <a:rPr lang="ru-RU" dirty="0"/>
-              <a:t>Параллельная обработка: лицо → эмоция, речь → текст + тон</a:t>
-            </a:r>
-          </a:p>
-          <a:p>
-            <a:pPr algn="l">
-              <a:buFont typeface="+mj-lt"/>
-              <a:buAutoNum type="arabicPeriod"/>
-            </a:pPr>
-            <a:r>
-              <a:rPr lang="ru-RU" dirty="0"/>
-              <a:t>Агрегация результатов (</a:t>
-            </a:r>
-            <a:r>
-              <a:rPr lang="ru-RU" dirty="0" err="1"/>
-              <a:t>late</a:t>
-            </a:r>
-            <a:r>
-              <a:rPr lang="ru-RU" dirty="0"/>
-              <a:t> </a:t>
-            </a:r>
-            <a:r>
-              <a:rPr lang="ru-RU" dirty="0" err="1"/>
-              <a:t>fusion</a:t>
-            </a:r>
-            <a:r>
-              <a:rPr lang="ru-RU" dirty="0"/>
-              <a:t>)</a:t>
-            </a:r>
-          </a:p>
-          <a:p>
-            <a:pPr algn="l">
-              <a:buFont typeface="+mj-lt"/>
-              <a:buAutoNum type="arabicPeriod"/>
-            </a:pPr>
-            <a:r>
-              <a:rPr lang="ru-RU" dirty="0"/>
-              <a:t>Формирование и отображение отчёта</a:t>
-            </a:r>
-          </a:p>
-          <a:p>
-            <a:pPr algn="l"/>
-            <a:r>
-              <a:rPr lang="ru-RU" dirty="0"/>
-              <a:t>Картинка: Блок-схема алгоритма (сделать в draw.io)</a:t>
-            </a:r>
           </a:p>
         </p:txBody>
       </p:sp>
     </p:spTree>
     <p:extLst>
       <p:ext uri="{BB962C8B-B14F-4D97-AF65-F5344CB8AC3E}">
-        <p14:creationId xmlns:p14="http://schemas.microsoft.com/office/powerpoint/2010/main" val="4254625303"/>
+        <p14:creationId xmlns:p14="http://schemas.microsoft.com/office/powerpoint/2010/main" val="2338647298"/>
       </p:ext>
     </p:extLst>
   </p:cSld>
@@ -4398,10 +4453,198 @@
       </p:grpSpPr>
       <p:sp>
         <p:nvSpPr>
-          <p:cNvPr id="5" name="TextBox 4">
-            <a:extLst>
-              <a:ext uri="{FF2B5EF4-FFF2-40B4-BE49-F238E27FC236}">
-                <a16:creationId xmlns:a16="http://schemas.microsoft.com/office/drawing/2014/main" id="{61BED1AB-11C4-48F5-BF70-1ACBA146FC6C}"/>
+          <p:cNvPr id="2" name="Заголовок 1">
+            <a:extLst>
+              <a:ext uri="{FF2B5EF4-FFF2-40B4-BE49-F238E27FC236}">
+                <a16:creationId xmlns:a16="http://schemas.microsoft.com/office/drawing/2014/main" id="{07D815F8-363A-4FDD-BF3E-513F73DA662A}"/>
+              </a:ext>
+            </a:extLst>
+          </p:cNvPr>
+          <p:cNvSpPr>
+            <a:spLocks noGrp="1"/>
+          </p:cNvSpPr>
+          <p:nvPr>
+            <p:ph type="title"/>
+          </p:nvPr>
+        </p:nvSpPr>
+        <p:spPr/>
+        <p:txBody>
+          <a:bodyPr/>
+          <a:lstStyle/>
+          <a:p>
+            <a:r>
+              <a:rPr lang="ru-RU" dirty="0"/>
+              <a:t>Пример обработки аудиопотока</a:t>
+            </a:r>
+          </a:p>
+        </p:txBody>
+      </p:sp>
+      <p:sp>
+        <p:nvSpPr>
+          <p:cNvPr id="3" name="Объект 2">
+            <a:extLst>
+              <a:ext uri="{FF2B5EF4-FFF2-40B4-BE49-F238E27FC236}">
+                <a16:creationId xmlns:a16="http://schemas.microsoft.com/office/drawing/2014/main" id="{CEBD09E6-48D2-4C1B-A424-71AEB12D05E6}"/>
+              </a:ext>
+            </a:extLst>
+          </p:cNvPr>
+          <p:cNvSpPr>
+            <a:spLocks noGrp="1"/>
+          </p:cNvSpPr>
+          <p:nvPr>
+            <p:ph idx="1"/>
+          </p:nvPr>
+        </p:nvSpPr>
+        <p:spPr/>
+        <p:txBody>
+          <a:bodyPr>
+            <a:normAutofit fontScale="62500" lnSpcReduction="20000"/>
+          </a:bodyPr>
+          <a:lstStyle/>
+          <a:p>
+            <a:pPr marL="0" indent="0" algn="just">
+              <a:buNone/>
+            </a:pPr>
+            <a:r>
+              <a:rPr lang="ru-RU" dirty="0"/>
+              <a:t>Захват и буферизация:</a:t>
+            </a:r>
+          </a:p>
+          <a:p>
+            <a:pPr algn="just"/>
+            <a:r>
+              <a:rPr lang="ru-RU" dirty="0"/>
+              <a:t>Клиент записывает аудио через </a:t>
+            </a:r>
+            <a:r>
+              <a:rPr lang="ru-RU" dirty="0" err="1"/>
+              <a:t>MediaRecorder</a:t>
+            </a:r>
+            <a:r>
+              <a:rPr lang="ru-RU" dirty="0"/>
+              <a:t> API</a:t>
+            </a:r>
+          </a:p>
+          <a:p>
+            <a:pPr algn="just"/>
+            <a:r>
+              <a:rPr lang="ru-RU" dirty="0"/>
+              <a:t>Стратегия кумулятивного накопления </a:t>
+            </a:r>
+            <a:r>
+              <a:rPr lang="ru-RU" dirty="0" err="1"/>
+              <a:t>чанков</a:t>
+            </a:r>
+            <a:r>
+              <a:rPr lang="ru-RU" dirty="0"/>
+              <a:t> обеспечивает непрерывность потока</a:t>
+            </a:r>
+          </a:p>
+          <a:p>
+            <a:pPr marL="0" indent="0" algn="just">
+              <a:buNone/>
+            </a:pPr>
+            <a:r>
+              <a:rPr lang="ru-RU" dirty="0"/>
+              <a:t>Кодирование:</a:t>
+            </a:r>
+          </a:p>
+          <a:p>
+            <a:pPr algn="just"/>
+            <a:r>
+              <a:rPr lang="ru-RU" dirty="0"/>
+              <a:t>Буфер кодируется в Base64 и отправляется с интервалом 1–2 секунды</a:t>
+            </a:r>
+          </a:p>
+          <a:p>
+            <a:pPr algn="just"/>
+            <a:r>
+              <a:rPr lang="ru-RU" dirty="0"/>
+              <a:t>Предотвращается потеря начальных фрагментов речи</a:t>
+            </a:r>
+          </a:p>
+          <a:p>
+            <a:pPr marL="0" indent="0" algn="just">
+              <a:buNone/>
+            </a:pPr>
+            <a:r>
+              <a:rPr lang="ru-RU" dirty="0"/>
+              <a:t>Распознавание:</a:t>
+            </a:r>
+          </a:p>
+          <a:p>
+            <a:pPr algn="just"/>
+            <a:r>
+              <a:rPr lang="ru-RU" dirty="0"/>
+              <a:t>Сервер декодирует </a:t>
+            </a:r>
+            <a:r>
+              <a:rPr lang="ru-RU" dirty="0" err="1"/>
+              <a:t>WebM</a:t>
+            </a:r>
+            <a:r>
+              <a:rPr lang="ru-RU" dirty="0"/>
+              <a:t>/Opus в PCM 16 кГц</a:t>
+            </a:r>
+          </a:p>
+          <a:p>
+            <a:pPr algn="just"/>
+            <a:r>
+              <a:rPr lang="ru-RU" dirty="0"/>
+              <a:t>Выполняется нормализация громкости и фильтрация шумов</a:t>
+            </a:r>
+          </a:p>
+          <a:p>
+            <a:pPr algn="just"/>
+            <a:r>
+              <a:rPr lang="ru-RU" dirty="0"/>
+              <a:t>Сигнал передаётся в </a:t>
+            </a:r>
+            <a:r>
+              <a:rPr lang="ru-RU" dirty="0" err="1"/>
+              <a:t>faster-whisper</a:t>
+            </a:r>
+            <a:r>
+              <a:rPr lang="ru-RU" dirty="0"/>
+              <a:t> для </a:t>
+            </a:r>
+            <a:r>
+              <a:rPr lang="ru-RU" dirty="0" err="1"/>
+              <a:t>транскрибации</a:t>
+            </a:r>
+            <a:endParaRPr lang="ru-RU" dirty="0"/>
+          </a:p>
+          <a:p>
+            <a:pPr marL="0" indent="0" algn="just">
+              <a:buNone/>
+            </a:pPr>
+            <a:r>
+              <a:rPr lang="ru-RU" dirty="0"/>
+              <a:t>Возврат результатов:</a:t>
+            </a:r>
+          </a:p>
+          <a:p>
+            <a:pPr algn="just"/>
+            <a:r>
+              <a:rPr lang="ru-RU" dirty="0"/>
+              <a:t>Сервис возвращает частичный и финальный тексты с метаданными</a:t>
+            </a:r>
+          </a:p>
+          <a:p>
+            <a:pPr algn="just"/>
+            <a:r>
+              <a:rPr lang="ru-RU" dirty="0"/>
+              <a:t>Результаты сохраняются в БД и транслируются для отображения в интерфейсе</a:t>
+            </a:r>
+          </a:p>
+        </p:txBody>
+      </p:sp>
+      <p:sp>
+        <p:nvSpPr>
+          <p:cNvPr id="4" name="TextBox 3">
+            <a:extLst>
+              <a:ext uri="{FF2B5EF4-FFF2-40B4-BE49-F238E27FC236}">
+                <a16:creationId xmlns:a16="http://schemas.microsoft.com/office/drawing/2014/main" id="{BD401ADA-F907-446F-A529-8B6A4967B58D}"/>
               </a:ext>
             </a:extLst>
           </p:cNvPr>
@@ -4426,106 +4669,16 @@
           <a:p>
             <a:r>
               <a:rPr lang="en-US" dirty="0"/>
-              <a:t>15/22</a:t>
+              <a:t>13/22</a:t>
             </a:r>
             <a:endParaRPr lang="ru-RU" dirty="0"/>
-          </a:p>
-        </p:txBody>
-      </p:sp>
-      <p:sp>
-        <p:nvSpPr>
-          <p:cNvPr id="6" name="Заголовок 1">
-            <a:extLst>
-              <a:ext uri="{FF2B5EF4-FFF2-40B4-BE49-F238E27FC236}">
-                <a16:creationId xmlns:a16="http://schemas.microsoft.com/office/drawing/2014/main" id="{C7FE94C1-7119-09AA-1780-C0215FA1FB94}"/>
-              </a:ext>
-            </a:extLst>
-          </p:cNvPr>
-          <p:cNvSpPr txBox="1">
-            <a:spLocks/>
-          </p:cNvSpPr>
-          <p:nvPr/>
-        </p:nvSpPr>
-        <p:spPr>
-          <a:xfrm>
-            <a:off x="223058" y="290010"/>
-            <a:ext cx="3018905" cy="2292477"/>
-          </a:xfrm>
-          <a:prstGeom prst="rect">
-            <a:avLst/>
-          </a:prstGeom>
-        </p:spPr>
-        <p:txBody>
-          <a:bodyPr vert="horz" lIns="91440" tIns="45720" rIns="91440" bIns="45720" rtlCol="0" anchor="ctr">
-            <a:normAutofit/>
-          </a:bodyPr>
-          <a:lstStyle>
-            <a:lvl1pPr algn="l" defTabSz="914400" rtl="0" eaLnBrk="1" latinLnBrk="0" hangingPunct="1">
-              <a:lnSpc>
-                <a:spcPct val="90000"/>
-              </a:lnSpc>
-              <a:spcBef>
-                <a:spcPct val="0"/>
-              </a:spcBef>
-              <a:buNone/>
-              <a:defRPr sz="4400" kern="1200">
-                <a:solidFill>
-                  <a:schemeClr val="tx1"/>
-                </a:solidFill>
-                <a:latin typeface="+mj-lt"/>
-                <a:ea typeface="+mj-ea"/>
-                <a:cs typeface="+mj-cs"/>
-              </a:defRPr>
-            </a:lvl1pPr>
-          </a:lstStyle>
-          <a:p>
-            <a:r>
-              <a:rPr lang="ru-RU" sz="3200" dirty="0"/>
-              <a:t>Интерфейс системы</a:t>
-            </a:r>
-          </a:p>
-        </p:txBody>
-      </p:sp>
-      <p:sp>
-        <p:nvSpPr>
-          <p:cNvPr id="3" name="TextBox 2">
-            <a:extLst>
-              <a:ext uri="{FF2B5EF4-FFF2-40B4-BE49-F238E27FC236}">
-                <a16:creationId xmlns:a16="http://schemas.microsoft.com/office/drawing/2014/main" id="{A8D2A9AF-D03C-4F58-31FE-7D5114D10DF8}"/>
-              </a:ext>
-            </a:extLst>
-          </p:cNvPr>
-          <p:cNvSpPr txBox="1"/>
-          <p:nvPr/>
-        </p:nvSpPr>
-        <p:spPr>
-          <a:xfrm>
-            <a:off x="3047238" y="2828836"/>
-            <a:ext cx="6094476" cy="646331"/>
-          </a:xfrm>
-          <a:prstGeom prst="rect">
-            <a:avLst/>
-          </a:prstGeom>
-          <a:noFill/>
-        </p:spPr>
-        <p:txBody>
-          <a:bodyPr wrap="square">
-            <a:spAutoFit/>
-          </a:bodyPr>
-          <a:lstStyle/>
-          <a:p>
-            <a:pPr algn="l"/>
-            <a:r>
-              <a:rPr lang="ru-RU" dirty="0"/>
-              <a:t>Картинка: Рисунок 7 из отчёта (полноэкранный скриншот интерфейса)</a:t>
-            </a:r>
           </a:p>
         </p:txBody>
       </p:sp>
     </p:spTree>
     <p:extLst>
       <p:ext uri="{BB962C8B-B14F-4D97-AF65-F5344CB8AC3E}">
-        <p14:creationId xmlns:p14="http://schemas.microsoft.com/office/powerpoint/2010/main" val="1850562476"/>
+        <p14:creationId xmlns:p14="http://schemas.microsoft.com/office/powerpoint/2010/main" val="1647174813"/>
       </p:ext>
     </p:extLst>
   </p:cSld>
@@ -4557,7 +4710,7 @@
           <p:cNvPr id="2" name="Заголовок 1">
             <a:extLst>
               <a:ext uri="{FF2B5EF4-FFF2-40B4-BE49-F238E27FC236}">
-                <a16:creationId xmlns:a16="http://schemas.microsoft.com/office/drawing/2014/main" id="{9423B7ED-CC57-49E9-84A2-D9248AB69B3D}"/>
+                <a16:creationId xmlns:a16="http://schemas.microsoft.com/office/drawing/2014/main" id="{7F1BFD6B-99D2-42D5-806B-5AF98D60157D}"/>
               </a:ext>
             </a:extLst>
           </p:cNvPr>
@@ -4570,8 +4723,8 @@
         </p:nvSpPr>
         <p:spPr>
           <a:xfrm>
-            <a:off x="92475" y="105052"/>
-            <a:ext cx="4204317" cy="2176509"/>
+            <a:off x="204956" y="255273"/>
+            <a:ext cx="4905652" cy="1496735"/>
           </a:xfrm>
         </p:spPr>
         <p:txBody>
@@ -4581,8 +4734,8 @@
           <a:lstStyle/>
           <a:p>
             <a:r>
-              <a:rPr lang="ru-RU" sz="3600" dirty="0"/>
-              <a:t>Пример аналитического отчёта</a:t>
+              <a:rPr lang="ru-RU" dirty="0"/>
+              <a:t>Алгоритм работы системы</a:t>
             </a:r>
           </a:p>
         </p:txBody>
@@ -4592,7 +4745,7 @@
           <p:cNvPr id="5" name="TextBox 4">
             <a:extLst>
               <a:ext uri="{FF2B5EF4-FFF2-40B4-BE49-F238E27FC236}">
-                <a16:creationId xmlns:a16="http://schemas.microsoft.com/office/drawing/2014/main" id="{AC95F111-5EAD-4700-80E6-067F170BC9FE}"/>
+                <a16:creationId xmlns:a16="http://schemas.microsoft.com/office/drawing/2014/main" id="{1C1068E4-64AA-4881-9003-243658ECFBBE}"/>
               </a:ext>
             </a:extLst>
           </p:cNvPr>
@@ -4617,7 +4770,7 @@
           <a:p>
             <a:r>
               <a:rPr lang="en-US" dirty="0"/>
-              <a:t>16/22</a:t>
+              <a:t>14/22</a:t>
             </a:r>
             <a:endParaRPr lang="ru-RU" dirty="0"/>
           </a:p>
@@ -4625,10 +4778,10 @@
       </p:sp>
       <p:sp>
         <p:nvSpPr>
-          <p:cNvPr id="7" name="TextBox 6">
-            <a:extLst>
-              <a:ext uri="{FF2B5EF4-FFF2-40B4-BE49-F238E27FC236}">
-                <a16:creationId xmlns:a16="http://schemas.microsoft.com/office/drawing/2014/main" id="{414F11B4-836D-A570-EF85-38D41BD9C562}"/>
+          <p:cNvPr id="6" name="TextBox 5">
+            <a:extLst>
+              <a:ext uri="{FF2B5EF4-FFF2-40B4-BE49-F238E27FC236}">
+                <a16:creationId xmlns:a16="http://schemas.microsoft.com/office/drawing/2014/main" id="{61830C30-DFFB-B5DE-EE03-CA29D77B4CCF}"/>
               </a:ext>
             </a:extLst>
           </p:cNvPr>
@@ -4637,8 +4790,8 @@
         </p:nvSpPr>
         <p:spPr>
           <a:xfrm>
-            <a:off x="2978658" y="2690336"/>
-            <a:ext cx="6140196" cy="1477328"/>
+            <a:off x="5397246" y="546622"/>
+            <a:ext cx="6094476" cy="5355312"/>
           </a:xfrm>
           <a:prstGeom prst="rect">
             <a:avLst/>
@@ -4652,43 +4805,128 @@
           <a:lstStyle/>
           <a:p>
             <a:pPr algn="l">
-              <a:buFont typeface="Arial" panose="020B0604020202020204" pitchFamily="34" charset="0"/>
-              <a:buChar char="•"/>
+              <a:buFont typeface="+mj-lt"/>
+              <a:buAutoNum type="arabicPeriod"/>
             </a:pPr>
             <a:r>
               <a:rPr lang="ru-RU" dirty="0"/>
-              <a:t>Сводка по встрече: распределение эмоций, активность, ключевые фразы</a:t>
+              <a:t>Аутентификация: Пользователь вводит учётные данные, сервер проверяет </a:t>
+            </a:r>
+            <a:r>
+              <a:rPr lang="ru-RU" dirty="0" err="1"/>
+              <a:t>хеш</a:t>
+            </a:r>
+            <a:r>
+              <a:rPr lang="ru-RU" dirty="0"/>
+              <a:t> пароля </a:t>
+            </a:r>
+            <a:r>
+              <a:rPr lang="ru-RU" dirty="0" err="1"/>
+              <a:t>bcrypt</a:t>
+            </a:r>
+            <a:r>
+              <a:rPr lang="ru-RU" dirty="0"/>
+              <a:t>, выдаёт JWT-токен доступа и токен обновления</a:t>
             </a:r>
           </a:p>
           <a:p>
             <a:pPr algn="l">
-              <a:buFont typeface="Arial" panose="020B0604020202020204" pitchFamily="34" charset="0"/>
-              <a:buChar char="•"/>
+              <a:buFont typeface="+mj-lt"/>
+              <a:buAutoNum type="arabicPeriod"/>
             </a:pPr>
             <a:r>
               <a:rPr lang="ru-RU" dirty="0"/>
-              <a:t>Карточки участников с индивидуальной статистикой</a:t>
+              <a:t>Создание сессии: Пользователь создаёт встречу или присоединяется по ссылке, сервер регистрирует сессию и инициализирует </a:t>
+            </a:r>
+            <a:r>
+              <a:rPr lang="ru-RU" dirty="0" err="1"/>
+              <a:t>WebSocket</a:t>
+            </a:r>
+            <a:r>
+              <a:rPr lang="ru-RU" dirty="0"/>
+              <a:t>-хаб</a:t>
             </a:r>
           </a:p>
           <a:p>
             <a:pPr algn="l">
-              <a:buFont typeface="Arial" panose="020B0604020202020204" pitchFamily="34" charset="0"/>
-              <a:buChar char="•"/>
+              <a:buFont typeface="+mj-lt"/>
+              <a:buAutoNum type="arabicPeriod"/>
             </a:pPr>
             <a:r>
+              <a:rPr lang="ru-RU" dirty="0"/>
+              <a:t>Захват медиа: Клиент запрашивает доступ к камере и микрофону, запускает компоненты захвата с адаптивной частотой отправки</a:t>
+            </a:r>
+          </a:p>
+          <a:p>
+            <a:pPr algn="l">
+              <a:buFont typeface="+mj-lt"/>
+              <a:buAutoNum type="arabicPeriod"/>
+            </a:pPr>
+            <a:r>
+              <a:rPr lang="ru-RU" dirty="0"/>
+              <a:t>Параллельная обработка: AI-шлюз одновременно анализирует видеопоток (детекция + классификация) и аудиопоток (</a:t>
+            </a:r>
+            <a:r>
               <a:rPr lang="ru-RU" dirty="0" err="1"/>
-              <a:t>Таймлайны</a:t>
-            </a:r>
-            <a:r>
-              <a:rPr lang="ru-RU" dirty="0"/>
-              <a:t> изменения эмоций</a:t>
-            </a:r>
-          </a:p>
-          <a:p>
-            <a:pPr algn="l"/>
-            <a:r>
-              <a:rPr lang="ru-RU" dirty="0"/>
-              <a:t>Картинка: Скриншот примера отчёта (если есть в проекте)</a:t>
+              <a:t>транскрибация</a:t>
+            </a:r>
+            <a:r>
+              <a:rPr lang="ru-RU" dirty="0"/>
+              <a:t> + анализ тона)</a:t>
+            </a:r>
+          </a:p>
+          <a:p>
+            <a:pPr algn="l">
+              <a:buFont typeface="+mj-lt"/>
+              <a:buAutoNum type="arabicPeriod"/>
+            </a:pPr>
+            <a:r>
+              <a:rPr lang="ru-RU" dirty="0"/>
+              <a:t>Агрегация: Результаты записываются в </a:t>
+            </a:r>
+            <a:r>
+              <a:rPr lang="ru-RU" dirty="0" err="1"/>
+              <a:t>PostgreSQL</a:t>
+            </a:r>
+            <a:r>
+              <a:rPr lang="ru-RU" dirty="0"/>
+              <a:t> с временными метками и транслируются клиентам</a:t>
+            </a:r>
+          </a:p>
+          <a:p>
+            <a:pPr algn="l">
+              <a:buFont typeface="+mj-lt"/>
+              <a:buAutoNum type="arabicPeriod"/>
+            </a:pPr>
+            <a:r>
+              <a:rPr lang="ru-RU" dirty="0"/>
+              <a:t>Формирование отчёта: При завершении встречи применяется </a:t>
+            </a:r>
+            <a:r>
+              <a:rPr lang="ru-RU" dirty="0" err="1"/>
+              <a:t>late</a:t>
+            </a:r>
+            <a:r>
+              <a:rPr lang="ru-RU" dirty="0"/>
+              <a:t> </a:t>
+            </a:r>
+            <a:r>
+              <a:rPr lang="ru-RU" dirty="0" err="1"/>
+              <a:t>fusion</a:t>
+            </a:r>
+            <a:r>
+              <a:rPr lang="ru-RU" dirty="0"/>
+              <a:t> для объединения статистики, формируется структурированный отчёт</a:t>
+            </a:r>
+            <a:br>
+              <a:rPr lang="ru-RU" dirty="0"/>
+            </a:br>
+            <a:br>
+              <a:rPr lang="ru-RU" dirty="0"/>
+            </a:br>
+            <a:r>
+              <a:rPr lang="ru-RU" dirty="0"/>
+              <a:t>Картинка: Блок-схема алгоритма (draw.io)</a:t>
             </a:r>
           </a:p>
         </p:txBody>
@@ -4696,7 +4934,7 @@
     </p:spTree>
     <p:extLst>
       <p:ext uri="{BB962C8B-B14F-4D97-AF65-F5344CB8AC3E}">
-        <p14:creationId xmlns:p14="http://schemas.microsoft.com/office/powerpoint/2010/main" val="141243602"/>
+        <p14:creationId xmlns:p14="http://schemas.microsoft.com/office/powerpoint/2010/main" val="4254625303"/>
       </p:ext>
     </p:extLst>
   </p:cSld>
@@ -4725,10 +4963,10 @@
       </p:grpSpPr>
       <p:sp>
         <p:nvSpPr>
-          <p:cNvPr id="6" name="TextBox 5">
-            <a:extLst>
-              <a:ext uri="{FF2B5EF4-FFF2-40B4-BE49-F238E27FC236}">
-                <a16:creationId xmlns:a16="http://schemas.microsoft.com/office/drawing/2014/main" id="{FA3F0CB6-C78C-4805-AEBB-AFF9D10A5577}"/>
+          <p:cNvPr id="5" name="TextBox 4">
+            <a:extLst>
+              <a:ext uri="{FF2B5EF4-FFF2-40B4-BE49-F238E27FC236}">
+                <a16:creationId xmlns:a16="http://schemas.microsoft.com/office/drawing/2014/main" id="{61BED1AB-11C4-48F5-BF70-1ACBA146FC6C}"/>
               </a:ext>
             </a:extLst>
           </p:cNvPr>
@@ -4753,7 +4991,7 @@
           <a:p>
             <a:r>
               <a:rPr lang="en-US" dirty="0"/>
-              <a:t>18/22</a:t>
+              <a:t>15/22</a:t>
             </a:r>
             <a:endParaRPr lang="ru-RU" dirty="0"/>
           </a:p>
@@ -4761,93 +4999,92 @@
       </p:sp>
       <p:sp>
         <p:nvSpPr>
-          <p:cNvPr id="8" name="Заголовок 7">
-            <a:extLst>
-              <a:ext uri="{FF2B5EF4-FFF2-40B4-BE49-F238E27FC236}">
-                <a16:creationId xmlns:a16="http://schemas.microsoft.com/office/drawing/2014/main" id="{6603485B-22FC-0A97-1718-C889CAEE53D8}"/>
-              </a:ext>
-            </a:extLst>
-          </p:cNvPr>
-          <p:cNvSpPr>
-            <a:spLocks noGrp="1"/>
-          </p:cNvSpPr>
-          <p:nvPr>
-            <p:ph type="title"/>
-          </p:nvPr>
-        </p:nvSpPr>
-        <p:spPr/>
-        <p:txBody>
-          <a:bodyPr/>
-          <a:lstStyle/>
-          <a:p>
-            <a:r>
-              <a:rPr lang="ru-RU" dirty="0"/>
-              <a:t>Пример работы модуля детекции</a:t>
-            </a:r>
-          </a:p>
-        </p:txBody>
-      </p:sp>
-      <p:sp>
-        <p:nvSpPr>
-          <p:cNvPr id="12" name="TextBox 11">
-            <a:extLst>
-              <a:ext uri="{FF2B5EF4-FFF2-40B4-BE49-F238E27FC236}">
-                <a16:creationId xmlns:a16="http://schemas.microsoft.com/office/drawing/2014/main" id="{7CCE1EB7-33D9-2E65-0BC0-90F903F3C93E}"/>
-              </a:ext>
-            </a:extLst>
-          </p:cNvPr>
-          <p:cNvSpPr txBox="1"/>
+          <p:cNvPr id="6" name="Заголовок 1">
+            <a:extLst>
+              <a:ext uri="{FF2B5EF4-FFF2-40B4-BE49-F238E27FC236}">
+                <a16:creationId xmlns:a16="http://schemas.microsoft.com/office/drawing/2014/main" id="{C7FE94C1-7119-09AA-1780-C0215FA1FB94}"/>
+              </a:ext>
+            </a:extLst>
+          </p:cNvPr>
+          <p:cNvSpPr txBox="1">
+            <a:spLocks/>
+          </p:cNvSpPr>
           <p:nvPr/>
         </p:nvSpPr>
         <p:spPr>
           <a:xfrm>
-            <a:off x="3047238" y="2967335"/>
-            <a:ext cx="6094476" cy="923330"/>
+            <a:off x="204770" y="146304"/>
+            <a:ext cx="8280862" cy="808551"/>
           </a:xfrm>
           <a:prstGeom prst="rect">
             <a:avLst/>
           </a:prstGeom>
-          <a:noFill/>
         </p:spPr>
         <p:txBody>
-          <a:bodyPr wrap="square">
-            <a:spAutoFit/>
+          <a:bodyPr vert="horz" lIns="91440" tIns="45720" rIns="91440" bIns="45720" rtlCol="0" anchor="ctr">
+            <a:normAutofit/>
           </a:bodyPr>
-          <a:lstStyle/>
-          <a:p>
-            <a:r>
-              <a:rPr lang="ru-RU" dirty="0"/>
-              <a:t>До/после: исходный кадр → кадр с </a:t>
-            </a:r>
-            <a:r>
-              <a:rPr lang="ru-RU" dirty="0" err="1"/>
-              <a:t>bounding</a:t>
-            </a:r>
-            <a:r>
-              <a:rPr lang="ru-RU" dirty="0"/>
-              <a:t> </a:t>
-            </a:r>
-            <a:r>
-              <a:rPr lang="ru-RU" dirty="0" err="1"/>
-              <a:t>box</a:t>
-            </a:r>
-            <a:r>
-              <a:rPr lang="ru-RU" dirty="0"/>
-              <a:t> и эмоцией</a:t>
-            </a:r>
-          </a:p>
-          <a:p>
-            <a:r>
-              <a:rPr lang="ru-RU" dirty="0"/>
-              <a:t>Картинка: Сравнительный скриншот (можно сделать скрин из работающей системы)</a:t>
-            </a:r>
-          </a:p>
-        </p:txBody>
-      </p:sp>
+          <a:lstStyle>
+            <a:lvl1pPr algn="l" defTabSz="914400" rtl="0" eaLnBrk="1" latinLnBrk="0" hangingPunct="1">
+              <a:lnSpc>
+                <a:spcPct val="90000"/>
+              </a:lnSpc>
+              <a:spcBef>
+                <a:spcPct val="0"/>
+              </a:spcBef>
+              <a:buNone/>
+              <a:defRPr sz="4400" kern="1200">
+                <a:solidFill>
+                  <a:schemeClr val="tx1"/>
+                </a:solidFill>
+                <a:latin typeface="+mj-lt"/>
+                <a:ea typeface="+mj-ea"/>
+                <a:cs typeface="+mj-cs"/>
+              </a:defRPr>
+            </a:lvl1pPr>
+          </a:lstStyle>
+          <a:p>
+            <a:r>
+              <a:rPr lang="ru-RU" sz="3200" dirty="0"/>
+              <a:t>Интерфейс системы</a:t>
+            </a:r>
+          </a:p>
+        </p:txBody>
+      </p:sp>
+      <p:pic>
+        <p:nvPicPr>
+          <p:cNvPr id="2" name="Рисунок 1">
+            <a:extLst>
+              <a:ext uri="{FF2B5EF4-FFF2-40B4-BE49-F238E27FC236}">
+                <a16:creationId xmlns:a16="http://schemas.microsoft.com/office/drawing/2014/main" id="{3A240AF3-3AA3-3709-E167-D4F5A9CA4FDE}"/>
+              </a:ext>
+            </a:extLst>
+          </p:cNvPr>
+          <p:cNvPicPr>
+            <a:picLocks noChangeAspect="1"/>
+          </p:cNvPicPr>
+          <p:nvPr/>
+        </p:nvPicPr>
+        <p:blipFill>
+          <a:blip r:embed="rId2"/>
+          <a:stretch>
+            <a:fillRect/>
+          </a:stretch>
+        </p:blipFill>
+        <p:spPr>
+          <a:xfrm>
+            <a:off x="204770" y="1467369"/>
+            <a:ext cx="9635940" cy="4924553"/>
+          </a:xfrm>
+          <a:prstGeom prst="rect">
+            <a:avLst/>
+          </a:prstGeom>
+        </p:spPr>
+      </p:pic>
     </p:spTree>
     <p:extLst>
       <p:ext uri="{BB962C8B-B14F-4D97-AF65-F5344CB8AC3E}">
-        <p14:creationId xmlns:p14="http://schemas.microsoft.com/office/powerpoint/2010/main" val="2834005285"/>
+        <p14:creationId xmlns:p14="http://schemas.microsoft.com/office/powerpoint/2010/main" val="1850562476"/>
       </p:ext>
     </p:extLst>
   </p:cSld>
@@ -4876,10 +5113,45 @@
       </p:grpSpPr>
       <p:sp>
         <p:nvSpPr>
+          <p:cNvPr id="2" name="Заголовок 1">
+            <a:extLst>
+              <a:ext uri="{FF2B5EF4-FFF2-40B4-BE49-F238E27FC236}">
+                <a16:creationId xmlns:a16="http://schemas.microsoft.com/office/drawing/2014/main" id="{9423B7ED-CC57-49E9-84A2-D9248AB69B3D}"/>
+              </a:ext>
+            </a:extLst>
+          </p:cNvPr>
+          <p:cNvSpPr>
+            <a:spLocks noGrp="1"/>
+          </p:cNvSpPr>
+          <p:nvPr>
+            <p:ph type="title"/>
+          </p:nvPr>
+        </p:nvSpPr>
+        <p:spPr>
+          <a:xfrm>
+            <a:off x="92475" y="105052"/>
+            <a:ext cx="4204317" cy="2176509"/>
+          </a:xfrm>
+        </p:spPr>
+        <p:txBody>
+          <a:bodyPr>
+            <a:normAutofit/>
+          </a:bodyPr>
+          <a:lstStyle/>
+          <a:p>
+            <a:r>
+              <a:rPr lang="ru-RU" sz="3600" dirty="0"/>
+              <a:t>Пример аналитического отчёта</a:t>
+            </a:r>
+          </a:p>
+        </p:txBody>
+      </p:sp>
+      <p:sp>
+        <p:nvSpPr>
           <p:cNvPr id="5" name="TextBox 4">
             <a:extLst>
               <a:ext uri="{FF2B5EF4-FFF2-40B4-BE49-F238E27FC236}">
-                <a16:creationId xmlns:a16="http://schemas.microsoft.com/office/drawing/2014/main" id="{AD3ACA76-DC55-4EE2-B96E-8C8DD92607FB}"/>
+                <a16:creationId xmlns:a16="http://schemas.microsoft.com/office/drawing/2014/main" id="{AC95F111-5EAD-4700-80E6-067F170BC9FE}"/>
               </a:ext>
             </a:extLst>
           </p:cNvPr>
@@ -4904,7 +5176,7 @@
           <a:p>
             <a:r>
               <a:rPr lang="en-US" dirty="0"/>
-              <a:t>19/22</a:t>
+              <a:t>16/22</a:t>
             </a:r>
             <a:endParaRPr lang="ru-RU" dirty="0"/>
           </a:p>
@@ -4912,74 +5184,20 @@
       </p:sp>
       <p:sp>
         <p:nvSpPr>
-          <p:cNvPr id="6" name="Заголовок 1">
-            <a:extLst>
-              <a:ext uri="{FF2B5EF4-FFF2-40B4-BE49-F238E27FC236}">
-                <a16:creationId xmlns:a16="http://schemas.microsoft.com/office/drawing/2014/main" id="{1D64F9D4-50F5-E5DE-1F6D-A6CCD663D908}"/>
-              </a:ext>
-            </a:extLst>
-          </p:cNvPr>
-          <p:cNvSpPr txBox="1">
-            <a:spLocks/>
-          </p:cNvSpPr>
+          <p:cNvPr id="7" name="TextBox 6">
+            <a:extLst>
+              <a:ext uri="{FF2B5EF4-FFF2-40B4-BE49-F238E27FC236}">
+                <a16:creationId xmlns:a16="http://schemas.microsoft.com/office/drawing/2014/main" id="{414F11B4-836D-A570-EF85-38D41BD9C562}"/>
+              </a:ext>
+            </a:extLst>
+          </p:cNvPr>
+          <p:cNvSpPr txBox="1"/>
           <p:nvPr/>
         </p:nvSpPr>
         <p:spPr>
           <a:xfrm>
-            <a:off x="163498" y="-132024"/>
-            <a:ext cx="10515600" cy="1325563"/>
-          </a:xfrm>
-          <a:prstGeom prst="rect">
-            <a:avLst/>
-          </a:prstGeom>
-        </p:spPr>
-        <p:txBody>
-          <a:bodyPr vert="horz" lIns="91440" tIns="45720" rIns="91440" bIns="45720" rtlCol="0" anchor="ctr">
-            <a:normAutofit/>
-          </a:bodyPr>
-          <a:lstStyle>
-            <a:lvl1pPr algn="l" defTabSz="914400" rtl="0" eaLnBrk="1" latinLnBrk="0" hangingPunct="1">
-              <a:lnSpc>
-                <a:spcPct val="90000"/>
-              </a:lnSpc>
-              <a:spcBef>
-                <a:spcPct val="0"/>
-              </a:spcBef>
-              <a:buNone/>
-              <a:defRPr sz="4400" kern="1200">
-                <a:solidFill>
-                  <a:schemeClr val="tx1"/>
-                </a:solidFill>
-                <a:latin typeface="+mj-lt"/>
-                <a:ea typeface="+mj-ea"/>
-                <a:cs typeface="+mj-cs"/>
-              </a:defRPr>
-            </a:lvl1pPr>
-          </a:lstStyle>
-          <a:p>
-            <a:r>
-              <a:rPr lang="ru-RU" sz="3600" dirty="0"/>
-              <a:t>Пример работы модуля распознавания речи</a:t>
-            </a:r>
-          </a:p>
-        </p:txBody>
-      </p:sp>
-      <p:sp>
-        <p:nvSpPr>
-          <p:cNvPr id="9" name="TextBox 8">
-            <a:extLst>
-              <a:ext uri="{FF2B5EF4-FFF2-40B4-BE49-F238E27FC236}">
-                <a16:creationId xmlns:a16="http://schemas.microsoft.com/office/drawing/2014/main" id="{9E3D4684-574A-EA26-898C-4CBE180E21B9}"/>
-              </a:ext>
-            </a:extLst>
-          </p:cNvPr>
-          <p:cNvSpPr txBox="1"/>
-          <p:nvPr/>
-        </p:nvSpPr>
-        <p:spPr>
-          <a:xfrm>
-            <a:off x="3026664" y="2903327"/>
-            <a:ext cx="6108192" cy="923330"/>
+            <a:off x="2978658" y="2690336"/>
+            <a:ext cx="6140196" cy="1477328"/>
           </a:xfrm>
           <a:prstGeom prst="rect">
             <a:avLst/>
@@ -4992,19 +5210,44 @@
           </a:bodyPr>
           <a:lstStyle/>
           <a:p>
+            <a:pPr algn="l">
+              <a:buFont typeface="Arial" panose="020B0604020202020204" pitchFamily="34" charset="0"/>
+              <a:buChar char="•"/>
+            </a:pPr>
+            <a:r>
+              <a:rPr lang="ru-RU" dirty="0"/>
+              <a:t>Сводка по встрече: распределение эмоций, активность, ключевые фразы</a:t>
+            </a:r>
+          </a:p>
+          <a:p>
+            <a:pPr algn="l">
+              <a:buFont typeface="Arial" panose="020B0604020202020204" pitchFamily="34" charset="0"/>
+              <a:buChar char="•"/>
+            </a:pPr>
+            <a:r>
+              <a:rPr lang="ru-RU" dirty="0"/>
+              <a:t>Карточки участников с индивидуальной статистикой</a:t>
+            </a:r>
+          </a:p>
+          <a:p>
+            <a:pPr algn="l">
+              <a:buFont typeface="Arial" panose="020B0604020202020204" pitchFamily="34" charset="0"/>
+              <a:buChar char="•"/>
+            </a:pPr>
             <a:r>
               <a:rPr lang="ru-RU" dirty="0" err="1"/>
-              <a:t>Аудиоволна</a:t>
-            </a:r>
-            <a:r>
-              <a:rPr lang="ru-RU" dirty="0"/>
-              <a:t> → текст → выделение эмоциональных маркеров</a:t>
-            </a:r>
-          </a:p>
-          <a:p>
-            <a:r>
-              <a:rPr lang="ru-RU" dirty="0"/>
-              <a:t>Картинка: Скриншот транскрипта с разметкой эмоций</a:t>
+              <a:t>Таймлайны</a:t>
+            </a:r>
+            <a:r>
+              <a:rPr lang="ru-RU" dirty="0"/>
+              <a:t> изменения эмоций</a:t>
+            </a:r>
+          </a:p>
+          <a:p>
+            <a:pPr algn="l"/>
+            <a:r>
+              <a:rPr lang="ru-RU" dirty="0"/>
+              <a:t>Картинка: Скриншот примера отчёта (если есть в проекте)</a:t>
             </a:r>
           </a:p>
         </p:txBody>
@@ -5012,7 +5255,7 @@
     </p:spTree>
     <p:extLst>
       <p:ext uri="{BB962C8B-B14F-4D97-AF65-F5344CB8AC3E}">
-        <p14:creationId xmlns:p14="http://schemas.microsoft.com/office/powerpoint/2010/main" val="1230299200"/>
+        <p14:creationId xmlns:p14="http://schemas.microsoft.com/office/powerpoint/2010/main" val="141243602"/>
       </p:ext>
     </p:extLst>
   </p:cSld>
@@ -5041,91 +5284,10 @@
       </p:grpSpPr>
       <p:sp>
         <p:nvSpPr>
-          <p:cNvPr id="2" name="Заголовок 1">
-            <a:extLst>
-              <a:ext uri="{FF2B5EF4-FFF2-40B4-BE49-F238E27FC236}">
-                <a16:creationId xmlns:a16="http://schemas.microsoft.com/office/drawing/2014/main" id="{8E4679AE-9695-41ED-964A-F63B6DC860B9}"/>
-              </a:ext>
-            </a:extLst>
-          </p:cNvPr>
-          <p:cNvSpPr>
-            <a:spLocks noGrp="1"/>
-          </p:cNvSpPr>
-          <p:nvPr>
-            <p:ph type="title"/>
-          </p:nvPr>
-        </p:nvSpPr>
-        <p:spPr/>
-        <p:txBody>
-          <a:bodyPr/>
-          <a:lstStyle/>
-          <a:p>
-            <a:r>
-              <a:rPr lang="ru-RU" dirty="0"/>
-              <a:t>Заключение</a:t>
-            </a:r>
-          </a:p>
-        </p:txBody>
-      </p:sp>
-      <p:sp>
-        <p:nvSpPr>
-          <p:cNvPr id="3" name="Объект 2">
-            <a:extLst>
-              <a:ext uri="{FF2B5EF4-FFF2-40B4-BE49-F238E27FC236}">
-                <a16:creationId xmlns:a16="http://schemas.microsoft.com/office/drawing/2014/main" id="{8DA6D676-1DC8-4A9C-81A7-79527C288ADC}"/>
-              </a:ext>
-            </a:extLst>
-          </p:cNvPr>
-          <p:cNvSpPr>
-            <a:spLocks noGrp="1"/>
-          </p:cNvSpPr>
-          <p:nvPr>
-            <p:ph idx="1"/>
-          </p:nvPr>
-        </p:nvSpPr>
-        <p:spPr>
-          <a:xfrm>
-            <a:off x="838200" y="1367162"/>
-            <a:ext cx="10515600" cy="5308846"/>
-          </a:xfrm>
-        </p:spPr>
-        <p:txBody>
-          <a:bodyPr>
-            <a:normAutofit/>
-          </a:bodyPr>
-          <a:lstStyle/>
-          <a:p>
-            <a:r>
-              <a:rPr lang="ru-RU" dirty="0"/>
-              <a:t>Цель и задачи выполнены</a:t>
-            </a:r>
-          </a:p>
-          <a:p>
-            <a:r>
-              <a:rPr lang="ru-RU" dirty="0"/>
-              <a:t>Реализована мультимодальная система анализа эмоций</a:t>
-            </a:r>
-          </a:p>
-          <a:p>
-            <a:r>
-              <a:rPr lang="ru-RU" dirty="0"/>
-              <a:t>Протестированы ключевые модули (детекция, ASR, отчётность)</a:t>
-            </a:r>
-          </a:p>
-          <a:p>
-            <a:r>
-              <a:rPr lang="ru-RU" dirty="0"/>
-              <a:t>Система готова к внедрению в HR-процессы</a:t>
-            </a:r>
-          </a:p>
-        </p:txBody>
-      </p:sp>
-      <p:sp>
-        <p:nvSpPr>
-          <p:cNvPr id="4" name="TextBox 3">
-            <a:extLst>
-              <a:ext uri="{FF2B5EF4-FFF2-40B4-BE49-F238E27FC236}">
-                <a16:creationId xmlns:a16="http://schemas.microsoft.com/office/drawing/2014/main" id="{7BE0758E-ED01-4E2A-9F8C-4C0573556692}"/>
+          <p:cNvPr id="6" name="TextBox 5">
+            <a:extLst>
+              <a:ext uri="{FF2B5EF4-FFF2-40B4-BE49-F238E27FC236}">
+                <a16:creationId xmlns:a16="http://schemas.microsoft.com/office/drawing/2014/main" id="{FA3F0CB6-C78C-4805-AEBB-AFF9D10A5577}"/>
               </a:ext>
             </a:extLst>
           </p:cNvPr>
@@ -5149,21 +5311,102 @@
           <a:lstStyle/>
           <a:p>
             <a:r>
-              <a:rPr lang="ru-RU" dirty="0"/>
-              <a:t>2</a:t>
-            </a:r>
-            <a:r>
               <a:rPr lang="en-US" dirty="0"/>
-              <a:t>2/22</a:t>
+              <a:t>18/22</a:t>
             </a:r>
             <a:endParaRPr lang="ru-RU" dirty="0"/>
+          </a:p>
+        </p:txBody>
+      </p:sp>
+      <p:sp>
+        <p:nvSpPr>
+          <p:cNvPr id="8" name="Заголовок 7">
+            <a:extLst>
+              <a:ext uri="{FF2B5EF4-FFF2-40B4-BE49-F238E27FC236}">
+                <a16:creationId xmlns:a16="http://schemas.microsoft.com/office/drawing/2014/main" id="{6603485B-22FC-0A97-1718-C889CAEE53D8}"/>
+              </a:ext>
+            </a:extLst>
+          </p:cNvPr>
+          <p:cNvSpPr>
+            <a:spLocks noGrp="1"/>
+          </p:cNvSpPr>
+          <p:nvPr>
+            <p:ph type="title"/>
+          </p:nvPr>
+        </p:nvSpPr>
+        <p:spPr/>
+        <p:txBody>
+          <a:bodyPr/>
+          <a:lstStyle/>
+          <a:p>
+            <a:r>
+              <a:rPr lang="ru-RU" dirty="0"/>
+              <a:t>Пример работы модуля детекции</a:t>
+            </a:r>
+          </a:p>
+        </p:txBody>
+      </p:sp>
+      <p:sp>
+        <p:nvSpPr>
+          <p:cNvPr id="12" name="TextBox 11">
+            <a:extLst>
+              <a:ext uri="{FF2B5EF4-FFF2-40B4-BE49-F238E27FC236}">
+                <a16:creationId xmlns:a16="http://schemas.microsoft.com/office/drawing/2014/main" id="{7CCE1EB7-33D9-2E65-0BC0-90F903F3C93E}"/>
+              </a:ext>
+            </a:extLst>
+          </p:cNvPr>
+          <p:cNvSpPr txBox="1"/>
+          <p:nvPr/>
+        </p:nvSpPr>
+        <p:spPr>
+          <a:xfrm>
+            <a:off x="3047238" y="2967335"/>
+            <a:ext cx="6094476" cy="923330"/>
+          </a:xfrm>
+          <a:prstGeom prst="rect">
+            <a:avLst/>
+          </a:prstGeom>
+          <a:noFill/>
+        </p:spPr>
+        <p:txBody>
+          <a:bodyPr wrap="square">
+            <a:spAutoFit/>
+          </a:bodyPr>
+          <a:lstStyle/>
+          <a:p>
+            <a:r>
+              <a:rPr lang="ru-RU" dirty="0"/>
+              <a:t>До/после: исходный кадр → кадр с </a:t>
+            </a:r>
+            <a:r>
+              <a:rPr lang="ru-RU" dirty="0" err="1"/>
+              <a:t>bounding</a:t>
+            </a:r>
+            <a:r>
+              <a:rPr lang="ru-RU" dirty="0"/>
+              <a:t> </a:t>
+            </a:r>
+            <a:r>
+              <a:rPr lang="ru-RU" dirty="0" err="1"/>
+              <a:t>box</a:t>
+            </a:r>
+            <a:r>
+              <a:rPr lang="ru-RU" dirty="0"/>
+              <a:t> и эмоцией</a:t>
+            </a:r>
+          </a:p>
+          <a:p>
+            <a:r>
+              <a:rPr lang="ru-RU" dirty="0"/>
+              <a:t>Картинка: Сравнительный скриншот (можно сделать скрин из работающей системы)</a:t>
+            </a:r>
           </a:p>
         </p:txBody>
       </p:sp>
     </p:spTree>
     <p:extLst>
       <p:ext uri="{BB962C8B-B14F-4D97-AF65-F5344CB8AC3E}">
-        <p14:creationId xmlns:p14="http://schemas.microsoft.com/office/powerpoint/2010/main" val="3186821950"/>
+        <p14:creationId xmlns:p14="http://schemas.microsoft.com/office/powerpoint/2010/main" val="2834005285"/>
       </p:ext>
     </p:extLst>
   </p:cSld>
@@ -5253,12 +5496,12 @@
               <a:buNone/>
             </a:pPr>
             <a:r>
-              <a:rPr lang="ru-RU" sz="1400" dirty="0">
+              <a:rPr lang="ru-RU" sz="1600" dirty="0">
                 <a:effectLst/>
                 <a:ea typeface="Calibri" panose="020F0502020204030204" pitchFamily="34" charset="0"/>
                 <a:cs typeface="Times New Roman" panose="02020603050405020304" pitchFamily="18" charset="0"/>
               </a:rPr>
-              <a:t>Цель практики:</a:t>
+              <a:t>Цель: Разработать программную часть системы распознавания эмоций на основе ИНС с использованием компьютерного зрения и глубокого обучения.</a:t>
             </a:r>
           </a:p>
           <a:p>
@@ -5269,12 +5512,12 @@
               <a:buNone/>
             </a:pPr>
             <a:r>
-              <a:rPr lang="ru-RU" sz="1400" dirty="0">
+              <a:rPr lang="ru-RU" sz="1600" dirty="0">
                 <a:effectLst/>
                 <a:ea typeface="Calibri" panose="020F0502020204030204" pitchFamily="34" charset="0"/>
                 <a:cs typeface="Times New Roman" panose="02020603050405020304" pitchFamily="18" charset="0"/>
               </a:rPr>
-              <a:t>Разработать программную часть системы распознавания эмоций человека на основе искусственной нейронной сети с использованием методов компьютерного зрения и глубокого обучения, включая обработку видеопотока, обучение модели и интеграцию с базой данных.</a:t>
+              <a:t>Задачи:</a:t>
             </a:r>
           </a:p>
           <a:p>
@@ -5285,23 +5528,7 @@
               <a:buNone/>
             </a:pPr>
             <a:r>
-              <a:rPr lang="ru-RU" sz="1400" dirty="0">
-                <a:effectLst/>
-                <a:ea typeface="Calibri" panose="020F0502020204030204" pitchFamily="34" charset="0"/>
-                <a:cs typeface="Times New Roman" panose="02020603050405020304" pitchFamily="18" charset="0"/>
-              </a:rPr>
-              <a:t>Задачи практики:</a:t>
-            </a:r>
-          </a:p>
-          <a:p>
-            <a:pPr indent="0" algn="just">
-              <a:lnSpc>
-                <a:spcPct val="150000"/>
-              </a:lnSpc>
-              <a:buNone/>
-            </a:pPr>
-            <a:r>
-              <a:rPr lang="ru-RU" sz="1400" dirty="0">
+              <a:rPr lang="ru-RU" sz="1600" dirty="0">
                 <a:effectLst/>
                 <a:ea typeface="Calibri" panose="020F0502020204030204" pitchFamily="34" charset="0"/>
                 <a:cs typeface="Times New Roman" panose="02020603050405020304" pitchFamily="18" charset="0"/>
@@ -5317,12 +5544,12 @@
               <a:buNone/>
             </a:pPr>
             <a:r>
-              <a:rPr lang="ru-RU" sz="1400" dirty="0">
+              <a:rPr lang="ru-RU" sz="1600" dirty="0">
                 <a:effectLst/>
                 <a:ea typeface="Calibri" panose="020F0502020204030204" pitchFamily="34" charset="0"/>
                 <a:cs typeface="Times New Roman" panose="02020603050405020304" pitchFamily="18" charset="0"/>
               </a:rPr>
-              <a:t>Проработка видов обеспечения: информационное обеспечение, программное обеспечение, алгоритмическое обеспечение, математическое обеспечение, техническое обеспечение</a:t>
+              <a:t>Проработка видов обеспечения: информационное, программное, алгоритмическое, математическое, техническое</a:t>
             </a:r>
           </a:p>
           <a:p>
@@ -5333,28 +5560,44 @@
               <a:buNone/>
             </a:pPr>
             <a:r>
-              <a:rPr lang="ru-RU" sz="1400" dirty="0">
+              <a:rPr lang="ru-RU" sz="1600" dirty="0">
                 <a:effectLst/>
                 <a:ea typeface="Calibri" panose="020F0502020204030204" pitchFamily="34" charset="0"/>
                 <a:cs typeface="Times New Roman" panose="02020603050405020304" pitchFamily="18" charset="0"/>
               </a:rPr>
-              <a:t>Реализация модуля анализа лица и эмоций на основе </a:t>
-            </a:r>
-            <a:r>
-              <a:rPr lang="ru-RU" sz="1400" dirty="0" err="1">
+              <a:t>Реализация модуля анализа лица и эмоций</a:t>
+            </a:r>
+          </a:p>
+          <a:p>
+            <a:pPr indent="0" algn="just">
+              <a:lnSpc>
+                <a:spcPct val="150000"/>
+              </a:lnSpc>
+              <a:buNone/>
+            </a:pPr>
+            <a:r>
+              <a:rPr lang="ru-RU" sz="1600" dirty="0">
                 <a:effectLst/>
                 <a:ea typeface="Calibri" panose="020F0502020204030204" pitchFamily="34" charset="0"/>
                 <a:cs typeface="Times New Roman" panose="02020603050405020304" pitchFamily="18" charset="0"/>
               </a:rPr>
-              <a:t>сверточных</a:t>
-            </a:r>
-            <a:r>
-              <a:rPr lang="ru-RU" sz="1400" dirty="0">
+              <a:t>Реализация модуля распознавания речи</a:t>
+            </a:r>
+          </a:p>
+          <a:p>
+            <a:pPr indent="0" algn="just">
+              <a:lnSpc>
+                <a:spcPct val="150000"/>
+              </a:lnSpc>
+              <a:buNone/>
+            </a:pPr>
+            <a:r>
+              <a:rPr lang="ru-RU" sz="1600" dirty="0">
                 <a:effectLst/>
                 <a:ea typeface="Calibri" panose="020F0502020204030204" pitchFamily="34" charset="0"/>
                 <a:cs typeface="Times New Roman" panose="02020603050405020304" pitchFamily="18" charset="0"/>
               </a:rPr>
-              <a:t> нейронных сетей</a:t>
+              <a:t>Разработка пользовательского интерфейса</a:t>
             </a:r>
           </a:p>
           <a:p>
@@ -5365,12 +5608,12 @@
               <a:buNone/>
             </a:pPr>
             <a:r>
-              <a:rPr lang="ru-RU" sz="1400" dirty="0">
+              <a:rPr lang="ru-RU" sz="1600" dirty="0">
                 <a:effectLst/>
                 <a:ea typeface="Calibri" panose="020F0502020204030204" pitchFamily="34" charset="0"/>
                 <a:cs typeface="Times New Roman" panose="02020603050405020304" pitchFamily="18" charset="0"/>
               </a:rPr>
-              <a:t>Реализация модуля распознавания речи и анализа аудиопотока</a:t>
+              <a:t>Интеграция модулей ИИ в единую систему</a:t>
             </a:r>
           </a:p>
           <a:p>
@@ -5381,44 +5624,12 @@
               <a:buNone/>
             </a:pPr>
             <a:r>
-              <a:rPr lang="ru-RU" sz="1400" dirty="0">
+              <a:rPr lang="ru-RU" sz="1600" dirty="0">
                 <a:effectLst/>
                 <a:ea typeface="Calibri" panose="020F0502020204030204" pitchFamily="34" charset="0"/>
                 <a:cs typeface="Times New Roman" panose="02020603050405020304" pitchFamily="18" charset="0"/>
               </a:rPr>
-              <a:t>Разработка пользовательского интерфейса программного комплекса</a:t>
-            </a:r>
-          </a:p>
-          <a:p>
-            <a:pPr indent="0" algn="just">
-              <a:lnSpc>
-                <a:spcPct val="150000"/>
-              </a:lnSpc>
-              <a:buNone/>
-            </a:pPr>
-            <a:r>
-              <a:rPr lang="ru-RU" sz="1400" dirty="0">
-                <a:effectLst/>
-                <a:ea typeface="Calibri" panose="020F0502020204030204" pitchFamily="34" charset="0"/>
-                <a:cs typeface="Times New Roman" panose="02020603050405020304" pitchFamily="18" charset="0"/>
-              </a:rPr>
-              <a:t>Интеграция модулей искусственного интеллекта в единую систему</a:t>
-            </a:r>
-          </a:p>
-          <a:p>
-            <a:pPr indent="0" algn="just">
-              <a:lnSpc>
-                <a:spcPct val="150000"/>
-              </a:lnSpc>
-              <a:buNone/>
-            </a:pPr>
-            <a:r>
-              <a:rPr lang="ru-RU" sz="1400" dirty="0">
-                <a:effectLst/>
-                <a:ea typeface="Calibri" panose="020F0502020204030204" pitchFamily="34" charset="0"/>
-                <a:cs typeface="Times New Roman" panose="02020603050405020304" pitchFamily="18" charset="0"/>
-              </a:rPr>
-              <a:t>Подготовка отчета по преддипломной практике</a:t>
+              <a:t>Подготовка отчёта по практике</a:t>
             </a:r>
           </a:p>
         </p:txBody>
@@ -5467,6 +5678,322 @@
     <p:extLst>
       <p:ext uri="{BB962C8B-B14F-4D97-AF65-F5344CB8AC3E}">
         <p14:creationId xmlns:p14="http://schemas.microsoft.com/office/powerpoint/2010/main" val="4080414093"/>
+      </p:ext>
+    </p:extLst>
+  </p:cSld>
+  <p:clrMapOvr>
+    <a:masterClrMapping/>
+  </p:clrMapOvr>
+</p:sld>
+</file>
+
+<file path=ppt/slides/slide20.xml><?xml version="1.0" encoding="utf-8"?>
+<p:sld xmlns:a="http://schemas.openxmlformats.org/drawingml/2006/main" xmlns:r="http://schemas.openxmlformats.org/officeDocument/2006/relationships" xmlns:p="http://schemas.openxmlformats.org/presentationml/2006/main">
+  <p:cSld>
+    <p:spTree>
+      <p:nvGrpSpPr>
+        <p:cNvPr id="1" name=""/>
+        <p:cNvGrpSpPr/>
+        <p:nvPr/>
+      </p:nvGrpSpPr>
+      <p:grpSpPr>
+        <a:xfrm>
+          <a:off x="0" y="0"/>
+          <a:ext cx="0" cy="0"/>
+          <a:chOff x="0" y="0"/>
+          <a:chExt cx="0" cy="0"/>
+        </a:xfrm>
+      </p:grpSpPr>
+      <p:sp>
+        <p:nvSpPr>
+          <p:cNvPr id="5" name="TextBox 4">
+            <a:extLst>
+              <a:ext uri="{FF2B5EF4-FFF2-40B4-BE49-F238E27FC236}">
+                <a16:creationId xmlns:a16="http://schemas.microsoft.com/office/drawing/2014/main" id="{AD3ACA76-DC55-4EE2-B96E-8C8DD92607FB}"/>
+              </a:ext>
+            </a:extLst>
+          </p:cNvPr>
+          <p:cNvSpPr txBox="1"/>
+          <p:nvPr/>
+        </p:nvSpPr>
+        <p:spPr>
+          <a:xfrm>
+            <a:off x="10990555" y="6391922"/>
+            <a:ext cx="870012" cy="372862"/>
+          </a:xfrm>
+          <a:prstGeom prst="rect">
+            <a:avLst/>
+          </a:prstGeom>
+          <a:noFill/>
+        </p:spPr>
+        <p:txBody>
+          <a:bodyPr wrap="square" rtlCol="0">
+            <a:spAutoFit/>
+          </a:bodyPr>
+          <a:lstStyle/>
+          <a:p>
+            <a:r>
+              <a:rPr lang="en-US" dirty="0"/>
+              <a:t>19/22</a:t>
+            </a:r>
+            <a:endParaRPr lang="ru-RU" dirty="0"/>
+          </a:p>
+        </p:txBody>
+      </p:sp>
+      <p:sp>
+        <p:nvSpPr>
+          <p:cNvPr id="6" name="Заголовок 1">
+            <a:extLst>
+              <a:ext uri="{FF2B5EF4-FFF2-40B4-BE49-F238E27FC236}">
+                <a16:creationId xmlns:a16="http://schemas.microsoft.com/office/drawing/2014/main" id="{1D64F9D4-50F5-E5DE-1F6D-A6CCD663D908}"/>
+              </a:ext>
+            </a:extLst>
+          </p:cNvPr>
+          <p:cNvSpPr txBox="1">
+            <a:spLocks/>
+          </p:cNvSpPr>
+          <p:nvPr/>
+        </p:nvSpPr>
+        <p:spPr>
+          <a:xfrm>
+            <a:off x="163498" y="-132024"/>
+            <a:ext cx="10515600" cy="1325563"/>
+          </a:xfrm>
+          <a:prstGeom prst="rect">
+            <a:avLst/>
+          </a:prstGeom>
+        </p:spPr>
+        <p:txBody>
+          <a:bodyPr vert="horz" lIns="91440" tIns="45720" rIns="91440" bIns="45720" rtlCol="0" anchor="ctr">
+            <a:normAutofit/>
+          </a:bodyPr>
+          <a:lstStyle>
+            <a:lvl1pPr algn="l" defTabSz="914400" rtl="0" eaLnBrk="1" latinLnBrk="0" hangingPunct="1">
+              <a:lnSpc>
+                <a:spcPct val="90000"/>
+              </a:lnSpc>
+              <a:spcBef>
+                <a:spcPct val="0"/>
+              </a:spcBef>
+              <a:buNone/>
+              <a:defRPr sz="4400" kern="1200">
+                <a:solidFill>
+                  <a:schemeClr val="tx1"/>
+                </a:solidFill>
+                <a:latin typeface="+mj-lt"/>
+                <a:ea typeface="+mj-ea"/>
+                <a:cs typeface="+mj-cs"/>
+              </a:defRPr>
+            </a:lvl1pPr>
+          </a:lstStyle>
+          <a:p>
+            <a:r>
+              <a:rPr lang="ru-RU" sz="3600" dirty="0"/>
+              <a:t>Пример работы модуля распознавания речи</a:t>
+            </a:r>
+          </a:p>
+        </p:txBody>
+      </p:sp>
+      <p:sp>
+        <p:nvSpPr>
+          <p:cNvPr id="9" name="TextBox 8">
+            <a:extLst>
+              <a:ext uri="{FF2B5EF4-FFF2-40B4-BE49-F238E27FC236}">
+                <a16:creationId xmlns:a16="http://schemas.microsoft.com/office/drawing/2014/main" id="{9E3D4684-574A-EA26-898C-4CBE180E21B9}"/>
+              </a:ext>
+            </a:extLst>
+          </p:cNvPr>
+          <p:cNvSpPr txBox="1"/>
+          <p:nvPr/>
+        </p:nvSpPr>
+        <p:spPr>
+          <a:xfrm>
+            <a:off x="3026664" y="2903327"/>
+            <a:ext cx="6108192" cy="923330"/>
+          </a:xfrm>
+          <a:prstGeom prst="rect">
+            <a:avLst/>
+          </a:prstGeom>
+          <a:noFill/>
+        </p:spPr>
+        <p:txBody>
+          <a:bodyPr wrap="square">
+            <a:spAutoFit/>
+          </a:bodyPr>
+          <a:lstStyle/>
+          <a:p>
+            <a:r>
+              <a:rPr lang="ru-RU" dirty="0" err="1"/>
+              <a:t>Аудиоволна</a:t>
+            </a:r>
+            <a:r>
+              <a:rPr lang="ru-RU" dirty="0"/>
+              <a:t> → текст → выделение эмоциональных маркеров</a:t>
+            </a:r>
+          </a:p>
+          <a:p>
+            <a:r>
+              <a:rPr lang="ru-RU" dirty="0"/>
+              <a:t>Картинка: Скриншот транскрипта с разметкой эмоций</a:t>
+            </a:r>
+          </a:p>
+        </p:txBody>
+      </p:sp>
+    </p:spTree>
+    <p:extLst>
+      <p:ext uri="{BB962C8B-B14F-4D97-AF65-F5344CB8AC3E}">
+        <p14:creationId xmlns:p14="http://schemas.microsoft.com/office/powerpoint/2010/main" val="1230299200"/>
+      </p:ext>
+    </p:extLst>
+  </p:cSld>
+  <p:clrMapOvr>
+    <a:masterClrMapping/>
+  </p:clrMapOvr>
+</p:sld>
+</file>
+
+<file path=ppt/slides/slide21.xml><?xml version="1.0" encoding="utf-8"?>
+<p:sld xmlns:a="http://schemas.openxmlformats.org/drawingml/2006/main" xmlns:r="http://schemas.openxmlformats.org/officeDocument/2006/relationships" xmlns:p="http://schemas.openxmlformats.org/presentationml/2006/main">
+  <p:cSld>
+    <p:spTree>
+      <p:nvGrpSpPr>
+        <p:cNvPr id="1" name=""/>
+        <p:cNvGrpSpPr/>
+        <p:nvPr/>
+      </p:nvGrpSpPr>
+      <p:grpSpPr>
+        <a:xfrm>
+          <a:off x="0" y="0"/>
+          <a:ext cx="0" cy="0"/>
+          <a:chOff x="0" y="0"/>
+          <a:chExt cx="0" cy="0"/>
+        </a:xfrm>
+      </p:grpSpPr>
+      <p:sp>
+        <p:nvSpPr>
+          <p:cNvPr id="2" name="Заголовок 1">
+            <a:extLst>
+              <a:ext uri="{FF2B5EF4-FFF2-40B4-BE49-F238E27FC236}">
+                <a16:creationId xmlns:a16="http://schemas.microsoft.com/office/drawing/2014/main" id="{8E4679AE-9695-41ED-964A-F63B6DC860B9}"/>
+              </a:ext>
+            </a:extLst>
+          </p:cNvPr>
+          <p:cNvSpPr>
+            <a:spLocks noGrp="1"/>
+          </p:cNvSpPr>
+          <p:nvPr>
+            <p:ph type="title"/>
+          </p:nvPr>
+        </p:nvSpPr>
+        <p:spPr/>
+        <p:txBody>
+          <a:bodyPr/>
+          <a:lstStyle/>
+          <a:p>
+            <a:r>
+              <a:rPr lang="ru-RU" dirty="0"/>
+              <a:t>Заключение</a:t>
+            </a:r>
+          </a:p>
+        </p:txBody>
+      </p:sp>
+      <p:sp>
+        <p:nvSpPr>
+          <p:cNvPr id="3" name="Объект 2">
+            <a:extLst>
+              <a:ext uri="{FF2B5EF4-FFF2-40B4-BE49-F238E27FC236}">
+                <a16:creationId xmlns:a16="http://schemas.microsoft.com/office/drawing/2014/main" id="{8DA6D676-1DC8-4A9C-81A7-79527C288ADC}"/>
+              </a:ext>
+            </a:extLst>
+          </p:cNvPr>
+          <p:cNvSpPr>
+            <a:spLocks noGrp="1"/>
+          </p:cNvSpPr>
+          <p:nvPr>
+            <p:ph idx="1"/>
+          </p:nvPr>
+        </p:nvSpPr>
+        <p:spPr>
+          <a:xfrm>
+            <a:off x="838200" y="1367162"/>
+            <a:ext cx="10515600" cy="5308846"/>
+          </a:xfrm>
+        </p:spPr>
+        <p:txBody>
+          <a:bodyPr>
+            <a:normAutofit/>
+          </a:bodyPr>
+          <a:lstStyle/>
+          <a:p>
+            <a:r>
+              <a:rPr lang="ru-RU" dirty="0"/>
+              <a:t>Цель и задачи выполнены</a:t>
+            </a:r>
+          </a:p>
+          <a:p>
+            <a:r>
+              <a:rPr lang="ru-RU" dirty="0"/>
+              <a:t>Реализована мультимодальная система анализа эмоций</a:t>
+            </a:r>
+          </a:p>
+          <a:p>
+            <a:r>
+              <a:rPr lang="ru-RU" dirty="0"/>
+              <a:t>Протестированы ключевые модули (детекция, ASR, отчётность)</a:t>
+            </a:r>
+          </a:p>
+          <a:p>
+            <a:r>
+              <a:rPr lang="ru-RU" dirty="0"/>
+              <a:t>Система готова к внедрению в HR-процессы</a:t>
+            </a:r>
+          </a:p>
+        </p:txBody>
+      </p:sp>
+      <p:sp>
+        <p:nvSpPr>
+          <p:cNvPr id="4" name="TextBox 3">
+            <a:extLst>
+              <a:ext uri="{FF2B5EF4-FFF2-40B4-BE49-F238E27FC236}">
+                <a16:creationId xmlns:a16="http://schemas.microsoft.com/office/drawing/2014/main" id="{7BE0758E-ED01-4E2A-9F8C-4C0573556692}"/>
+              </a:ext>
+            </a:extLst>
+          </p:cNvPr>
+          <p:cNvSpPr txBox="1"/>
+          <p:nvPr/>
+        </p:nvSpPr>
+        <p:spPr>
+          <a:xfrm>
+            <a:off x="10990555" y="6391922"/>
+            <a:ext cx="870012" cy="372862"/>
+          </a:xfrm>
+          <a:prstGeom prst="rect">
+            <a:avLst/>
+          </a:prstGeom>
+          <a:noFill/>
+        </p:spPr>
+        <p:txBody>
+          <a:bodyPr wrap="square" rtlCol="0">
+            <a:spAutoFit/>
+          </a:bodyPr>
+          <a:lstStyle/>
+          <a:p>
+            <a:r>
+              <a:rPr lang="ru-RU" dirty="0"/>
+              <a:t>2</a:t>
+            </a:r>
+            <a:r>
+              <a:rPr lang="en-US" dirty="0"/>
+              <a:t>2/22</a:t>
+            </a:r>
+            <a:endParaRPr lang="ru-RU" dirty="0"/>
+          </a:p>
+        </p:txBody>
+      </p:sp>
+    </p:spTree>
+    <p:extLst>
+      <p:ext uri="{BB962C8B-B14F-4D97-AF65-F5344CB8AC3E}">
+        <p14:creationId xmlns:p14="http://schemas.microsoft.com/office/powerpoint/2010/main" val="3186821950"/>
       </p:ext>
     </p:extLst>
   </p:cSld>
@@ -5550,61 +6077,43 @@
         </p:spPr>
         <p:txBody>
           <a:bodyPr>
-            <a:normAutofit fontScale="77500" lnSpcReduction="20000"/>
+            <a:normAutofit/>
           </a:bodyPr>
           <a:lstStyle/>
           <a:p>
-            <a:pPr marL="0" indent="0">
-              <a:buNone/>
-            </a:pPr>
-            <a:r>
-              <a:rPr lang="ru-RU" dirty="0"/>
-              <a:t>Рост значимости эмоционального интеллекта в HR: Современные подходы к управлению персоналом подчеркивают важность учёта эмоционального состояния сотрудников для повышения производительности и снижения текучести кадров. Эмоции влияют на мотивацию, вовлечённость и качество работы.</a:t>
-            </a:r>
-          </a:p>
-          <a:p>
-            <a:pPr marL="0" indent="0">
-              <a:buNone/>
-            </a:pPr>
-            <a:r>
-              <a:rPr lang="ru-RU" dirty="0"/>
-              <a:t>Ограниченность традиционных методов: Субъективные оценки и анкетирование не обеспечивают высокой точности и оперативности, что затрудняет своевременное выявление проблем, таких как профессиональное выгорание или снижение вовлечённости.</a:t>
-            </a:r>
-          </a:p>
-          <a:p>
-            <a:pPr marL="0" indent="0">
-              <a:buNone/>
-            </a:pPr>
-            <a:r>
-              <a:rPr lang="ru-RU" dirty="0"/>
-              <a:t>Развитие технологий ИИ: Прогресс в области компьютерного зрения, обработки аудиосигналов и глубокого обучения создаёт основу для разработки автоматизированных систем анализа эмоций в реальном времени.</a:t>
-            </a:r>
-          </a:p>
-          <a:p>
-            <a:pPr marL="0" indent="0">
-              <a:buNone/>
-            </a:pPr>
-            <a:r>
-              <a:rPr lang="ru-RU" dirty="0"/>
-              <a:t>Потребность в мультимодальном анализе: Комплексный подход, объединяющий видео- и аудиоданные, позволяет учитывать разнообразные аспекты эмоционального состояния, повышая точность классификации до 85% и выше.</a:t>
-            </a:r>
-          </a:p>
-          <a:p>
-            <a:pPr marL="0" indent="0">
-              <a:buNone/>
-            </a:pPr>
-            <a:r>
-              <a:rPr lang="ru-RU" dirty="0"/>
-              <a:t>Экономическая эффективность: Автоматизация анализа эмоций способствует снижению затрат на HR-процессы, таких как подбор персонала и мониторинг вовлечённости, за счёт оперативного предоставления данных для принятия управленческих решений.</a:t>
-            </a:r>
-          </a:p>
-          <a:p>
-            <a:pPr marL="0" indent="0">
-              <a:buNone/>
-            </a:pPr>
-            <a:r>
-              <a:rPr lang="ru-RU" dirty="0"/>
-              <a:t>Соответствие законодательству: Разрабатываемая система обеспечивает соответствие требованиям ФЗ-152 о защите персональных данных за счёт локальной обработки информации и шифрования.</a:t>
+            <a:r>
+              <a:rPr lang="ru-RU" dirty="0"/>
+              <a:t>Эмоциональный интеллект становится ключевым фактором эффективности в HR</a:t>
+            </a:r>
+          </a:p>
+          <a:p>
+            <a:r>
+              <a:rPr lang="ru-RU" dirty="0"/>
+              <a:t>Традиционные методы оценки (анкетирование, наблюдение) субъективны и трудоёмки</a:t>
+            </a:r>
+          </a:p>
+          <a:p>
+            <a:r>
+              <a:rPr lang="ru-RU" dirty="0"/>
+              <a:t>Технологии ИИ позволяют автоматизировать анализ эмоций в реальном времени</a:t>
+            </a:r>
+          </a:p>
+          <a:p>
+            <a:r>
+              <a:rPr lang="ru-RU" dirty="0"/>
+              <a:t>Мультимодальный подход (видео + аудио) повышает точность классификации до 85% и выше</a:t>
+            </a:r>
+          </a:p>
+          <a:p>
+            <a:r>
+              <a:rPr lang="ru-RU" dirty="0"/>
+              <a:t>Система снижает нагрузку на HR-специалистов и обеспечивает объективность оценки</a:t>
+            </a:r>
+          </a:p>
+          <a:p>
+            <a:r>
+              <a:rPr lang="ru-RU" dirty="0"/>
+              <a:t>Архитектура соответствует требованиям ФЗ-152 о защите персональных данных</a:t>
             </a:r>
           </a:p>
         </p:txBody>
@@ -5726,7 +6235,7 @@
           <a:p>
             <a:r>
               <a:rPr lang="ru-RU" dirty="0"/>
-              <a:t>Картинка: Рисунок 11 из отчёта (6 базовых эмоций по Экману)</a:t>
+              <a:t>Картинка: найти нормальную или удалить </a:t>
             </a:r>
           </a:p>
         </p:txBody>
@@ -5791,153 +6300,6 @@
       </p:sp>
       <p:sp>
         <p:nvSpPr>
-          <p:cNvPr id="3" name="Объект 2">
-            <a:extLst>
-              <a:ext uri="{FF2B5EF4-FFF2-40B4-BE49-F238E27FC236}">
-                <a16:creationId xmlns:a16="http://schemas.microsoft.com/office/drawing/2014/main" id="{00D182C1-D99A-4CAC-9542-3094FF64E7EC}"/>
-              </a:ext>
-            </a:extLst>
-          </p:cNvPr>
-          <p:cNvSpPr>
-            <a:spLocks noGrp="1"/>
-          </p:cNvSpPr>
-          <p:nvPr>
-            <p:ph idx="1"/>
-          </p:nvPr>
-        </p:nvSpPr>
-        <p:spPr/>
-        <p:txBody>
-          <a:bodyPr/>
-          <a:lstStyle/>
-          <a:p>
-            <a:r>
-              <a:rPr lang="ru-RU" dirty="0"/>
-              <a:t>Язык: </a:t>
-            </a:r>
-            <a:r>
-              <a:rPr lang="en-US" dirty="0"/>
-              <a:t>Python (AI-</a:t>
-            </a:r>
-            <a:r>
-              <a:rPr lang="ru-RU" dirty="0"/>
-              <a:t>модули), </a:t>
-            </a:r>
-            <a:r>
-              <a:rPr lang="en-US" dirty="0"/>
-              <a:t>Go (</a:t>
-            </a:r>
-            <a:r>
-              <a:rPr lang="ru-RU" dirty="0"/>
-              <a:t>бэкенд), </a:t>
-            </a:r>
-            <a:r>
-              <a:rPr lang="en-US" dirty="0"/>
-              <a:t>TypeScript (</a:t>
-            </a:r>
-            <a:r>
-              <a:rPr lang="ru-RU" dirty="0" err="1"/>
-              <a:t>фронтенд</a:t>
-            </a:r>
-            <a:r>
-              <a:rPr lang="ru-RU" dirty="0"/>
-              <a:t>)</a:t>
-            </a:r>
-          </a:p>
-          <a:p>
-            <a:r>
-              <a:rPr lang="ru-RU" dirty="0"/>
-              <a:t>Фреймворки: </a:t>
-            </a:r>
-            <a:r>
-              <a:rPr lang="en-US" dirty="0"/>
-              <a:t>React + </a:t>
-            </a:r>
-            <a:r>
-              <a:rPr lang="en-US" dirty="0" err="1"/>
-              <a:t>Vite</a:t>
-            </a:r>
-            <a:r>
-              <a:rPr lang="en-US" dirty="0"/>
-              <a:t>, Gin, </a:t>
-            </a:r>
-            <a:r>
-              <a:rPr lang="en-US" dirty="0" err="1"/>
-              <a:t>FastAPI</a:t>
-            </a:r>
-            <a:endParaRPr lang="en-US" dirty="0"/>
-          </a:p>
-          <a:p>
-            <a:r>
-              <a:rPr lang="ru-RU" dirty="0"/>
-              <a:t>Библиотеки ИИ: </a:t>
-            </a:r>
-            <a:r>
-              <a:rPr lang="en-US" dirty="0"/>
-              <a:t>OpenCV, </a:t>
-            </a:r>
-            <a:r>
-              <a:rPr lang="en-US" dirty="0" err="1"/>
-              <a:t>DeepFace</a:t>
-            </a:r>
-            <a:r>
-              <a:rPr lang="en-US" dirty="0"/>
-              <a:t>, </a:t>
-            </a:r>
-            <a:r>
-              <a:rPr lang="en-US" dirty="0" err="1"/>
-              <a:t>MediaPipe</a:t>
-            </a:r>
-            <a:r>
-              <a:rPr lang="en-US" dirty="0"/>
-              <a:t>, faster-whisper</a:t>
-            </a:r>
-          </a:p>
-          <a:p>
-            <a:r>
-              <a:rPr lang="ru-RU" dirty="0"/>
-              <a:t>СУБД: </a:t>
-            </a:r>
-            <a:r>
-              <a:rPr lang="en-US" dirty="0"/>
-              <a:t>PostgreSQL + JSONB</a:t>
-            </a:r>
-          </a:p>
-          <a:p>
-            <a:r>
-              <a:rPr lang="ru-RU" dirty="0"/>
-              <a:t>Инструменты: </a:t>
-            </a:r>
-            <a:r>
-              <a:rPr lang="en-US" dirty="0"/>
-              <a:t>Docker, Draw.io, PyCharm</a:t>
-            </a:r>
-          </a:p>
-          <a:p>
-            <a:r>
-              <a:rPr lang="ru-RU" dirty="0"/>
-              <a:t>Картинки: Логотипы технологий (официальные сайты: </a:t>
-            </a:r>
-            <a:r>
-              <a:rPr lang="en-US" dirty="0" err="1"/>
-              <a:t>react.dev</a:t>
-            </a:r>
-            <a:r>
-              <a:rPr lang="en-US" dirty="0"/>
-              <a:t>, </a:t>
-            </a:r>
-            <a:r>
-              <a:rPr lang="en-US" dirty="0" err="1"/>
-              <a:t>go.dev</a:t>
-            </a:r>
-            <a:r>
-              <a:rPr lang="en-US" dirty="0"/>
-              <a:t>, python.org, postgresql.org, docker.com)</a:t>
-            </a:r>
-          </a:p>
-        </p:txBody>
-      </p:sp>
-      <p:sp>
-        <p:nvSpPr>
           <p:cNvPr id="7" name="TextBox 6">
             <a:extLst>
               <a:ext uri="{FF2B5EF4-FFF2-40B4-BE49-F238E27FC236}">
@@ -5972,6 +6334,241 @@
           </a:p>
         </p:txBody>
       </p:sp>
+      <p:pic>
+        <p:nvPicPr>
+          <p:cNvPr id="1028" name="Picture 4" descr="Picture background">
+            <a:extLst>
+              <a:ext uri="{FF2B5EF4-FFF2-40B4-BE49-F238E27FC236}">
+                <a16:creationId xmlns:a16="http://schemas.microsoft.com/office/drawing/2014/main" id="{82F14302-1BF2-E1DF-19A8-0E74AB6A70B2}"/>
+              </a:ext>
+            </a:extLst>
+          </p:cNvPr>
+          <p:cNvPicPr>
+            <a:picLocks noChangeAspect="1" noChangeArrowheads="1"/>
+          </p:cNvPicPr>
+          <p:nvPr/>
+        </p:nvPicPr>
+        <p:blipFill>
+          <a:blip r:embed="rId2">
+            <a:extLst>
+              <a:ext uri="{28A0092B-C50C-407E-A947-70E740481C1C}">
+                <a14:useLocalDpi xmlns:a14="http://schemas.microsoft.com/office/drawing/2010/main" val="0"/>
+              </a:ext>
+            </a:extLst>
+          </a:blip>
+          <a:srcRect/>
+          <a:stretch>
+            <a:fillRect/>
+          </a:stretch>
+        </p:blipFill>
+        <p:spPr bwMode="auto">
+          <a:xfrm>
+            <a:off x="3779663" y="2120804"/>
+            <a:ext cx="3699318" cy="1381464"/>
+          </a:xfrm>
+          <a:prstGeom prst="rect">
+            <a:avLst/>
+          </a:prstGeom>
+          <a:noFill/>
+          <a:extLst>
+            <a:ext uri="{909E8E84-426E-40DD-AFC4-6F175D3DCCD1}">
+              <a14:hiddenFill xmlns:a14="http://schemas.microsoft.com/office/drawing/2010/main">
+                <a:solidFill>
+                  <a:srgbClr val="FFFFFF"/>
+                </a:solidFill>
+              </a14:hiddenFill>
+            </a:ext>
+          </a:extLst>
+        </p:spPr>
+      </p:pic>
+      <p:pic>
+        <p:nvPicPr>
+          <p:cNvPr id="1030" name="Picture 6" descr="Picture background">
+            <a:extLst>
+              <a:ext uri="{FF2B5EF4-FFF2-40B4-BE49-F238E27FC236}">
+                <a16:creationId xmlns:a16="http://schemas.microsoft.com/office/drawing/2014/main" id="{A339DE64-170F-3267-C6E5-0C47E9D9367C}"/>
+              </a:ext>
+            </a:extLst>
+          </p:cNvPr>
+          <p:cNvPicPr>
+            <a:picLocks noChangeAspect="1" noChangeArrowheads="1"/>
+          </p:cNvPicPr>
+          <p:nvPr/>
+        </p:nvPicPr>
+        <p:blipFill>
+          <a:blip r:embed="rId3">
+            <a:extLst>
+              <a:ext uri="{28A0092B-C50C-407E-A947-70E740481C1C}">
+                <a14:useLocalDpi xmlns:a14="http://schemas.microsoft.com/office/drawing/2010/main" val="0"/>
+              </a:ext>
+            </a:extLst>
+          </a:blip>
+          <a:srcRect/>
+          <a:stretch>
+            <a:fillRect/>
+          </a:stretch>
+        </p:blipFill>
+        <p:spPr bwMode="auto">
+          <a:xfrm>
+            <a:off x="8647176" y="1445684"/>
+            <a:ext cx="1871472" cy="1871472"/>
+          </a:xfrm>
+          <a:prstGeom prst="rect">
+            <a:avLst/>
+          </a:prstGeom>
+          <a:noFill/>
+          <a:extLst>
+            <a:ext uri="{909E8E84-426E-40DD-AFC4-6F175D3DCCD1}">
+              <a14:hiddenFill xmlns:a14="http://schemas.microsoft.com/office/drawing/2010/main">
+                <a:solidFill>
+                  <a:srgbClr val="FFFFFF"/>
+                </a:solidFill>
+              </a14:hiddenFill>
+            </a:ext>
+          </a:extLst>
+        </p:spPr>
+      </p:pic>
+      <p:pic>
+        <p:nvPicPr>
+          <p:cNvPr id="1032" name="Picture 8" descr="Picture background">
+            <a:extLst>
+              <a:ext uri="{FF2B5EF4-FFF2-40B4-BE49-F238E27FC236}">
+                <a16:creationId xmlns:a16="http://schemas.microsoft.com/office/drawing/2014/main" id="{28767BEC-E43E-ABAE-D052-1CD818E5D755}"/>
+              </a:ext>
+            </a:extLst>
+          </p:cNvPr>
+          <p:cNvPicPr>
+            <a:picLocks noChangeAspect="1" noChangeArrowheads="1"/>
+          </p:cNvPicPr>
+          <p:nvPr/>
+        </p:nvPicPr>
+        <p:blipFill>
+          <a:blip r:embed="rId4">
+            <a:extLst>
+              <a:ext uri="{28A0092B-C50C-407E-A947-70E740481C1C}">
+                <a14:useLocalDpi xmlns:a14="http://schemas.microsoft.com/office/drawing/2010/main" val="0"/>
+              </a:ext>
+            </a:extLst>
+          </a:blip>
+          <a:srcRect/>
+          <a:stretch>
+            <a:fillRect/>
+          </a:stretch>
+        </p:blipFill>
+        <p:spPr bwMode="auto">
+          <a:xfrm>
+            <a:off x="1913382" y="3575536"/>
+            <a:ext cx="2035466" cy="2100601"/>
+          </a:xfrm>
+          <a:prstGeom prst="rect">
+            <a:avLst/>
+          </a:prstGeom>
+          <a:noFill/>
+          <a:extLst>
+            <a:ext uri="{909E8E84-426E-40DD-AFC4-6F175D3DCCD1}">
+              <a14:hiddenFill xmlns:a14="http://schemas.microsoft.com/office/drawing/2010/main">
+                <a:solidFill>
+                  <a:srgbClr val="FFFFFF"/>
+                </a:solidFill>
+              </a14:hiddenFill>
+            </a:ext>
+          </a:extLst>
+        </p:spPr>
+      </p:pic>
+      <p:pic>
+        <p:nvPicPr>
+          <p:cNvPr id="1036" name="Picture 12" descr="Picture background">
+            <a:extLst>
+              <a:ext uri="{FF2B5EF4-FFF2-40B4-BE49-F238E27FC236}">
+                <a16:creationId xmlns:a16="http://schemas.microsoft.com/office/drawing/2014/main" id="{809F2891-D9F2-175C-53BA-BE3D9B227152}"/>
+              </a:ext>
+            </a:extLst>
+          </p:cNvPr>
+          <p:cNvPicPr>
+            <a:picLocks noChangeAspect="1" noChangeArrowheads="1"/>
+          </p:cNvPicPr>
+          <p:nvPr/>
+        </p:nvPicPr>
+        <p:blipFill>
+          <a:blip r:embed="rId5">
+            <a:extLst>
+              <a:ext uri="{28A0092B-C50C-407E-A947-70E740481C1C}">
+                <a14:useLocalDpi xmlns:a14="http://schemas.microsoft.com/office/drawing/2010/main" val="0"/>
+              </a:ext>
+            </a:extLst>
+          </a:blip>
+          <a:srcRect/>
+          <a:stretch>
+            <a:fillRect/>
+          </a:stretch>
+        </p:blipFill>
+        <p:spPr bwMode="auto">
+          <a:xfrm>
+            <a:off x="7596875" y="3575535"/>
+            <a:ext cx="2100602" cy="2100602"/>
+          </a:xfrm>
+          <a:prstGeom prst="rect">
+            <a:avLst/>
+          </a:prstGeom>
+          <a:noFill/>
+          <a:extLst>
+            <a:ext uri="{909E8E84-426E-40DD-AFC4-6F175D3DCCD1}">
+              <a14:hiddenFill xmlns:a14="http://schemas.microsoft.com/office/drawing/2010/main">
+                <a:solidFill>
+                  <a:srgbClr val="FFFFFF"/>
+                </a:solidFill>
+              </a14:hiddenFill>
+            </a:ext>
+          </a:extLst>
+        </p:spPr>
+      </p:pic>
+      <p:pic>
+        <p:nvPicPr>
+          <p:cNvPr id="1038" name="Picture 14" descr="Picture background">
+            <a:extLst>
+              <a:ext uri="{FF2B5EF4-FFF2-40B4-BE49-F238E27FC236}">
+                <a16:creationId xmlns:a16="http://schemas.microsoft.com/office/drawing/2014/main" id="{56A00DD1-6DEC-2ED3-2ECC-A70C200901C3}"/>
+              </a:ext>
+            </a:extLst>
+          </p:cNvPr>
+          <p:cNvPicPr>
+            <a:picLocks noChangeAspect="1" noChangeArrowheads="1"/>
+          </p:cNvPicPr>
+          <p:nvPr/>
+        </p:nvPicPr>
+        <p:blipFill>
+          <a:blip r:embed="rId6">
+            <a:extLst>
+              <a:ext uri="{28A0092B-C50C-407E-A947-70E740481C1C}">
+                <a14:useLocalDpi xmlns:a14="http://schemas.microsoft.com/office/drawing/2010/main" val="0"/>
+              </a:ext>
+            </a:extLst>
+          </a:blip>
+          <a:srcRect/>
+          <a:stretch>
+            <a:fillRect/>
+          </a:stretch>
+        </p:blipFill>
+        <p:spPr bwMode="auto">
+          <a:xfrm>
+            <a:off x="1000411" y="1328398"/>
+            <a:ext cx="2278570" cy="2100602"/>
+          </a:xfrm>
+          <a:prstGeom prst="rect">
+            <a:avLst/>
+          </a:prstGeom>
+          <a:noFill/>
+          <a:extLst>
+            <a:ext uri="{909E8E84-426E-40DD-AFC4-6F175D3DCCD1}">
+              <a14:hiddenFill xmlns:a14="http://schemas.microsoft.com/office/drawing/2010/main">
+                <a:solidFill>
+                  <a:srgbClr val="FFFFFF"/>
+                </a:solidFill>
+              </a14:hiddenFill>
+            </a:ext>
+          </a:extLst>
+        </p:spPr>
+      </p:pic>
     </p:spTree>
     <p:extLst>
       <p:ext uri="{BB962C8B-B14F-4D97-AF65-F5344CB8AC3E}">
@@ -6030,109 +6627,31 @@
           </a:bodyPr>
           <a:lstStyle/>
           <a:p>
-            <a:r>
-              <a:rPr lang="ru-RU" dirty="0"/>
-              <a:t>Детекция лица: </a:t>
-            </a:r>
-            <a:r>
-              <a:rPr lang="en-US" dirty="0"/>
-              <a:t>MTCNN (</a:t>
-            </a:r>
-            <a:r>
-              <a:rPr lang="ru-RU" dirty="0"/>
-              <a:t>каскадная архитектура)</a:t>
-            </a:r>
-          </a:p>
-          <a:p>
-            <a:r>
-              <a:rPr lang="ru-RU" dirty="0"/>
-              <a:t>Классификация эмоций: </a:t>
-            </a:r>
-            <a:r>
-              <a:rPr lang="en-US" dirty="0"/>
-              <a:t>VGG-Face, </a:t>
-            </a:r>
-            <a:r>
-              <a:rPr lang="en-US" dirty="0" err="1"/>
-              <a:t>EfficientNet</a:t>
-            </a:r>
-            <a:endParaRPr lang="en-US" dirty="0"/>
-          </a:p>
-          <a:p>
-            <a:r>
-              <a:rPr lang="ru-RU" dirty="0"/>
-              <a:t>Опционально: </a:t>
-            </a:r>
-            <a:r>
-              <a:rPr lang="en-US" dirty="0" err="1"/>
-              <a:t>MediaPipe</a:t>
-            </a:r>
-            <a:r>
-              <a:rPr lang="en-US" dirty="0"/>
-              <a:t> Face </a:t>
-            </a:r>
-            <a:r>
-              <a:rPr lang="en-US" dirty="0" err="1"/>
-              <a:t>Landmarker</a:t>
-            </a:r>
-            <a:r>
-              <a:rPr lang="en-US" dirty="0"/>
-              <a:t> (468 </a:t>
-            </a:r>
-            <a:r>
-              <a:rPr lang="ru-RU" dirty="0"/>
-              <a:t>точек)</a:t>
-            </a:r>
-          </a:p>
-          <a:p>
-            <a:r>
-              <a:rPr lang="ru-RU" dirty="0"/>
-              <a:t>Классификация по модели Экмана: радость, грусть, гнев, страх, удивление, отвращение</a:t>
-            </a:r>
-          </a:p>
-          <a:p>
             <a:pPr marL="0" indent="0">
               <a:buNone/>
             </a:pPr>
             <a:r>
-              <a:rPr lang="ru-RU" dirty="0"/>
-              <a:t>Картинки:</a:t>
-            </a:r>
-          </a:p>
-          <a:p>
-            <a:r>
-              <a:rPr lang="ru-RU" dirty="0"/>
-              <a:t>Рисунок 8 (архитектура </a:t>
-            </a:r>
-            <a:r>
-              <a:rPr lang="en-US" dirty="0"/>
-              <a:t>MTCNN)</a:t>
-            </a:r>
-          </a:p>
-          <a:p>
-            <a:r>
-              <a:rPr lang="ru-RU" dirty="0"/>
-              <a:t>Рисунок 9 (архитектура </a:t>
-            </a:r>
-            <a:r>
-              <a:rPr lang="en-US" dirty="0"/>
-              <a:t>VGG-16)</a:t>
-            </a:r>
-          </a:p>
-          <a:p>
-            <a:r>
-              <a:rPr lang="ru-RU" dirty="0"/>
-              <a:t>Рисунок 10 (сетка </a:t>
-            </a:r>
-            <a:r>
-              <a:rPr lang="en-US" dirty="0" err="1"/>
-              <a:t>MediaPipe</a:t>
-            </a:r>
-            <a:r>
-              <a:rPr lang="en-US" dirty="0"/>
-              <a:t>)</a:t>
-            </a:r>
-            <a:endParaRPr lang="ru-RU" dirty="0"/>
+              <a:rPr lang="ru-RU" sz="1800" dirty="0"/>
+              <a:t>Детекция лица:</a:t>
+            </a:r>
+          </a:p>
+          <a:p>
+            <a:r>
+              <a:rPr lang="ru-RU" sz="1800" dirty="0"/>
+              <a:t>Применяется каскадная архитектура MTCNN из трёх нейронных сетей</a:t>
+            </a:r>
+          </a:p>
+          <a:p>
+            <a:r>
+              <a:rPr lang="ru-RU" sz="1800" dirty="0"/>
+              <a:t>P-Net генерирует кандидаты, R-Net уточняет границы, O-Net определяет 5 ключевых точек</a:t>
+            </a:r>
+          </a:p>
+          <a:p>
+            <a:r>
+              <a:rPr lang="ru-RU" sz="1800" dirty="0"/>
+              <a:t>Выравнивание лица повышает точность последующей классификации</a:t>
+            </a:r>
           </a:p>
         </p:txBody>
       </p:sp>
@@ -6207,6 +6726,36 @@
           </a:p>
         </p:txBody>
       </p:sp>
+      <p:pic>
+        <p:nvPicPr>
+          <p:cNvPr id="5" name="Рисунок 4">
+            <a:extLst>
+              <a:ext uri="{FF2B5EF4-FFF2-40B4-BE49-F238E27FC236}">
+                <a16:creationId xmlns:a16="http://schemas.microsoft.com/office/drawing/2014/main" id="{4B00B286-9A87-B124-779F-59DF1D8877D8}"/>
+              </a:ext>
+            </a:extLst>
+          </p:cNvPr>
+          <p:cNvPicPr>
+            <a:picLocks noChangeAspect="1"/>
+          </p:cNvPicPr>
+          <p:nvPr/>
+        </p:nvPicPr>
+        <p:blipFill>
+          <a:blip r:embed="rId2"/>
+          <a:stretch>
+            <a:fillRect/>
+          </a:stretch>
+        </p:blipFill>
+        <p:spPr>
+          <a:xfrm>
+            <a:off x="293333" y="2459336"/>
+            <a:ext cx="10515600" cy="4119017"/>
+          </a:xfrm>
+          <a:prstGeom prst="rect">
+            <a:avLst/>
+          </a:prstGeom>
+        </p:spPr>
+      </p:pic>
     </p:spTree>
     <p:extLst>
       <p:ext uri="{BB962C8B-B14F-4D97-AF65-F5344CB8AC3E}">
@@ -6239,57 +6788,24 @@
       </p:grpSpPr>
       <p:sp>
         <p:nvSpPr>
-          <p:cNvPr id="2" name="Заголовок 1">
-            <a:extLst>
-              <a:ext uri="{FF2B5EF4-FFF2-40B4-BE49-F238E27FC236}">
-                <a16:creationId xmlns:a16="http://schemas.microsoft.com/office/drawing/2014/main" id="{975598A4-2CEB-4A01-98CC-B4D5443A0519}"/>
-              </a:ext>
-            </a:extLst>
-          </p:cNvPr>
-          <p:cNvSpPr>
-            <a:spLocks noGrp="1"/>
-          </p:cNvSpPr>
-          <p:nvPr>
-            <p:ph type="title"/>
+          <p:cNvPr id="3" name="Объект 2">
+            <a:extLst>
+              <a:ext uri="{FF2B5EF4-FFF2-40B4-BE49-F238E27FC236}">
+                <a16:creationId xmlns:a16="http://schemas.microsoft.com/office/drawing/2014/main" id="{C9F7A7BF-345D-4464-BA61-1943803CE2E9}"/>
+              </a:ext>
+            </a:extLst>
+          </p:cNvPr>
+          <p:cNvSpPr>
+            <a:spLocks noGrp="1"/>
+          </p:cNvSpPr>
+          <p:nvPr>
+            <p:ph idx="1"/>
           </p:nvPr>
         </p:nvSpPr>
         <p:spPr>
           <a:xfrm>
-            <a:off x="838200" y="85987"/>
-            <a:ext cx="10515600" cy="1325563"/>
-          </a:xfrm>
-        </p:spPr>
-        <p:txBody>
-          <a:bodyPr/>
-          <a:lstStyle/>
-          <a:p>
-            <a:r>
-              <a:rPr lang="ru-RU" dirty="0"/>
-              <a:t>Модуль распознавания речи</a:t>
-            </a:r>
-          </a:p>
-        </p:txBody>
-      </p:sp>
-      <p:sp>
-        <p:nvSpPr>
-          <p:cNvPr id="3" name="Объект 2">
-            <a:extLst>
-              <a:ext uri="{FF2B5EF4-FFF2-40B4-BE49-F238E27FC236}">
-                <a16:creationId xmlns:a16="http://schemas.microsoft.com/office/drawing/2014/main" id="{3F58553F-6F10-47A7-90AD-8A548C4AE47D}"/>
-              </a:ext>
-            </a:extLst>
-          </p:cNvPr>
-          <p:cNvSpPr>
-            <a:spLocks noGrp="1"/>
-          </p:cNvSpPr>
-          <p:nvPr>
-            <p:ph idx="1"/>
-          </p:nvPr>
-        </p:nvSpPr>
-        <p:spPr>
-          <a:xfrm>
-            <a:off x="838200" y="1100831"/>
-            <a:ext cx="10515600" cy="5592932"/>
+            <a:off x="838200" y="969118"/>
+            <a:ext cx="10515600" cy="5839612"/>
           </a:xfrm>
         </p:spPr>
         <p:txBody>
@@ -6298,74 +6814,58 @@
           </a:bodyPr>
           <a:lstStyle/>
           <a:p>
-            <a:r>
-              <a:rPr lang="ru-RU" dirty="0"/>
-              <a:t>Модель: </a:t>
-            </a:r>
-            <a:r>
-              <a:rPr lang="en-US" dirty="0"/>
-              <a:t>Whisper (OpenAI) / faster-whisper</a:t>
-            </a:r>
-          </a:p>
-          <a:p>
-            <a:r>
-              <a:rPr lang="en-US" dirty="0"/>
-              <a:t>Encoder-Decoder </a:t>
-            </a:r>
-            <a:r>
-              <a:rPr lang="ru-RU" dirty="0"/>
-              <a:t>трансформер</a:t>
-            </a:r>
-          </a:p>
-          <a:p>
-            <a:r>
-              <a:rPr lang="ru-RU" dirty="0"/>
-              <a:t>Обучение на 680 000 часов аудиоданных</a:t>
-            </a:r>
-          </a:p>
-          <a:p>
-            <a:r>
-              <a:rPr lang="ru-RU" dirty="0"/>
-              <a:t>Поддержка 99 языков</a:t>
-            </a:r>
-          </a:p>
-          <a:p>
-            <a:r>
-              <a:rPr lang="ru-RU" dirty="0"/>
-              <a:t>Оптимизация: квантование, </a:t>
-            </a:r>
-            <a:r>
-              <a:rPr lang="en-US" dirty="0"/>
-              <a:t>batching, GPU</a:t>
-            </a:r>
-          </a:p>
-          <a:p>
             <a:pPr marL="0" indent="0">
               <a:buNone/>
             </a:pPr>
             <a:r>
-              <a:rPr lang="ru-RU" dirty="0"/>
-              <a:t>Картинки:</a:t>
-            </a:r>
-          </a:p>
-          <a:p>
-            <a:r>
-              <a:rPr lang="ru-RU" dirty="0"/>
-              <a:t>Рисунок 12 (архитектура </a:t>
-            </a:r>
-            <a:r>
-              <a:rPr lang="en-US" dirty="0"/>
-              <a:t>Transformer)</a:t>
-            </a:r>
-          </a:p>
-          <a:p>
-            <a:r>
-              <a:rPr lang="ru-RU" dirty="0"/>
-              <a:t>Рисунок 13 (схема </a:t>
-            </a:r>
-            <a:r>
-              <a:rPr lang="en-US" dirty="0"/>
-              <a:t>Whisper)</a:t>
+              <a:rPr lang="ru-RU" sz="1800" dirty="0"/>
+              <a:t>Классификация эмоций:</a:t>
+            </a:r>
+          </a:p>
+          <a:p>
+            <a:r>
+              <a:rPr lang="ru-RU" sz="1800" dirty="0"/>
+              <a:t>Используется библиотека </a:t>
+            </a:r>
+            <a:r>
+              <a:rPr lang="ru-RU" sz="1800" dirty="0" err="1"/>
+              <a:t>DeepFace</a:t>
+            </a:r>
+            <a:r>
+              <a:rPr lang="ru-RU" sz="1800" dirty="0"/>
+              <a:t> с </a:t>
+            </a:r>
+            <a:r>
+              <a:rPr lang="ru-RU" sz="1800" dirty="0" err="1"/>
+              <a:t>предобученными</a:t>
+            </a:r>
+            <a:r>
+              <a:rPr lang="ru-RU" sz="1800" dirty="0"/>
+              <a:t> моделями</a:t>
+            </a:r>
+          </a:p>
+          <a:p>
+            <a:r>
+              <a:rPr lang="ru-RU" sz="1800" dirty="0"/>
+              <a:t>VGG-Face: 16–19 </a:t>
+            </a:r>
+            <a:r>
+              <a:rPr lang="ru-RU" sz="1800" dirty="0" err="1"/>
+              <a:t>свёрточных</a:t>
+            </a:r>
+            <a:r>
+              <a:rPr lang="ru-RU" sz="1800" dirty="0"/>
+              <a:t> слоёв для глубокого извлечения признаков</a:t>
+            </a:r>
+          </a:p>
+          <a:p>
+            <a:r>
+              <a:rPr lang="ru-RU" sz="1800" dirty="0" err="1"/>
+              <a:t>EfficientNet</a:t>
+            </a:r>
+            <a:r>
+              <a:rPr lang="ru-RU" sz="1800" dirty="0"/>
+              <a:t>: оптимизированное соотношение точности и скорости</a:t>
             </a:r>
           </a:p>
         </p:txBody>
@@ -6375,7 +6875,7 @@
           <p:cNvPr id="4" name="TextBox 3">
             <a:extLst>
               <a:ext uri="{FF2B5EF4-FFF2-40B4-BE49-F238E27FC236}">
-                <a16:creationId xmlns:a16="http://schemas.microsoft.com/office/drawing/2014/main" id="{C06811B9-633B-4D7E-9477-717C2159737D}"/>
+                <a16:creationId xmlns:a16="http://schemas.microsoft.com/office/drawing/2014/main" id="{64686E8C-5C6E-4C73-90BC-84349D9F5C1C}"/>
               </a:ext>
             </a:extLst>
           </p:cNvPr>
@@ -6400,16 +6900,92 @@
           <a:p>
             <a:r>
               <a:rPr lang="en-US" dirty="0"/>
-              <a:t>6/22</a:t>
+              <a:t>5/22</a:t>
             </a:r>
             <a:endParaRPr lang="ru-RU" dirty="0"/>
           </a:p>
         </p:txBody>
       </p:sp>
+      <p:sp>
+        <p:nvSpPr>
+          <p:cNvPr id="2" name="Заголовок 1">
+            <a:extLst>
+              <a:ext uri="{FF2B5EF4-FFF2-40B4-BE49-F238E27FC236}">
+                <a16:creationId xmlns:a16="http://schemas.microsoft.com/office/drawing/2014/main" id="{1B58CB9A-86AF-B0B7-3E9B-73D490908836}"/>
+              </a:ext>
+            </a:extLst>
+          </p:cNvPr>
+          <p:cNvSpPr>
+            <a:spLocks noGrp="1"/>
+          </p:cNvSpPr>
+          <p:nvPr>
+            <p:ph type="title"/>
+          </p:nvPr>
+        </p:nvSpPr>
+        <p:spPr>
+          <a:xfrm>
+            <a:off x="474955" y="-189056"/>
+            <a:ext cx="10515600" cy="1325563"/>
+          </a:xfrm>
+        </p:spPr>
+        <p:txBody>
+          <a:bodyPr>
+            <a:normAutofit/>
+          </a:bodyPr>
+          <a:lstStyle/>
+          <a:p>
+            <a:r>
+              <a:rPr lang="ru-RU" sz="4000" dirty="0"/>
+              <a:t>Модуль анализа лица и эмоций</a:t>
+            </a:r>
+          </a:p>
+        </p:txBody>
+      </p:sp>
+      <p:pic>
+        <p:nvPicPr>
+          <p:cNvPr id="5" name="Рисунок 4">
+            <a:extLst>
+              <a:ext uri="{FF2B5EF4-FFF2-40B4-BE49-F238E27FC236}">
+                <a16:creationId xmlns:a16="http://schemas.microsoft.com/office/drawing/2014/main" id="{71DA179A-E911-4403-8C4E-5C33367F0B7C}"/>
+              </a:ext>
+            </a:extLst>
+          </p:cNvPr>
+          <p:cNvPicPr>
+            <a:picLocks noChangeAspect="1"/>
+          </p:cNvPicPr>
+          <p:nvPr/>
+        </p:nvPicPr>
+        <p:blipFill>
+          <a:blip r:embed="rId2">
+            <a:extLst>
+              <a:ext uri="{28A0092B-C50C-407E-A947-70E740481C1C}">
+                <a14:useLocalDpi xmlns:a14="http://schemas.microsoft.com/office/drawing/2010/main" val="0"/>
+              </a:ext>
+            </a:extLst>
+          </a:blip>
+          <a:srcRect/>
+          <a:stretch>
+            <a:fillRect/>
+          </a:stretch>
+        </p:blipFill>
+        <p:spPr bwMode="auto">
+          <a:xfrm>
+            <a:off x="373838" y="2801492"/>
+            <a:ext cx="10616717" cy="2814964"/>
+          </a:xfrm>
+          <a:prstGeom prst="rect">
+            <a:avLst/>
+          </a:prstGeom>
+          <a:noFill/>
+          <a:ln>
+            <a:noFill/>
+          </a:ln>
+        </p:spPr>
+      </p:pic>
     </p:spTree>
     <p:extLst>
       <p:ext uri="{BB962C8B-B14F-4D97-AF65-F5344CB8AC3E}">
-        <p14:creationId xmlns:p14="http://schemas.microsoft.com/office/powerpoint/2010/main" val="1912452483"/>
+        <p14:creationId xmlns:p14="http://schemas.microsoft.com/office/powerpoint/2010/main" val="9083835"/>
       </p:ext>
     </p:extLst>
   </p:cSld>
@@ -6438,38 +7014,10 @@
       </p:grpSpPr>
       <p:sp>
         <p:nvSpPr>
-          <p:cNvPr id="2" name="Заголовок 1">
-            <a:extLst>
-              <a:ext uri="{FF2B5EF4-FFF2-40B4-BE49-F238E27FC236}">
-                <a16:creationId xmlns:a16="http://schemas.microsoft.com/office/drawing/2014/main" id="{66339CDE-94C1-4EB4-9224-7DA92A27428A}"/>
-              </a:ext>
-            </a:extLst>
-          </p:cNvPr>
-          <p:cNvSpPr>
-            <a:spLocks noGrp="1"/>
-          </p:cNvSpPr>
-          <p:nvPr>
-            <p:ph type="title"/>
-          </p:nvPr>
-        </p:nvSpPr>
-        <p:spPr/>
-        <p:txBody>
-          <a:bodyPr/>
-          <a:lstStyle/>
-          <a:p>
-            <a:r>
-              <a:rPr lang="ru-RU" dirty="0"/>
-              <a:t>Функции системы</a:t>
-            </a:r>
-          </a:p>
-        </p:txBody>
-      </p:sp>
-      <p:sp>
-        <p:nvSpPr>
           <p:cNvPr id="3" name="Объект 2">
             <a:extLst>
               <a:ext uri="{FF2B5EF4-FFF2-40B4-BE49-F238E27FC236}">
-                <a16:creationId xmlns:a16="http://schemas.microsoft.com/office/drawing/2014/main" id="{CEC388F7-4FCC-4EBE-9E97-E7A0CDF59B9F}"/>
+                <a16:creationId xmlns:a16="http://schemas.microsoft.com/office/drawing/2014/main" id="{C9F7A7BF-345D-4464-BA61-1943803CE2E9}"/>
               </a:ext>
             </a:extLst>
           </p:cNvPr>
@@ -6480,10 +7028,15 @@
             <p:ph idx="1"/>
           </p:nvPr>
         </p:nvSpPr>
-        <p:spPr/>
+        <p:spPr>
+          <a:xfrm>
+            <a:off x="419164" y="969118"/>
+            <a:ext cx="4856924" cy="5839612"/>
+          </a:xfrm>
+        </p:spPr>
         <p:txBody>
           <a:bodyPr>
-            <a:normAutofit fontScale="92500" lnSpcReduction="20000"/>
+            <a:normAutofit/>
           </a:bodyPr>
           <a:lstStyle/>
           <a:p>
@@ -6491,36 +7044,8 @@
               <a:buNone/>
             </a:pPr>
             <a:r>
-              <a:rPr lang="ru-RU" dirty="0"/>
-              <a:t>Основные:</a:t>
-            </a:r>
-          </a:p>
-          <a:p>
-            <a:r>
-              <a:rPr lang="ru-RU" dirty="0"/>
-              <a:t>Захват видео/аудио в браузере</a:t>
-            </a:r>
-          </a:p>
-          <a:p>
-            <a:r>
-              <a:rPr lang="ru-RU" dirty="0"/>
-              <a:t>Детекция лиц и классификация эмоций в реальном времени</a:t>
-            </a:r>
-          </a:p>
-          <a:p>
-            <a:r>
-              <a:rPr lang="ru-RU" dirty="0" err="1"/>
-              <a:t>Транскрибация</a:t>
-            </a:r>
-            <a:r>
-              <a:rPr lang="ru-RU" dirty="0"/>
-              <a:t> речи и анализ тональности</a:t>
-            </a:r>
-          </a:p>
-          <a:p>
-            <a:r>
-              <a:rPr lang="ru-RU" dirty="0"/>
-              <a:t>Формирование аналитического отчёта</a:t>
+              <a:rPr lang="ru-RU" sz="1800" dirty="0"/>
+              <a:t>Назначение: Построение плотной сетки из 468 трёхмерных ключевых точек на лице</a:t>
             </a:r>
           </a:p>
           <a:p>
@@ -6528,57 +7053,92 @@
               <a:buNone/>
             </a:pPr>
             <a:r>
-              <a:rPr lang="ru-RU" dirty="0"/>
-              <a:t>Дополнительные:</a:t>
-            </a:r>
-          </a:p>
-          <a:p>
-            <a:r>
-              <a:rPr lang="ru-RU" dirty="0"/>
-              <a:t>Аутентификация (JWT + </a:t>
-            </a:r>
-            <a:r>
-              <a:rPr lang="ru-RU" dirty="0" err="1"/>
-              <a:t>bcrypt</a:t>
-            </a:r>
-            <a:r>
-              <a:rPr lang="ru-RU" dirty="0"/>
+              <a:rPr lang="ru-RU" sz="1800" dirty="0"/>
+              <a:t>Возможности:</a:t>
+            </a:r>
+          </a:p>
+          <a:p>
+            <a:r>
+              <a:rPr lang="ru-RU" sz="1800" dirty="0"/>
+              <a:t>Оценка </a:t>
+            </a:r>
+            <a:r>
+              <a:rPr lang="ru-RU" sz="1800" dirty="0" err="1"/>
+              <a:t>blendshape</a:t>
+            </a:r>
+            <a:r>
+              <a:rPr lang="ru-RU" sz="1800" dirty="0"/>
+              <a:t>-коэффициентов для анализа активности лицевых мышц</a:t>
+            </a:r>
+          </a:p>
+          <a:p>
+            <a:r>
+              <a:rPr lang="ru-RU" sz="1800" dirty="0"/>
+              <a:t>Вычисление углов поворота головы (</a:t>
+            </a:r>
+            <a:r>
+              <a:rPr lang="ru-RU" sz="1800" dirty="0" err="1"/>
+              <a:t>yaw</a:t>
+            </a:r>
+            <a:r>
+              <a:rPr lang="ru-RU" sz="1800" dirty="0"/>
+              <a:t>, </a:t>
+            </a:r>
+            <a:r>
+              <a:rPr lang="ru-RU" sz="1800" dirty="0" err="1"/>
+              <a:t>pitch</a:t>
+            </a:r>
+            <a:r>
+              <a:rPr lang="ru-RU" sz="1800" dirty="0"/>
+              <a:t>, </a:t>
+            </a:r>
+            <a:r>
+              <a:rPr lang="ru-RU" sz="1800" dirty="0" err="1"/>
+              <a:t>roll</a:t>
+            </a:r>
+            <a:r>
+              <a:rPr lang="ru-RU" sz="1800" dirty="0"/>
               <a:t>)</a:t>
             </a:r>
           </a:p>
           <a:p>
             <a:r>
-              <a:rPr lang="ru-RU" dirty="0" err="1"/>
-              <a:t>WebSocket</a:t>
-            </a:r>
-            <a:r>
-              <a:rPr lang="ru-RU" dirty="0"/>
-              <a:t> для </a:t>
-            </a:r>
-            <a:r>
-              <a:rPr lang="ru-RU" dirty="0" err="1"/>
-              <a:t>real-time</a:t>
-            </a:r>
-            <a:r>
-              <a:rPr lang="ru-RU" dirty="0"/>
-              <a:t> обмена</a:t>
-            </a:r>
-          </a:p>
-          <a:p>
-            <a:r>
-              <a:rPr lang="ru-RU" dirty="0"/>
-              <a:t>Хранение данных в </a:t>
-            </a:r>
-            <a:r>
-              <a:rPr lang="ru-RU" dirty="0" err="1"/>
-              <a:t>PostgreSQL</a:t>
-            </a:r>
-            <a:endParaRPr lang="ru-RU" dirty="0"/>
-          </a:p>
-          <a:p>
-            <a:r>
-              <a:rPr lang="ru-RU" dirty="0"/>
-              <a:t>Экспорт отчётов (JSON/PDF)</a:t>
+              <a:rPr lang="ru-RU" sz="1800" dirty="0"/>
+              <a:t>Отслеживание </a:t>
+            </a:r>
+            <a:r>
+              <a:rPr lang="ru-RU" sz="1800" dirty="0" err="1"/>
+              <a:t>микровыражений</a:t>
+            </a:r>
+            <a:r>
+              <a:rPr lang="ru-RU" sz="1800" dirty="0"/>
+              <a:t> длительностью 1/25–1/5 секунды</a:t>
+            </a:r>
+          </a:p>
+          <a:p>
+            <a:pPr marL="0" indent="0">
+              <a:buNone/>
+            </a:pPr>
+            <a:r>
+              <a:rPr lang="ru-RU" sz="1800" dirty="0"/>
+              <a:t>Архитектура: </a:t>
+            </a:r>
+            <a:r>
+              <a:rPr lang="ru-RU" sz="1800" dirty="0" err="1"/>
+              <a:t>Encoder-decoder</a:t>
+            </a:r>
+            <a:r>
+              <a:rPr lang="ru-RU" sz="1800" dirty="0"/>
+              <a:t> на базе трансформеров обеспечивает детальную 3D-модель лица</a:t>
+            </a:r>
+          </a:p>
+          <a:p>
+            <a:pPr marL="0" indent="0">
+              <a:buNone/>
+            </a:pPr>
+            <a:r>
+              <a:rPr lang="ru-RU" sz="1800" dirty="0"/>
+              <a:t>Преимущества: Устойчивость к перекрытиям, различным ракурсам, работа в реальном времени</a:t>
             </a:r>
           </a:p>
         </p:txBody>
@@ -6588,7 +7148,7 @@
           <p:cNvPr id="4" name="TextBox 3">
             <a:extLst>
               <a:ext uri="{FF2B5EF4-FFF2-40B4-BE49-F238E27FC236}">
-                <a16:creationId xmlns:a16="http://schemas.microsoft.com/office/drawing/2014/main" id="{55E45F7B-423C-432A-AB30-10FB23DEFF5A}"/>
+                <a16:creationId xmlns:a16="http://schemas.microsoft.com/office/drawing/2014/main" id="{64686E8C-5C6E-4C73-90BC-84349D9F5C1C}"/>
               </a:ext>
             </a:extLst>
           </p:cNvPr>
@@ -6613,16 +7173,97 @@
           <a:p>
             <a:r>
               <a:rPr lang="en-US" dirty="0"/>
-              <a:t>7/22</a:t>
+              <a:t>5/22</a:t>
             </a:r>
             <a:endParaRPr lang="ru-RU" dirty="0"/>
           </a:p>
         </p:txBody>
       </p:sp>
+      <p:sp>
+        <p:nvSpPr>
+          <p:cNvPr id="2" name="Заголовок 1">
+            <a:extLst>
+              <a:ext uri="{FF2B5EF4-FFF2-40B4-BE49-F238E27FC236}">
+                <a16:creationId xmlns:a16="http://schemas.microsoft.com/office/drawing/2014/main" id="{1B58CB9A-86AF-B0B7-3E9B-73D490908836}"/>
+              </a:ext>
+            </a:extLst>
+          </p:cNvPr>
+          <p:cNvSpPr>
+            <a:spLocks noGrp="1"/>
+          </p:cNvSpPr>
+          <p:nvPr>
+            <p:ph type="title"/>
+          </p:nvPr>
+        </p:nvSpPr>
+        <p:spPr>
+          <a:xfrm>
+            <a:off x="474955" y="-189056"/>
+            <a:ext cx="10515600" cy="1325563"/>
+          </a:xfrm>
+        </p:spPr>
+        <p:txBody>
+          <a:bodyPr>
+            <a:normAutofit/>
+          </a:bodyPr>
+          <a:lstStyle/>
+          <a:p>
+            <a:r>
+              <a:rPr lang="ru-RU" sz="4000" dirty="0"/>
+              <a:t>Модель </a:t>
+            </a:r>
+            <a:r>
+              <a:rPr lang="en-US" sz="4000" dirty="0" err="1"/>
+              <a:t>MediaPipe</a:t>
+            </a:r>
+            <a:endParaRPr lang="ru-RU" sz="4000" dirty="0"/>
+          </a:p>
+        </p:txBody>
+      </p:sp>
+      <p:pic>
+        <p:nvPicPr>
+          <p:cNvPr id="7" name="Рисунок 6" descr="Задача &quot;Опорный знак на лице&quot;">
+            <a:extLst>
+              <a:ext uri="{FF2B5EF4-FFF2-40B4-BE49-F238E27FC236}">
+                <a16:creationId xmlns:a16="http://schemas.microsoft.com/office/drawing/2014/main" id="{AC6A1973-8F20-E21C-8984-347E22110987}"/>
+              </a:ext>
+            </a:extLst>
+          </p:cNvPr>
+          <p:cNvPicPr>
+            <a:picLocks noChangeAspect="1"/>
+          </p:cNvPicPr>
+          <p:nvPr/>
+        </p:nvPicPr>
+        <p:blipFill>
+          <a:blip r:embed="rId2">
+            <a:extLst>
+              <a:ext uri="{28A0092B-C50C-407E-A947-70E740481C1C}">
+                <a14:useLocalDpi xmlns:a14="http://schemas.microsoft.com/office/drawing/2010/main" val="0"/>
+              </a:ext>
+            </a:extLst>
+          </a:blip>
+          <a:srcRect/>
+          <a:stretch>
+            <a:fillRect/>
+          </a:stretch>
+        </p:blipFill>
+        <p:spPr bwMode="auto">
+          <a:xfrm>
+            <a:off x="5832411" y="1429115"/>
+            <a:ext cx="5940425" cy="3256280"/>
+          </a:xfrm>
+          <a:prstGeom prst="rect">
+            <a:avLst/>
+          </a:prstGeom>
+          <a:noFill/>
+          <a:ln>
+            <a:noFill/>
+          </a:ln>
+        </p:spPr>
+      </p:pic>
     </p:spTree>
     <p:extLst>
       <p:ext uri="{BB962C8B-B14F-4D97-AF65-F5344CB8AC3E}">
-        <p14:creationId xmlns:p14="http://schemas.microsoft.com/office/powerpoint/2010/main" val="2854395773"/>
+        <p14:creationId xmlns:p14="http://schemas.microsoft.com/office/powerpoint/2010/main" val="441378147"/>
       </p:ext>
     </p:extLst>
   </p:cSld>
@@ -6654,7 +7295,7 @@
           <p:cNvPr id="2" name="Заголовок 1">
             <a:extLst>
               <a:ext uri="{FF2B5EF4-FFF2-40B4-BE49-F238E27FC236}">
-                <a16:creationId xmlns:a16="http://schemas.microsoft.com/office/drawing/2014/main" id="{1EBAAD23-B9AF-47EB-97C4-C8F7C47862D2}"/>
+                <a16:creationId xmlns:a16="http://schemas.microsoft.com/office/drawing/2014/main" id="{66339CDE-94C1-4EB4-9224-7DA92A27428A}"/>
               </a:ext>
             </a:extLst>
           </p:cNvPr>
@@ -6672,7 +7313,7 @@
           <a:p>
             <a:r>
               <a:rPr lang="ru-RU" dirty="0"/>
-              <a:t>Средство разработки интерфейса</a:t>
+              <a:t>Функции системы</a:t>
             </a:r>
           </a:p>
         </p:txBody>
@@ -6682,7 +7323,7 @@
           <p:cNvPr id="3" name="Объект 2">
             <a:extLst>
               <a:ext uri="{FF2B5EF4-FFF2-40B4-BE49-F238E27FC236}">
-                <a16:creationId xmlns:a16="http://schemas.microsoft.com/office/drawing/2014/main" id="{EA95FAD0-980E-4610-98D5-906FF259B027}"/>
+                <a16:creationId xmlns:a16="http://schemas.microsoft.com/office/drawing/2014/main" id="{CEC388F7-4FCC-4EBE-9E97-E7A0CDF59B9F}"/>
               </a:ext>
             </a:extLst>
           </p:cNvPr>
@@ -6696,132 +7337,92 @@
         <p:spPr/>
         <p:txBody>
           <a:bodyPr>
-            <a:normAutofit fontScale="92500" lnSpcReduction="20000"/>
+            <a:normAutofit fontScale="77500" lnSpcReduction="20000"/>
           </a:bodyPr>
           <a:lstStyle/>
           <a:p>
-            <a:r>
-              <a:rPr lang="en-US" dirty="0" err="1"/>
-              <a:t>DeepFace</a:t>
-            </a:r>
-            <a:r>
-              <a:rPr lang="en-US" dirty="0"/>
-              <a:t>:</a:t>
-            </a:r>
-          </a:p>
-          <a:p>
-            <a:r>
-              <a:rPr lang="ru-RU" dirty="0"/>
-              <a:t>Мета-библиотека с </a:t>
-            </a:r>
+            <a:pPr marL="0" indent="0">
+              <a:buNone/>
+            </a:pPr>
+            <a:r>
+              <a:rPr lang="ru-RU" dirty="0"/>
+              <a:t>Анализ видеопотока:</a:t>
+            </a:r>
+          </a:p>
+          <a:p>
+            <a:r>
+              <a:rPr lang="ru-RU" dirty="0"/>
+              <a:t>Захват видео через браузерные API без плагинов</a:t>
+            </a:r>
+          </a:p>
+          <a:p>
+            <a:r>
+              <a:rPr lang="ru-RU" dirty="0"/>
+              <a:t>Детекция лиц и классификация эмоций в реальном времени</a:t>
+            </a:r>
+          </a:p>
+          <a:p>
+            <a:r>
+              <a:rPr lang="ru-RU" dirty="0"/>
+              <a:t>Отслеживание изменения эмоционального состояния в течение сессии</a:t>
+            </a:r>
+          </a:p>
+          <a:p>
+            <a:pPr marL="0" indent="0">
+              <a:buNone/>
+            </a:pPr>
+            <a:r>
+              <a:rPr lang="ru-RU" dirty="0"/>
+              <a:t>Анализ аудиопотока:</a:t>
+            </a:r>
+          </a:p>
+          <a:p>
+            <a:r>
+              <a:rPr lang="ru-RU" dirty="0"/>
+              <a:t>Запись аудио с частотой 16 кГц</a:t>
+            </a:r>
+          </a:p>
+          <a:p>
             <a:r>
               <a:rPr lang="ru-RU" dirty="0" err="1"/>
-              <a:t>предобученными</a:t>
-            </a:r>
-            <a:r>
-              <a:rPr lang="ru-RU" dirty="0"/>
-              <a:t> моделями</a:t>
-            </a:r>
-          </a:p>
-          <a:p>
-            <a:r>
-              <a:rPr lang="ru-RU" dirty="0"/>
-              <a:t>Поддержка </a:t>
-            </a:r>
-            <a:r>
-              <a:rPr lang="en-US" dirty="0"/>
-              <a:t>VGG-Face, Facenet512, </a:t>
-            </a:r>
-            <a:r>
-              <a:rPr lang="en-US" dirty="0" err="1"/>
-              <a:t>EfficientNet</a:t>
-            </a:r>
-            <a:endParaRPr lang="en-US" dirty="0"/>
-          </a:p>
-          <a:p>
-            <a:r>
-              <a:rPr lang="en-US" dirty="0" err="1"/>
-              <a:t>MediaPipe</a:t>
-            </a:r>
-            <a:r>
-              <a:rPr lang="en-US" dirty="0"/>
-              <a:t> Face </a:t>
-            </a:r>
-            <a:r>
-              <a:rPr lang="en-US" dirty="0" err="1"/>
-              <a:t>Landmarker</a:t>
-            </a:r>
-            <a:r>
-              <a:rPr lang="en-US" dirty="0"/>
-              <a:t>:</a:t>
-            </a:r>
-          </a:p>
-          <a:p>
-            <a:r>
-              <a:rPr lang="en-US" dirty="0"/>
-              <a:t>468 3D </a:t>
-            </a:r>
-            <a:r>
-              <a:rPr lang="ru-RU" dirty="0"/>
-              <a:t>ключевых точек</a:t>
-            </a:r>
-          </a:p>
-          <a:p>
-            <a:r>
-              <a:rPr lang="en-US" dirty="0" err="1"/>
-              <a:t>Blendshape</a:t>
-            </a:r>
-            <a:r>
-              <a:rPr lang="en-US" dirty="0"/>
-              <a:t>-</a:t>
-            </a:r>
-            <a:r>
-              <a:rPr lang="ru-RU" dirty="0"/>
-              <a:t>коэффициенты, углы поворота головы</a:t>
-            </a:r>
-          </a:p>
-          <a:p>
-            <a:r>
-              <a:rPr lang="en-US" dirty="0"/>
-              <a:t>faster-whisper:</a:t>
-            </a:r>
-          </a:p>
-          <a:p>
-            <a:r>
-              <a:rPr lang="ru-RU" dirty="0"/>
-              <a:t>Оптимизированный </a:t>
-            </a:r>
-            <a:r>
-              <a:rPr lang="ru-RU" dirty="0" err="1"/>
-              <a:t>инференс</a:t>
-            </a:r>
-            <a:r>
-              <a:rPr lang="ru-RU" dirty="0"/>
-              <a:t> </a:t>
-            </a:r>
-            <a:r>
-              <a:rPr lang="en-US" dirty="0"/>
-              <a:t>Whisper</a:t>
-            </a:r>
-          </a:p>
-          <a:p>
-            <a:r>
-              <a:rPr lang="ru-RU" dirty="0"/>
-              <a:t>Поддержка </a:t>
-            </a:r>
-            <a:r>
-              <a:rPr lang="en-US" dirty="0"/>
-              <a:t>streaming, </a:t>
-            </a:r>
-            <a:r>
-              <a:rPr lang="ru-RU" dirty="0"/>
-              <a:t>квантование</a:t>
-            </a:r>
-          </a:p>
-          <a:p>
-            <a:r>
-              <a:rPr lang="ru-RU" dirty="0"/>
-              <a:t>Картинки: Те же, что на слайдах 5-6 (по необходимости)</a:t>
+              <a:t>Транскрибация</a:t>
+            </a:r>
+            <a:r>
+              <a:rPr lang="ru-RU" dirty="0"/>
+              <a:t> речи и анализ голосовых характеристик</a:t>
+            </a:r>
+          </a:p>
+          <a:p>
+            <a:r>
+              <a:rPr lang="ru-RU" dirty="0"/>
+              <a:t>Определение эмоциональной окраски и выделение ключевых фраз</a:t>
+            </a:r>
+          </a:p>
+          <a:p>
+            <a:pPr marL="0" indent="0">
+              <a:buNone/>
+            </a:pPr>
+            <a:r>
+              <a:rPr lang="ru-RU" dirty="0"/>
+              <a:t>Формирование отчётности:</a:t>
+            </a:r>
+          </a:p>
+          <a:p>
+            <a:r>
+              <a:rPr lang="ru-RU" dirty="0"/>
+              <a:t>Аналитический отчёт с распределением эмоций по времени</a:t>
+            </a:r>
+          </a:p>
+          <a:p>
+            <a:r>
+              <a:rPr lang="ru-RU" dirty="0"/>
+              <a:t>Карточки участников с индивидуальной статистикой</a:t>
+            </a:r>
+          </a:p>
+          <a:p>
+            <a:r>
+              <a:rPr lang="ru-RU" dirty="0"/>
+              <a:t>Экспорт результатов в форматах JSON и PDF</a:t>
             </a:r>
           </a:p>
         </p:txBody>
@@ -6831,7 +7432,7 @@
           <p:cNvPr id="4" name="TextBox 3">
             <a:extLst>
               <a:ext uri="{FF2B5EF4-FFF2-40B4-BE49-F238E27FC236}">
-                <a16:creationId xmlns:a16="http://schemas.microsoft.com/office/drawing/2014/main" id="{57D9155A-5477-428A-B594-4DE38D5D9805}"/>
+                <a16:creationId xmlns:a16="http://schemas.microsoft.com/office/drawing/2014/main" id="{55E45F7B-423C-432A-AB30-10FB23DEFF5A}"/>
               </a:ext>
             </a:extLst>
           </p:cNvPr>
@@ -6856,7 +7457,7 @@
           <a:p>
             <a:r>
               <a:rPr lang="en-US" dirty="0"/>
-              <a:t>9/22</a:t>
+              <a:t>7/22</a:t>
             </a:r>
             <a:endParaRPr lang="ru-RU" dirty="0"/>
           </a:p>
@@ -6865,7 +7466,7 @@
     </p:spTree>
     <p:extLst>
       <p:ext uri="{BB962C8B-B14F-4D97-AF65-F5344CB8AC3E}">
-        <p14:creationId xmlns:p14="http://schemas.microsoft.com/office/powerpoint/2010/main" val="276913619"/>
+        <p14:creationId xmlns:p14="http://schemas.microsoft.com/office/powerpoint/2010/main" val="2854395773"/>
       </p:ext>
     </p:extLst>
   </p:cSld>

--- a/вкр/практика/преза.pptx
+++ b/вкр/практика/преза.pptx
@@ -1,31 +1,33 @@
 
 <file path=ppt/presentation.xml><?xml version="1.0" encoding="utf-8"?>
-<p:presentation xmlns:a="http://schemas.openxmlformats.org/drawingml/2006/main" xmlns:r="http://schemas.openxmlformats.org/officeDocument/2006/relationships" xmlns:p="http://schemas.openxmlformats.org/presentationml/2006/main" saveSubsetFonts="1">
+<p:presentation xmlns:a="http://schemas.openxmlformats.org/drawingml/2006/main" xmlns:r="http://schemas.openxmlformats.org/officeDocument/2006/relationships" xmlns:p="http://schemas.openxmlformats.org/presentationml/2006/main" showSpecialPlsOnTitleSld="0" saveSubsetFonts="1">
   <p:sldMasterIdLst>
     <p:sldMasterId id="2147483648" r:id="rId1"/>
   </p:sldMasterIdLst>
+  <p:notesMasterIdLst>
+    <p:notesMasterId r:id="rId19"/>
+  </p:notesMasterIdLst>
+  <p:handoutMasterIdLst>
+    <p:handoutMasterId r:id="rId20"/>
+  </p:handoutMasterIdLst>
   <p:sldIdLst>
     <p:sldId id="256" r:id="rId2"/>
     <p:sldId id="257" r:id="rId3"/>
     <p:sldId id="258" r:id="rId4"/>
-    <p:sldId id="282" r:id="rId5"/>
-    <p:sldId id="259" r:id="rId6"/>
+    <p:sldId id="259" r:id="rId5"/>
+    <p:sldId id="287" r:id="rId6"/>
     <p:sldId id="260" r:id="rId7"/>
     <p:sldId id="283" r:id="rId8"/>
-    <p:sldId id="284" r:id="rId9"/>
-    <p:sldId id="262" r:id="rId10"/>
-    <p:sldId id="261" r:id="rId11"/>
-    <p:sldId id="285" r:id="rId12"/>
-    <p:sldId id="264" r:id="rId13"/>
-    <p:sldId id="266" r:id="rId14"/>
-    <p:sldId id="267" r:id="rId15"/>
-    <p:sldId id="268" r:id="rId16"/>
-    <p:sldId id="269" r:id="rId17"/>
-    <p:sldId id="272" r:id="rId18"/>
-    <p:sldId id="274" r:id="rId19"/>
-    <p:sldId id="276" r:id="rId20"/>
-    <p:sldId id="277" r:id="rId21"/>
-    <p:sldId id="280" r:id="rId22"/>
+    <p:sldId id="288" r:id="rId9"/>
+    <p:sldId id="293" r:id="rId10"/>
+    <p:sldId id="284" r:id="rId11"/>
+    <p:sldId id="264" r:id="rId12"/>
+    <p:sldId id="266" r:id="rId13"/>
+    <p:sldId id="290" r:id="rId14"/>
+    <p:sldId id="291" r:id="rId15"/>
+    <p:sldId id="294" r:id="rId16"/>
+    <p:sldId id="289" r:id="rId17"/>
+    <p:sldId id="280" r:id="rId18"/>
   </p:sldIdLst>
   <p:sldSz cx="12192000" cy="6858000"/>
   <p:notesSz cx="6858000" cy="9144000"/>
@@ -132,6 +134,546 @@
 </p:presentation>
 </file>
 
+<file path=ppt/handoutMasters/handoutMaster1.xml><?xml version="1.0" encoding="utf-8"?>
+<p:handoutMaster xmlns:a="http://schemas.openxmlformats.org/drawingml/2006/main" xmlns:r="http://schemas.openxmlformats.org/officeDocument/2006/relationships" xmlns:p="http://schemas.openxmlformats.org/presentationml/2006/main">
+  <p:cSld>
+    <p:bg>
+      <p:bgRef idx="1001">
+        <a:schemeClr val="bg1"/>
+      </p:bgRef>
+    </p:bg>
+    <p:spTree>
+      <p:nvGrpSpPr>
+        <p:cNvPr id="1" name=""/>
+        <p:cNvGrpSpPr/>
+        <p:nvPr/>
+      </p:nvGrpSpPr>
+      <p:grpSpPr>
+        <a:xfrm>
+          <a:off x="0" y="0"/>
+          <a:ext cx="0" cy="0"/>
+          <a:chOff x="0" y="0"/>
+          <a:chExt cx="0" cy="0"/>
+        </a:xfrm>
+      </p:grpSpPr>
+      <p:sp>
+        <p:nvSpPr>
+          <p:cNvPr id="2" name="Верхний колонтитул 1">
+            <a:extLst>
+              <a:ext uri="{FF2B5EF4-FFF2-40B4-BE49-F238E27FC236}">
+                <a16:creationId xmlns:a16="http://schemas.microsoft.com/office/drawing/2014/main" id="{6EF1F35D-CE6B-ADDB-FDB9-CD9C55B407A5}"/>
+              </a:ext>
+            </a:extLst>
+          </p:cNvPr>
+          <p:cNvSpPr>
+            <a:spLocks noGrp="1"/>
+          </p:cNvSpPr>
+          <p:nvPr>
+            <p:ph type="hdr" sz="quarter"/>
+          </p:nvPr>
+        </p:nvSpPr>
+        <p:spPr>
+          <a:xfrm>
+            <a:off x="0" y="0"/>
+            <a:ext cx="2971800" cy="458788"/>
+          </a:xfrm>
+          <a:prstGeom prst="rect">
+            <a:avLst/>
+          </a:prstGeom>
+        </p:spPr>
+        <p:txBody>
+          <a:bodyPr vert="horz" lIns="91440" tIns="45720" rIns="91440" bIns="45720" rtlCol="0"/>
+          <a:lstStyle>
+            <a:lvl1pPr algn="l">
+              <a:defRPr sz="1200"/>
+            </a:lvl1pPr>
+          </a:lstStyle>
+          <a:p>
+            <a:endParaRPr lang="ru-RU"/>
+          </a:p>
+        </p:txBody>
+      </p:sp>
+      <p:sp>
+        <p:nvSpPr>
+          <p:cNvPr id="3" name="Дата 2">
+            <a:extLst>
+              <a:ext uri="{FF2B5EF4-FFF2-40B4-BE49-F238E27FC236}">
+                <a16:creationId xmlns:a16="http://schemas.microsoft.com/office/drawing/2014/main" id="{88B66112-651F-AEBD-6B85-767E04E75FEE}"/>
+              </a:ext>
+            </a:extLst>
+          </p:cNvPr>
+          <p:cNvSpPr>
+            <a:spLocks noGrp="1"/>
+          </p:cNvSpPr>
+          <p:nvPr>
+            <p:ph type="dt" sz="quarter" idx="1"/>
+          </p:nvPr>
+        </p:nvSpPr>
+        <p:spPr>
+          <a:xfrm>
+            <a:off x="3884613" y="0"/>
+            <a:ext cx="2971800" cy="458788"/>
+          </a:xfrm>
+          <a:prstGeom prst="rect">
+            <a:avLst/>
+          </a:prstGeom>
+        </p:spPr>
+        <p:txBody>
+          <a:bodyPr vert="horz" lIns="91440" tIns="45720" rIns="91440" bIns="45720" rtlCol="0"/>
+          <a:lstStyle>
+            <a:lvl1pPr algn="r">
+              <a:defRPr sz="1200"/>
+            </a:lvl1pPr>
+          </a:lstStyle>
+          <a:p>
+            <a:fld id="{07640263-EA9F-497A-96B0-1CCF8BC43BB1}" type="datetimeFigureOut">
+              <a:rPr lang="ru-RU" smtClean="0"/>
+              <a:t>21.05.2026</a:t>
+            </a:fld>
+            <a:endParaRPr lang="ru-RU"/>
+          </a:p>
+        </p:txBody>
+      </p:sp>
+      <p:sp>
+        <p:nvSpPr>
+          <p:cNvPr id="4" name="Нижний колонтитул 3">
+            <a:extLst>
+              <a:ext uri="{FF2B5EF4-FFF2-40B4-BE49-F238E27FC236}">
+                <a16:creationId xmlns:a16="http://schemas.microsoft.com/office/drawing/2014/main" id="{797B29B0-EAB6-0B0C-CB03-B9C31452932B}"/>
+              </a:ext>
+            </a:extLst>
+          </p:cNvPr>
+          <p:cNvSpPr>
+            <a:spLocks noGrp="1"/>
+          </p:cNvSpPr>
+          <p:nvPr>
+            <p:ph type="ftr" sz="quarter" idx="2"/>
+          </p:nvPr>
+        </p:nvSpPr>
+        <p:spPr>
+          <a:xfrm>
+            <a:off x="0" y="8685213"/>
+            <a:ext cx="2971800" cy="458787"/>
+          </a:xfrm>
+          <a:prstGeom prst="rect">
+            <a:avLst/>
+          </a:prstGeom>
+        </p:spPr>
+        <p:txBody>
+          <a:bodyPr vert="horz" lIns="91440" tIns="45720" rIns="91440" bIns="45720" rtlCol="0" anchor="b"/>
+          <a:lstStyle>
+            <a:lvl1pPr algn="l">
+              <a:defRPr sz="1200"/>
+            </a:lvl1pPr>
+          </a:lstStyle>
+          <a:p>
+            <a:endParaRPr lang="ru-RU"/>
+          </a:p>
+        </p:txBody>
+      </p:sp>
+      <p:sp>
+        <p:nvSpPr>
+          <p:cNvPr id="5" name="Номер слайда 4">
+            <a:extLst>
+              <a:ext uri="{FF2B5EF4-FFF2-40B4-BE49-F238E27FC236}">
+                <a16:creationId xmlns:a16="http://schemas.microsoft.com/office/drawing/2014/main" id="{22958B48-5A14-EDA4-AC95-A317551274BC}"/>
+              </a:ext>
+            </a:extLst>
+          </p:cNvPr>
+          <p:cNvSpPr>
+            <a:spLocks noGrp="1"/>
+          </p:cNvSpPr>
+          <p:nvPr>
+            <p:ph type="sldNum" sz="quarter" idx="3"/>
+          </p:nvPr>
+        </p:nvSpPr>
+        <p:spPr>
+          <a:xfrm>
+            <a:off x="3884613" y="8685213"/>
+            <a:ext cx="2971800" cy="458787"/>
+          </a:xfrm>
+          <a:prstGeom prst="rect">
+            <a:avLst/>
+          </a:prstGeom>
+        </p:spPr>
+        <p:txBody>
+          <a:bodyPr vert="horz" lIns="91440" tIns="45720" rIns="91440" bIns="45720" rtlCol="0" anchor="b"/>
+          <a:lstStyle>
+            <a:lvl1pPr algn="r">
+              <a:defRPr sz="1200"/>
+            </a:lvl1pPr>
+          </a:lstStyle>
+          <a:p>
+            <a:fld id="{E5FB2736-D875-4BC4-8EB6-BA4CC5004DCE}" type="slidenum">
+              <a:rPr lang="ru-RU" smtClean="0"/>
+              <a:t>‹#›</a:t>
+            </a:fld>
+            <a:endParaRPr lang="ru-RU"/>
+          </a:p>
+        </p:txBody>
+      </p:sp>
+    </p:spTree>
+    <p:extLst>
+      <p:ext uri="{BB962C8B-B14F-4D97-AF65-F5344CB8AC3E}">
+        <p14:creationId xmlns:p14="http://schemas.microsoft.com/office/powerpoint/2010/main" val="2107027134"/>
+      </p:ext>
+    </p:extLst>
+  </p:cSld>
+  <p:clrMap bg1="lt1" tx1="dk1" bg2="lt2" tx2="dk2" accent1="accent1" accent2="accent2" accent3="accent3" accent4="accent4" accent5="accent5" accent6="accent6" hlink="hlink" folHlink="folHlink"/>
+  <p:hf hdr="0" ftr="0" dt="0"/>
+</p:handoutMaster>
+</file>
+
+<file path=ppt/notesMasters/notesMaster1.xml><?xml version="1.0" encoding="utf-8"?>
+<p:notesMaster xmlns:a="http://schemas.openxmlformats.org/drawingml/2006/main" xmlns:r="http://schemas.openxmlformats.org/officeDocument/2006/relationships" xmlns:p="http://schemas.openxmlformats.org/presentationml/2006/main">
+  <p:cSld>
+    <p:bg>
+      <p:bgRef idx="1001">
+        <a:schemeClr val="bg1"/>
+      </p:bgRef>
+    </p:bg>
+    <p:spTree>
+      <p:nvGrpSpPr>
+        <p:cNvPr id="1" name=""/>
+        <p:cNvGrpSpPr/>
+        <p:nvPr/>
+      </p:nvGrpSpPr>
+      <p:grpSpPr>
+        <a:xfrm>
+          <a:off x="0" y="0"/>
+          <a:ext cx="0" cy="0"/>
+          <a:chOff x="0" y="0"/>
+          <a:chExt cx="0" cy="0"/>
+        </a:xfrm>
+      </p:grpSpPr>
+      <p:sp>
+        <p:nvSpPr>
+          <p:cNvPr id="2" name="Верхний колонтитул 1"/>
+          <p:cNvSpPr>
+            <a:spLocks noGrp="1"/>
+          </p:cNvSpPr>
+          <p:nvPr>
+            <p:ph type="hdr" sz="quarter"/>
+          </p:nvPr>
+        </p:nvSpPr>
+        <p:spPr>
+          <a:xfrm>
+            <a:off x="0" y="0"/>
+            <a:ext cx="2971800" cy="458788"/>
+          </a:xfrm>
+          <a:prstGeom prst="rect">
+            <a:avLst/>
+          </a:prstGeom>
+        </p:spPr>
+        <p:txBody>
+          <a:bodyPr vert="horz" lIns="91440" tIns="45720" rIns="91440" bIns="45720" rtlCol="0"/>
+          <a:lstStyle>
+            <a:lvl1pPr algn="l">
+              <a:defRPr sz="1200"/>
+            </a:lvl1pPr>
+          </a:lstStyle>
+          <a:p>
+            <a:endParaRPr lang="ru-RU"/>
+          </a:p>
+        </p:txBody>
+      </p:sp>
+      <p:sp>
+        <p:nvSpPr>
+          <p:cNvPr id="3" name="Дата 2"/>
+          <p:cNvSpPr>
+            <a:spLocks noGrp="1"/>
+          </p:cNvSpPr>
+          <p:nvPr>
+            <p:ph type="dt" idx="1"/>
+          </p:nvPr>
+        </p:nvSpPr>
+        <p:spPr>
+          <a:xfrm>
+            <a:off x="3884613" y="0"/>
+            <a:ext cx="2971800" cy="458788"/>
+          </a:xfrm>
+          <a:prstGeom prst="rect">
+            <a:avLst/>
+          </a:prstGeom>
+        </p:spPr>
+        <p:txBody>
+          <a:bodyPr vert="horz" lIns="91440" tIns="45720" rIns="91440" bIns="45720" rtlCol="0"/>
+          <a:lstStyle>
+            <a:lvl1pPr algn="r">
+              <a:defRPr sz="1200"/>
+            </a:lvl1pPr>
+          </a:lstStyle>
+          <a:p>
+            <a:fld id="{66574A11-D777-4A21-A270-6F8A09B2D137}" type="datetimeFigureOut">
+              <a:rPr lang="ru-RU" smtClean="0"/>
+              <a:t>21.05.2026</a:t>
+            </a:fld>
+            <a:endParaRPr lang="ru-RU"/>
+          </a:p>
+        </p:txBody>
+      </p:sp>
+      <p:sp>
+        <p:nvSpPr>
+          <p:cNvPr id="4" name="Образ слайда 3"/>
+          <p:cNvSpPr>
+            <a:spLocks noGrp="1" noRot="1" noChangeAspect="1"/>
+          </p:cNvSpPr>
+          <p:nvPr>
+            <p:ph type="sldImg" idx="2"/>
+          </p:nvPr>
+        </p:nvSpPr>
+        <p:spPr>
+          <a:xfrm>
+            <a:off x="685800" y="1143000"/>
+            <a:ext cx="5486400" cy="3086100"/>
+          </a:xfrm>
+          <a:prstGeom prst="rect">
+            <a:avLst/>
+          </a:prstGeom>
+          <a:noFill/>
+          <a:ln w="12700">
+            <a:solidFill>
+              <a:prstClr val="black"/>
+            </a:solidFill>
+          </a:ln>
+        </p:spPr>
+        <p:txBody>
+          <a:bodyPr vert="horz" lIns="91440" tIns="45720" rIns="91440" bIns="45720" rtlCol="0" anchor="ctr"/>
+          <a:lstStyle/>
+          <a:p>
+            <a:endParaRPr lang="ru-RU"/>
+          </a:p>
+        </p:txBody>
+      </p:sp>
+      <p:sp>
+        <p:nvSpPr>
+          <p:cNvPr id="5" name="Заметки 4"/>
+          <p:cNvSpPr>
+            <a:spLocks noGrp="1"/>
+          </p:cNvSpPr>
+          <p:nvPr>
+            <p:ph type="body" sz="quarter" idx="3"/>
+          </p:nvPr>
+        </p:nvSpPr>
+        <p:spPr>
+          <a:xfrm>
+            <a:off x="685800" y="4400550"/>
+            <a:ext cx="5486400" cy="3600450"/>
+          </a:xfrm>
+          <a:prstGeom prst="rect">
+            <a:avLst/>
+          </a:prstGeom>
+        </p:spPr>
+        <p:txBody>
+          <a:bodyPr vert="horz" lIns="91440" tIns="45720" rIns="91440" bIns="45720" rtlCol="0"/>
+          <a:lstStyle/>
+          <a:p>
+            <a:pPr lvl="0"/>
+            <a:r>
+              <a:rPr lang="ru-RU"/>
+              <a:t>Образец текста</a:t>
+            </a:r>
+          </a:p>
+          <a:p>
+            <a:pPr lvl="1"/>
+            <a:r>
+              <a:rPr lang="ru-RU"/>
+              <a:t>Второй уровень</a:t>
+            </a:r>
+          </a:p>
+          <a:p>
+            <a:pPr lvl="2"/>
+            <a:r>
+              <a:rPr lang="ru-RU"/>
+              <a:t>Третий уровень</a:t>
+            </a:r>
+          </a:p>
+          <a:p>
+            <a:pPr lvl="3"/>
+            <a:r>
+              <a:rPr lang="ru-RU"/>
+              <a:t>Четвертый уровень</a:t>
+            </a:r>
+          </a:p>
+          <a:p>
+            <a:pPr lvl="4"/>
+            <a:r>
+              <a:rPr lang="ru-RU"/>
+              <a:t>Пятый уровень</a:t>
+            </a:r>
+          </a:p>
+        </p:txBody>
+      </p:sp>
+      <p:sp>
+        <p:nvSpPr>
+          <p:cNvPr id="6" name="Нижний колонтитул 5"/>
+          <p:cNvSpPr>
+            <a:spLocks noGrp="1"/>
+          </p:cNvSpPr>
+          <p:nvPr>
+            <p:ph type="ftr" sz="quarter" idx="4"/>
+          </p:nvPr>
+        </p:nvSpPr>
+        <p:spPr>
+          <a:xfrm>
+            <a:off x="0" y="8685213"/>
+            <a:ext cx="2971800" cy="458787"/>
+          </a:xfrm>
+          <a:prstGeom prst="rect">
+            <a:avLst/>
+          </a:prstGeom>
+        </p:spPr>
+        <p:txBody>
+          <a:bodyPr vert="horz" lIns="91440" tIns="45720" rIns="91440" bIns="45720" rtlCol="0" anchor="b"/>
+          <a:lstStyle>
+            <a:lvl1pPr algn="l">
+              <a:defRPr sz="1200"/>
+            </a:lvl1pPr>
+          </a:lstStyle>
+          <a:p>
+            <a:endParaRPr lang="ru-RU"/>
+          </a:p>
+        </p:txBody>
+      </p:sp>
+      <p:sp>
+        <p:nvSpPr>
+          <p:cNvPr id="7" name="Номер слайда 6"/>
+          <p:cNvSpPr>
+            <a:spLocks noGrp="1"/>
+          </p:cNvSpPr>
+          <p:nvPr>
+            <p:ph type="sldNum" sz="quarter" idx="5"/>
+          </p:nvPr>
+        </p:nvSpPr>
+        <p:spPr>
+          <a:xfrm>
+            <a:off x="3884613" y="8685213"/>
+            <a:ext cx="2971800" cy="458787"/>
+          </a:xfrm>
+          <a:prstGeom prst="rect">
+            <a:avLst/>
+          </a:prstGeom>
+        </p:spPr>
+        <p:txBody>
+          <a:bodyPr vert="horz" lIns="91440" tIns="45720" rIns="91440" bIns="45720" rtlCol="0" anchor="b"/>
+          <a:lstStyle>
+            <a:lvl1pPr algn="r">
+              <a:defRPr sz="1200"/>
+            </a:lvl1pPr>
+          </a:lstStyle>
+          <a:p>
+            <a:fld id="{0DDB6E01-9A66-45F7-9913-E47108469099}" type="slidenum">
+              <a:rPr lang="ru-RU" smtClean="0"/>
+              <a:t>‹#›</a:t>
+            </a:fld>
+            <a:endParaRPr lang="ru-RU"/>
+          </a:p>
+        </p:txBody>
+      </p:sp>
+    </p:spTree>
+    <p:extLst>
+      <p:ext uri="{BB962C8B-B14F-4D97-AF65-F5344CB8AC3E}">
+        <p14:creationId xmlns:p14="http://schemas.microsoft.com/office/powerpoint/2010/main" val="375170411"/>
+      </p:ext>
+    </p:extLst>
+  </p:cSld>
+  <p:clrMap bg1="lt1" tx1="dk1" bg2="lt2" tx2="dk2" accent1="accent1" accent2="accent2" accent3="accent3" accent4="accent4" accent5="accent5" accent6="accent6" hlink="hlink" folHlink="folHlink"/>
+  <p:hf hdr="0" ftr="0" dt="0"/>
+  <p:notesStyle>
+    <a:lvl1pPr marL="0" algn="l" defTabSz="914400" rtl="0" eaLnBrk="1" latinLnBrk="0" hangingPunct="1">
+      <a:defRPr sz="1200" kern="1200">
+        <a:solidFill>
+          <a:schemeClr val="tx1"/>
+        </a:solidFill>
+        <a:latin typeface="+mn-lt"/>
+        <a:ea typeface="+mn-ea"/>
+        <a:cs typeface="+mn-cs"/>
+      </a:defRPr>
+    </a:lvl1pPr>
+    <a:lvl2pPr marL="457200" algn="l" defTabSz="914400" rtl="0" eaLnBrk="1" latinLnBrk="0" hangingPunct="1">
+      <a:defRPr sz="1200" kern="1200">
+        <a:solidFill>
+          <a:schemeClr val="tx1"/>
+        </a:solidFill>
+        <a:latin typeface="+mn-lt"/>
+        <a:ea typeface="+mn-ea"/>
+        <a:cs typeface="+mn-cs"/>
+      </a:defRPr>
+    </a:lvl2pPr>
+    <a:lvl3pPr marL="914400" algn="l" defTabSz="914400" rtl="0" eaLnBrk="1" latinLnBrk="0" hangingPunct="1">
+      <a:defRPr sz="1200" kern="1200">
+        <a:solidFill>
+          <a:schemeClr val="tx1"/>
+        </a:solidFill>
+        <a:latin typeface="+mn-lt"/>
+        <a:ea typeface="+mn-ea"/>
+        <a:cs typeface="+mn-cs"/>
+      </a:defRPr>
+    </a:lvl3pPr>
+    <a:lvl4pPr marL="1371600" algn="l" defTabSz="914400" rtl="0" eaLnBrk="1" latinLnBrk="0" hangingPunct="1">
+      <a:defRPr sz="1200" kern="1200">
+        <a:solidFill>
+          <a:schemeClr val="tx1"/>
+        </a:solidFill>
+        <a:latin typeface="+mn-lt"/>
+        <a:ea typeface="+mn-ea"/>
+        <a:cs typeface="+mn-cs"/>
+      </a:defRPr>
+    </a:lvl4pPr>
+    <a:lvl5pPr marL="1828800" algn="l" defTabSz="914400" rtl="0" eaLnBrk="1" latinLnBrk="0" hangingPunct="1">
+      <a:defRPr sz="1200" kern="1200">
+        <a:solidFill>
+          <a:schemeClr val="tx1"/>
+        </a:solidFill>
+        <a:latin typeface="+mn-lt"/>
+        <a:ea typeface="+mn-ea"/>
+        <a:cs typeface="+mn-cs"/>
+      </a:defRPr>
+    </a:lvl5pPr>
+    <a:lvl6pPr marL="2286000" algn="l" defTabSz="914400" rtl="0" eaLnBrk="1" latinLnBrk="0" hangingPunct="1">
+      <a:defRPr sz="1200" kern="1200">
+        <a:solidFill>
+          <a:schemeClr val="tx1"/>
+        </a:solidFill>
+        <a:latin typeface="+mn-lt"/>
+        <a:ea typeface="+mn-ea"/>
+        <a:cs typeface="+mn-cs"/>
+      </a:defRPr>
+    </a:lvl6pPr>
+    <a:lvl7pPr marL="2743200" algn="l" defTabSz="914400" rtl="0" eaLnBrk="1" latinLnBrk="0" hangingPunct="1">
+      <a:defRPr sz="1200" kern="1200">
+        <a:solidFill>
+          <a:schemeClr val="tx1"/>
+        </a:solidFill>
+        <a:latin typeface="+mn-lt"/>
+        <a:ea typeface="+mn-ea"/>
+        <a:cs typeface="+mn-cs"/>
+      </a:defRPr>
+    </a:lvl7pPr>
+    <a:lvl8pPr marL="3200400" algn="l" defTabSz="914400" rtl="0" eaLnBrk="1" latinLnBrk="0" hangingPunct="1">
+      <a:defRPr sz="1200" kern="1200">
+        <a:solidFill>
+          <a:schemeClr val="tx1"/>
+        </a:solidFill>
+        <a:latin typeface="+mn-lt"/>
+        <a:ea typeface="+mn-ea"/>
+        <a:cs typeface="+mn-cs"/>
+      </a:defRPr>
+    </a:lvl8pPr>
+    <a:lvl9pPr marL="3657600" algn="l" defTabSz="914400" rtl="0" eaLnBrk="1" latinLnBrk="0" hangingPunct="1">
+      <a:defRPr sz="1200" kern="1200">
+        <a:solidFill>
+          <a:schemeClr val="tx1"/>
+        </a:solidFill>
+        <a:latin typeface="+mn-lt"/>
+        <a:ea typeface="+mn-ea"/>
+        <a:cs typeface="+mn-cs"/>
+      </a:defRPr>
+    </a:lvl9pPr>
+  </p:notesStyle>
+</p:notesMaster>
+</file>
+
 <file path=ppt/slideLayouts/slideLayout1.xml><?xml version="1.0" encoding="utf-8"?>
 <p:sldLayout xmlns:a="http://schemas.openxmlformats.org/drawingml/2006/main" xmlns:r="http://schemas.openxmlformats.org/officeDocument/2006/relationships" xmlns:p="http://schemas.openxmlformats.org/presentationml/2006/main" type="title" preserve="1">
   <p:cSld name="Титульный слайд">
@@ -170,6 +712,9 @@
             <a:off x="1524000" y="1122363"/>
             <a:ext cx="9144000" cy="2387600"/>
           </a:xfrm>
+          <a:prstGeom prst="rect">
+            <a:avLst/>
+          </a:prstGeom>
         </p:spPr>
         <p:txBody>
           <a:bodyPr anchor="b"/>
@@ -207,6 +752,9 @@
             <a:off x="1524000" y="3602038"/>
             <a:ext cx="9144000" cy="1655762"/>
           </a:xfrm>
+          <a:prstGeom prst="rect">
+            <a:avLst/>
+          </a:prstGeom>
         </p:spPr>
         <p:txBody>
           <a:bodyPr/>
@@ -272,14 +820,22 @@
             <p:ph type="dt" sz="half" idx="10"/>
           </p:nvPr>
         </p:nvSpPr>
-        <p:spPr/>
+        <p:spPr>
+          <a:xfrm>
+            <a:off x="838200" y="6356350"/>
+            <a:ext cx="2743200" cy="365125"/>
+          </a:xfrm>
+          <a:prstGeom prst="rect">
+            <a:avLst/>
+          </a:prstGeom>
+        </p:spPr>
         <p:txBody>
           <a:bodyPr/>
           <a:lstStyle/>
           <a:p>
-            <a:fld id="{AB8EB9DB-94B2-4D97-AB29-D096994DA229}" type="datetimeFigureOut">
+            <a:fld id="{E916E196-4804-4F42-898A-0FC902D9B484}" type="datetime1">
               <a:rPr lang="ru-RU" smtClean="0"/>
-              <a:t>19.05.2026</a:t>
+              <a:t>21.05.2026</a:t>
             </a:fld>
             <a:endParaRPr lang="ru-RU"/>
           </a:p>
@@ -301,7 +857,15 @@
             <p:ph type="ftr" sz="quarter" idx="11"/>
           </p:nvPr>
         </p:nvSpPr>
-        <p:spPr/>
+        <p:spPr>
+          <a:xfrm>
+            <a:off x="4038600" y="6356350"/>
+            <a:ext cx="4114800" cy="365125"/>
+          </a:xfrm>
+          <a:prstGeom prst="rect">
+            <a:avLst/>
+          </a:prstGeom>
+        </p:spPr>
         <p:txBody>
           <a:bodyPr/>
           <a:lstStyle/>
@@ -385,7 +949,15 @@
             <p:ph type="title"/>
           </p:nvPr>
         </p:nvSpPr>
-        <p:spPr/>
+        <p:spPr>
+          <a:xfrm>
+            <a:off x="838200" y="365125"/>
+            <a:ext cx="10515600" cy="1325563"/>
+          </a:xfrm>
+          <a:prstGeom prst="rect">
+            <a:avLst/>
+          </a:prstGeom>
+        </p:spPr>
         <p:txBody>
           <a:bodyPr/>
           <a:lstStyle/>
@@ -413,7 +985,15 @@
             <p:ph type="body" orient="vert" idx="1"/>
           </p:nvPr>
         </p:nvSpPr>
-        <p:spPr/>
+        <p:spPr>
+          <a:xfrm>
+            <a:off x="838200" y="1825625"/>
+            <a:ext cx="10515600" cy="4351338"/>
+          </a:xfrm>
+          <a:prstGeom prst="rect">
+            <a:avLst/>
+          </a:prstGeom>
+        </p:spPr>
         <p:txBody>
           <a:bodyPr vert="eaVert"/>
           <a:lstStyle/>
@@ -470,14 +1050,22 @@
             <p:ph type="dt" sz="half" idx="10"/>
           </p:nvPr>
         </p:nvSpPr>
-        <p:spPr/>
+        <p:spPr>
+          <a:xfrm>
+            <a:off x="838200" y="6356350"/>
+            <a:ext cx="2743200" cy="365125"/>
+          </a:xfrm>
+          <a:prstGeom prst="rect">
+            <a:avLst/>
+          </a:prstGeom>
+        </p:spPr>
         <p:txBody>
           <a:bodyPr/>
           <a:lstStyle/>
           <a:p>
-            <a:fld id="{AB8EB9DB-94B2-4D97-AB29-D096994DA229}" type="datetimeFigureOut">
+            <a:fld id="{665369D4-ACF4-452B-B065-8EB5038972C3}" type="datetime1">
               <a:rPr lang="ru-RU" smtClean="0"/>
-              <a:t>19.05.2026</a:t>
+              <a:t>21.05.2026</a:t>
             </a:fld>
             <a:endParaRPr lang="ru-RU"/>
           </a:p>
@@ -499,7 +1087,15 @@
             <p:ph type="ftr" sz="quarter" idx="11"/>
           </p:nvPr>
         </p:nvSpPr>
-        <p:spPr/>
+        <p:spPr>
+          <a:xfrm>
+            <a:off x="4038600" y="6356350"/>
+            <a:ext cx="4114800" cy="365125"/>
+          </a:xfrm>
+          <a:prstGeom prst="rect">
+            <a:avLst/>
+          </a:prstGeom>
+        </p:spPr>
         <p:txBody>
           <a:bodyPr/>
           <a:lstStyle/>
@@ -588,6 +1184,9 @@
             <a:off x="8724900" y="365125"/>
             <a:ext cx="2628900" cy="5811838"/>
           </a:xfrm>
+          <a:prstGeom prst="rect">
+            <a:avLst/>
+          </a:prstGeom>
         </p:spPr>
         <p:txBody>
           <a:bodyPr vert="eaVert"/>
@@ -621,6 +1220,9 @@
             <a:off x="838200" y="365125"/>
             <a:ext cx="7734300" cy="5811838"/>
           </a:xfrm>
+          <a:prstGeom prst="rect">
+            <a:avLst/>
+          </a:prstGeom>
         </p:spPr>
         <p:txBody>
           <a:bodyPr vert="eaVert"/>
@@ -678,14 +1280,22 @@
             <p:ph type="dt" sz="half" idx="10"/>
           </p:nvPr>
         </p:nvSpPr>
-        <p:spPr/>
+        <p:spPr>
+          <a:xfrm>
+            <a:off x="838200" y="6356350"/>
+            <a:ext cx="2743200" cy="365125"/>
+          </a:xfrm>
+          <a:prstGeom prst="rect">
+            <a:avLst/>
+          </a:prstGeom>
+        </p:spPr>
         <p:txBody>
           <a:bodyPr/>
           <a:lstStyle/>
           <a:p>
-            <a:fld id="{AB8EB9DB-94B2-4D97-AB29-D096994DA229}" type="datetimeFigureOut">
+            <a:fld id="{51B40BE4-505E-422D-8FE2-7C14F619B5A8}" type="datetime1">
               <a:rPr lang="ru-RU" smtClean="0"/>
-              <a:t>19.05.2026</a:t>
+              <a:t>21.05.2026</a:t>
             </a:fld>
             <a:endParaRPr lang="ru-RU"/>
           </a:p>
@@ -707,7 +1317,15 @@
             <p:ph type="ftr" sz="quarter" idx="11"/>
           </p:nvPr>
         </p:nvSpPr>
-        <p:spPr/>
+        <p:spPr>
+          <a:xfrm>
+            <a:off x="4038600" y="6356350"/>
+            <a:ext cx="4114800" cy="365125"/>
+          </a:xfrm>
+          <a:prstGeom prst="rect">
+            <a:avLst/>
+          </a:prstGeom>
+        </p:spPr>
         <p:txBody>
           <a:bodyPr/>
           <a:lstStyle/>
@@ -791,7 +1409,15 @@
             <p:ph type="title"/>
           </p:nvPr>
         </p:nvSpPr>
-        <p:spPr/>
+        <p:spPr>
+          <a:xfrm>
+            <a:off x="838200" y="365125"/>
+            <a:ext cx="10515600" cy="1325563"/>
+          </a:xfrm>
+          <a:prstGeom prst="rect">
+            <a:avLst/>
+          </a:prstGeom>
+        </p:spPr>
         <p:txBody>
           <a:bodyPr/>
           <a:lstStyle/>
@@ -819,7 +1445,15 @@
             <p:ph idx="1"/>
           </p:nvPr>
         </p:nvSpPr>
-        <p:spPr/>
+        <p:spPr>
+          <a:xfrm>
+            <a:off x="838200" y="1825625"/>
+            <a:ext cx="10515600" cy="4351338"/>
+          </a:xfrm>
+          <a:prstGeom prst="rect">
+            <a:avLst/>
+          </a:prstGeom>
+        </p:spPr>
         <p:txBody>
           <a:bodyPr/>
           <a:lstStyle/>
@@ -876,14 +1510,22 @@
             <p:ph type="dt" sz="half" idx="10"/>
           </p:nvPr>
         </p:nvSpPr>
-        <p:spPr/>
+        <p:spPr>
+          <a:xfrm>
+            <a:off x="838200" y="6356350"/>
+            <a:ext cx="2743200" cy="365125"/>
+          </a:xfrm>
+          <a:prstGeom prst="rect">
+            <a:avLst/>
+          </a:prstGeom>
+        </p:spPr>
         <p:txBody>
           <a:bodyPr/>
           <a:lstStyle/>
           <a:p>
-            <a:fld id="{AB8EB9DB-94B2-4D97-AB29-D096994DA229}" type="datetimeFigureOut">
+            <a:fld id="{303C7D8F-2A26-4A8C-918C-F8DEED5C5692}" type="datetime1">
               <a:rPr lang="ru-RU" smtClean="0"/>
-              <a:t>19.05.2026</a:t>
+              <a:t>21.05.2026</a:t>
             </a:fld>
             <a:endParaRPr lang="ru-RU"/>
           </a:p>
@@ -905,7 +1547,15 @@
             <p:ph type="ftr" sz="quarter" idx="11"/>
           </p:nvPr>
         </p:nvSpPr>
-        <p:spPr/>
+        <p:spPr>
+          <a:xfrm>
+            <a:off x="4038600" y="6356350"/>
+            <a:ext cx="4114800" cy="365125"/>
+          </a:xfrm>
+          <a:prstGeom prst="rect">
+            <a:avLst/>
+          </a:prstGeom>
+        </p:spPr>
         <p:txBody>
           <a:bodyPr/>
           <a:lstStyle/>
@@ -930,16 +1580,30 @@
             <p:ph type="sldNum" sz="quarter" idx="12"/>
           </p:nvPr>
         </p:nvSpPr>
-        <p:spPr/>
+        <p:spPr>
+          <a:xfrm>
+            <a:off x="11059064" y="6521570"/>
+            <a:ext cx="1124309" cy="336430"/>
+          </a:xfrm>
+        </p:spPr>
         <p:txBody>
           <a:bodyPr/>
-          <a:lstStyle/>
+          <a:lstStyle>
+            <a:lvl1pPr>
+              <a:defRPr>
+                <a:solidFill>
+                  <a:schemeClr val="tx1"/>
+                </a:solidFill>
+              </a:defRPr>
+            </a:lvl1pPr>
+          </a:lstStyle>
           <a:p>
             <a:fld id="{5F9DB6E4-81A8-48FA-A111-413E3E85E768}" type="slidenum">
               <a:rPr lang="ru-RU" smtClean="0"/>
+              <a:pPr/>
               <a:t>‹#›</a:t>
             </a:fld>
-            <a:endParaRPr lang="ru-RU"/>
+            <a:endParaRPr lang="ru-RU" dirty="0"/>
           </a:p>
         </p:txBody>
       </p:sp>
@@ -994,6 +1658,9 @@
             <a:off x="831850" y="1709738"/>
             <a:ext cx="10515600" cy="2852737"/>
           </a:xfrm>
+          <a:prstGeom prst="rect">
+            <a:avLst/>
+          </a:prstGeom>
         </p:spPr>
         <p:txBody>
           <a:bodyPr anchor="b"/>
@@ -1031,6 +1698,9 @@
             <a:off x="831850" y="4589463"/>
             <a:ext cx="10515600" cy="1500187"/>
           </a:xfrm>
+          <a:prstGeom prst="rect">
+            <a:avLst/>
+          </a:prstGeom>
         </p:spPr>
         <p:txBody>
           <a:bodyPr/>
@@ -1151,14 +1821,22 @@
             <p:ph type="dt" sz="half" idx="10"/>
           </p:nvPr>
         </p:nvSpPr>
-        <p:spPr/>
+        <p:spPr>
+          <a:xfrm>
+            <a:off x="838200" y="6356350"/>
+            <a:ext cx="2743200" cy="365125"/>
+          </a:xfrm>
+          <a:prstGeom prst="rect">
+            <a:avLst/>
+          </a:prstGeom>
+        </p:spPr>
         <p:txBody>
           <a:bodyPr/>
           <a:lstStyle/>
           <a:p>
-            <a:fld id="{AB8EB9DB-94B2-4D97-AB29-D096994DA229}" type="datetimeFigureOut">
+            <a:fld id="{47F38BAD-298E-4C7C-BB8A-26FD3D33ECCE}" type="datetime1">
               <a:rPr lang="ru-RU" smtClean="0"/>
-              <a:t>19.05.2026</a:t>
+              <a:t>21.05.2026</a:t>
             </a:fld>
             <a:endParaRPr lang="ru-RU"/>
           </a:p>
@@ -1180,7 +1858,15 @@
             <p:ph type="ftr" sz="quarter" idx="11"/>
           </p:nvPr>
         </p:nvSpPr>
-        <p:spPr/>
+        <p:spPr>
+          <a:xfrm>
+            <a:off x="4038600" y="6356350"/>
+            <a:ext cx="4114800" cy="365125"/>
+          </a:xfrm>
+          <a:prstGeom prst="rect">
+            <a:avLst/>
+          </a:prstGeom>
+        </p:spPr>
         <p:txBody>
           <a:bodyPr/>
           <a:lstStyle/>
@@ -1264,7 +1950,15 @@
             <p:ph type="title"/>
           </p:nvPr>
         </p:nvSpPr>
-        <p:spPr/>
+        <p:spPr>
+          <a:xfrm>
+            <a:off x="838200" y="365125"/>
+            <a:ext cx="10515600" cy="1325563"/>
+          </a:xfrm>
+          <a:prstGeom prst="rect">
+            <a:avLst/>
+          </a:prstGeom>
+        </p:spPr>
         <p:txBody>
           <a:bodyPr/>
           <a:lstStyle/>
@@ -1297,6 +1991,9 @@
             <a:off x="838200" y="1825625"/>
             <a:ext cx="5181600" cy="4351338"/>
           </a:xfrm>
+          <a:prstGeom prst="rect">
+            <a:avLst/>
+          </a:prstGeom>
         </p:spPr>
         <p:txBody>
           <a:bodyPr/>
@@ -1359,6 +2056,9 @@
             <a:off x="6172200" y="1825625"/>
             <a:ext cx="5181600" cy="4351338"/>
           </a:xfrm>
+          <a:prstGeom prst="rect">
+            <a:avLst/>
+          </a:prstGeom>
         </p:spPr>
         <p:txBody>
           <a:bodyPr/>
@@ -1416,14 +2116,22 @@
             <p:ph type="dt" sz="half" idx="10"/>
           </p:nvPr>
         </p:nvSpPr>
-        <p:spPr/>
+        <p:spPr>
+          <a:xfrm>
+            <a:off x="838200" y="6356350"/>
+            <a:ext cx="2743200" cy="365125"/>
+          </a:xfrm>
+          <a:prstGeom prst="rect">
+            <a:avLst/>
+          </a:prstGeom>
+        </p:spPr>
         <p:txBody>
           <a:bodyPr/>
           <a:lstStyle/>
           <a:p>
-            <a:fld id="{AB8EB9DB-94B2-4D97-AB29-D096994DA229}" type="datetimeFigureOut">
+            <a:fld id="{4F74C74B-F198-4F1D-A85F-7D813148100B}" type="datetime1">
               <a:rPr lang="ru-RU" smtClean="0"/>
-              <a:t>19.05.2026</a:t>
+              <a:t>21.05.2026</a:t>
             </a:fld>
             <a:endParaRPr lang="ru-RU"/>
           </a:p>
@@ -1445,7 +2153,15 @@
             <p:ph type="ftr" sz="quarter" idx="11"/>
           </p:nvPr>
         </p:nvSpPr>
-        <p:spPr/>
+        <p:spPr>
+          <a:xfrm>
+            <a:off x="4038600" y="6356350"/>
+            <a:ext cx="4114800" cy="365125"/>
+          </a:xfrm>
+          <a:prstGeom prst="rect">
+            <a:avLst/>
+          </a:prstGeom>
+        </p:spPr>
         <p:txBody>
           <a:bodyPr/>
           <a:lstStyle/>
@@ -1534,6 +2250,9 @@
             <a:off x="839788" y="365125"/>
             <a:ext cx="10515600" cy="1325563"/>
           </a:xfrm>
+          <a:prstGeom prst="rect">
+            <a:avLst/>
+          </a:prstGeom>
         </p:spPr>
         <p:txBody>
           <a:bodyPr/>
@@ -1567,6 +2286,9 @@
             <a:off x="839788" y="1681163"/>
             <a:ext cx="5157787" cy="823912"/>
           </a:xfrm>
+          <a:prstGeom prst="rect">
+            <a:avLst/>
+          </a:prstGeom>
         </p:spPr>
         <p:txBody>
           <a:bodyPr anchor="b"/>
@@ -1638,6 +2360,9 @@
             <a:off x="839788" y="2505075"/>
             <a:ext cx="5157787" cy="3684588"/>
           </a:xfrm>
+          <a:prstGeom prst="rect">
+            <a:avLst/>
+          </a:prstGeom>
         </p:spPr>
         <p:txBody>
           <a:bodyPr/>
@@ -1700,6 +2425,9 @@
             <a:off x="6172200" y="1681163"/>
             <a:ext cx="5183188" cy="823912"/>
           </a:xfrm>
+          <a:prstGeom prst="rect">
+            <a:avLst/>
+          </a:prstGeom>
         </p:spPr>
         <p:txBody>
           <a:bodyPr anchor="b"/>
@@ -1771,6 +2499,9 @@
             <a:off x="6172200" y="2505075"/>
             <a:ext cx="5183188" cy="3684588"/>
           </a:xfrm>
+          <a:prstGeom prst="rect">
+            <a:avLst/>
+          </a:prstGeom>
         </p:spPr>
         <p:txBody>
           <a:bodyPr/>
@@ -1828,14 +2559,22 @@
             <p:ph type="dt" sz="half" idx="10"/>
           </p:nvPr>
         </p:nvSpPr>
-        <p:spPr/>
+        <p:spPr>
+          <a:xfrm>
+            <a:off x="838200" y="6356350"/>
+            <a:ext cx="2743200" cy="365125"/>
+          </a:xfrm>
+          <a:prstGeom prst="rect">
+            <a:avLst/>
+          </a:prstGeom>
+        </p:spPr>
         <p:txBody>
           <a:bodyPr/>
           <a:lstStyle/>
           <a:p>
-            <a:fld id="{AB8EB9DB-94B2-4D97-AB29-D096994DA229}" type="datetimeFigureOut">
+            <a:fld id="{2BB4B2F3-C8F7-4496-AB1D-5B712B52D4CC}" type="datetime1">
               <a:rPr lang="ru-RU" smtClean="0"/>
-              <a:t>19.05.2026</a:t>
+              <a:t>21.05.2026</a:t>
             </a:fld>
             <a:endParaRPr lang="ru-RU"/>
           </a:p>
@@ -1857,7 +2596,15 @@
             <p:ph type="ftr" sz="quarter" idx="11"/>
           </p:nvPr>
         </p:nvSpPr>
-        <p:spPr/>
+        <p:spPr>
+          <a:xfrm>
+            <a:off x="4038600" y="6356350"/>
+            <a:ext cx="4114800" cy="365125"/>
+          </a:xfrm>
+          <a:prstGeom prst="rect">
+            <a:avLst/>
+          </a:prstGeom>
+        </p:spPr>
         <p:txBody>
           <a:bodyPr/>
           <a:lstStyle/>
@@ -1941,7 +2688,15 @@
             <p:ph type="title"/>
           </p:nvPr>
         </p:nvSpPr>
-        <p:spPr/>
+        <p:spPr>
+          <a:xfrm>
+            <a:off x="838200" y="365125"/>
+            <a:ext cx="10515600" cy="1325563"/>
+          </a:xfrm>
+          <a:prstGeom prst="rect">
+            <a:avLst/>
+          </a:prstGeom>
+        </p:spPr>
         <p:txBody>
           <a:bodyPr/>
           <a:lstStyle/>
@@ -1969,14 +2724,22 @@
             <p:ph type="dt" sz="half" idx="10"/>
           </p:nvPr>
         </p:nvSpPr>
-        <p:spPr/>
+        <p:spPr>
+          <a:xfrm>
+            <a:off x="838200" y="6356350"/>
+            <a:ext cx="2743200" cy="365125"/>
+          </a:xfrm>
+          <a:prstGeom prst="rect">
+            <a:avLst/>
+          </a:prstGeom>
+        </p:spPr>
         <p:txBody>
           <a:bodyPr/>
           <a:lstStyle/>
           <a:p>
-            <a:fld id="{AB8EB9DB-94B2-4D97-AB29-D096994DA229}" type="datetimeFigureOut">
+            <a:fld id="{69017ECC-D4AC-4388-A12E-1F5EBDCBE0DE}" type="datetime1">
               <a:rPr lang="ru-RU" smtClean="0"/>
-              <a:t>19.05.2026</a:t>
+              <a:t>21.05.2026</a:t>
             </a:fld>
             <a:endParaRPr lang="ru-RU"/>
           </a:p>
@@ -1998,7 +2761,15 @@
             <p:ph type="ftr" sz="quarter" idx="11"/>
           </p:nvPr>
         </p:nvSpPr>
-        <p:spPr/>
+        <p:spPr>
+          <a:xfrm>
+            <a:off x="4038600" y="6356350"/>
+            <a:ext cx="4114800" cy="365125"/>
+          </a:xfrm>
+          <a:prstGeom prst="rect">
+            <a:avLst/>
+          </a:prstGeom>
+        </p:spPr>
         <p:txBody>
           <a:bodyPr/>
           <a:lstStyle/>
@@ -2082,14 +2853,22 @@
             <p:ph type="dt" sz="half" idx="10"/>
           </p:nvPr>
         </p:nvSpPr>
-        <p:spPr/>
+        <p:spPr>
+          <a:xfrm>
+            <a:off x="838200" y="6356350"/>
+            <a:ext cx="2743200" cy="365125"/>
+          </a:xfrm>
+          <a:prstGeom prst="rect">
+            <a:avLst/>
+          </a:prstGeom>
+        </p:spPr>
         <p:txBody>
           <a:bodyPr/>
           <a:lstStyle/>
           <a:p>
-            <a:fld id="{AB8EB9DB-94B2-4D97-AB29-D096994DA229}" type="datetimeFigureOut">
+            <a:fld id="{A7ABE4D9-AEC4-4B77-B4CC-7FBE63FE841C}" type="datetime1">
               <a:rPr lang="ru-RU" smtClean="0"/>
-              <a:t>19.05.2026</a:t>
+              <a:t>21.05.2026</a:t>
             </a:fld>
             <a:endParaRPr lang="ru-RU"/>
           </a:p>
@@ -2111,7 +2890,15 @@
             <p:ph type="ftr" sz="quarter" idx="11"/>
           </p:nvPr>
         </p:nvSpPr>
-        <p:spPr/>
+        <p:spPr>
+          <a:xfrm>
+            <a:off x="4038600" y="6356350"/>
+            <a:ext cx="4114800" cy="365125"/>
+          </a:xfrm>
+          <a:prstGeom prst="rect">
+            <a:avLst/>
+          </a:prstGeom>
+        </p:spPr>
         <p:txBody>
           <a:bodyPr/>
           <a:lstStyle/>
@@ -2200,6 +2987,9 @@
             <a:off x="839788" y="457200"/>
             <a:ext cx="3932237" cy="1600200"/>
           </a:xfrm>
+          <a:prstGeom prst="rect">
+            <a:avLst/>
+          </a:prstGeom>
         </p:spPr>
         <p:txBody>
           <a:bodyPr anchor="b"/>
@@ -2237,6 +3027,9 @@
             <a:off x="5183188" y="987425"/>
             <a:ext cx="6172200" cy="4873625"/>
           </a:xfrm>
+          <a:prstGeom prst="rect">
+            <a:avLst/>
+          </a:prstGeom>
         </p:spPr>
         <p:txBody>
           <a:bodyPr/>
@@ -2327,6 +3120,9 @@
             <a:off x="839788" y="2057400"/>
             <a:ext cx="3932237" cy="3811588"/>
           </a:xfrm>
+          <a:prstGeom prst="rect">
+            <a:avLst/>
+          </a:prstGeom>
         </p:spPr>
         <p:txBody>
           <a:bodyPr/>
@@ -2393,14 +3189,22 @@
             <p:ph type="dt" sz="half" idx="10"/>
           </p:nvPr>
         </p:nvSpPr>
-        <p:spPr/>
+        <p:spPr>
+          <a:xfrm>
+            <a:off x="838200" y="6356350"/>
+            <a:ext cx="2743200" cy="365125"/>
+          </a:xfrm>
+          <a:prstGeom prst="rect">
+            <a:avLst/>
+          </a:prstGeom>
+        </p:spPr>
         <p:txBody>
           <a:bodyPr/>
           <a:lstStyle/>
           <a:p>
-            <a:fld id="{AB8EB9DB-94B2-4D97-AB29-D096994DA229}" type="datetimeFigureOut">
+            <a:fld id="{21664E07-3D79-4A05-BB0B-898AD5671495}" type="datetime1">
               <a:rPr lang="ru-RU" smtClean="0"/>
-              <a:t>19.05.2026</a:t>
+              <a:t>21.05.2026</a:t>
             </a:fld>
             <a:endParaRPr lang="ru-RU"/>
           </a:p>
@@ -2422,7 +3226,15 @@
             <p:ph type="ftr" sz="quarter" idx="11"/>
           </p:nvPr>
         </p:nvSpPr>
-        <p:spPr/>
+        <p:spPr>
+          <a:xfrm>
+            <a:off x="4038600" y="6356350"/>
+            <a:ext cx="4114800" cy="365125"/>
+          </a:xfrm>
+          <a:prstGeom prst="rect">
+            <a:avLst/>
+          </a:prstGeom>
+        </p:spPr>
         <p:txBody>
           <a:bodyPr/>
           <a:lstStyle/>
@@ -2511,6 +3323,9 @@
             <a:off x="839788" y="457200"/>
             <a:ext cx="3932237" cy="1600200"/>
           </a:xfrm>
+          <a:prstGeom prst="rect">
+            <a:avLst/>
+          </a:prstGeom>
         </p:spPr>
         <p:txBody>
           <a:bodyPr anchor="b"/>
@@ -2548,6 +3363,9 @@
             <a:off x="5183188" y="987425"/>
             <a:ext cx="6172200" cy="4873625"/>
           </a:xfrm>
+          <a:prstGeom prst="rect">
+            <a:avLst/>
+          </a:prstGeom>
         </p:spPr>
         <p:txBody>
           <a:bodyPr/>
@@ -2615,6 +3433,9 @@
             <a:off x="839788" y="2057400"/>
             <a:ext cx="3932237" cy="3811588"/>
           </a:xfrm>
+          <a:prstGeom prst="rect">
+            <a:avLst/>
+          </a:prstGeom>
         </p:spPr>
         <p:txBody>
           <a:bodyPr/>
@@ -2681,14 +3502,22 @@
             <p:ph type="dt" sz="half" idx="10"/>
           </p:nvPr>
         </p:nvSpPr>
-        <p:spPr/>
+        <p:spPr>
+          <a:xfrm>
+            <a:off x="838200" y="6356350"/>
+            <a:ext cx="2743200" cy="365125"/>
+          </a:xfrm>
+          <a:prstGeom prst="rect">
+            <a:avLst/>
+          </a:prstGeom>
+        </p:spPr>
         <p:txBody>
           <a:bodyPr/>
           <a:lstStyle/>
           <a:p>
-            <a:fld id="{AB8EB9DB-94B2-4D97-AB29-D096994DA229}" type="datetimeFigureOut">
+            <a:fld id="{69552C21-0914-4B44-973B-AE86C28FD0CC}" type="datetime1">
               <a:rPr lang="ru-RU" smtClean="0"/>
-              <a:t>19.05.2026</a:t>
+              <a:t>21.05.2026</a:t>
             </a:fld>
             <a:endParaRPr lang="ru-RU"/>
           </a:p>
@@ -2710,7 +3539,15 @@
             <p:ph type="ftr" sz="quarter" idx="11"/>
           </p:nvPr>
         </p:nvSpPr>
-        <p:spPr/>
+        <p:spPr>
+          <a:xfrm>
+            <a:off x="4038600" y="6356350"/>
+            <a:ext cx="4114800" cy="365125"/>
+          </a:xfrm>
+          <a:prstGeom prst="rect">
+            <a:avLst/>
+          </a:prstGeom>
+        </p:spPr>
         <p:txBody>
           <a:bodyPr/>
           <a:lstStyle/>
@@ -2785,243 +3622,46 @@
       </p:grpSpPr>
       <p:sp>
         <p:nvSpPr>
-          <p:cNvPr id="2" name="Заголовок 1">
-            <a:extLst>
-              <a:ext uri="{FF2B5EF4-FFF2-40B4-BE49-F238E27FC236}">
-                <a16:creationId xmlns:a16="http://schemas.microsoft.com/office/drawing/2014/main" id="{5B163F25-8401-4050-B9C0-1864FD918F87}"/>
-              </a:ext>
-            </a:extLst>
-          </p:cNvPr>
-          <p:cNvSpPr>
-            <a:spLocks noGrp="1"/>
-          </p:cNvSpPr>
-          <p:nvPr>
-            <p:ph type="title"/>
-          </p:nvPr>
-        </p:nvSpPr>
-        <p:spPr>
-          <a:xfrm>
-            <a:off x="838200" y="365125"/>
-            <a:ext cx="10515600" cy="1325563"/>
+          <p:cNvPr id="6" name="Номер слайда 5">
+            <a:extLst>
+              <a:ext uri="{FF2B5EF4-FFF2-40B4-BE49-F238E27FC236}">
+                <a16:creationId xmlns:a16="http://schemas.microsoft.com/office/drawing/2014/main" id="{F8C1D08D-9EC8-40DB-9B46-669208259D44}"/>
+              </a:ext>
+            </a:extLst>
+          </p:cNvPr>
+          <p:cNvSpPr>
+            <a:spLocks noGrp="1"/>
+          </p:cNvSpPr>
+          <p:nvPr>
+            <p:ph type="sldNum" sz="quarter" idx="4"/>
+          </p:nvPr>
+        </p:nvSpPr>
+        <p:spPr>
+          <a:xfrm>
+            <a:off x="11067690" y="6521570"/>
+            <a:ext cx="1124309" cy="336430"/>
           </a:xfrm>
           <a:prstGeom prst="rect">
             <a:avLst/>
           </a:prstGeom>
         </p:spPr>
         <p:txBody>
-          <a:bodyPr vert="horz" lIns="91440" tIns="45720" rIns="91440" bIns="45720" rtlCol="0" anchor="ctr">
-            <a:normAutofit/>
-          </a:bodyPr>
-          <a:lstStyle/>
-          <a:p>
-            <a:r>
-              <a:rPr lang="ru-RU"/>
-              <a:t>Образец заголовка</a:t>
-            </a:r>
-          </a:p>
-        </p:txBody>
-      </p:sp>
-      <p:sp>
-        <p:nvSpPr>
-          <p:cNvPr id="3" name="Текст 2">
-            <a:extLst>
-              <a:ext uri="{FF2B5EF4-FFF2-40B4-BE49-F238E27FC236}">
-                <a16:creationId xmlns:a16="http://schemas.microsoft.com/office/drawing/2014/main" id="{7C158BF0-F39C-48A3-8E8A-C22EF5572C9B}"/>
-              </a:ext>
-            </a:extLst>
-          </p:cNvPr>
-          <p:cNvSpPr>
-            <a:spLocks noGrp="1"/>
-          </p:cNvSpPr>
-          <p:nvPr>
-            <p:ph type="body" idx="1"/>
-          </p:nvPr>
-        </p:nvSpPr>
-        <p:spPr>
-          <a:xfrm>
-            <a:off x="838200" y="1825625"/>
-            <a:ext cx="10515600" cy="4351338"/>
-          </a:xfrm>
-          <a:prstGeom prst="rect">
-            <a:avLst/>
-          </a:prstGeom>
-        </p:spPr>
-        <p:txBody>
-          <a:bodyPr vert="horz" lIns="91440" tIns="45720" rIns="91440" bIns="45720" rtlCol="0">
-            <a:normAutofit/>
-          </a:bodyPr>
-          <a:lstStyle/>
-          <a:p>
-            <a:pPr lvl="0"/>
-            <a:r>
-              <a:rPr lang="ru-RU"/>
-              <a:t>Образец текста</a:t>
-            </a:r>
-          </a:p>
-          <a:p>
-            <a:pPr lvl="1"/>
-            <a:r>
-              <a:rPr lang="ru-RU"/>
-              <a:t>Второй уровень</a:t>
-            </a:r>
-          </a:p>
-          <a:p>
-            <a:pPr lvl="2"/>
-            <a:r>
-              <a:rPr lang="ru-RU"/>
-              <a:t>Третий уровень</a:t>
-            </a:r>
-          </a:p>
-          <a:p>
-            <a:pPr lvl="3"/>
-            <a:r>
-              <a:rPr lang="ru-RU"/>
-              <a:t>Четвертый уровень</a:t>
-            </a:r>
-          </a:p>
-          <a:p>
-            <a:pPr lvl="4"/>
-            <a:r>
-              <a:rPr lang="ru-RU"/>
-              <a:t>Пятый уровень</a:t>
-            </a:r>
-          </a:p>
-        </p:txBody>
-      </p:sp>
-      <p:sp>
-        <p:nvSpPr>
-          <p:cNvPr id="4" name="Дата 3">
-            <a:extLst>
-              <a:ext uri="{FF2B5EF4-FFF2-40B4-BE49-F238E27FC236}">
-                <a16:creationId xmlns:a16="http://schemas.microsoft.com/office/drawing/2014/main" id="{E115F282-4ED1-4FED-82A5-D48D197176AF}"/>
-              </a:ext>
-            </a:extLst>
-          </p:cNvPr>
-          <p:cNvSpPr>
-            <a:spLocks noGrp="1"/>
-          </p:cNvSpPr>
-          <p:nvPr>
-            <p:ph type="dt" sz="half" idx="2"/>
-          </p:nvPr>
-        </p:nvSpPr>
-        <p:spPr>
-          <a:xfrm>
-            <a:off x="838200" y="6356350"/>
-            <a:ext cx="2743200" cy="365125"/>
-          </a:xfrm>
-          <a:prstGeom prst="rect">
-            <a:avLst/>
-          </a:prstGeom>
-        </p:spPr>
-        <p:txBody>
-          <a:bodyPr vert="horz" lIns="91440" tIns="45720" rIns="91440" bIns="45720" rtlCol="0" anchor="ctr"/>
-          <a:lstStyle>
-            <a:lvl1pPr algn="l">
-              <a:defRPr sz="1200">
-                <a:solidFill>
-                  <a:schemeClr val="tx1">
-                    <a:tint val="75000"/>
-                  </a:schemeClr>
-                </a:solidFill>
-              </a:defRPr>
-            </a:lvl1pPr>
-          </a:lstStyle>
-          <a:p>
-            <a:fld id="{AB8EB9DB-94B2-4D97-AB29-D096994DA229}" type="datetimeFigureOut">
-              <a:rPr lang="ru-RU" smtClean="0"/>
-              <a:t>19.05.2026</a:t>
-            </a:fld>
-            <a:endParaRPr lang="ru-RU"/>
-          </a:p>
-        </p:txBody>
-      </p:sp>
-      <p:sp>
-        <p:nvSpPr>
-          <p:cNvPr id="5" name="Нижний колонтитул 4">
-            <a:extLst>
-              <a:ext uri="{FF2B5EF4-FFF2-40B4-BE49-F238E27FC236}">
-                <a16:creationId xmlns:a16="http://schemas.microsoft.com/office/drawing/2014/main" id="{4AA805AD-E84B-485F-BE45-31A48BA73256}"/>
-              </a:ext>
-            </a:extLst>
-          </p:cNvPr>
-          <p:cNvSpPr>
-            <a:spLocks noGrp="1"/>
-          </p:cNvSpPr>
-          <p:nvPr>
-            <p:ph type="ftr" sz="quarter" idx="3"/>
-          </p:nvPr>
-        </p:nvSpPr>
-        <p:spPr>
-          <a:xfrm>
-            <a:off x="4038600" y="6356350"/>
-            <a:ext cx="4114800" cy="365125"/>
-          </a:xfrm>
-          <a:prstGeom prst="rect">
-            <a:avLst/>
-          </a:prstGeom>
-        </p:spPr>
-        <p:txBody>
-          <a:bodyPr vert="horz" lIns="91440" tIns="45720" rIns="91440" bIns="45720" rtlCol="0" anchor="ctr"/>
-          <a:lstStyle>
-            <a:lvl1pPr algn="ctr">
-              <a:defRPr sz="1200">
-                <a:solidFill>
-                  <a:schemeClr val="tx1">
-                    <a:tint val="75000"/>
-                  </a:schemeClr>
-                </a:solidFill>
-              </a:defRPr>
-            </a:lvl1pPr>
-          </a:lstStyle>
-          <a:p>
-            <a:endParaRPr lang="ru-RU"/>
-          </a:p>
-        </p:txBody>
-      </p:sp>
-      <p:sp>
-        <p:nvSpPr>
-          <p:cNvPr id="6" name="Номер слайда 5">
-            <a:extLst>
-              <a:ext uri="{FF2B5EF4-FFF2-40B4-BE49-F238E27FC236}">
-                <a16:creationId xmlns:a16="http://schemas.microsoft.com/office/drawing/2014/main" id="{F8C1D08D-9EC8-40DB-9B46-669208259D44}"/>
-              </a:ext>
-            </a:extLst>
-          </p:cNvPr>
-          <p:cNvSpPr>
-            <a:spLocks noGrp="1"/>
-          </p:cNvSpPr>
-          <p:nvPr>
-            <p:ph type="sldNum" sz="quarter" idx="4"/>
-          </p:nvPr>
-        </p:nvSpPr>
-        <p:spPr>
-          <a:xfrm>
-            <a:off x="8610600" y="6356350"/>
-            <a:ext cx="2743200" cy="365125"/>
-          </a:xfrm>
-          <a:prstGeom prst="rect">
-            <a:avLst/>
-          </a:prstGeom>
-        </p:spPr>
-        <p:txBody>
           <a:bodyPr vert="horz" lIns="91440" tIns="45720" rIns="91440" bIns="45720" rtlCol="0" anchor="ctr"/>
           <a:lstStyle>
             <a:lvl1pPr algn="r">
-              <a:defRPr sz="1200">
-                <a:solidFill>
-                  <a:schemeClr val="tx1">
-                    <a:tint val="75000"/>
-                  </a:schemeClr>
-                </a:solidFill>
-              </a:defRPr>
+              <a:defRPr lang="ru-RU" smtClean="0"/>
             </a:lvl1pPr>
           </a:lstStyle>
           <a:p>
             <a:fld id="{5F9DB6E4-81A8-48FA-A111-413E3E85E768}" type="slidenum">
               <a:rPr lang="ru-RU" smtClean="0"/>
+              <a:pPr/>
               <a:t>‹#›</a:t>
             </a:fld>
-            <a:endParaRPr lang="ru-RU"/>
+            <a:r>
+              <a:rPr lang="ru-RU" dirty="0"/>
+              <a:t>/12</a:t>
+            </a:r>
           </a:p>
         </p:txBody>
       </p:sp>
@@ -3046,6 +3686,7 @@
     <p:sldLayoutId id="2147483658" r:id="rId10"/>
     <p:sldLayoutId id="2147483659" r:id="rId11"/>
   </p:sldLayoutIdLst>
+  <p:hf hdr="0" ftr="0" dt="0"/>
   <p:txStyles>
     <p:titleStyle>
       <a:lvl1pPr algn="l" defTabSz="914400" rtl="0" eaLnBrk="1" latinLnBrk="0" hangingPunct="1">
@@ -3456,10 +4097,128 @@
       </p:grpSpPr>
       <p:sp>
         <p:nvSpPr>
+          <p:cNvPr id="3" name="Объект 2">
+            <a:extLst>
+              <a:ext uri="{FF2B5EF4-FFF2-40B4-BE49-F238E27FC236}">
+                <a16:creationId xmlns:a16="http://schemas.microsoft.com/office/drawing/2014/main" id="{C9F7A7BF-345D-4464-BA61-1943803CE2E9}"/>
+              </a:ext>
+            </a:extLst>
+          </p:cNvPr>
+          <p:cNvSpPr>
+            <a:spLocks noGrp="1"/>
+          </p:cNvSpPr>
+          <p:nvPr>
+            <p:ph idx="1"/>
+          </p:nvPr>
+        </p:nvSpPr>
+        <p:spPr>
+          <a:xfrm>
+            <a:off x="419164" y="969118"/>
+            <a:ext cx="4856924" cy="5839612"/>
+          </a:xfrm>
+        </p:spPr>
+        <p:txBody>
+          <a:bodyPr>
+            <a:normAutofit/>
+          </a:bodyPr>
+          <a:lstStyle/>
+          <a:p>
+            <a:pPr algn="just"/>
+            <a:r>
+              <a:rPr lang="ru-RU" sz="1800" dirty="0"/>
+              <a:t>В связи с необходимостью более детального анализа мимики и положения головы в пространстве, в систему интегрирована модель </a:t>
+            </a:r>
+            <a:r>
+              <a:rPr lang="ru-RU" sz="1800" dirty="0" err="1"/>
+              <a:t>MediaPipe</a:t>
+            </a:r>
+            <a:r>
+              <a:rPr lang="ru-RU" sz="1800" dirty="0"/>
+              <a:t> Face </a:t>
+            </a:r>
+            <a:r>
+              <a:rPr lang="ru-RU" sz="1800" dirty="0" err="1"/>
+              <a:t>Landmarker</a:t>
+            </a:r>
+            <a:r>
+              <a:rPr lang="ru-RU" sz="1800" dirty="0"/>
+              <a:t> от Google.</a:t>
+            </a:r>
+          </a:p>
+          <a:p>
+            <a:pPr algn="just"/>
+            <a:r>
+              <a:rPr lang="ru-RU" sz="1800" dirty="0"/>
+              <a:t>На вход модели подаётся выровненное изображение лица. Модель строит плотную сетку из 468 трёхмерных ключевых точек, охватывающих контуры глаз, бровей, носа, губ и овала лица.</a:t>
+            </a:r>
+          </a:p>
+          <a:p>
+            <a:pPr algn="just"/>
+            <a:r>
+              <a:rPr lang="ru-RU" sz="1800" dirty="0"/>
+              <a:t>На выходе формируются </a:t>
+            </a:r>
+            <a:r>
+              <a:rPr lang="ru-RU" sz="1800" dirty="0" err="1"/>
+              <a:t>blendshape</a:t>
+            </a:r>
+            <a:r>
+              <a:rPr lang="ru-RU" sz="1800" dirty="0"/>
+              <a:t>-коэффициенты (активность групп лицевых мышц), углы поворота головы (</a:t>
+            </a:r>
+            <a:r>
+              <a:rPr lang="ru-RU" sz="1800" dirty="0" err="1"/>
+              <a:t>yaw</a:t>
+            </a:r>
+            <a:r>
+              <a:rPr lang="ru-RU" sz="1800" dirty="0"/>
+              <a:t>, </a:t>
+            </a:r>
+            <a:r>
+              <a:rPr lang="ru-RU" sz="1800" dirty="0" err="1"/>
+              <a:t>pitch</a:t>
+            </a:r>
+            <a:r>
+              <a:rPr lang="ru-RU" sz="1800" dirty="0"/>
+              <a:t>, </a:t>
+            </a:r>
+            <a:r>
+              <a:rPr lang="ru-RU" sz="1800" dirty="0" err="1"/>
+              <a:t>roll</a:t>
+            </a:r>
+            <a:r>
+              <a:rPr lang="ru-RU" sz="1800" dirty="0"/>
+              <a:t>) и данные для отслеживания </a:t>
+            </a:r>
+            <a:r>
+              <a:rPr lang="ru-RU" sz="1800" dirty="0" err="1"/>
+              <a:t>микровыражений</a:t>
+            </a:r>
+            <a:r>
+              <a:rPr lang="ru-RU" sz="1800" dirty="0"/>
+              <a:t>.</a:t>
+            </a:r>
+          </a:p>
+          <a:p>
+            <a:pPr algn="just"/>
+            <a:r>
+              <a:rPr lang="ru-RU" sz="1800" dirty="0"/>
+              <a:t>Модель перезаписывает и обогащает базовые данные классификации, позволяя системе учитывать не только статические эмоции, но и динамику мимики</a:t>
+            </a:r>
+            <a:r>
+              <a:rPr lang="en-US" sz="1800" dirty="0"/>
+              <a:t>.</a:t>
+            </a:r>
+            <a:endParaRPr lang="ru-RU" sz="1800" dirty="0"/>
+          </a:p>
+        </p:txBody>
+      </p:sp>
+      <p:sp>
+        <p:nvSpPr>
           <p:cNvPr id="2" name="Заголовок 1">
             <a:extLst>
               <a:ext uri="{FF2B5EF4-FFF2-40B4-BE49-F238E27FC236}">
-                <a16:creationId xmlns:a16="http://schemas.microsoft.com/office/drawing/2014/main" id="{975598A4-2CEB-4A01-98CC-B4D5443A0519}"/>
+                <a16:creationId xmlns:a16="http://schemas.microsoft.com/office/drawing/2014/main" id="{1B58CB9A-86AF-B0B7-3E9B-73D490908836}"/>
               </a:ext>
             </a:extLst>
           </p:cNvPr>
@@ -3472,181 +4231,110 @@
         </p:nvSpPr>
         <p:spPr>
           <a:xfrm>
-            <a:off x="838200" y="85987"/>
+            <a:off x="419164" y="103552"/>
             <a:ext cx="10515600" cy="1325563"/>
           </a:xfrm>
         </p:spPr>
         <p:txBody>
-          <a:bodyPr/>
-          <a:lstStyle/>
-          <a:p>
-            <a:r>
-              <a:rPr lang="ru-RU" dirty="0"/>
-              <a:t>Модуль распознавания речи</a:t>
-            </a:r>
-          </a:p>
-        </p:txBody>
-      </p:sp>
-      <p:sp>
-        <p:nvSpPr>
-          <p:cNvPr id="3" name="Объект 2">
-            <a:extLst>
-              <a:ext uri="{FF2B5EF4-FFF2-40B4-BE49-F238E27FC236}">
-                <a16:creationId xmlns:a16="http://schemas.microsoft.com/office/drawing/2014/main" id="{3F58553F-6F10-47A7-90AD-8A548C4AE47D}"/>
-              </a:ext>
-            </a:extLst>
-          </p:cNvPr>
-          <p:cNvSpPr>
-            <a:spLocks noGrp="1"/>
-          </p:cNvSpPr>
-          <p:nvPr>
-            <p:ph idx="1"/>
-          </p:nvPr>
-        </p:nvSpPr>
-        <p:spPr>
-          <a:xfrm>
-            <a:off x="838200" y="1100831"/>
-            <a:ext cx="10515600" cy="5592932"/>
-          </a:xfrm>
-        </p:spPr>
-        <p:txBody>
           <a:bodyPr>
-            <a:normAutofit lnSpcReduction="10000"/>
+            <a:normAutofit/>
           </a:bodyPr>
           <a:lstStyle/>
           <a:p>
-            <a:pPr marL="0" indent="0">
-              <a:buNone/>
-            </a:pPr>
-            <a:r>
-              <a:rPr lang="ru-RU" dirty="0"/>
+            <a:r>
+              <a:rPr lang="ru-RU" sz="4000" dirty="0"/>
               <a:t>Модель </a:t>
             </a:r>
             <a:r>
-              <a:rPr lang="ru-RU" dirty="0" err="1"/>
-              <a:t>Whisper</a:t>
-            </a:r>
-            <a:r>
-              <a:rPr lang="ru-RU" dirty="0"/>
-              <a:t> (OpenAI):</a:t>
-            </a:r>
-          </a:p>
-          <a:p>
-            <a:r>
-              <a:rPr lang="ru-RU" dirty="0" err="1"/>
-              <a:t>Encoder-decoder</a:t>
-            </a:r>
-            <a:r>
-              <a:rPr lang="ru-RU" dirty="0"/>
-              <a:t> трансформер, обученный на 680 000 часов аудиоданных</a:t>
-            </a:r>
-          </a:p>
-          <a:p>
-            <a:r>
-              <a:rPr lang="ru-RU" dirty="0"/>
-              <a:t>Поддержка 99 языков, устойчивость к акцентам и шуму</a:t>
-            </a:r>
-          </a:p>
-          <a:p>
-            <a:pPr marL="0" indent="0">
-              <a:buNone/>
-            </a:pPr>
-            <a:r>
-              <a:rPr lang="ru-RU" dirty="0"/>
-              <a:t>Архитектура обработки:</a:t>
-            </a:r>
-          </a:p>
-          <a:p>
-            <a:r>
-              <a:rPr lang="ru-RU" dirty="0"/>
-              <a:t>Предобработка: аудиосигнал 16 кГц преобразуется в мел-спектрограмму (80 каналов)</a:t>
-            </a:r>
-          </a:p>
-          <a:p>
-            <a:r>
-              <a:rPr lang="ru-RU" dirty="0" err="1"/>
-              <a:t>Энкодер</a:t>
-            </a:r>
-            <a:r>
-              <a:rPr lang="ru-RU" dirty="0"/>
-              <a:t> извлекает контекстуальные признаки через механизм </a:t>
-            </a:r>
-            <a:r>
-              <a:rPr lang="ru-RU" dirty="0" err="1"/>
-              <a:t>самовнимания</a:t>
-            </a:r>
-            <a:endParaRPr lang="ru-RU" dirty="0"/>
-          </a:p>
-          <a:p>
-            <a:r>
-              <a:rPr lang="ru-RU" dirty="0"/>
-              <a:t>Декодер генерирует текстовые токены </a:t>
-            </a:r>
-            <a:r>
-              <a:rPr lang="ru-RU" dirty="0" err="1"/>
-              <a:t>авторегрессионно</a:t>
-            </a:r>
-            <a:r>
-              <a:rPr lang="ru-RU" dirty="0"/>
-              <a:t> с учётом кросс-внимания</a:t>
-            </a:r>
-          </a:p>
-          <a:p>
-            <a:r>
-              <a:rPr lang="ru-RU" dirty="0"/>
-              <a:t>Оптимизация: Библиотека </a:t>
-            </a:r>
-            <a:r>
-              <a:rPr lang="ru-RU" dirty="0" err="1"/>
-              <a:t>faster-whisper</a:t>
-            </a:r>
-            <a:r>
-              <a:rPr lang="ru-RU" dirty="0"/>
-              <a:t> с квантованием весов, пакетной обработкой и поддержкой GPU</a:t>
-            </a:r>
-          </a:p>
-        </p:txBody>
-      </p:sp>
-      <p:sp>
-        <p:nvSpPr>
-          <p:cNvPr id="4" name="TextBox 3">
-            <a:extLst>
-              <a:ext uri="{FF2B5EF4-FFF2-40B4-BE49-F238E27FC236}">
-                <a16:creationId xmlns:a16="http://schemas.microsoft.com/office/drawing/2014/main" id="{C06811B9-633B-4D7E-9477-717C2159737D}"/>
-              </a:ext>
-            </a:extLst>
-          </p:cNvPr>
-          <p:cNvSpPr txBox="1"/>
+              <a:rPr lang="en-US" sz="4000" dirty="0" err="1"/>
+              <a:t>MediaPipe</a:t>
+            </a:r>
+            <a:r>
+              <a:rPr lang="en-US" sz="4000" dirty="0"/>
+              <a:t> Face </a:t>
+            </a:r>
+            <a:r>
+              <a:rPr lang="en-US" sz="4000" dirty="0" err="1"/>
+              <a:t>Landmarker</a:t>
+            </a:r>
+            <a:endParaRPr lang="en-US" sz="4000" dirty="0"/>
+          </a:p>
+        </p:txBody>
+      </p:sp>
+      <p:pic>
+        <p:nvPicPr>
+          <p:cNvPr id="7" name="Рисунок 6" descr="Задача &quot;Опорный знак на лице&quot;">
+            <a:extLst>
+              <a:ext uri="{FF2B5EF4-FFF2-40B4-BE49-F238E27FC236}">
+                <a16:creationId xmlns:a16="http://schemas.microsoft.com/office/drawing/2014/main" id="{AC6A1973-8F20-E21C-8984-347E22110987}"/>
+              </a:ext>
+            </a:extLst>
+          </p:cNvPr>
+          <p:cNvPicPr>
+            <a:picLocks noChangeAspect="1"/>
+          </p:cNvPicPr>
           <p:nvPr/>
-        </p:nvSpPr>
-        <p:spPr>
-          <a:xfrm>
-            <a:off x="10990555" y="6391922"/>
-            <a:ext cx="870012" cy="372862"/>
+        </p:nvPicPr>
+        <p:blipFill>
+          <a:blip r:embed="rId2">
+            <a:extLst>
+              <a:ext uri="{28A0092B-C50C-407E-A947-70E740481C1C}">
+                <a14:useLocalDpi xmlns:a14="http://schemas.microsoft.com/office/drawing/2010/main" val="0"/>
+              </a:ext>
+            </a:extLst>
+          </a:blip>
+          <a:srcRect/>
+          <a:stretch>
+            <a:fillRect/>
+          </a:stretch>
+        </p:blipFill>
+        <p:spPr bwMode="auto">
+          <a:xfrm>
+            <a:off x="5832411" y="1429115"/>
+            <a:ext cx="5940425" cy="3256280"/>
           </a:xfrm>
           <a:prstGeom prst="rect">
             <a:avLst/>
           </a:prstGeom>
           <a:noFill/>
-        </p:spPr>
-        <p:txBody>
-          <a:bodyPr wrap="square" rtlCol="0">
-            <a:spAutoFit/>
-          </a:bodyPr>
-          <a:lstStyle/>
-          <a:p>
-            <a:r>
-              <a:rPr lang="en-US" dirty="0"/>
-              <a:t>6/22</a:t>
-            </a:r>
-            <a:endParaRPr lang="ru-RU" dirty="0"/>
+          <a:ln>
+            <a:noFill/>
+          </a:ln>
+        </p:spPr>
+      </p:pic>
+      <p:sp>
+        <p:nvSpPr>
+          <p:cNvPr id="5" name="Номер слайда 4">
+            <a:extLst>
+              <a:ext uri="{FF2B5EF4-FFF2-40B4-BE49-F238E27FC236}">
+                <a16:creationId xmlns:a16="http://schemas.microsoft.com/office/drawing/2014/main" id="{C938FBF3-4A9B-D591-C9C7-E929397E9F73}"/>
+              </a:ext>
+            </a:extLst>
+          </p:cNvPr>
+          <p:cNvSpPr>
+            <a:spLocks noGrp="1"/>
+          </p:cNvSpPr>
+          <p:nvPr>
+            <p:ph type="sldNum" sz="quarter" idx="12"/>
+          </p:nvPr>
+        </p:nvSpPr>
+        <p:spPr/>
+        <p:txBody>
+          <a:bodyPr/>
+          <a:lstStyle/>
+          <a:p>
+            <a:fld id="{5F9DB6E4-81A8-48FA-A111-413E3E85E768}" type="slidenum">
+              <a:rPr lang="ru-RU" smtClean="0"/>
+              <a:t>10</a:t>
+            </a:fld>
+            <a:endParaRPr lang="ru-RU"/>
           </a:p>
         </p:txBody>
       </p:sp>
     </p:spTree>
     <p:extLst>
       <p:ext uri="{BB962C8B-B14F-4D97-AF65-F5344CB8AC3E}">
-        <p14:creationId xmlns:p14="http://schemas.microsoft.com/office/powerpoint/2010/main" val="1912452483"/>
+        <p14:creationId xmlns:p14="http://schemas.microsoft.com/office/powerpoint/2010/main" val="441378147"/>
       </p:ext>
     </p:extLst>
   </p:cSld>
@@ -3678,7 +4366,7 @@
           <p:cNvPr id="2" name="Заголовок 1">
             <a:extLst>
               <a:ext uri="{FF2B5EF4-FFF2-40B4-BE49-F238E27FC236}">
-                <a16:creationId xmlns:a16="http://schemas.microsoft.com/office/drawing/2014/main" id="{975598A4-2CEB-4A01-98CC-B4D5443A0519}"/>
+                <a16:creationId xmlns:a16="http://schemas.microsoft.com/office/drawing/2014/main" id="{1EBAAD23-B9AF-47EB-97C4-C8F7C47862D2}"/>
               </a:ext>
             </a:extLst>
           </p:cNvPr>
@@ -3689,93 +4377,128 @@
             <p:ph type="title"/>
           </p:nvPr>
         </p:nvSpPr>
-        <p:spPr>
-          <a:xfrm>
-            <a:off x="838200" y="85987"/>
-            <a:ext cx="10515600" cy="1325563"/>
-          </a:xfrm>
-        </p:spPr>
+        <p:spPr/>
         <p:txBody>
           <a:bodyPr/>
           <a:lstStyle/>
           <a:p>
             <a:r>
               <a:rPr lang="ru-RU" dirty="0"/>
-              <a:t>Модуль распознавания речи</a:t>
-            </a:r>
-          </a:p>
-        </p:txBody>
-      </p:sp>
-      <p:sp>
-        <p:nvSpPr>
-          <p:cNvPr id="4" name="TextBox 3">
-            <a:extLst>
-              <a:ext uri="{FF2B5EF4-FFF2-40B4-BE49-F238E27FC236}">
-                <a16:creationId xmlns:a16="http://schemas.microsoft.com/office/drawing/2014/main" id="{C06811B9-633B-4D7E-9477-717C2159737D}"/>
-              </a:ext>
-            </a:extLst>
-          </p:cNvPr>
-          <p:cNvSpPr txBox="1"/>
-          <p:nvPr/>
-        </p:nvSpPr>
-        <p:spPr>
-          <a:xfrm>
-            <a:off x="10990555" y="6391922"/>
-            <a:ext cx="870012" cy="372862"/>
-          </a:xfrm>
-          <a:prstGeom prst="rect">
-            <a:avLst/>
-          </a:prstGeom>
-          <a:noFill/>
-        </p:spPr>
-        <p:txBody>
-          <a:bodyPr wrap="square" rtlCol="0">
-            <a:spAutoFit/>
+              <a:t>Средство разработки пользовательского интерфейса</a:t>
+            </a:r>
+          </a:p>
+        </p:txBody>
+      </p:sp>
+      <p:sp>
+        <p:nvSpPr>
+          <p:cNvPr id="3" name="Объект 2">
+            <a:extLst>
+              <a:ext uri="{FF2B5EF4-FFF2-40B4-BE49-F238E27FC236}">
+                <a16:creationId xmlns:a16="http://schemas.microsoft.com/office/drawing/2014/main" id="{EA95FAD0-980E-4610-98D5-906FF259B027}"/>
+              </a:ext>
+            </a:extLst>
+          </p:cNvPr>
+          <p:cNvSpPr>
+            <a:spLocks noGrp="1"/>
+          </p:cNvSpPr>
+          <p:nvPr>
+            <p:ph idx="1"/>
+          </p:nvPr>
+        </p:nvSpPr>
+        <p:spPr>
+          <a:xfrm>
+            <a:off x="838200" y="1801368"/>
+            <a:ext cx="9613392" cy="4526280"/>
+          </a:xfrm>
+        </p:spPr>
+        <p:txBody>
+          <a:bodyPr>
+            <a:normAutofit fontScale="85000" lnSpcReduction="10000"/>
           </a:bodyPr>
           <a:lstStyle/>
           <a:p>
-            <a:r>
-              <a:rPr lang="en-US" dirty="0"/>
-              <a:t>6/22</a:t>
-            </a:r>
-            <a:endParaRPr lang="ru-RU" dirty="0"/>
-          </a:p>
-        </p:txBody>
-      </p:sp>
-      <p:pic>
-        <p:nvPicPr>
-          <p:cNvPr id="7" name="Рисунок 6">
-            <a:extLst>
-              <a:ext uri="{FF2B5EF4-FFF2-40B4-BE49-F238E27FC236}">
-                <a16:creationId xmlns:a16="http://schemas.microsoft.com/office/drawing/2014/main" id="{B38D79AC-165D-FB25-7588-89E4A91E88A1}"/>
-              </a:ext>
-            </a:extLst>
-          </p:cNvPr>
-          <p:cNvPicPr>
-            <a:picLocks noChangeAspect="1"/>
-          </p:cNvPicPr>
-          <p:nvPr/>
-        </p:nvPicPr>
-        <p:blipFill>
-          <a:blip r:embed="rId2"/>
-          <a:stretch>
-            <a:fillRect/>
-          </a:stretch>
-        </p:blipFill>
-        <p:spPr>
-          <a:xfrm>
-            <a:off x="838199" y="1411550"/>
-            <a:ext cx="10511501" cy="4724074"/>
-          </a:xfrm>
-          <a:prstGeom prst="rect">
-            <a:avLst/>
-          </a:prstGeom>
-        </p:spPr>
-      </p:pic>
+            <a:pPr algn="just"/>
+            <a:r>
+              <a:rPr lang="ru-RU" dirty="0" err="1"/>
+              <a:t>React</a:t>
+            </a:r>
+            <a:r>
+              <a:rPr lang="ru-RU" dirty="0"/>
+              <a:t> 18 + </a:t>
+            </a:r>
+            <a:r>
+              <a:rPr lang="ru-RU" dirty="0" err="1"/>
+              <a:t>TypeScript</a:t>
+            </a:r>
+            <a:r>
+              <a:rPr lang="ru-RU" dirty="0"/>
+              <a:t> + </a:t>
+            </a:r>
+            <a:r>
+              <a:rPr lang="ru-RU" dirty="0" err="1"/>
+              <a:t>Vite</a:t>
+            </a:r>
+            <a:r>
+              <a:rPr lang="ru-RU" dirty="0"/>
+              <a:t> – современный стек для создания высокопроизводительных одностраничных приложений. Типизированный код повышает надёжность разработки и упрощает поддержку системы.</a:t>
+            </a:r>
+          </a:p>
+          <a:p>
+            <a:pPr algn="just"/>
+            <a:r>
+              <a:rPr lang="ru-RU" dirty="0"/>
+              <a:t>Приложение состоит из клиентской части (отображение медиа, аналитики, управление сессиями) и серверной логики. Чёткое разделение ответственности ускоряет разработку и тестирование.</a:t>
+            </a:r>
+          </a:p>
+          <a:p>
+            <a:pPr algn="just"/>
+            <a:r>
+              <a:rPr lang="ru-RU" dirty="0"/>
+              <a:t>Инструменты экосистемы обеспечивают минимизацию перерисовок, кэширование серверного состояния и автоматическое обновление данных в реальном времени.</a:t>
+            </a:r>
+          </a:p>
+          <a:p>
+            <a:pPr algn="just"/>
+            <a:r>
+              <a:rPr lang="ru-RU" dirty="0"/>
+              <a:t>Адаптивная вёрстка и поддержка тем оформления гарантируют корректное отображение на десктопах и планшетах, что соответствует требованиям современных корпоративных платформ.</a:t>
+            </a:r>
+          </a:p>
+        </p:txBody>
+      </p:sp>
+      <p:sp>
+        <p:nvSpPr>
+          <p:cNvPr id="5" name="Номер слайда 4">
+            <a:extLst>
+              <a:ext uri="{FF2B5EF4-FFF2-40B4-BE49-F238E27FC236}">
+                <a16:creationId xmlns:a16="http://schemas.microsoft.com/office/drawing/2014/main" id="{E9BEF2B6-39B9-162E-8066-79C12B92C3BE}"/>
+              </a:ext>
+            </a:extLst>
+          </p:cNvPr>
+          <p:cNvSpPr>
+            <a:spLocks noGrp="1"/>
+          </p:cNvSpPr>
+          <p:nvPr>
+            <p:ph type="sldNum" sz="quarter" idx="12"/>
+          </p:nvPr>
+        </p:nvSpPr>
+        <p:spPr/>
+        <p:txBody>
+          <a:bodyPr/>
+          <a:lstStyle/>
+          <a:p>
+            <a:fld id="{5F9DB6E4-81A8-48FA-A111-413E3E85E768}" type="slidenum">
+              <a:rPr lang="ru-RU" smtClean="0"/>
+              <a:t>11</a:t>
+            </a:fld>
+            <a:endParaRPr lang="ru-RU"/>
+          </a:p>
+        </p:txBody>
+      </p:sp>
     </p:spTree>
     <p:extLst>
       <p:ext uri="{BB962C8B-B14F-4D97-AF65-F5344CB8AC3E}">
-        <p14:creationId xmlns:p14="http://schemas.microsoft.com/office/powerpoint/2010/main" val="4231230440"/>
+        <p14:creationId xmlns:p14="http://schemas.microsoft.com/office/powerpoint/2010/main" val="276913619"/>
       </p:ext>
     </p:extLst>
   </p:cSld>
@@ -3807,7 +4530,7 @@
           <p:cNvPr id="2" name="Заголовок 1">
             <a:extLst>
               <a:ext uri="{FF2B5EF4-FFF2-40B4-BE49-F238E27FC236}">
-                <a16:creationId xmlns:a16="http://schemas.microsoft.com/office/drawing/2014/main" id="{1EBAAD23-B9AF-47EB-97C4-C8F7C47862D2}"/>
+                <a16:creationId xmlns:a16="http://schemas.microsoft.com/office/drawing/2014/main" id="{554A4237-7384-4D65-B40A-9F7802E2C2BF}"/>
               </a:ext>
             </a:extLst>
           </p:cNvPr>
@@ -3825,7 +4548,7 @@
           <a:p>
             <a:r>
               <a:rPr lang="ru-RU" dirty="0"/>
-              <a:t>Средство разработки пользовательского интерфейса</a:t>
+              <a:t>Информационное обеспечение</a:t>
             </a:r>
           </a:p>
         </p:txBody>
@@ -3835,7 +4558,7 @@
           <p:cNvPr id="3" name="Объект 2">
             <a:extLst>
               <a:ext uri="{FF2B5EF4-FFF2-40B4-BE49-F238E27FC236}">
-                <a16:creationId xmlns:a16="http://schemas.microsoft.com/office/drawing/2014/main" id="{EA95FAD0-980E-4610-98D5-906FF259B027}"/>
+                <a16:creationId xmlns:a16="http://schemas.microsoft.com/office/drawing/2014/main" id="{A03513E5-CE54-4AB7-8986-EBEFE16031CF}"/>
               </a:ext>
             </a:extLst>
           </p:cNvPr>
@@ -3846,150 +4569,110 @@
             <p:ph idx="1"/>
           </p:nvPr>
         </p:nvSpPr>
-        <p:spPr/>
+        <p:spPr>
+          <a:xfrm>
+            <a:off x="676656" y="1690688"/>
+            <a:ext cx="10677144" cy="4802187"/>
+          </a:xfrm>
+        </p:spPr>
         <p:txBody>
           <a:bodyPr>
-            <a:normAutofit fontScale="85000" lnSpcReduction="10000"/>
+            <a:normAutofit fontScale="92500" lnSpcReduction="20000"/>
           </a:bodyPr>
           <a:lstStyle/>
           <a:p>
-            <a:pPr marL="0" indent="0">
-              <a:buNone/>
-            </a:pPr>
+            <a:pPr algn="just"/>
             <a:r>
               <a:rPr lang="ru-RU" dirty="0"/>
-              <a:t>Технологии: </a:t>
-            </a:r>
-            <a:r>
-              <a:rPr lang="ru-RU" dirty="0" err="1"/>
-              <a:t>React</a:t>
-            </a:r>
+              <a:t>Информационное обеспечение АСУ – совокупность системно-ориентированных данных, описывающих принятый в системе словарь базовых описаний, классификаторы и актуализируемых данных о состоянии информационной модели на всех этапах жизненного цикла.</a:t>
+            </a:r>
+          </a:p>
+          <a:p>
+            <a:pPr algn="just"/>
             <a:r>
               <a:rPr lang="ru-RU" dirty="0"/>
-              <a:t> 18 + </a:t>
-            </a:r>
-            <a:r>
-              <a:rPr lang="ru-RU" dirty="0" err="1"/>
-              <a:t>TypeScript</a:t>
-            </a:r>
+              <a:t>Информационным обеспечением системы является набор обученных нейросетевых моделей, конфигурационных файлов и алгоритмов агрегации, с которыми взаимодействует программный комплекс.</a:t>
+            </a:r>
+          </a:p>
+          <a:p>
+            <a:pPr algn="just"/>
             <a:r>
               <a:rPr lang="ru-RU" dirty="0"/>
-              <a:t> + </a:t>
-            </a:r>
-            <a:r>
-              <a:rPr lang="ru-RU" dirty="0" err="1"/>
-              <a:t>Vite</a:t>
-            </a:r>
-            <a:endParaRPr lang="ru-RU" dirty="0"/>
-          </a:p>
-          <a:p>
-            <a:pPr marL="0" indent="0">
-              <a:buNone/>
-            </a:pPr>
+              <a:t>Входной информацией является:</a:t>
+            </a:r>
+          </a:p>
+          <a:p>
+            <a:pPr lvl="1" algn="just"/>
             <a:r>
               <a:rPr lang="ru-RU" dirty="0"/>
-              <a:t>Архитектура:</a:t>
-            </a:r>
-          </a:p>
-          <a:p>
-            <a:r>
-              <a:rPr lang="ru-RU" dirty="0"/>
-              <a:t>Компонентный подход с </a:t>
-            </a:r>
-            <a:r>
-              <a:rPr lang="ru-RU" dirty="0" err="1"/>
-              <a:t>переиспользуемыми</a:t>
-            </a:r>
-            <a:r>
-              <a:rPr lang="ru-RU" dirty="0"/>
-              <a:t> элементами интерфейса</a:t>
-            </a:r>
-          </a:p>
-          <a:p>
-            <a:r>
-              <a:rPr lang="ru-RU" dirty="0"/>
-              <a:t>Virtual DOM обеспечивает минимизацию перерисовок</a:t>
-            </a:r>
-          </a:p>
-          <a:p>
+              <a:t>Видеопоток с веб-камеры (640×480+, 15–30 кадров/с, формат JPEG через </a:t>
+            </a:r>
             <a:r>
               <a:rPr lang="ru-RU" dirty="0" err="1"/>
               <a:t>WebSocket</a:t>
             </a:r>
             <a:r>
               <a:rPr lang="ru-RU" dirty="0"/>
-              <a:t> для автоматического обновления данных в реальном времени</a:t>
-            </a:r>
-          </a:p>
-          <a:p>
-            <a:pPr marL="0" indent="0">
-              <a:buNone/>
-            </a:pPr>
+              <a:t>)</a:t>
+            </a:r>
+          </a:p>
+          <a:p>
+            <a:pPr lvl="1" algn="just"/>
             <a:r>
               <a:rPr lang="ru-RU" dirty="0"/>
-              <a:t>Управление состоянием:</a:t>
-            </a:r>
-          </a:p>
-          <a:p>
+              <a:t>Аудиопоток с микрофона (16 кГц, моно, формат </a:t>
+            </a:r>
+            <a:r>
+              <a:rPr lang="ru-RU" dirty="0" err="1"/>
+              <a:t>WebM</a:t>
+            </a:r>
             <a:r>
               <a:rPr lang="ru-RU" dirty="0"/>
-              <a:t>Глобальное серверное состояние кэшируется специализированной библиотекой запросов</a:t>
-            </a:r>
-          </a:p>
-          <a:p>
+              <a:t>/Opus)</a:t>
+            </a:r>
+          </a:p>
+          <a:p>
+            <a:pPr algn="just"/>
             <a:r>
               <a:rPr lang="ru-RU" dirty="0"/>
-              <a:t>Локальное состояние встречи управляется через легковесное хранилище</a:t>
-            </a:r>
-          </a:p>
-          <a:p>
-            <a:r>
-              <a:rPr lang="ru-RU" dirty="0"/>
-              <a:t>Адаптивность: Интерфейс корректно отображается на десктопах, планшетах и мобильных устройствах</a:t>
-            </a:r>
-          </a:p>
-        </p:txBody>
-      </p:sp>
-      <p:sp>
-        <p:nvSpPr>
-          <p:cNvPr id="4" name="TextBox 3">
-            <a:extLst>
-              <a:ext uri="{FF2B5EF4-FFF2-40B4-BE49-F238E27FC236}">
-                <a16:creationId xmlns:a16="http://schemas.microsoft.com/office/drawing/2014/main" id="{57D9155A-5477-428A-B594-4DE38D5D9805}"/>
-              </a:ext>
-            </a:extLst>
-          </p:cNvPr>
-          <p:cNvSpPr txBox="1"/>
-          <p:nvPr/>
-        </p:nvSpPr>
-        <p:spPr>
-          <a:xfrm>
-            <a:off x="10990555" y="6391922"/>
-            <a:ext cx="870012" cy="372862"/>
-          </a:xfrm>
-          <a:prstGeom prst="rect">
-            <a:avLst/>
-          </a:prstGeom>
-          <a:noFill/>
-        </p:spPr>
-        <p:txBody>
-          <a:bodyPr wrap="square" rtlCol="0">
-            <a:spAutoFit/>
-          </a:bodyPr>
-          <a:lstStyle/>
-          <a:p>
-            <a:r>
-              <a:rPr lang="en-US" dirty="0"/>
-              <a:t>9/22</a:t>
-            </a:r>
-            <a:endParaRPr lang="ru-RU" dirty="0"/>
+              <a:t>Данные поступают непрерывно, обрабатываются в изолированных AI-шлюзах и сохраняются в реляционной СУБД с использованием формата JSONB для гибкого хранения разнородных аналитических событий.</a:t>
+            </a:r>
+          </a:p>
+        </p:txBody>
+      </p:sp>
+      <p:sp>
+        <p:nvSpPr>
+          <p:cNvPr id="4" name="Номер слайда 3">
+            <a:extLst>
+              <a:ext uri="{FF2B5EF4-FFF2-40B4-BE49-F238E27FC236}">
+                <a16:creationId xmlns:a16="http://schemas.microsoft.com/office/drawing/2014/main" id="{CC5BD3B4-94D6-9BF1-6ED5-AA71E42B8AE9}"/>
+              </a:ext>
+            </a:extLst>
+          </p:cNvPr>
+          <p:cNvSpPr>
+            <a:spLocks noGrp="1"/>
+          </p:cNvSpPr>
+          <p:nvPr>
+            <p:ph type="sldNum" sz="quarter" idx="12"/>
+          </p:nvPr>
+        </p:nvSpPr>
+        <p:spPr/>
+        <p:txBody>
+          <a:bodyPr/>
+          <a:lstStyle/>
+          <a:p>
+            <a:fld id="{5F9DB6E4-81A8-48FA-A111-413E3E85E768}" type="slidenum">
+              <a:rPr lang="ru-RU" smtClean="0"/>
+              <a:t>12</a:t>
+            </a:fld>
+            <a:endParaRPr lang="ru-RU"/>
           </a:p>
         </p:txBody>
       </p:sp>
     </p:spTree>
     <p:extLst>
       <p:ext uri="{BB962C8B-B14F-4D97-AF65-F5344CB8AC3E}">
-        <p14:creationId xmlns:p14="http://schemas.microsoft.com/office/powerpoint/2010/main" val="276913619"/>
+        <p14:creationId xmlns:p14="http://schemas.microsoft.com/office/powerpoint/2010/main" val="2287653594"/>
       </p:ext>
     </p:extLst>
   </p:cSld>
@@ -4039,7 +4722,7 @@
           <a:p>
             <a:r>
               <a:rPr lang="ru-RU" dirty="0"/>
-              <a:t>Информационное обеспечение</a:t>
+              <a:t>Датасеты для обучения моделей эмоций</a:t>
             </a:r>
           </a:p>
         </p:txBody>
@@ -4060,68 +4743,22 @@
             <p:ph idx="1"/>
           </p:nvPr>
         </p:nvSpPr>
-        <p:spPr/>
+        <p:spPr>
+          <a:xfrm>
+            <a:off x="676656" y="1690688"/>
+            <a:ext cx="10677144" cy="4802187"/>
+          </a:xfrm>
+        </p:spPr>
         <p:txBody>
           <a:bodyPr>
-            <a:normAutofit fontScale="92500" lnSpcReduction="10000"/>
+            <a:normAutofit fontScale="92500"/>
           </a:bodyPr>
           <a:lstStyle/>
           <a:p>
-            <a:pPr marL="0" indent="0">
-              <a:buNone/>
-            </a:pPr>
+            <a:pPr algn="just"/>
             <a:r>
               <a:rPr lang="ru-RU" dirty="0"/>
-              <a:t>Определение: Совокупность системно-ориентированных данных, описывающих словарь базовых описаний и актуализируемых данных о состоянии информационной модели.</a:t>
-            </a:r>
-          </a:p>
-          <a:p>
-            <a:pPr marL="0" indent="0">
-              <a:buNone/>
-            </a:pPr>
-            <a:r>
-              <a:rPr lang="ru-RU" dirty="0"/>
-              <a:t>Входные данные:</a:t>
-            </a:r>
-          </a:p>
-          <a:p>
-            <a:r>
-              <a:rPr lang="ru-RU" dirty="0"/>
-              <a:t>Видеопоток: 640×480+, 15–30 кадров/с, формат JPEG через </a:t>
-            </a:r>
-            <a:r>
-              <a:rPr lang="ru-RU" dirty="0" err="1"/>
-              <a:t>WebSocket</a:t>
-            </a:r>
-            <a:endParaRPr lang="ru-RU" dirty="0"/>
-          </a:p>
-          <a:p>
-            <a:r>
-              <a:rPr lang="ru-RU" dirty="0"/>
-              <a:t>Аудиопоток: 16 кГц, моно, формат </a:t>
-            </a:r>
-            <a:r>
-              <a:rPr lang="ru-RU" dirty="0" err="1"/>
-              <a:t>WebM</a:t>
-            </a:r>
-            <a:r>
-              <a:rPr lang="ru-RU" dirty="0"/>
-              <a:t>/Opus</a:t>
-            </a:r>
-          </a:p>
-          <a:p>
-            <a:pPr marL="0" indent="0">
-              <a:buNone/>
-            </a:pPr>
-            <a:r>
-              <a:rPr lang="ru-RU" dirty="0"/>
-              <a:t>Обучающие датасеты:</a:t>
-            </a:r>
-          </a:p>
-          <a:p>
-            <a:r>
-              <a:rPr lang="ru-RU" dirty="0"/>
-              <a:t>Для эмоций: FER-2013 (35 000 изображений), </a:t>
+              <a:t>Для обучения и валидации моделей классификации эмоций использовались открытые датасеты FER-2013 (35 000 изображений), </a:t>
             </a:r>
             <a:r>
               <a:rPr lang="ru-RU" dirty="0" err="1"/>
@@ -4129,65 +4766,81 @@
             </a:r>
             <a:r>
               <a:rPr lang="ru-RU" dirty="0"/>
-              <a:t> (1 000 000+), RAF-DB</a:t>
-            </a:r>
-          </a:p>
-          <a:p>
+              <a:t> (1 000 000+ размеченных кадров) и RAF-DB.</a:t>
+            </a:r>
+          </a:p>
+          <a:p>
+            <a:pPr algn="just"/>
             <a:r>
               <a:rPr lang="ru-RU" dirty="0"/>
-              <a:t>Для речи: </a:t>
+              <a:t>Изображения прошли предварительную подготовку: нормализация размера, конвертация в градации серого, выравнивание геометрии лица на основе ключевых точек.</a:t>
+            </a:r>
+          </a:p>
+          <a:p>
+            <a:pPr algn="just"/>
+            <a:r>
+              <a:rPr lang="ru-RU" dirty="0"/>
+              <a:t>Для повышения устойчивости модели к изменениям освещения и ракурсов применялось </a:t>
             </a:r>
             <a:r>
               <a:rPr lang="ru-RU" dirty="0" err="1"/>
-              <a:t>LibriSpeech</a:t>
+              <a:t>аугментирование</a:t>
             </a:r>
             <a:r>
               <a:rPr lang="ru-RU" dirty="0"/>
-              <a:t> (1000 часов), Common Voice (многоязычный)</a:t>
-            </a:r>
-          </a:p>
-        </p:txBody>
-      </p:sp>
-      <p:sp>
-        <p:nvSpPr>
-          <p:cNvPr id="6" name="TextBox 5">
-            <a:extLst>
-              <a:ext uri="{FF2B5EF4-FFF2-40B4-BE49-F238E27FC236}">
-                <a16:creationId xmlns:a16="http://schemas.microsoft.com/office/drawing/2014/main" id="{4B50098F-7052-48E4-A34F-402D8BB81F7F}"/>
-              </a:ext>
-            </a:extLst>
-          </p:cNvPr>
-          <p:cNvSpPr txBox="1"/>
-          <p:nvPr/>
-        </p:nvSpPr>
-        <p:spPr>
-          <a:xfrm>
-            <a:off x="10990555" y="6391922"/>
-            <a:ext cx="870012" cy="372862"/>
-          </a:xfrm>
-          <a:prstGeom prst="rect">
-            <a:avLst/>
-          </a:prstGeom>
-          <a:noFill/>
-        </p:spPr>
-        <p:txBody>
-          <a:bodyPr wrap="square" rtlCol="0">
-            <a:spAutoFit/>
-          </a:bodyPr>
-          <a:lstStyle/>
-          <a:p>
-            <a:r>
-              <a:rPr lang="en-US" dirty="0"/>
-              <a:t>11/22</a:t>
-            </a:r>
-            <a:endParaRPr lang="ru-RU" dirty="0"/>
+              <a:t>: случайные повороты, сдвиги, изменение контрастности и добавление шума.</a:t>
+            </a:r>
+          </a:p>
+          <a:p>
+            <a:pPr algn="just"/>
+            <a:r>
+              <a:rPr lang="ru-RU" dirty="0"/>
+              <a:t>Разметка осуществлялась по 7 категориям (6 базовых эмоций + нейтрально) с перекрёстной проверкой </a:t>
+            </a:r>
+            <a:r>
+              <a:rPr lang="ru-RU" dirty="0" err="1"/>
+              <a:t>аннотаторов</a:t>
+            </a:r>
+            <a:r>
+              <a:rPr lang="ru-RU" dirty="0"/>
+              <a:t> для минимизации ошибок в обучающей выборке.</a:t>
+            </a:r>
+          </a:p>
+        </p:txBody>
+      </p:sp>
+      <p:sp>
+        <p:nvSpPr>
+          <p:cNvPr id="4" name="Номер слайда 3">
+            <a:extLst>
+              <a:ext uri="{FF2B5EF4-FFF2-40B4-BE49-F238E27FC236}">
+                <a16:creationId xmlns:a16="http://schemas.microsoft.com/office/drawing/2014/main" id="{BEFC8532-F45A-69C0-A2DF-8DF9C82CCC68}"/>
+              </a:ext>
+            </a:extLst>
+          </p:cNvPr>
+          <p:cNvSpPr>
+            <a:spLocks noGrp="1"/>
+          </p:cNvSpPr>
+          <p:nvPr>
+            <p:ph type="sldNum" sz="quarter" idx="12"/>
+          </p:nvPr>
+        </p:nvSpPr>
+        <p:spPr/>
+        <p:txBody>
+          <a:bodyPr/>
+          <a:lstStyle/>
+          <a:p>
+            <a:fld id="{5F9DB6E4-81A8-48FA-A111-413E3E85E768}" type="slidenum">
+              <a:rPr lang="ru-RU" smtClean="0"/>
+              <a:t>13</a:t>
+            </a:fld>
+            <a:endParaRPr lang="ru-RU"/>
           </a:p>
         </p:txBody>
       </p:sp>
     </p:spTree>
     <p:extLst>
       <p:ext uri="{BB962C8B-B14F-4D97-AF65-F5344CB8AC3E}">
-        <p14:creationId xmlns:p14="http://schemas.microsoft.com/office/powerpoint/2010/main" val="2287653594"/>
+        <p14:creationId xmlns:p14="http://schemas.microsoft.com/office/powerpoint/2010/main" val="4052091097"/>
       </p:ext>
     </p:extLst>
   </p:cSld>
@@ -4219,7 +4872,7 @@
           <p:cNvPr id="2" name="Заголовок 1">
             <a:extLst>
               <a:ext uri="{FF2B5EF4-FFF2-40B4-BE49-F238E27FC236}">
-                <a16:creationId xmlns:a16="http://schemas.microsoft.com/office/drawing/2014/main" id="{6AE47E73-D877-4497-A30F-9D6C2A470274}"/>
+                <a16:creationId xmlns:a16="http://schemas.microsoft.com/office/drawing/2014/main" id="{554A4237-7384-4D65-B40A-9F7802E2C2BF}"/>
               </a:ext>
             </a:extLst>
           </p:cNvPr>
@@ -4230,19 +4883,14 @@
             <p:ph type="title"/>
           </p:nvPr>
         </p:nvSpPr>
-        <p:spPr>
-          <a:xfrm>
-            <a:off x="838200" y="18255"/>
-            <a:ext cx="10515600" cy="1325563"/>
-          </a:xfrm>
-        </p:spPr>
+        <p:spPr/>
         <p:txBody>
           <a:bodyPr/>
           <a:lstStyle/>
           <a:p>
             <a:r>
               <a:rPr lang="ru-RU" dirty="0"/>
-              <a:t>Пример обработки видеопотока</a:t>
+              <a:t>Датасеты для обучения моделей распознавания речи</a:t>
             </a:r>
           </a:p>
         </p:txBody>
@@ -4252,7 +4900,7 @@
           <p:cNvPr id="3" name="Объект 2">
             <a:extLst>
               <a:ext uri="{FF2B5EF4-FFF2-40B4-BE49-F238E27FC236}">
-                <a16:creationId xmlns:a16="http://schemas.microsoft.com/office/drawing/2014/main" id="{0EC84FC0-D965-4180-9E61-13CDF03E77C5}"/>
+                <a16:creationId xmlns:a16="http://schemas.microsoft.com/office/drawing/2014/main" id="{A03513E5-CE54-4AB7-8986-EBEFE16031CF}"/>
               </a:ext>
             </a:extLst>
           </p:cNvPr>
@@ -4265,158 +4913,90 @@
         </p:nvSpPr>
         <p:spPr>
           <a:xfrm>
-            <a:off x="374904" y="1038686"/>
-            <a:ext cx="11558016" cy="5819313"/>
+            <a:off x="676656" y="1690688"/>
+            <a:ext cx="10677144" cy="4802187"/>
           </a:xfrm>
         </p:spPr>
         <p:txBody>
           <a:bodyPr>
-            <a:normAutofit fontScale="92500" lnSpcReduction="10000"/>
+            <a:normAutofit fontScale="92500"/>
           </a:bodyPr>
           <a:lstStyle/>
           <a:p>
-            <a:pPr marL="0" indent="0">
-              <a:buNone/>
-            </a:pPr>
             <a:r>
               <a:rPr lang="ru-RU" dirty="0"/>
-              <a:t>Захват и передача:</a:t>
-            </a:r>
-          </a:p>
-          <a:p>
+              <a:t>Для обучения и тонкой настройки модели распознавания речи использовались многоязычные датасеты </a:t>
+            </a:r>
+            <a:r>
+              <a:rPr lang="ru-RU" dirty="0" err="1"/>
+              <a:t>LibriSpeech</a:t>
+            </a:r>
             <a:r>
               <a:rPr lang="ru-RU" dirty="0"/>
-              <a:t>Клиент извлекает кадры через </a:t>
+              <a:t> (1000 часов размеченной речи) и Mozilla Common Voice.</a:t>
+            </a:r>
+          </a:p>
+          <a:p>
+            <a:r>
+              <a:rPr lang="ru-RU" dirty="0"/>
+              <a:t>Аудиозаписи прошли предобработку: приведение к единой частоте дискретизации 16 кГц, нормализация громкости, фильтрация низкочастотных шумов и удаление сегментов с молчанием.</a:t>
+            </a:r>
+          </a:p>
+          <a:p>
+            <a:r>
+              <a:rPr lang="ru-RU" dirty="0"/>
+              <a:t>Для адаптации под русскоязычные HR-сценарии применялась дополнительная разметка профессиональной терминологии и коррекция фонетических особенностей речи.</a:t>
+            </a:r>
+          </a:p>
+          <a:p>
+            <a:r>
+              <a:rPr lang="ru-RU" dirty="0"/>
+              <a:t>Датасеты разделены на обучающую, </a:t>
             </a:r>
             <a:r>
               <a:rPr lang="ru-RU" dirty="0" err="1"/>
-              <a:t>canvas</a:t>
+              <a:t>валидационную</a:t>
             </a:r>
             <a:r>
               <a:rPr lang="ru-RU" dirty="0"/>
-              <a:t> с интервалом 200–500 мс</a:t>
-            </a:r>
-          </a:p>
-          <a:p>
+              <a:t> и тестовую выборки для объективной оценки метрики WER (Word </a:t>
+            </a:r>
+            <a:r>
+              <a:rPr lang="ru-RU" dirty="0" err="1"/>
+              <a:t>Error</a:t>
+            </a:r>
             <a:r>
               <a:rPr lang="ru-RU" dirty="0"/>
-              <a:t>Изображение конвертируется в JPEG Base64 и передаётся через </a:t>
-            </a:r>
-            <a:r>
-              <a:rPr lang="ru-RU" dirty="0" err="1"/>
-              <a:t>WebSocket</a:t>
-            </a:r>
-            <a:endParaRPr lang="ru-RU" dirty="0"/>
-          </a:p>
-          <a:p>
-            <a:pPr marL="0" indent="0">
-              <a:buNone/>
-            </a:pPr>
-            <a:r>
-              <a:rPr lang="ru-RU" dirty="0"/>
-              <a:t>Детекция на сервере:</a:t>
-            </a:r>
-          </a:p>
-          <a:p>
-            <a:r>
-              <a:rPr lang="ru-RU" dirty="0"/>
-              <a:t>AI-шлюз декодирует изображение и передаёт в модуль MTCNN</a:t>
-            </a:r>
-          </a:p>
-          <a:p>
-            <a:r>
-              <a:rPr lang="ru-RU" dirty="0"/>
-              <a:t>Каскадная сеть последовательно обрабатывает кадр через P-Net, R-Net, O-Net</a:t>
-            </a:r>
-          </a:p>
-          <a:p>
-            <a:r>
-              <a:rPr lang="ru-RU" dirty="0"/>
-              <a:t>Определяются 5 ключевых точек для выравнивания лица</a:t>
-            </a:r>
-          </a:p>
-          <a:p>
-            <a:pPr marL="0" indent="0">
-              <a:buNone/>
-            </a:pPr>
-            <a:r>
-              <a:rPr lang="ru-RU" dirty="0"/>
-              <a:t>Классификация:</a:t>
-            </a:r>
-          </a:p>
-          <a:p>
-            <a:r>
-              <a:rPr lang="ru-RU" dirty="0"/>
-              <a:t>Выровненное изображение подаётся на вход модели </a:t>
-            </a:r>
-            <a:r>
-              <a:rPr lang="ru-RU" dirty="0" err="1"/>
-              <a:t>DeepFace</a:t>
-            </a:r>
-            <a:endParaRPr lang="ru-RU" dirty="0"/>
-          </a:p>
-          <a:p>
-            <a:r>
-              <a:rPr lang="ru-RU" dirty="0"/>
-              <a:t>Возвращаются вероятности принадлежности к 6 базовым эмоциям и нейтральному состоянию</a:t>
-            </a:r>
-          </a:p>
-          <a:p>
-            <a:r>
-              <a:rPr lang="ru-RU" dirty="0"/>
-              <a:t>Сохранение: Результаты записываются в </a:t>
-            </a:r>
-            <a:r>
-              <a:rPr lang="ru-RU" dirty="0" err="1"/>
-              <a:t>PostgreSQL</a:t>
-            </a:r>
-            <a:r>
-              <a:rPr lang="ru-RU" dirty="0"/>
-              <a:t> и транслируются клиентам в реальном времени</a:t>
-            </a:r>
-          </a:p>
-        </p:txBody>
-      </p:sp>
-      <p:sp>
-        <p:nvSpPr>
-          <p:cNvPr id="5" name="TextBox 4">
-            <a:extLst>
-              <a:ext uri="{FF2B5EF4-FFF2-40B4-BE49-F238E27FC236}">
-                <a16:creationId xmlns:a16="http://schemas.microsoft.com/office/drawing/2014/main" id="{B956DD11-6E19-4DE8-AAA6-BECB7A79B558}"/>
-              </a:ext>
-            </a:extLst>
-          </p:cNvPr>
-          <p:cNvSpPr txBox="1"/>
-          <p:nvPr/>
-        </p:nvSpPr>
-        <p:spPr>
-          <a:xfrm>
-            <a:off x="10990555" y="6391922"/>
-            <a:ext cx="870012" cy="372862"/>
-          </a:xfrm>
-          <a:prstGeom prst="rect">
-            <a:avLst/>
-          </a:prstGeom>
-          <a:noFill/>
-        </p:spPr>
-        <p:txBody>
-          <a:bodyPr wrap="square" rtlCol="0">
-            <a:spAutoFit/>
-          </a:bodyPr>
-          <a:lstStyle/>
-          <a:p>
-            <a:r>
-              <a:rPr lang="en-US" dirty="0"/>
-              <a:t>1</a:t>
-            </a:r>
-            <a:r>
-              <a:rPr lang="ru-RU" dirty="0"/>
-              <a:t>2</a:t>
-            </a:r>
-            <a:r>
-              <a:rPr lang="en-US" dirty="0"/>
-              <a:t>/22</a:t>
-            </a:r>
+              <a:t> Rate) и предотвращения переобучения модели.</a:t>
+            </a:r>
+          </a:p>
+        </p:txBody>
+      </p:sp>
+      <p:sp>
+        <p:nvSpPr>
+          <p:cNvPr id="4" name="Номер слайда 3">
+            <a:extLst>
+              <a:ext uri="{FF2B5EF4-FFF2-40B4-BE49-F238E27FC236}">
+                <a16:creationId xmlns:a16="http://schemas.microsoft.com/office/drawing/2014/main" id="{876FA01B-9A52-F89F-A16D-335822DC56DD}"/>
+              </a:ext>
+            </a:extLst>
+          </p:cNvPr>
+          <p:cNvSpPr>
+            <a:spLocks noGrp="1"/>
+          </p:cNvSpPr>
+          <p:nvPr>
+            <p:ph type="sldNum" sz="quarter" idx="12"/>
+          </p:nvPr>
+        </p:nvSpPr>
+        <p:spPr/>
+        <p:txBody>
+          <a:bodyPr/>
+          <a:lstStyle/>
+          <a:p>
+            <a:fld id="{5F9DB6E4-81A8-48FA-A111-413E3E85E768}" type="slidenum">
+              <a:rPr lang="ru-RU"/>
+              <a:t>14</a:t>
+            </a:fld>
             <a:endParaRPr lang="ru-RU" dirty="0"/>
           </a:p>
         </p:txBody>
@@ -4424,7 +5004,7 @@
     </p:spTree>
     <p:extLst>
       <p:ext uri="{BB962C8B-B14F-4D97-AF65-F5344CB8AC3E}">
-        <p14:creationId xmlns:p14="http://schemas.microsoft.com/office/powerpoint/2010/main" val="2338647298"/>
+        <p14:creationId xmlns:p14="http://schemas.microsoft.com/office/powerpoint/2010/main" val="2492345886"/>
       </p:ext>
     </p:extLst>
   </p:cSld>
@@ -4456,7 +5036,7 @@
           <p:cNvPr id="2" name="Заголовок 1">
             <a:extLst>
               <a:ext uri="{FF2B5EF4-FFF2-40B4-BE49-F238E27FC236}">
-                <a16:creationId xmlns:a16="http://schemas.microsoft.com/office/drawing/2014/main" id="{07D815F8-363A-4FDD-BF3E-513F73DA662A}"/>
+                <a16:creationId xmlns:a16="http://schemas.microsoft.com/office/drawing/2014/main" id="{6AE47E73-D877-4497-A30F-9D6C2A470274}"/>
               </a:ext>
             </a:extLst>
           </p:cNvPr>
@@ -4467,210 +5047,86 @@
             <p:ph type="title"/>
           </p:nvPr>
         </p:nvSpPr>
-        <p:spPr/>
-        <p:txBody>
-          <a:bodyPr/>
+        <p:spPr>
+          <a:xfrm>
+            <a:off x="426720" y="502887"/>
+            <a:ext cx="4806346" cy="1325563"/>
+          </a:xfrm>
+        </p:spPr>
+        <p:txBody>
+          <a:bodyPr>
+            <a:normAutofit fontScale="90000"/>
+          </a:bodyPr>
           <a:lstStyle/>
           <a:p>
             <a:r>
               <a:rPr lang="ru-RU" dirty="0"/>
-              <a:t>Пример обработки аудиопотока</a:t>
-            </a:r>
-          </a:p>
-        </p:txBody>
-      </p:sp>
-      <p:sp>
-        <p:nvSpPr>
-          <p:cNvPr id="3" name="Объект 2">
-            <a:extLst>
-              <a:ext uri="{FF2B5EF4-FFF2-40B4-BE49-F238E27FC236}">
-                <a16:creationId xmlns:a16="http://schemas.microsoft.com/office/drawing/2014/main" id="{CEBD09E6-48D2-4C1B-A424-71AEB12D05E6}"/>
-              </a:ext>
-            </a:extLst>
-          </p:cNvPr>
-          <p:cNvSpPr>
-            <a:spLocks noGrp="1"/>
-          </p:cNvSpPr>
-          <p:nvPr>
-            <p:ph idx="1"/>
-          </p:nvPr>
-        </p:nvSpPr>
-        <p:spPr/>
-        <p:txBody>
-          <a:bodyPr>
-            <a:normAutofit fontScale="62500" lnSpcReduction="20000"/>
-          </a:bodyPr>
-          <a:lstStyle/>
-          <a:p>
-            <a:pPr marL="0" indent="0" algn="just">
-              <a:buNone/>
-            </a:pPr>
-            <a:r>
-              <a:rPr lang="ru-RU" dirty="0"/>
-              <a:t>Захват и буферизация:</a:t>
-            </a:r>
-          </a:p>
-          <a:p>
-            <a:pPr algn="just"/>
-            <a:r>
-              <a:rPr lang="ru-RU" dirty="0"/>
-              <a:t>Клиент записывает аудио через </a:t>
-            </a:r>
-            <a:r>
-              <a:rPr lang="ru-RU" dirty="0" err="1"/>
-              <a:t>MediaRecorder</a:t>
-            </a:r>
-            <a:r>
-              <a:rPr lang="ru-RU" dirty="0"/>
-              <a:t> API</a:t>
-            </a:r>
-          </a:p>
-          <a:p>
-            <a:pPr algn="just"/>
-            <a:r>
-              <a:rPr lang="ru-RU" dirty="0"/>
-              <a:t>Стратегия кумулятивного накопления </a:t>
-            </a:r>
-            <a:r>
-              <a:rPr lang="ru-RU" dirty="0" err="1"/>
-              <a:t>чанков</a:t>
-            </a:r>
-            <a:r>
-              <a:rPr lang="ru-RU" dirty="0"/>
-              <a:t> обеспечивает непрерывность потока</a:t>
-            </a:r>
-          </a:p>
-          <a:p>
-            <a:pPr marL="0" indent="0" algn="just">
-              <a:buNone/>
-            </a:pPr>
-            <a:r>
-              <a:rPr lang="ru-RU" dirty="0"/>
-              <a:t>Кодирование:</a:t>
-            </a:r>
-          </a:p>
-          <a:p>
-            <a:pPr algn="just"/>
-            <a:r>
-              <a:rPr lang="ru-RU" dirty="0"/>
-              <a:t>Буфер кодируется в Base64 и отправляется с интервалом 1–2 секунды</a:t>
-            </a:r>
-          </a:p>
-          <a:p>
-            <a:pPr algn="just"/>
-            <a:r>
-              <a:rPr lang="ru-RU" dirty="0"/>
-              <a:t>Предотвращается потеря начальных фрагментов речи</a:t>
-            </a:r>
-          </a:p>
-          <a:p>
-            <a:pPr marL="0" indent="0" algn="just">
-              <a:buNone/>
-            </a:pPr>
-            <a:r>
-              <a:rPr lang="ru-RU" dirty="0"/>
-              <a:t>Распознавание:</a:t>
-            </a:r>
-          </a:p>
-          <a:p>
-            <a:pPr algn="just"/>
-            <a:r>
-              <a:rPr lang="ru-RU" dirty="0"/>
-              <a:t>Сервер декодирует </a:t>
-            </a:r>
-            <a:r>
-              <a:rPr lang="ru-RU" dirty="0" err="1"/>
-              <a:t>WebM</a:t>
-            </a:r>
-            <a:r>
-              <a:rPr lang="ru-RU" dirty="0"/>
-              <a:t>/Opus в PCM 16 кГц</a:t>
-            </a:r>
-          </a:p>
-          <a:p>
-            <a:pPr algn="just"/>
-            <a:r>
-              <a:rPr lang="ru-RU" dirty="0"/>
-              <a:t>Выполняется нормализация громкости и фильтрация шумов</a:t>
-            </a:r>
-          </a:p>
-          <a:p>
-            <a:pPr algn="just"/>
-            <a:r>
-              <a:rPr lang="ru-RU" dirty="0"/>
-              <a:t>Сигнал передаётся в </a:t>
-            </a:r>
-            <a:r>
-              <a:rPr lang="ru-RU" dirty="0" err="1"/>
-              <a:t>faster-whisper</a:t>
-            </a:r>
-            <a:r>
-              <a:rPr lang="ru-RU" dirty="0"/>
-              <a:t> для </a:t>
-            </a:r>
-            <a:r>
-              <a:rPr lang="ru-RU" dirty="0" err="1"/>
-              <a:t>транскрибации</a:t>
-            </a:r>
-            <a:endParaRPr lang="ru-RU" dirty="0"/>
-          </a:p>
-          <a:p>
-            <a:pPr marL="0" indent="0" algn="just">
-              <a:buNone/>
-            </a:pPr>
-            <a:r>
-              <a:rPr lang="ru-RU" dirty="0"/>
-              <a:t>Возврат результатов:</a:t>
-            </a:r>
-          </a:p>
-          <a:p>
-            <a:pPr algn="just"/>
-            <a:r>
-              <a:rPr lang="ru-RU" dirty="0"/>
-              <a:t>Сервис возвращает частичный и финальный тексты с метаданными</a:t>
-            </a:r>
-          </a:p>
-          <a:p>
-            <a:pPr algn="just"/>
-            <a:r>
-              <a:rPr lang="ru-RU" dirty="0"/>
-              <a:t>Результаты сохраняются в БД и транслируются для отображения в интерфейсе</a:t>
-            </a:r>
-          </a:p>
-        </p:txBody>
-      </p:sp>
-      <p:sp>
-        <p:nvSpPr>
-          <p:cNvPr id="4" name="TextBox 3">
-            <a:extLst>
-              <a:ext uri="{FF2B5EF4-FFF2-40B4-BE49-F238E27FC236}">
-                <a16:creationId xmlns:a16="http://schemas.microsoft.com/office/drawing/2014/main" id="{BD401ADA-F907-446F-A529-8B6A4967B58D}"/>
-              </a:ext>
-            </a:extLst>
-          </p:cNvPr>
-          <p:cNvSpPr txBox="1"/>
+              <a:t>Алгоритмическое обеспечение. Алгоритм работы программы</a:t>
+            </a:r>
+          </a:p>
+        </p:txBody>
+      </p:sp>
+      <p:pic>
+        <p:nvPicPr>
+          <p:cNvPr id="14" name="Рисунок 13" descr="Изображение выглядит как текст, снимок экрана, Шрифт, круг&#10;&#10;Автоматически созданное описание">
+            <a:extLst>
+              <a:ext uri="{FF2B5EF4-FFF2-40B4-BE49-F238E27FC236}">
+                <a16:creationId xmlns:a16="http://schemas.microsoft.com/office/drawing/2014/main" id="{64B798B7-B817-76FD-B22A-243899D54FCF}"/>
+              </a:ext>
+            </a:extLst>
+          </p:cNvPr>
+          <p:cNvPicPr>
+            <a:picLocks noChangeAspect="1"/>
+          </p:cNvPicPr>
           <p:nvPr/>
-        </p:nvSpPr>
-        <p:spPr>
-          <a:xfrm>
-            <a:off x="10990555" y="6391922"/>
-            <a:ext cx="870012" cy="372862"/>
+        </p:nvPicPr>
+        <p:blipFill>
+          <a:blip r:embed="rId2">
+            <a:extLst>
+              <a:ext uri="{28A0092B-C50C-407E-A947-70E740481C1C}">
+                <a14:useLocalDpi xmlns:a14="http://schemas.microsoft.com/office/drawing/2010/main" val="0"/>
+              </a:ext>
+            </a:extLst>
+          </a:blip>
+          <a:stretch>
+            <a:fillRect/>
+          </a:stretch>
+        </p:blipFill>
+        <p:spPr>
+          <a:xfrm>
+            <a:off x="3888898" y="93216"/>
+            <a:ext cx="7577678" cy="6452798"/>
           </a:xfrm>
           <a:prstGeom prst="rect">
             <a:avLst/>
           </a:prstGeom>
-          <a:noFill/>
-        </p:spPr>
-        <p:txBody>
-          <a:bodyPr wrap="square" rtlCol="0">
-            <a:spAutoFit/>
-          </a:bodyPr>
-          <a:lstStyle/>
-          <a:p>
-            <a:r>
-              <a:rPr lang="en-US" dirty="0"/>
-              <a:t>13/22</a:t>
-            </a:r>
+        </p:spPr>
+      </p:pic>
+      <p:sp>
+        <p:nvSpPr>
+          <p:cNvPr id="3" name="Номер слайда 2">
+            <a:extLst>
+              <a:ext uri="{FF2B5EF4-FFF2-40B4-BE49-F238E27FC236}">
+                <a16:creationId xmlns:a16="http://schemas.microsoft.com/office/drawing/2014/main" id="{7F01DB20-C1C1-2C1C-3C13-1BAAD2296A64}"/>
+              </a:ext>
+            </a:extLst>
+          </p:cNvPr>
+          <p:cNvSpPr>
+            <a:spLocks noGrp="1"/>
+          </p:cNvSpPr>
+          <p:nvPr>
+            <p:ph type="sldNum" sz="quarter" idx="12"/>
+          </p:nvPr>
+        </p:nvSpPr>
+        <p:spPr/>
+        <p:txBody>
+          <a:bodyPr/>
+          <a:lstStyle/>
+          <a:p>
+            <a:fld id="{5F9DB6E4-81A8-48FA-A111-413E3E85E768}" type="slidenum">
+              <a:rPr lang="ru-RU" smtClean="0"/>
+              <a:t>15</a:t>
+            </a:fld>
             <a:endParaRPr lang="ru-RU" dirty="0"/>
           </a:p>
         </p:txBody>
@@ -4678,7 +5134,7 @@
     </p:spTree>
     <p:extLst>
       <p:ext uri="{BB962C8B-B14F-4D97-AF65-F5344CB8AC3E}">
-        <p14:creationId xmlns:p14="http://schemas.microsoft.com/office/powerpoint/2010/main" val="1647174813"/>
+        <p14:creationId xmlns:p14="http://schemas.microsoft.com/office/powerpoint/2010/main" val="634590208"/>
       </p:ext>
     </p:extLst>
   </p:cSld>
@@ -4705,236 +5161,102 @@
           <a:chExt cx="0" cy="0"/>
         </a:xfrm>
       </p:grpSpPr>
-      <p:sp>
-        <p:nvSpPr>
-          <p:cNvPr id="2" name="Заголовок 1">
-            <a:extLst>
-              <a:ext uri="{FF2B5EF4-FFF2-40B4-BE49-F238E27FC236}">
-                <a16:creationId xmlns:a16="http://schemas.microsoft.com/office/drawing/2014/main" id="{7F1BFD6B-99D2-42D5-806B-5AF98D60157D}"/>
-              </a:ext>
-            </a:extLst>
-          </p:cNvPr>
-          <p:cNvSpPr>
-            <a:spLocks noGrp="1"/>
-          </p:cNvSpPr>
-          <p:nvPr>
-            <p:ph type="title"/>
-          </p:nvPr>
-        </p:nvSpPr>
-        <p:spPr>
-          <a:xfrm>
-            <a:off x="204956" y="255273"/>
-            <a:ext cx="4905652" cy="1496735"/>
-          </a:xfrm>
-        </p:spPr>
-        <p:txBody>
-          <a:bodyPr>
-            <a:normAutofit/>
-          </a:bodyPr>
-          <a:lstStyle/>
-          <a:p>
-            <a:r>
-              <a:rPr lang="ru-RU" dirty="0"/>
-              <a:t>Алгоритм работы системы</a:t>
-            </a:r>
-          </a:p>
-        </p:txBody>
-      </p:sp>
-      <p:sp>
-        <p:nvSpPr>
-          <p:cNvPr id="5" name="TextBox 4">
-            <a:extLst>
-              <a:ext uri="{FF2B5EF4-FFF2-40B4-BE49-F238E27FC236}">
-                <a16:creationId xmlns:a16="http://schemas.microsoft.com/office/drawing/2014/main" id="{1C1068E4-64AA-4881-9003-243658ECFBBE}"/>
-              </a:ext>
-            </a:extLst>
-          </p:cNvPr>
-          <p:cNvSpPr txBox="1"/>
+      <p:pic>
+        <p:nvPicPr>
+          <p:cNvPr id="5" name="Рисунок 4">
+            <a:extLst>
+              <a:ext uri="{FF2B5EF4-FFF2-40B4-BE49-F238E27FC236}">
+                <a16:creationId xmlns:a16="http://schemas.microsoft.com/office/drawing/2014/main" id="{3A240AF3-3AA3-3709-E167-D4F5A9CA4FDE}"/>
+              </a:ext>
+            </a:extLst>
+          </p:cNvPr>
+          <p:cNvPicPr>
+            <a:picLocks noChangeAspect="1"/>
+          </p:cNvPicPr>
           <p:nvPr/>
-        </p:nvSpPr>
-        <p:spPr>
-          <a:xfrm>
-            <a:off x="10990555" y="6391922"/>
-            <a:ext cx="870012" cy="372862"/>
+        </p:nvPicPr>
+        <p:blipFill>
+          <a:blip r:embed="rId2"/>
+          <a:stretch>
+            <a:fillRect/>
+          </a:stretch>
+        </p:blipFill>
+        <p:spPr>
+          <a:xfrm>
+            <a:off x="603504" y="1570743"/>
+            <a:ext cx="10222992" cy="5224572"/>
           </a:xfrm>
           <a:prstGeom prst="rect">
             <a:avLst/>
           </a:prstGeom>
-          <a:noFill/>
-        </p:spPr>
-        <p:txBody>
-          <a:bodyPr wrap="square" rtlCol="0">
-            <a:spAutoFit/>
-          </a:bodyPr>
-          <a:lstStyle/>
-          <a:p>
-            <a:r>
-              <a:rPr lang="en-US" dirty="0"/>
-              <a:t>14/22</a:t>
-            </a:r>
-            <a:endParaRPr lang="ru-RU" dirty="0"/>
-          </a:p>
-        </p:txBody>
-      </p:sp>
-      <p:sp>
-        <p:nvSpPr>
-          <p:cNvPr id="6" name="TextBox 5">
-            <a:extLst>
-              <a:ext uri="{FF2B5EF4-FFF2-40B4-BE49-F238E27FC236}">
-                <a16:creationId xmlns:a16="http://schemas.microsoft.com/office/drawing/2014/main" id="{61830C30-DFFB-B5DE-EE03-CA29D77B4CCF}"/>
-              </a:ext>
-            </a:extLst>
-          </p:cNvPr>
-          <p:cNvSpPr txBox="1"/>
-          <p:nvPr/>
-        </p:nvSpPr>
-        <p:spPr>
-          <a:xfrm>
-            <a:off x="5397246" y="546622"/>
-            <a:ext cx="6094476" cy="5355312"/>
-          </a:xfrm>
-          <a:prstGeom prst="rect">
-            <a:avLst/>
-          </a:prstGeom>
-          <a:noFill/>
-        </p:spPr>
-        <p:txBody>
-          <a:bodyPr wrap="square">
-            <a:spAutoFit/>
-          </a:bodyPr>
-          <a:lstStyle/>
-          <a:p>
-            <a:pPr algn="l">
-              <a:buFont typeface="+mj-lt"/>
-              <a:buAutoNum type="arabicPeriod"/>
-            </a:pPr>
+        </p:spPr>
+      </p:pic>
+      <p:sp>
+        <p:nvSpPr>
+          <p:cNvPr id="9" name="Заголовок 8">
+            <a:extLst>
+              <a:ext uri="{FF2B5EF4-FFF2-40B4-BE49-F238E27FC236}">
+                <a16:creationId xmlns:a16="http://schemas.microsoft.com/office/drawing/2014/main" id="{97468337-8816-F43C-CDDA-7015138208A6}"/>
+              </a:ext>
+            </a:extLst>
+          </p:cNvPr>
+          <p:cNvSpPr>
+            <a:spLocks noGrp="1"/>
+          </p:cNvSpPr>
+          <p:nvPr>
+            <p:ph type="title"/>
+          </p:nvPr>
+        </p:nvSpPr>
+        <p:spPr>
+          <a:xfrm>
+            <a:off x="603504" y="93216"/>
+            <a:ext cx="10515600" cy="1325563"/>
+          </a:xfrm>
+        </p:spPr>
+        <p:txBody>
+          <a:bodyPr/>
+          <a:lstStyle/>
+          <a:p>
             <a:r>
               <a:rPr lang="ru-RU" dirty="0"/>
-              <a:t>Аутентификация: Пользователь вводит учётные данные, сервер проверяет </a:t>
-            </a:r>
-            <a:r>
-              <a:rPr lang="ru-RU" dirty="0" err="1"/>
-              <a:t>хеш</a:t>
-            </a:r>
-            <a:r>
-              <a:rPr lang="ru-RU" dirty="0"/>
-              <a:t> пароля </a:t>
-            </a:r>
-            <a:r>
-              <a:rPr lang="ru-RU" dirty="0" err="1"/>
-              <a:t>bcrypt</a:t>
-            </a:r>
-            <a:r>
-              <a:rPr lang="ru-RU" dirty="0"/>
-              <a:t>, выдаёт JWT-токен доступа и токен обновления</a:t>
-            </a:r>
-          </a:p>
-          <a:p>
-            <a:pPr algn="l">
-              <a:buFont typeface="+mj-lt"/>
-              <a:buAutoNum type="arabicPeriod"/>
-            </a:pPr>
-            <a:r>
-              <a:rPr lang="ru-RU" dirty="0"/>
-              <a:t>Создание сессии: Пользователь создаёт встречу или присоединяется по ссылке, сервер регистрирует сессию и инициализирует </a:t>
-            </a:r>
-            <a:r>
-              <a:rPr lang="ru-RU" dirty="0" err="1"/>
-              <a:t>WebSocket</a:t>
-            </a:r>
-            <a:r>
-              <a:rPr lang="ru-RU" dirty="0"/>
-              <a:t>-хаб</a:t>
-            </a:r>
-          </a:p>
-          <a:p>
-            <a:pPr algn="l">
-              <a:buFont typeface="+mj-lt"/>
-              <a:buAutoNum type="arabicPeriod"/>
-            </a:pPr>
-            <a:r>
-              <a:rPr lang="ru-RU" dirty="0"/>
-              <a:t>Захват медиа: Клиент запрашивает доступ к камере и микрофону, запускает компоненты захвата с адаптивной частотой отправки</a:t>
-            </a:r>
-          </a:p>
-          <a:p>
-            <a:pPr algn="l">
-              <a:buFont typeface="+mj-lt"/>
-              <a:buAutoNum type="arabicPeriod"/>
-            </a:pPr>
-            <a:r>
-              <a:rPr lang="ru-RU" dirty="0"/>
-              <a:t>Параллельная обработка: AI-шлюз одновременно анализирует видеопоток (детекция + классификация) и аудиопоток (</a:t>
-            </a:r>
-            <a:r>
-              <a:rPr lang="ru-RU" dirty="0" err="1"/>
-              <a:t>транскрибация</a:t>
-            </a:r>
-            <a:r>
-              <a:rPr lang="ru-RU" dirty="0"/>
-              <a:t> + анализ тона)</a:t>
-            </a:r>
-          </a:p>
-          <a:p>
-            <a:pPr algn="l">
-              <a:buFont typeface="+mj-lt"/>
-              <a:buAutoNum type="arabicPeriod"/>
-            </a:pPr>
-            <a:r>
-              <a:rPr lang="ru-RU" dirty="0"/>
-              <a:t>Агрегация: Результаты записываются в </a:t>
-            </a:r>
-            <a:r>
-              <a:rPr lang="ru-RU" dirty="0" err="1"/>
-              <a:t>PostgreSQL</a:t>
-            </a:r>
-            <a:r>
-              <a:rPr lang="ru-RU" dirty="0"/>
-              <a:t> с временными метками и транслируются клиентам</a:t>
-            </a:r>
-          </a:p>
-          <a:p>
-            <a:pPr algn="l">
-              <a:buFont typeface="+mj-lt"/>
-              <a:buAutoNum type="arabicPeriod"/>
-            </a:pPr>
-            <a:r>
-              <a:rPr lang="ru-RU" dirty="0"/>
-              <a:t>Формирование отчёта: При завершении встречи применяется </a:t>
-            </a:r>
-            <a:r>
-              <a:rPr lang="ru-RU" dirty="0" err="1"/>
-              <a:t>late</a:t>
-            </a:r>
-            <a:r>
-              <a:rPr lang="ru-RU" dirty="0"/>
-              <a:t> </a:t>
-            </a:r>
-            <a:r>
-              <a:rPr lang="ru-RU" dirty="0" err="1"/>
-              <a:t>fusion</a:t>
-            </a:r>
-            <a:r>
-              <a:rPr lang="ru-RU" dirty="0"/>
-              <a:t> для объединения статистики, формируется структурированный отчёт</a:t>
-            </a:r>
-            <a:br>
-              <a:rPr lang="ru-RU" dirty="0"/>
-            </a:br>
-            <a:br>
-              <a:rPr lang="ru-RU" dirty="0"/>
-            </a:br>
-            <a:r>
-              <a:rPr lang="ru-RU" dirty="0"/>
-              <a:t>Картинка: Блок-схема алгоритма (draw.io)</a:t>
-            </a:r>
+              <a:t>Интерфейс системы</a:t>
+            </a:r>
+          </a:p>
+        </p:txBody>
+      </p:sp>
+      <p:sp>
+        <p:nvSpPr>
+          <p:cNvPr id="2" name="Номер слайда 1">
+            <a:extLst>
+              <a:ext uri="{FF2B5EF4-FFF2-40B4-BE49-F238E27FC236}">
+                <a16:creationId xmlns:a16="http://schemas.microsoft.com/office/drawing/2014/main" id="{2DA7844C-4845-591E-A755-516346161CEC}"/>
+              </a:ext>
+            </a:extLst>
+          </p:cNvPr>
+          <p:cNvSpPr>
+            <a:spLocks noGrp="1"/>
+          </p:cNvSpPr>
+          <p:nvPr>
+            <p:ph type="sldNum" sz="quarter" idx="12"/>
+          </p:nvPr>
+        </p:nvSpPr>
+        <p:spPr/>
+        <p:txBody>
+          <a:bodyPr/>
+          <a:lstStyle/>
+          <a:p>
+            <a:fld id="{5F9DB6E4-81A8-48FA-A111-413E3E85E768}" type="slidenum">
+              <a:rPr lang="ru-RU" smtClean="0"/>
+              <a:t>16</a:t>
+            </a:fld>
+            <a:endParaRPr lang="ru-RU"/>
           </a:p>
         </p:txBody>
       </p:sp>
     </p:spTree>
     <p:extLst>
       <p:ext uri="{BB962C8B-B14F-4D97-AF65-F5344CB8AC3E}">
-        <p14:creationId xmlns:p14="http://schemas.microsoft.com/office/powerpoint/2010/main" val="4254625303"/>
+        <p14:creationId xmlns:p14="http://schemas.microsoft.com/office/powerpoint/2010/main" val="3695925043"/>
       </p:ext>
     </p:extLst>
   </p:cSld>
@@ -4963,450 +5285,263 @@
       </p:grpSpPr>
       <p:sp>
         <p:nvSpPr>
-          <p:cNvPr id="5" name="TextBox 4">
-            <a:extLst>
-              <a:ext uri="{FF2B5EF4-FFF2-40B4-BE49-F238E27FC236}">
-                <a16:creationId xmlns:a16="http://schemas.microsoft.com/office/drawing/2014/main" id="{61BED1AB-11C4-48F5-BF70-1ACBA146FC6C}"/>
-              </a:ext>
-            </a:extLst>
-          </p:cNvPr>
-          <p:cNvSpPr txBox="1"/>
-          <p:nvPr/>
-        </p:nvSpPr>
-        <p:spPr>
-          <a:xfrm>
-            <a:off x="10990555" y="6391922"/>
-            <a:ext cx="870012" cy="372862"/>
-          </a:xfrm>
-          <a:prstGeom prst="rect">
-            <a:avLst/>
-          </a:prstGeom>
-          <a:noFill/>
-        </p:spPr>
-        <p:txBody>
-          <a:bodyPr wrap="square" rtlCol="0">
-            <a:spAutoFit/>
+          <p:cNvPr id="2" name="Заголовок 1">
+            <a:extLst>
+              <a:ext uri="{FF2B5EF4-FFF2-40B4-BE49-F238E27FC236}">
+                <a16:creationId xmlns:a16="http://schemas.microsoft.com/office/drawing/2014/main" id="{8E4679AE-9695-41ED-964A-F63B6DC860B9}"/>
+              </a:ext>
+            </a:extLst>
+          </p:cNvPr>
+          <p:cNvSpPr>
+            <a:spLocks noGrp="1"/>
+          </p:cNvSpPr>
+          <p:nvPr>
+            <p:ph type="title"/>
+          </p:nvPr>
+        </p:nvSpPr>
+        <p:spPr>
+          <a:xfrm>
+            <a:off x="838200" y="181992"/>
+            <a:ext cx="10515600" cy="1325563"/>
+          </a:xfrm>
+        </p:spPr>
+        <p:txBody>
+          <a:bodyPr/>
+          <a:lstStyle/>
+          <a:p>
+            <a:r>
+              <a:rPr lang="ru-RU" dirty="0"/>
+              <a:t>Заключение</a:t>
+            </a:r>
+          </a:p>
+        </p:txBody>
+      </p:sp>
+      <p:sp>
+        <p:nvSpPr>
+          <p:cNvPr id="3" name="Объект 2">
+            <a:extLst>
+              <a:ext uri="{FF2B5EF4-FFF2-40B4-BE49-F238E27FC236}">
+                <a16:creationId xmlns:a16="http://schemas.microsoft.com/office/drawing/2014/main" id="{8DA6D676-1DC8-4A9C-81A7-79527C288ADC}"/>
+              </a:ext>
+            </a:extLst>
+          </p:cNvPr>
+          <p:cNvSpPr>
+            <a:spLocks noGrp="1"/>
+          </p:cNvSpPr>
+          <p:nvPr>
+            <p:ph idx="1"/>
+          </p:nvPr>
+        </p:nvSpPr>
+        <p:spPr>
+          <a:xfrm>
+            <a:off x="838200" y="1367162"/>
+            <a:ext cx="10515600" cy="5308846"/>
+          </a:xfrm>
+        </p:spPr>
+        <p:txBody>
+          <a:bodyPr>
+            <a:normAutofit fontScale="92500" lnSpcReduction="10000"/>
           </a:bodyPr>
           <a:lstStyle/>
           <a:p>
-            <a:r>
-              <a:rPr lang="en-US" dirty="0"/>
-              <a:t>15/22</a:t>
-            </a:r>
-            <a:endParaRPr lang="ru-RU" dirty="0"/>
-          </a:p>
-        </p:txBody>
-      </p:sp>
-      <p:sp>
-        <p:nvSpPr>
-          <p:cNvPr id="6" name="Заголовок 1">
-            <a:extLst>
-              <a:ext uri="{FF2B5EF4-FFF2-40B4-BE49-F238E27FC236}">
-                <a16:creationId xmlns:a16="http://schemas.microsoft.com/office/drawing/2014/main" id="{C7FE94C1-7119-09AA-1780-C0215FA1FB94}"/>
-              </a:ext>
-            </a:extLst>
-          </p:cNvPr>
-          <p:cNvSpPr txBox="1">
-            <a:spLocks/>
-          </p:cNvSpPr>
-          <p:nvPr/>
-        </p:nvSpPr>
-        <p:spPr>
-          <a:xfrm>
-            <a:off x="204770" y="146304"/>
-            <a:ext cx="8280862" cy="808551"/>
-          </a:xfrm>
-          <a:prstGeom prst="rect">
-            <a:avLst/>
-          </a:prstGeom>
-        </p:spPr>
-        <p:txBody>
-          <a:bodyPr vert="horz" lIns="91440" tIns="45720" rIns="91440" bIns="45720" rtlCol="0" anchor="ctr">
-            <a:normAutofit/>
-          </a:bodyPr>
-          <a:lstStyle>
-            <a:lvl1pPr algn="l" defTabSz="914400" rtl="0" eaLnBrk="1" latinLnBrk="0" hangingPunct="1">
-              <a:lnSpc>
-                <a:spcPct val="90000"/>
-              </a:lnSpc>
-              <a:spcBef>
-                <a:spcPct val="0"/>
-              </a:spcBef>
-              <a:buNone/>
-              <a:defRPr sz="4400" kern="1200">
-                <a:solidFill>
-                  <a:schemeClr val="tx1"/>
-                </a:solidFill>
-                <a:latin typeface="+mj-lt"/>
-                <a:ea typeface="+mj-ea"/>
-                <a:cs typeface="+mj-cs"/>
-              </a:defRPr>
-            </a:lvl1pPr>
-          </a:lstStyle>
-          <a:p>
-            <a:r>
-              <a:rPr lang="ru-RU" sz="3200" dirty="0"/>
-              <a:t>Интерфейс системы</a:t>
-            </a:r>
-          </a:p>
-        </p:txBody>
-      </p:sp>
-      <p:pic>
-        <p:nvPicPr>
-          <p:cNvPr id="2" name="Рисунок 1">
-            <a:extLst>
-              <a:ext uri="{FF2B5EF4-FFF2-40B4-BE49-F238E27FC236}">
-                <a16:creationId xmlns:a16="http://schemas.microsoft.com/office/drawing/2014/main" id="{3A240AF3-3AA3-3709-E167-D4F5A9CA4FDE}"/>
-              </a:ext>
-            </a:extLst>
-          </p:cNvPr>
-          <p:cNvPicPr>
-            <a:picLocks noChangeAspect="1"/>
-          </p:cNvPicPr>
-          <p:nvPr/>
-        </p:nvPicPr>
-        <p:blipFill>
-          <a:blip r:embed="rId2"/>
-          <a:stretch>
-            <a:fillRect/>
-          </a:stretch>
-        </p:blipFill>
-        <p:spPr>
-          <a:xfrm>
-            <a:off x="204770" y="1467369"/>
-            <a:ext cx="9635940" cy="4924553"/>
-          </a:xfrm>
-          <a:prstGeom prst="rect">
-            <a:avLst/>
-          </a:prstGeom>
-        </p:spPr>
-      </p:pic>
+            <a:pPr algn="just"/>
+            <a:r>
+              <a:rPr lang="ru-RU" dirty="0"/>
+              <a:t>В результате прохождения практики были изучены и описаны средства разработки: языки </a:t>
+            </a:r>
+            <a:r>
+              <a:rPr lang="ru-RU" dirty="0" err="1"/>
+              <a:t>TypeScript</a:t>
+            </a:r>
+            <a:r>
+              <a:rPr lang="ru-RU" dirty="0"/>
+              <a:t>, Go, Python, фреймворки </a:t>
+            </a:r>
+            <a:r>
+              <a:rPr lang="ru-RU" dirty="0" err="1"/>
+              <a:t>React</a:t>
+            </a:r>
+            <a:r>
+              <a:rPr lang="ru-RU" dirty="0"/>
+              <a:t>, </a:t>
+            </a:r>
+            <a:r>
+              <a:rPr lang="ru-RU" dirty="0" err="1"/>
+              <a:t>Gin</a:t>
+            </a:r>
+            <a:r>
+              <a:rPr lang="ru-RU" dirty="0"/>
+              <a:t>, </a:t>
+            </a:r>
+            <a:r>
+              <a:rPr lang="ru-RU" dirty="0" err="1"/>
+              <a:t>FastAPI</a:t>
+            </a:r>
+            <a:r>
+              <a:rPr lang="ru-RU" dirty="0"/>
+              <a:t>, </a:t>
+            </a:r>
+            <a:r>
+              <a:rPr lang="ru-RU" dirty="0" err="1"/>
+              <a:t>сверточные</a:t>
+            </a:r>
+            <a:r>
+              <a:rPr lang="ru-RU" dirty="0"/>
+              <a:t> и рекуррентные нейронные сети, библиотеки </a:t>
+            </a:r>
+            <a:r>
+              <a:rPr lang="ru-RU" dirty="0" err="1"/>
+              <a:t>OpenCV</a:t>
+            </a:r>
+            <a:r>
+              <a:rPr lang="ru-RU" dirty="0"/>
+              <a:t>, </a:t>
+            </a:r>
+            <a:r>
+              <a:rPr lang="ru-RU" dirty="0" err="1"/>
+              <a:t>DeepFace</a:t>
+            </a:r>
+            <a:r>
+              <a:rPr lang="ru-RU" dirty="0"/>
+              <a:t>, </a:t>
+            </a:r>
+            <a:r>
+              <a:rPr lang="ru-RU" dirty="0" err="1"/>
+              <a:t>MediaPipe</a:t>
+            </a:r>
+            <a:r>
+              <a:rPr lang="ru-RU" dirty="0"/>
+              <a:t>, </a:t>
+            </a:r>
+            <a:r>
+              <a:rPr lang="ru-RU" dirty="0" err="1"/>
+              <a:t>faster-whisper</a:t>
+            </a:r>
+            <a:r>
+              <a:rPr lang="ru-RU" dirty="0"/>
+              <a:t>, СУБД </a:t>
+            </a:r>
+            <a:r>
+              <a:rPr lang="ru-RU" dirty="0" err="1"/>
+              <a:t>PostgreSQL</a:t>
+            </a:r>
+            <a:r>
+              <a:rPr lang="ru-RU" dirty="0"/>
+              <a:t>, среда Draw.io.</a:t>
+            </a:r>
+          </a:p>
+          <a:p>
+            <a:pPr algn="just"/>
+            <a:r>
+              <a:rPr lang="ru-RU" dirty="0"/>
+              <a:t>Проработаны виды обеспечения: информационное (видео/аудиопотоки, датасеты), программное (клиент-серверная архитектура, </a:t>
+            </a:r>
+            <a:r>
+              <a:rPr lang="ru-RU" dirty="0" err="1"/>
+              <a:t>микросервисы</a:t>
+            </a:r>
+            <a:r>
+              <a:rPr lang="ru-RU" dirty="0"/>
+              <a:t>), алгоритмическое (детекция, </a:t>
+            </a:r>
+            <a:r>
+              <a:rPr lang="ru-RU" dirty="0" err="1"/>
+              <a:t>транскрибация</a:t>
+            </a:r>
+            <a:r>
+              <a:rPr lang="ru-RU" dirty="0"/>
+              <a:t>, </a:t>
+            </a:r>
+            <a:r>
+              <a:rPr lang="ru-RU" dirty="0" err="1"/>
+              <a:t>late</a:t>
+            </a:r>
+            <a:r>
+              <a:rPr lang="ru-RU" dirty="0"/>
+              <a:t> </a:t>
+            </a:r>
+            <a:r>
+              <a:rPr lang="ru-RU" dirty="0" err="1"/>
+              <a:t>fusion</a:t>
+            </a:r>
+            <a:r>
+              <a:rPr lang="ru-RU" dirty="0"/>
+              <a:t>), математическое (метрики точности, WER).</a:t>
+            </a:r>
+          </a:p>
+          <a:p>
+            <a:pPr algn="just"/>
+            <a:r>
+              <a:rPr lang="ru-RU" dirty="0"/>
+              <a:t>Реализованы модули анализа лица и эмоций на основе MTCNN и </a:t>
+            </a:r>
+            <a:r>
+              <a:rPr lang="ru-RU" dirty="0" err="1"/>
+              <a:t>предобученных</a:t>
+            </a:r>
+            <a:r>
+              <a:rPr lang="ru-RU" dirty="0"/>
+              <a:t> CNN, а также модуль распознавания речи </a:t>
+            </a:r>
+            <a:r>
+              <a:rPr lang="ru-RU" dirty="0" err="1"/>
+              <a:t>faster-whisper</a:t>
+            </a:r>
+            <a:r>
+              <a:rPr lang="ru-RU" dirty="0"/>
+              <a:t> с поддержкой </a:t>
+            </a:r>
+            <a:r>
+              <a:rPr lang="ru-RU" dirty="0" err="1"/>
+              <a:t>streaming</a:t>
+            </a:r>
+            <a:r>
+              <a:rPr lang="ru-RU" dirty="0"/>
+              <a:t>-обработки.</a:t>
+            </a:r>
+          </a:p>
+          <a:p>
+            <a:pPr algn="just"/>
+            <a:r>
+              <a:rPr lang="ru-RU" dirty="0"/>
+              <a:t>Модули интегрированы в единую веб-платформу, протестированы в смоделированных HR-сценариях и готовы к внедрению с соблюдением требований ФЗ-152.</a:t>
+            </a:r>
+          </a:p>
+        </p:txBody>
+      </p:sp>
+      <p:sp>
+        <p:nvSpPr>
+          <p:cNvPr id="5" name="Номер слайда 4">
+            <a:extLst>
+              <a:ext uri="{FF2B5EF4-FFF2-40B4-BE49-F238E27FC236}">
+                <a16:creationId xmlns:a16="http://schemas.microsoft.com/office/drawing/2014/main" id="{09D63931-887F-15C8-43DC-CD5EEB99069D}"/>
+              </a:ext>
+            </a:extLst>
+          </p:cNvPr>
+          <p:cNvSpPr>
+            <a:spLocks noGrp="1"/>
+          </p:cNvSpPr>
+          <p:nvPr>
+            <p:ph type="sldNum" sz="quarter" idx="12"/>
+          </p:nvPr>
+        </p:nvSpPr>
+        <p:spPr/>
+        <p:txBody>
+          <a:bodyPr/>
+          <a:lstStyle/>
+          <a:p>
+            <a:fld id="{5F9DB6E4-81A8-48FA-A111-413E3E85E768}" type="slidenum">
+              <a:rPr lang="ru-RU" smtClean="0"/>
+              <a:t>17</a:t>
+            </a:fld>
+            <a:endParaRPr lang="ru-RU"/>
+          </a:p>
+        </p:txBody>
+      </p:sp>
     </p:spTree>
     <p:extLst>
       <p:ext uri="{BB962C8B-B14F-4D97-AF65-F5344CB8AC3E}">
-        <p14:creationId xmlns:p14="http://schemas.microsoft.com/office/powerpoint/2010/main" val="1850562476"/>
-      </p:ext>
-    </p:extLst>
-  </p:cSld>
-  <p:clrMapOvr>
-    <a:masterClrMapping/>
-  </p:clrMapOvr>
-</p:sld>
-</file>
-
-<file path=ppt/slides/slide18.xml><?xml version="1.0" encoding="utf-8"?>
-<p:sld xmlns:a="http://schemas.openxmlformats.org/drawingml/2006/main" xmlns:r="http://schemas.openxmlformats.org/officeDocument/2006/relationships" xmlns:p="http://schemas.openxmlformats.org/presentationml/2006/main">
-  <p:cSld>
-    <p:spTree>
-      <p:nvGrpSpPr>
-        <p:cNvPr id="1" name=""/>
-        <p:cNvGrpSpPr/>
-        <p:nvPr/>
-      </p:nvGrpSpPr>
-      <p:grpSpPr>
-        <a:xfrm>
-          <a:off x="0" y="0"/>
-          <a:ext cx="0" cy="0"/>
-          <a:chOff x="0" y="0"/>
-          <a:chExt cx="0" cy="0"/>
-        </a:xfrm>
-      </p:grpSpPr>
-      <p:sp>
-        <p:nvSpPr>
-          <p:cNvPr id="2" name="Заголовок 1">
-            <a:extLst>
-              <a:ext uri="{FF2B5EF4-FFF2-40B4-BE49-F238E27FC236}">
-                <a16:creationId xmlns:a16="http://schemas.microsoft.com/office/drawing/2014/main" id="{9423B7ED-CC57-49E9-84A2-D9248AB69B3D}"/>
-              </a:ext>
-            </a:extLst>
-          </p:cNvPr>
-          <p:cNvSpPr>
-            <a:spLocks noGrp="1"/>
-          </p:cNvSpPr>
-          <p:nvPr>
-            <p:ph type="title"/>
-          </p:nvPr>
-        </p:nvSpPr>
-        <p:spPr>
-          <a:xfrm>
-            <a:off x="92475" y="105052"/>
-            <a:ext cx="4204317" cy="2176509"/>
-          </a:xfrm>
-        </p:spPr>
-        <p:txBody>
-          <a:bodyPr>
-            <a:normAutofit/>
-          </a:bodyPr>
-          <a:lstStyle/>
-          <a:p>
-            <a:r>
-              <a:rPr lang="ru-RU" sz="3600" dirty="0"/>
-              <a:t>Пример аналитического отчёта</a:t>
-            </a:r>
-          </a:p>
-        </p:txBody>
-      </p:sp>
-      <p:sp>
-        <p:nvSpPr>
-          <p:cNvPr id="5" name="TextBox 4">
-            <a:extLst>
-              <a:ext uri="{FF2B5EF4-FFF2-40B4-BE49-F238E27FC236}">
-                <a16:creationId xmlns:a16="http://schemas.microsoft.com/office/drawing/2014/main" id="{AC95F111-5EAD-4700-80E6-067F170BC9FE}"/>
-              </a:ext>
-            </a:extLst>
-          </p:cNvPr>
-          <p:cNvSpPr txBox="1"/>
-          <p:nvPr/>
-        </p:nvSpPr>
-        <p:spPr>
-          <a:xfrm>
-            <a:off x="10990555" y="6391922"/>
-            <a:ext cx="870012" cy="372862"/>
-          </a:xfrm>
-          <a:prstGeom prst="rect">
-            <a:avLst/>
-          </a:prstGeom>
-          <a:noFill/>
-        </p:spPr>
-        <p:txBody>
-          <a:bodyPr wrap="square" rtlCol="0">
-            <a:spAutoFit/>
-          </a:bodyPr>
-          <a:lstStyle/>
-          <a:p>
-            <a:r>
-              <a:rPr lang="en-US" dirty="0"/>
-              <a:t>16/22</a:t>
-            </a:r>
-            <a:endParaRPr lang="ru-RU" dirty="0"/>
-          </a:p>
-        </p:txBody>
-      </p:sp>
-      <p:sp>
-        <p:nvSpPr>
-          <p:cNvPr id="7" name="TextBox 6">
-            <a:extLst>
-              <a:ext uri="{FF2B5EF4-FFF2-40B4-BE49-F238E27FC236}">
-                <a16:creationId xmlns:a16="http://schemas.microsoft.com/office/drawing/2014/main" id="{414F11B4-836D-A570-EF85-38D41BD9C562}"/>
-              </a:ext>
-            </a:extLst>
-          </p:cNvPr>
-          <p:cNvSpPr txBox="1"/>
-          <p:nvPr/>
-        </p:nvSpPr>
-        <p:spPr>
-          <a:xfrm>
-            <a:off x="2978658" y="2690336"/>
-            <a:ext cx="6140196" cy="1477328"/>
-          </a:xfrm>
-          <a:prstGeom prst="rect">
-            <a:avLst/>
-          </a:prstGeom>
-          <a:noFill/>
-        </p:spPr>
-        <p:txBody>
-          <a:bodyPr wrap="square">
-            <a:spAutoFit/>
-          </a:bodyPr>
-          <a:lstStyle/>
-          <a:p>
-            <a:pPr algn="l">
-              <a:buFont typeface="Arial" panose="020B0604020202020204" pitchFamily="34" charset="0"/>
-              <a:buChar char="•"/>
-            </a:pPr>
-            <a:r>
-              <a:rPr lang="ru-RU" dirty="0"/>
-              <a:t>Сводка по встрече: распределение эмоций, активность, ключевые фразы</a:t>
-            </a:r>
-          </a:p>
-          <a:p>
-            <a:pPr algn="l">
-              <a:buFont typeface="Arial" panose="020B0604020202020204" pitchFamily="34" charset="0"/>
-              <a:buChar char="•"/>
-            </a:pPr>
-            <a:r>
-              <a:rPr lang="ru-RU" dirty="0"/>
-              <a:t>Карточки участников с индивидуальной статистикой</a:t>
-            </a:r>
-          </a:p>
-          <a:p>
-            <a:pPr algn="l">
-              <a:buFont typeface="Arial" panose="020B0604020202020204" pitchFamily="34" charset="0"/>
-              <a:buChar char="•"/>
-            </a:pPr>
-            <a:r>
-              <a:rPr lang="ru-RU" dirty="0" err="1"/>
-              <a:t>Таймлайны</a:t>
-            </a:r>
-            <a:r>
-              <a:rPr lang="ru-RU" dirty="0"/>
-              <a:t> изменения эмоций</a:t>
-            </a:r>
-          </a:p>
-          <a:p>
-            <a:pPr algn="l"/>
-            <a:r>
-              <a:rPr lang="ru-RU" dirty="0"/>
-              <a:t>Картинка: Скриншот примера отчёта (если есть в проекте)</a:t>
-            </a:r>
-          </a:p>
-        </p:txBody>
-      </p:sp>
-    </p:spTree>
-    <p:extLst>
-      <p:ext uri="{BB962C8B-B14F-4D97-AF65-F5344CB8AC3E}">
-        <p14:creationId xmlns:p14="http://schemas.microsoft.com/office/powerpoint/2010/main" val="141243602"/>
-      </p:ext>
-    </p:extLst>
-  </p:cSld>
-  <p:clrMapOvr>
-    <a:masterClrMapping/>
-  </p:clrMapOvr>
-</p:sld>
-</file>
-
-<file path=ppt/slides/slide19.xml><?xml version="1.0" encoding="utf-8"?>
-<p:sld xmlns:a="http://schemas.openxmlformats.org/drawingml/2006/main" xmlns:r="http://schemas.openxmlformats.org/officeDocument/2006/relationships" xmlns:p="http://schemas.openxmlformats.org/presentationml/2006/main">
-  <p:cSld>
-    <p:spTree>
-      <p:nvGrpSpPr>
-        <p:cNvPr id="1" name=""/>
-        <p:cNvGrpSpPr/>
-        <p:nvPr/>
-      </p:nvGrpSpPr>
-      <p:grpSpPr>
-        <a:xfrm>
-          <a:off x="0" y="0"/>
-          <a:ext cx="0" cy="0"/>
-          <a:chOff x="0" y="0"/>
-          <a:chExt cx="0" cy="0"/>
-        </a:xfrm>
-      </p:grpSpPr>
-      <p:sp>
-        <p:nvSpPr>
-          <p:cNvPr id="6" name="TextBox 5">
-            <a:extLst>
-              <a:ext uri="{FF2B5EF4-FFF2-40B4-BE49-F238E27FC236}">
-                <a16:creationId xmlns:a16="http://schemas.microsoft.com/office/drawing/2014/main" id="{FA3F0CB6-C78C-4805-AEBB-AFF9D10A5577}"/>
-              </a:ext>
-            </a:extLst>
-          </p:cNvPr>
-          <p:cNvSpPr txBox="1"/>
-          <p:nvPr/>
-        </p:nvSpPr>
-        <p:spPr>
-          <a:xfrm>
-            <a:off x="10990555" y="6391922"/>
-            <a:ext cx="870012" cy="372862"/>
-          </a:xfrm>
-          <a:prstGeom prst="rect">
-            <a:avLst/>
-          </a:prstGeom>
-          <a:noFill/>
-        </p:spPr>
-        <p:txBody>
-          <a:bodyPr wrap="square" rtlCol="0">
-            <a:spAutoFit/>
-          </a:bodyPr>
-          <a:lstStyle/>
-          <a:p>
-            <a:r>
-              <a:rPr lang="en-US" dirty="0"/>
-              <a:t>18/22</a:t>
-            </a:r>
-            <a:endParaRPr lang="ru-RU" dirty="0"/>
-          </a:p>
-        </p:txBody>
-      </p:sp>
-      <p:sp>
-        <p:nvSpPr>
-          <p:cNvPr id="8" name="Заголовок 7">
-            <a:extLst>
-              <a:ext uri="{FF2B5EF4-FFF2-40B4-BE49-F238E27FC236}">
-                <a16:creationId xmlns:a16="http://schemas.microsoft.com/office/drawing/2014/main" id="{6603485B-22FC-0A97-1718-C889CAEE53D8}"/>
-              </a:ext>
-            </a:extLst>
-          </p:cNvPr>
-          <p:cNvSpPr>
-            <a:spLocks noGrp="1"/>
-          </p:cNvSpPr>
-          <p:nvPr>
-            <p:ph type="title"/>
-          </p:nvPr>
-        </p:nvSpPr>
-        <p:spPr/>
-        <p:txBody>
-          <a:bodyPr/>
-          <a:lstStyle/>
-          <a:p>
-            <a:r>
-              <a:rPr lang="ru-RU" dirty="0"/>
-              <a:t>Пример работы модуля детекции</a:t>
-            </a:r>
-          </a:p>
-        </p:txBody>
-      </p:sp>
-      <p:sp>
-        <p:nvSpPr>
-          <p:cNvPr id="12" name="TextBox 11">
-            <a:extLst>
-              <a:ext uri="{FF2B5EF4-FFF2-40B4-BE49-F238E27FC236}">
-                <a16:creationId xmlns:a16="http://schemas.microsoft.com/office/drawing/2014/main" id="{7CCE1EB7-33D9-2E65-0BC0-90F903F3C93E}"/>
-              </a:ext>
-            </a:extLst>
-          </p:cNvPr>
-          <p:cNvSpPr txBox="1"/>
-          <p:nvPr/>
-        </p:nvSpPr>
-        <p:spPr>
-          <a:xfrm>
-            <a:off x="3047238" y="2967335"/>
-            <a:ext cx="6094476" cy="923330"/>
-          </a:xfrm>
-          <a:prstGeom prst="rect">
-            <a:avLst/>
-          </a:prstGeom>
-          <a:noFill/>
-        </p:spPr>
-        <p:txBody>
-          <a:bodyPr wrap="square">
-            <a:spAutoFit/>
-          </a:bodyPr>
-          <a:lstStyle/>
-          <a:p>
-            <a:r>
-              <a:rPr lang="ru-RU" dirty="0"/>
-              <a:t>До/после: исходный кадр → кадр с </a:t>
-            </a:r>
-            <a:r>
-              <a:rPr lang="ru-RU" dirty="0" err="1"/>
-              <a:t>bounding</a:t>
-            </a:r>
-            <a:r>
-              <a:rPr lang="ru-RU" dirty="0"/>
-              <a:t> </a:t>
-            </a:r>
-            <a:r>
-              <a:rPr lang="ru-RU" dirty="0" err="1"/>
-              <a:t>box</a:t>
-            </a:r>
-            <a:r>
-              <a:rPr lang="ru-RU" dirty="0"/>
-              <a:t> и эмоцией</a:t>
-            </a:r>
-          </a:p>
-          <a:p>
-            <a:r>
-              <a:rPr lang="ru-RU" dirty="0"/>
-              <a:t>Картинка: Сравнительный скриншот (можно сделать скрин из работающей системы)</a:t>
-            </a:r>
-          </a:p>
-        </p:txBody>
-      </p:sp>
-    </p:spTree>
-    <p:extLst>
-      <p:ext uri="{BB962C8B-B14F-4D97-AF65-F5344CB8AC3E}">
-        <p14:creationId xmlns:p14="http://schemas.microsoft.com/office/powerpoint/2010/main" val="2834005285"/>
+        <p14:creationId xmlns:p14="http://schemas.microsoft.com/office/powerpoint/2010/main" val="3186821950"/>
       </p:ext>
     </p:extLst>
   </p:cSld>
@@ -5493,15 +5628,14 @@
               <a:lnSpc>
                 <a:spcPct val="150000"/>
               </a:lnSpc>
+              <a:spcBef>
+                <a:spcPts val="0"/>
+              </a:spcBef>
               <a:buNone/>
             </a:pPr>
             <a:r>
-              <a:rPr lang="ru-RU" sz="1600" dirty="0">
-                <a:effectLst/>
-                <a:ea typeface="Calibri" panose="020F0502020204030204" pitchFamily="34" charset="0"/>
-                <a:cs typeface="Times New Roman" panose="02020603050405020304" pitchFamily="18" charset="0"/>
-              </a:rPr>
-              <a:t>Цель: Разработать программную часть системы распознавания эмоций на основе ИНС с использованием компьютерного зрения и глубокого обучения.</a:t>
+              <a:rPr lang="ru-RU" sz="1800" dirty="0"/>
+              <a:t>Цель: Разработать программную часть системы распознавания эмоций человека на основе ИНС с использованием методов компьютерного зрения и глубокого обучения.</a:t>
             </a:r>
           </a:p>
           <a:p>
@@ -5509,168 +5643,142 @@
               <a:lnSpc>
                 <a:spcPct val="150000"/>
               </a:lnSpc>
+              <a:spcBef>
+                <a:spcPts val="0"/>
+              </a:spcBef>
               <a:buNone/>
             </a:pPr>
             <a:r>
-              <a:rPr lang="ru-RU" sz="1600" dirty="0">
-                <a:effectLst/>
-                <a:ea typeface="Calibri" panose="020F0502020204030204" pitchFamily="34" charset="0"/>
-                <a:cs typeface="Times New Roman" panose="02020603050405020304" pitchFamily="18" charset="0"/>
-              </a:rPr>
-              <a:t>Задачи:</a:t>
-            </a:r>
-          </a:p>
-          <a:p>
-            <a:pPr indent="0" algn="just">
+              <a:rPr lang="ru-RU" sz="1800" dirty="0"/>
+              <a:t>Задачи практики:</a:t>
+            </a:r>
+          </a:p>
+          <a:p>
+            <a:pPr marL="514350" indent="0" algn="just">
               <a:lnSpc>
                 <a:spcPct val="150000"/>
               </a:lnSpc>
-              <a:buNone/>
+              <a:spcBef>
+                <a:spcPts val="0"/>
+              </a:spcBef>
             </a:pPr>
             <a:r>
-              <a:rPr lang="ru-RU" sz="1600" dirty="0">
-                <a:effectLst/>
-                <a:ea typeface="Calibri" panose="020F0502020204030204" pitchFamily="34" charset="0"/>
-                <a:cs typeface="Times New Roman" panose="02020603050405020304" pitchFamily="18" charset="0"/>
-              </a:rPr>
+              <a:rPr lang="ru-RU" sz="1800" dirty="0"/>
               <a:t>Описание средств и технологий разработки</a:t>
             </a:r>
           </a:p>
           <a:p>
-            <a:pPr indent="0" algn="just">
+            <a:pPr marL="514350" indent="0" algn="just">
               <a:lnSpc>
                 <a:spcPct val="150000"/>
               </a:lnSpc>
-              <a:buNone/>
+              <a:spcBef>
+                <a:spcPts val="0"/>
+              </a:spcBef>
             </a:pPr>
             <a:r>
-              <a:rPr lang="ru-RU" sz="1600" dirty="0">
-                <a:effectLst/>
-                <a:ea typeface="Calibri" panose="020F0502020204030204" pitchFamily="34" charset="0"/>
-                <a:cs typeface="Times New Roman" panose="02020603050405020304" pitchFamily="18" charset="0"/>
-              </a:rPr>
+              <a:rPr lang="ru-RU" sz="1800" dirty="0"/>
               <a:t>Проработка видов обеспечения: информационное, программное, алгоритмическое, математическое, техническое</a:t>
             </a:r>
           </a:p>
           <a:p>
-            <a:pPr indent="0" algn="just">
+            <a:pPr marL="514350" indent="0" algn="just">
               <a:lnSpc>
                 <a:spcPct val="150000"/>
               </a:lnSpc>
-              <a:buNone/>
+              <a:spcBef>
+                <a:spcPts val="0"/>
+              </a:spcBef>
             </a:pPr>
             <a:r>
-              <a:rPr lang="ru-RU" sz="1600" dirty="0">
-                <a:effectLst/>
-                <a:ea typeface="Calibri" panose="020F0502020204030204" pitchFamily="34" charset="0"/>
-                <a:cs typeface="Times New Roman" panose="02020603050405020304" pitchFamily="18" charset="0"/>
-              </a:rPr>
+              <a:rPr lang="ru-RU" sz="1800" dirty="0"/>
               <a:t>Реализация модуля анализа лица и эмоций</a:t>
             </a:r>
           </a:p>
           <a:p>
-            <a:pPr indent="0" algn="just">
+            <a:pPr marL="514350" indent="0" algn="just">
               <a:lnSpc>
                 <a:spcPct val="150000"/>
               </a:lnSpc>
-              <a:buNone/>
+              <a:spcBef>
+                <a:spcPts val="0"/>
+              </a:spcBef>
             </a:pPr>
             <a:r>
-              <a:rPr lang="ru-RU" sz="1600" dirty="0">
-                <a:effectLst/>
-                <a:ea typeface="Calibri" panose="020F0502020204030204" pitchFamily="34" charset="0"/>
-                <a:cs typeface="Times New Roman" panose="02020603050405020304" pitchFamily="18" charset="0"/>
-              </a:rPr>
+              <a:rPr lang="ru-RU" sz="1800" dirty="0"/>
               <a:t>Реализация модуля распознавания речи</a:t>
             </a:r>
           </a:p>
           <a:p>
-            <a:pPr indent="0" algn="just">
+            <a:pPr marL="514350" indent="0" algn="just">
               <a:lnSpc>
                 <a:spcPct val="150000"/>
               </a:lnSpc>
-              <a:buNone/>
+              <a:spcBef>
+                <a:spcPts val="0"/>
+              </a:spcBef>
             </a:pPr>
             <a:r>
-              <a:rPr lang="ru-RU" sz="1600" dirty="0">
-                <a:effectLst/>
-                <a:ea typeface="Calibri" panose="020F0502020204030204" pitchFamily="34" charset="0"/>
-                <a:cs typeface="Times New Roman" panose="02020603050405020304" pitchFamily="18" charset="0"/>
-              </a:rPr>
-              <a:t>Разработка пользовательского интерфейса</a:t>
-            </a:r>
-          </a:p>
-          <a:p>
-            <a:pPr indent="0" algn="just">
+              <a:rPr lang="ru-RU" sz="1800" dirty="0"/>
+              <a:t>Разработка пользовательского интерфейса ПО</a:t>
+            </a:r>
+          </a:p>
+          <a:p>
+            <a:pPr marL="514350" indent="0" algn="just">
               <a:lnSpc>
                 <a:spcPct val="150000"/>
               </a:lnSpc>
-              <a:buNone/>
+              <a:spcBef>
+                <a:spcPts val="0"/>
+              </a:spcBef>
             </a:pPr>
             <a:r>
-              <a:rPr lang="ru-RU" sz="1600" dirty="0">
-                <a:effectLst/>
-                <a:ea typeface="Calibri" panose="020F0502020204030204" pitchFamily="34" charset="0"/>
-                <a:cs typeface="Times New Roman" panose="02020603050405020304" pitchFamily="18" charset="0"/>
-              </a:rPr>
+              <a:rPr lang="ru-RU" sz="1800" dirty="0"/>
               <a:t>Интеграция модулей ИИ в единую систему</a:t>
             </a:r>
           </a:p>
           <a:p>
-            <a:pPr indent="0" algn="just">
+            <a:pPr marL="514350" indent="0" algn="just">
               <a:lnSpc>
                 <a:spcPct val="150000"/>
               </a:lnSpc>
-              <a:buNone/>
+              <a:spcBef>
+                <a:spcPts val="0"/>
+              </a:spcBef>
             </a:pPr>
             <a:r>
-              <a:rPr lang="ru-RU" sz="1600" dirty="0">
-                <a:effectLst/>
-                <a:ea typeface="Calibri" panose="020F0502020204030204" pitchFamily="34" charset="0"/>
-                <a:cs typeface="Times New Roman" panose="02020603050405020304" pitchFamily="18" charset="0"/>
-              </a:rPr>
-              <a:t>Подготовка отчёта по практике</a:t>
-            </a:r>
-          </a:p>
-        </p:txBody>
-      </p:sp>
-      <p:sp>
-        <p:nvSpPr>
-          <p:cNvPr id="4" name="TextBox 3">
-            <a:extLst>
-              <a:ext uri="{FF2B5EF4-FFF2-40B4-BE49-F238E27FC236}">
-                <a16:creationId xmlns:a16="http://schemas.microsoft.com/office/drawing/2014/main" id="{508D8360-FA0F-440D-8156-2BF331DE0269}"/>
-              </a:ext>
-            </a:extLst>
-          </p:cNvPr>
-          <p:cNvSpPr txBox="1"/>
-          <p:nvPr/>
-        </p:nvSpPr>
-        <p:spPr>
-          <a:xfrm>
-            <a:off x="10990555" y="6391922"/>
-            <a:ext cx="870012" cy="372862"/>
-          </a:xfrm>
-          <a:prstGeom prst="rect">
-            <a:avLst/>
-          </a:prstGeom>
-          <a:noFill/>
-        </p:spPr>
-        <p:txBody>
-          <a:bodyPr wrap="square" rtlCol="0">
-            <a:spAutoFit/>
-          </a:bodyPr>
-          <a:lstStyle/>
-          <a:p>
-            <a:r>
-              <a:rPr lang="ru-RU" dirty="0"/>
+              <a:rPr lang="ru-RU" sz="1800" dirty="0"/>
+              <a:t>Подготовить отчёт по преддипломной практике</a:t>
+            </a:r>
+          </a:p>
+        </p:txBody>
+      </p:sp>
+      <p:sp>
+        <p:nvSpPr>
+          <p:cNvPr id="5" name="Номер слайда 4">
+            <a:extLst>
+              <a:ext uri="{FF2B5EF4-FFF2-40B4-BE49-F238E27FC236}">
+                <a16:creationId xmlns:a16="http://schemas.microsoft.com/office/drawing/2014/main" id="{EFBD14C5-A728-280F-7BFA-0B641D24C778}"/>
+              </a:ext>
+            </a:extLst>
+          </p:cNvPr>
+          <p:cNvSpPr>
+            <a:spLocks noGrp="1"/>
+          </p:cNvSpPr>
+          <p:nvPr>
+            <p:ph type="sldNum" sz="quarter" idx="12"/>
+          </p:nvPr>
+        </p:nvSpPr>
+        <p:spPr/>
+        <p:txBody>
+          <a:bodyPr/>
+          <a:lstStyle/>
+          <a:p>
+            <a:fld id="{5F9DB6E4-81A8-48FA-A111-413E3E85E768}" type="slidenum">
+              <a:rPr lang="ru-RU" smtClean="0"/>
               <a:t>2</a:t>
-            </a:r>
-            <a:r>
-              <a:rPr lang="en-US" dirty="0"/>
-              <a:t>/22</a:t>
-            </a:r>
-            <a:endParaRPr lang="ru-RU" dirty="0"/>
+            </a:fld>
+            <a:endParaRPr lang="ru-RU"/>
           </a:p>
         </p:txBody>
       </p:sp>
@@ -5678,322 +5786,6 @@
     <p:extLst>
       <p:ext uri="{BB962C8B-B14F-4D97-AF65-F5344CB8AC3E}">
         <p14:creationId xmlns:p14="http://schemas.microsoft.com/office/powerpoint/2010/main" val="4080414093"/>
-      </p:ext>
-    </p:extLst>
-  </p:cSld>
-  <p:clrMapOvr>
-    <a:masterClrMapping/>
-  </p:clrMapOvr>
-</p:sld>
-</file>
-
-<file path=ppt/slides/slide20.xml><?xml version="1.0" encoding="utf-8"?>
-<p:sld xmlns:a="http://schemas.openxmlformats.org/drawingml/2006/main" xmlns:r="http://schemas.openxmlformats.org/officeDocument/2006/relationships" xmlns:p="http://schemas.openxmlformats.org/presentationml/2006/main">
-  <p:cSld>
-    <p:spTree>
-      <p:nvGrpSpPr>
-        <p:cNvPr id="1" name=""/>
-        <p:cNvGrpSpPr/>
-        <p:nvPr/>
-      </p:nvGrpSpPr>
-      <p:grpSpPr>
-        <a:xfrm>
-          <a:off x="0" y="0"/>
-          <a:ext cx="0" cy="0"/>
-          <a:chOff x="0" y="0"/>
-          <a:chExt cx="0" cy="0"/>
-        </a:xfrm>
-      </p:grpSpPr>
-      <p:sp>
-        <p:nvSpPr>
-          <p:cNvPr id="5" name="TextBox 4">
-            <a:extLst>
-              <a:ext uri="{FF2B5EF4-FFF2-40B4-BE49-F238E27FC236}">
-                <a16:creationId xmlns:a16="http://schemas.microsoft.com/office/drawing/2014/main" id="{AD3ACA76-DC55-4EE2-B96E-8C8DD92607FB}"/>
-              </a:ext>
-            </a:extLst>
-          </p:cNvPr>
-          <p:cNvSpPr txBox="1"/>
-          <p:nvPr/>
-        </p:nvSpPr>
-        <p:spPr>
-          <a:xfrm>
-            <a:off x="10990555" y="6391922"/>
-            <a:ext cx="870012" cy="372862"/>
-          </a:xfrm>
-          <a:prstGeom prst="rect">
-            <a:avLst/>
-          </a:prstGeom>
-          <a:noFill/>
-        </p:spPr>
-        <p:txBody>
-          <a:bodyPr wrap="square" rtlCol="0">
-            <a:spAutoFit/>
-          </a:bodyPr>
-          <a:lstStyle/>
-          <a:p>
-            <a:r>
-              <a:rPr lang="en-US" dirty="0"/>
-              <a:t>19/22</a:t>
-            </a:r>
-            <a:endParaRPr lang="ru-RU" dirty="0"/>
-          </a:p>
-        </p:txBody>
-      </p:sp>
-      <p:sp>
-        <p:nvSpPr>
-          <p:cNvPr id="6" name="Заголовок 1">
-            <a:extLst>
-              <a:ext uri="{FF2B5EF4-FFF2-40B4-BE49-F238E27FC236}">
-                <a16:creationId xmlns:a16="http://schemas.microsoft.com/office/drawing/2014/main" id="{1D64F9D4-50F5-E5DE-1F6D-A6CCD663D908}"/>
-              </a:ext>
-            </a:extLst>
-          </p:cNvPr>
-          <p:cNvSpPr txBox="1">
-            <a:spLocks/>
-          </p:cNvSpPr>
-          <p:nvPr/>
-        </p:nvSpPr>
-        <p:spPr>
-          <a:xfrm>
-            <a:off x="163498" y="-132024"/>
-            <a:ext cx="10515600" cy="1325563"/>
-          </a:xfrm>
-          <a:prstGeom prst="rect">
-            <a:avLst/>
-          </a:prstGeom>
-        </p:spPr>
-        <p:txBody>
-          <a:bodyPr vert="horz" lIns="91440" tIns="45720" rIns="91440" bIns="45720" rtlCol="0" anchor="ctr">
-            <a:normAutofit/>
-          </a:bodyPr>
-          <a:lstStyle>
-            <a:lvl1pPr algn="l" defTabSz="914400" rtl="0" eaLnBrk="1" latinLnBrk="0" hangingPunct="1">
-              <a:lnSpc>
-                <a:spcPct val="90000"/>
-              </a:lnSpc>
-              <a:spcBef>
-                <a:spcPct val="0"/>
-              </a:spcBef>
-              <a:buNone/>
-              <a:defRPr sz="4400" kern="1200">
-                <a:solidFill>
-                  <a:schemeClr val="tx1"/>
-                </a:solidFill>
-                <a:latin typeface="+mj-lt"/>
-                <a:ea typeface="+mj-ea"/>
-                <a:cs typeface="+mj-cs"/>
-              </a:defRPr>
-            </a:lvl1pPr>
-          </a:lstStyle>
-          <a:p>
-            <a:r>
-              <a:rPr lang="ru-RU" sz="3600" dirty="0"/>
-              <a:t>Пример работы модуля распознавания речи</a:t>
-            </a:r>
-          </a:p>
-        </p:txBody>
-      </p:sp>
-      <p:sp>
-        <p:nvSpPr>
-          <p:cNvPr id="9" name="TextBox 8">
-            <a:extLst>
-              <a:ext uri="{FF2B5EF4-FFF2-40B4-BE49-F238E27FC236}">
-                <a16:creationId xmlns:a16="http://schemas.microsoft.com/office/drawing/2014/main" id="{9E3D4684-574A-EA26-898C-4CBE180E21B9}"/>
-              </a:ext>
-            </a:extLst>
-          </p:cNvPr>
-          <p:cNvSpPr txBox="1"/>
-          <p:nvPr/>
-        </p:nvSpPr>
-        <p:spPr>
-          <a:xfrm>
-            <a:off x="3026664" y="2903327"/>
-            <a:ext cx="6108192" cy="923330"/>
-          </a:xfrm>
-          <a:prstGeom prst="rect">
-            <a:avLst/>
-          </a:prstGeom>
-          <a:noFill/>
-        </p:spPr>
-        <p:txBody>
-          <a:bodyPr wrap="square">
-            <a:spAutoFit/>
-          </a:bodyPr>
-          <a:lstStyle/>
-          <a:p>
-            <a:r>
-              <a:rPr lang="ru-RU" dirty="0" err="1"/>
-              <a:t>Аудиоволна</a:t>
-            </a:r>
-            <a:r>
-              <a:rPr lang="ru-RU" dirty="0"/>
-              <a:t> → текст → выделение эмоциональных маркеров</a:t>
-            </a:r>
-          </a:p>
-          <a:p>
-            <a:r>
-              <a:rPr lang="ru-RU" dirty="0"/>
-              <a:t>Картинка: Скриншот транскрипта с разметкой эмоций</a:t>
-            </a:r>
-          </a:p>
-        </p:txBody>
-      </p:sp>
-    </p:spTree>
-    <p:extLst>
-      <p:ext uri="{BB962C8B-B14F-4D97-AF65-F5344CB8AC3E}">
-        <p14:creationId xmlns:p14="http://schemas.microsoft.com/office/powerpoint/2010/main" val="1230299200"/>
-      </p:ext>
-    </p:extLst>
-  </p:cSld>
-  <p:clrMapOvr>
-    <a:masterClrMapping/>
-  </p:clrMapOvr>
-</p:sld>
-</file>
-
-<file path=ppt/slides/slide21.xml><?xml version="1.0" encoding="utf-8"?>
-<p:sld xmlns:a="http://schemas.openxmlformats.org/drawingml/2006/main" xmlns:r="http://schemas.openxmlformats.org/officeDocument/2006/relationships" xmlns:p="http://schemas.openxmlformats.org/presentationml/2006/main">
-  <p:cSld>
-    <p:spTree>
-      <p:nvGrpSpPr>
-        <p:cNvPr id="1" name=""/>
-        <p:cNvGrpSpPr/>
-        <p:nvPr/>
-      </p:nvGrpSpPr>
-      <p:grpSpPr>
-        <a:xfrm>
-          <a:off x="0" y="0"/>
-          <a:ext cx="0" cy="0"/>
-          <a:chOff x="0" y="0"/>
-          <a:chExt cx="0" cy="0"/>
-        </a:xfrm>
-      </p:grpSpPr>
-      <p:sp>
-        <p:nvSpPr>
-          <p:cNvPr id="2" name="Заголовок 1">
-            <a:extLst>
-              <a:ext uri="{FF2B5EF4-FFF2-40B4-BE49-F238E27FC236}">
-                <a16:creationId xmlns:a16="http://schemas.microsoft.com/office/drawing/2014/main" id="{8E4679AE-9695-41ED-964A-F63B6DC860B9}"/>
-              </a:ext>
-            </a:extLst>
-          </p:cNvPr>
-          <p:cNvSpPr>
-            <a:spLocks noGrp="1"/>
-          </p:cNvSpPr>
-          <p:nvPr>
-            <p:ph type="title"/>
-          </p:nvPr>
-        </p:nvSpPr>
-        <p:spPr/>
-        <p:txBody>
-          <a:bodyPr/>
-          <a:lstStyle/>
-          <a:p>
-            <a:r>
-              <a:rPr lang="ru-RU" dirty="0"/>
-              <a:t>Заключение</a:t>
-            </a:r>
-          </a:p>
-        </p:txBody>
-      </p:sp>
-      <p:sp>
-        <p:nvSpPr>
-          <p:cNvPr id="3" name="Объект 2">
-            <a:extLst>
-              <a:ext uri="{FF2B5EF4-FFF2-40B4-BE49-F238E27FC236}">
-                <a16:creationId xmlns:a16="http://schemas.microsoft.com/office/drawing/2014/main" id="{8DA6D676-1DC8-4A9C-81A7-79527C288ADC}"/>
-              </a:ext>
-            </a:extLst>
-          </p:cNvPr>
-          <p:cNvSpPr>
-            <a:spLocks noGrp="1"/>
-          </p:cNvSpPr>
-          <p:nvPr>
-            <p:ph idx="1"/>
-          </p:nvPr>
-        </p:nvSpPr>
-        <p:spPr>
-          <a:xfrm>
-            <a:off x="838200" y="1367162"/>
-            <a:ext cx="10515600" cy="5308846"/>
-          </a:xfrm>
-        </p:spPr>
-        <p:txBody>
-          <a:bodyPr>
-            <a:normAutofit/>
-          </a:bodyPr>
-          <a:lstStyle/>
-          <a:p>
-            <a:r>
-              <a:rPr lang="ru-RU" dirty="0"/>
-              <a:t>Цель и задачи выполнены</a:t>
-            </a:r>
-          </a:p>
-          <a:p>
-            <a:r>
-              <a:rPr lang="ru-RU" dirty="0"/>
-              <a:t>Реализована мультимодальная система анализа эмоций</a:t>
-            </a:r>
-          </a:p>
-          <a:p>
-            <a:r>
-              <a:rPr lang="ru-RU" dirty="0"/>
-              <a:t>Протестированы ключевые модули (детекция, ASR, отчётность)</a:t>
-            </a:r>
-          </a:p>
-          <a:p>
-            <a:r>
-              <a:rPr lang="ru-RU" dirty="0"/>
-              <a:t>Система готова к внедрению в HR-процессы</a:t>
-            </a:r>
-          </a:p>
-        </p:txBody>
-      </p:sp>
-      <p:sp>
-        <p:nvSpPr>
-          <p:cNvPr id="4" name="TextBox 3">
-            <a:extLst>
-              <a:ext uri="{FF2B5EF4-FFF2-40B4-BE49-F238E27FC236}">
-                <a16:creationId xmlns:a16="http://schemas.microsoft.com/office/drawing/2014/main" id="{7BE0758E-ED01-4E2A-9F8C-4C0573556692}"/>
-              </a:ext>
-            </a:extLst>
-          </p:cNvPr>
-          <p:cNvSpPr txBox="1"/>
-          <p:nvPr/>
-        </p:nvSpPr>
-        <p:spPr>
-          <a:xfrm>
-            <a:off x="10990555" y="6391922"/>
-            <a:ext cx="870012" cy="372862"/>
-          </a:xfrm>
-          <a:prstGeom prst="rect">
-            <a:avLst/>
-          </a:prstGeom>
-          <a:noFill/>
-        </p:spPr>
-        <p:txBody>
-          <a:bodyPr wrap="square" rtlCol="0">
-            <a:spAutoFit/>
-          </a:bodyPr>
-          <a:lstStyle/>
-          <a:p>
-            <a:r>
-              <a:rPr lang="ru-RU" dirty="0"/>
-              <a:t>2</a:t>
-            </a:r>
-            <a:r>
-              <a:rPr lang="en-US" dirty="0"/>
-              <a:t>2/22</a:t>
-            </a:r>
-            <a:endParaRPr lang="ru-RU" dirty="0"/>
-          </a:p>
-        </p:txBody>
-      </p:sp>
-    </p:spTree>
-    <p:extLst>
-      <p:ext uri="{BB962C8B-B14F-4D97-AF65-F5344CB8AC3E}">
-        <p14:creationId xmlns:p14="http://schemas.microsoft.com/office/powerpoint/2010/main" val="3186821950"/>
       </p:ext>
     </p:extLst>
   </p:cSld>
@@ -6077,80 +5869,79 @@
         </p:spPr>
         <p:txBody>
           <a:bodyPr>
-            <a:normAutofit/>
+            <a:normAutofit fontScale="85000" lnSpcReduction="20000"/>
           </a:bodyPr>
           <a:lstStyle/>
           <a:p>
+            <a:pPr algn="just"/>
             <a:r>
               <a:rPr lang="ru-RU" dirty="0"/>
-              <a:t>Эмоциональный интеллект становится ключевым фактором эффективности в HR</a:t>
-            </a:r>
-          </a:p>
-          <a:p>
+              <a:t>Рост значимости эмоционального интеллекта в HR: современные подходы к управлению персоналом подчеркивают важность учёта эмоционального состояния для повышения производительности и снижения текучести кадров.</a:t>
+            </a:r>
+          </a:p>
+          <a:p>
+            <a:pPr algn="just"/>
             <a:r>
               <a:rPr lang="ru-RU" dirty="0"/>
-              <a:t>Традиционные методы оценки (анкетирование, наблюдение) субъективны и трудоёмки</a:t>
-            </a:r>
-          </a:p>
-          <a:p>
+              <a:t>Ограниченность традиционных методов: субъективные оценки и анкетирование не обеспечивают высокой точности и оперативности, что затрудняет своевременное выявление профессионального выгорания.</a:t>
+            </a:r>
+          </a:p>
+          <a:p>
+            <a:pPr algn="just"/>
             <a:r>
               <a:rPr lang="ru-RU" dirty="0"/>
-              <a:t>Технологии ИИ позволяют автоматизировать анализ эмоций в реальном времени</a:t>
-            </a:r>
-          </a:p>
-          <a:p>
+              <a:t>Развитие технологий ИИ: прогресс в области компьютерного зрения и обработки аудиосигналов создаёт основу для автоматизированного анализа эмоций в режиме, близком к реальному времени.</a:t>
+            </a:r>
+          </a:p>
+          <a:p>
+            <a:pPr algn="just"/>
             <a:r>
               <a:rPr lang="ru-RU" dirty="0"/>
-              <a:t>Мультимодальный подход (видео + аудио) повышает точность классификации до 85% и выше</a:t>
-            </a:r>
-          </a:p>
-          <a:p>
+              <a:t>Потребность в мультимодальном анализе: комплексный подход, объединяющий видео- и аудиоданные, позволяет учитывать взаимодополняющие признаки, повышая точность классификации.</a:t>
+            </a:r>
+          </a:p>
+          <a:p>
+            <a:pPr algn="just"/>
             <a:r>
               <a:rPr lang="ru-RU" dirty="0"/>
-              <a:t>Система снижает нагрузку на HR-специалистов и обеспечивает объективность оценки</a:t>
-            </a:r>
-          </a:p>
-          <a:p>
+              <a:t>Автоматизация снижает нагрузку на HR-специалистов, обеспечивает объективность оценки и формирует количественные метрики для принятия управленческих решений.</a:t>
+            </a:r>
+          </a:p>
+          <a:p>
+            <a:pPr algn="just"/>
             <a:r>
               <a:rPr lang="ru-RU" dirty="0"/>
-              <a:t>Архитектура соответствует требованиям ФЗ-152 о защите персональных данных</a:t>
-            </a:r>
-          </a:p>
-        </p:txBody>
-      </p:sp>
-      <p:sp>
-        <p:nvSpPr>
-          <p:cNvPr id="4" name="TextBox 3">
-            <a:extLst>
-              <a:ext uri="{FF2B5EF4-FFF2-40B4-BE49-F238E27FC236}">
-                <a16:creationId xmlns:a16="http://schemas.microsoft.com/office/drawing/2014/main" id="{46D1CC9F-A08B-4855-A038-008F06257CDA}"/>
-              </a:ext>
-            </a:extLst>
-          </p:cNvPr>
-          <p:cNvSpPr txBox="1"/>
-          <p:nvPr/>
-        </p:nvSpPr>
-        <p:spPr>
-          <a:xfrm>
-            <a:off x="10990555" y="6391922"/>
-            <a:ext cx="870012" cy="372862"/>
-          </a:xfrm>
-          <a:prstGeom prst="rect">
-            <a:avLst/>
-          </a:prstGeom>
-          <a:noFill/>
-        </p:spPr>
-        <p:txBody>
-          <a:bodyPr wrap="square" rtlCol="0">
-            <a:spAutoFit/>
-          </a:bodyPr>
-          <a:lstStyle/>
-          <a:p>
-            <a:r>
-              <a:rPr lang="en-US" dirty="0"/>
-              <a:t>3/22</a:t>
-            </a:r>
-            <a:endParaRPr lang="ru-RU" dirty="0"/>
+              <a:t>Актуальность обусловлена отсутствием доступных систем, адаптированных под задачи HR и соответствие требованиям ФЗ-152 о локализации и защите персональных данных сотрудников.</a:t>
+            </a:r>
+          </a:p>
+        </p:txBody>
+      </p:sp>
+      <p:sp>
+        <p:nvSpPr>
+          <p:cNvPr id="5" name="Номер слайда 4">
+            <a:extLst>
+              <a:ext uri="{FF2B5EF4-FFF2-40B4-BE49-F238E27FC236}">
+                <a16:creationId xmlns:a16="http://schemas.microsoft.com/office/drawing/2014/main" id="{61A45460-A723-7A87-8308-C202F8B17C43}"/>
+              </a:ext>
+            </a:extLst>
+          </p:cNvPr>
+          <p:cNvSpPr>
+            <a:spLocks noGrp="1"/>
+          </p:cNvSpPr>
+          <p:nvPr>
+            <p:ph type="sldNum" sz="quarter" idx="12"/>
+          </p:nvPr>
+        </p:nvSpPr>
+        <p:spPr/>
+        <p:txBody>
+          <a:bodyPr/>
+          <a:lstStyle/>
+          <a:p>
+            <a:fld id="{5F9DB6E4-81A8-48FA-A111-413E3E85E768}" type="slidenum">
+              <a:rPr lang="ru-RU" smtClean="0"/>
+              <a:t>3</a:t>
+            </a:fld>
+            <a:endParaRPr lang="ru-RU"/>
           </a:p>
         </p:txBody>
       </p:sp>
@@ -6189,7 +5980,7 @@
           <p:cNvPr id="2" name="Заголовок 1">
             <a:extLst>
               <a:ext uri="{FF2B5EF4-FFF2-40B4-BE49-F238E27FC236}">
-                <a16:creationId xmlns:a16="http://schemas.microsoft.com/office/drawing/2014/main" id="{C3254AE5-4C49-793F-E6F2-9CFEA3A60935}"/>
+                <a16:creationId xmlns:a16="http://schemas.microsoft.com/office/drawing/2014/main" id="{6E8DEFDC-A437-4C47-B07D-6342E196D0E9}"/>
               </a:ext>
             </a:extLst>
           </p:cNvPr>
@@ -6200,50 +5991,291 @@
             <p:ph type="title"/>
           </p:nvPr>
         </p:nvSpPr>
+        <p:spPr>
+          <a:xfrm>
+            <a:off x="675989" y="59192"/>
+            <a:ext cx="10515600" cy="1325563"/>
+          </a:xfrm>
+        </p:spPr>
+        <p:txBody>
+          <a:bodyPr/>
+          <a:lstStyle/>
+          <a:p>
+            <a:r>
+              <a:rPr lang="ru-RU" dirty="0"/>
+              <a:t>Средства и технологии разработки</a:t>
+            </a:r>
+          </a:p>
+        </p:txBody>
+      </p:sp>
+      <p:pic>
+        <p:nvPicPr>
+          <p:cNvPr id="1028" name="Picture 4" descr="Picture background">
+            <a:extLst>
+              <a:ext uri="{FF2B5EF4-FFF2-40B4-BE49-F238E27FC236}">
+                <a16:creationId xmlns:a16="http://schemas.microsoft.com/office/drawing/2014/main" id="{82F14302-1BF2-E1DF-19A8-0E74AB6A70B2}"/>
+              </a:ext>
+            </a:extLst>
+          </p:cNvPr>
+          <p:cNvPicPr>
+            <a:picLocks noChangeAspect="1" noChangeArrowheads="1"/>
+          </p:cNvPicPr>
+          <p:nvPr/>
+        </p:nvPicPr>
+        <p:blipFill>
+          <a:blip r:embed="rId2">
+            <a:extLst>
+              <a:ext uri="{28A0092B-C50C-407E-A947-70E740481C1C}">
+                <a14:useLocalDpi xmlns:a14="http://schemas.microsoft.com/office/drawing/2010/main" val="0"/>
+              </a:ext>
+            </a:extLst>
+          </a:blip>
+          <a:srcRect/>
+          <a:stretch>
+            <a:fillRect/>
+          </a:stretch>
+        </p:blipFill>
+        <p:spPr bwMode="auto">
+          <a:xfrm>
+            <a:off x="3779663" y="2120804"/>
+            <a:ext cx="3699318" cy="1381464"/>
+          </a:xfrm>
+          <a:prstGeom prst="rect">
+            <a:avLst/>
+          </a:prstGeom>
+          <a:noFill/>
+          <a:extLst>
+            <a:ext uri="{909E8E84-426E-40DD-AFC4-6F175D3DCCD1}">
+              <a14:hiddenFill xmlns:a14="http://schemas.microsoft.com/office/drawing/2010/main">
+                <a:solidFill>
+                  <a:srgbClr val="FFFFFF"/>
+                </a:solidFill>
+              </a14:hiddenFill>
+            </a:ext>
+          </a:extLst>
+        </p:spPr>
+      </p:pic>
+      <p:pic>
+        <p:nvPicPr>
+          <p:cNvPr id="1030" name="Picture 6" descr="Picture background">
+            <a:extLst>
+              <a:ext uri="{FF2B5EF4-FFF2-40B4-BE49-F238E27FC236}">
+                <a16:creationId xmlns:a16="http://schemas.microsoft.com/office/drawing/2014/main" id="{A339DE64-170F-3267-C6E5-0C47E9D9367C}"/>
+              </a:ext>
+            </a:extLst>
+          </p:cNvPr>
+          <p:cNvPicPr>
+            <a:picLocks noChangeAspect="1" noChangeArrowheads="1"/>
+          </p:cNvPicPr>
+          <p:nvPr/>
+        </p:nvPicPr>
+        <p:blipFill>
+          <a:blip r:embed="rId3">
+            <a:extLst>
+              <a:ext uri="{28A0092B-C50C-407E-A947-70E740481C1C}">
+                <a14:useLocalDpi xmlns:a14="http://schemas.microsoft.com/office/drawing/2010/main" val="0"/>
+              </a:ext>
+            </a:extLst>
+          </a:blip>
+          <a:srcRect/>
+          <a:stretch>
+            <a:fillRect/>
+          </a:stretch>
+        </p:blipFill>
+        <p:spPr bwMode="auto">
+          <a:xfrm>
+            <a:off x="8647176" y="1445684"/>
+            <a:ext cx="1871472" cy="1871472"/>
+          </a:xfrm>
+          <a:prstGeom prst="rect">
+            <a:avLst/>
+          </a:prstGeom>
+          <a:noFill/>
+          <a:extLst>
+            <a:ext uri="{909E8E84-426E-40DD-AFC4-6F175D3DCCD1}">
+              <a14:hiddenFill xmlns:a14="http://schemas.microsoft.com/office/drawing/2010/main">
+                <a:solidFill>
+                  <a:srgbClr val="FFFFFF"/>
+                </a:solidFill>
+              </a14:hiddenFill>
+            </a:ext>
+          </a:extLst>
+        </p:spPr>
+      </p:pic>
+      <p:pic>
+        <p:nvPicPr>
+          <p:cNvPr id="1032" name="Picture 8" descr="Picture background">
+            <a:extLst>
+              <a:ext uri="{FF2B5EF4-FFF2-40B4-BE49-F238E27FC236}">
+                <a16:creationId xmlns:a16="http://schemas.microsoft.com/office/drawing/2014/main" id="{28767BEC-E43E-ABAE-D052-1CD818E5D755}"/>
+              </a:ext>
+            </a:extLst>
+          </p:cNvPr>
+          <p:cNvPicPr>
+            <a:picLocks noChangeAspect="1" noChangeArrowheads="1"/>
+          </p:cNvPicPr>
+          <p:nvPr/>
+        </p:nvPicPr>
+        <p:blipFill>
+          <a:blip r:embed="rId4">
+            <a:extLst>
+              <a:ext uri="{28A0092B-C50C-407E-A947-70E740481C1C}">
+                <a14:useLocalDpi xmlns:a14="http://schemas.microsoft.com/office/drawing/2010/main" val="0"/>
+              </a:ext>
+            </a:extLst>
+          </a:blip>
+          <a:srcRect/>
+          <a:stretch>
+            <a:fillRect/>
+          </a:stretch>
+        </p:blipFill>
+        <p:spPr bwMode="auto">
+          <a:xfrm>
+            <a:off x="1913382" y="3575536"/>
+            <a:ext cx="2035466" cy="2100601"/>
+          </a:xfrm>
+          <a:prstGeom prst="rect">
+            <a:avLst/>
+          </a:prstGeom>
+          <a:noFill/>
+          <a:extLst>
+            <a:ext uri="{909E8E84-426E-40DD-AFC4-6F175D3DCCD1}">
+              <a14:hiddenFill xmlns:a14="http://schemas.microsoft.com/office/drawing/2010/main">
+                <a:solidFill>
+                  <a:srgbClr val="FFFFFF"/>
+                </a:solidFill>
+              </a14:hiddenFill>
+            </a:ext>
+          </a:extLst>
+        </p:spPr>
+      </p:pic>
+      <p:pic>
+        <p:nvPicPr>
+          <p:cNvPr id="1036" name="Picture 12" descr="Picture background">
+            <a:extLst>
+              <a:ext uri="{FF2B5EF4-FFF2-40B4-BE49-F238E27FC236}">
+                <a16:creationId xmlns:a16="http://schemas.microsoft.com/office/drawing/2014/main" id="{809F2891-D9F2-175C-53BA-BE3D9B227152}"/>
+              </a:ext>
+            </a:extLst>
+          </p:cNvPr>
+          <p:cNvPicPr>
+            <a:picLocks noChangeAspect="1" noChangeArrowheads="1"/>
+          </p:cNvPicPr>
+          <p:nvPr/>
+        </p:nvPicPr>
+        <p:blipFill>
+          <a:blip r:embed="rId5">
+            <a:extLst>
+              <a:ext uri="{28A0092B-C50C-407E-A947-70E740481C1C}">
+                <a14:useLocalDpi xmlns:a14="http://schemas.microsoft.com/office/drawing/2010/main" val="0"/>
+              </a:ext>
+            </a:extLst>
+          </a:blip>
+          <a:srcRect/>
+          <a:stretch>
+            <a:fillRect/>
+          </a:stretch>
+        </p:blipFill>
+        <p:spPr bwMode="auto">
+          <a:xfrm>
+            <a:off x="7596875" y="3575535"/>
+            <a:ext cx="2100602" cy="2100602"/>
+          </a:xfrm>
+          <a:prstGeom prst="rect">
+            <a:avLst/>
+          </a:prstGeom>
+          <a:noFill/>
+          <a:extLst>
+            <a:ext uri="{909E8E84-426E-40DD-AFC4-6F175D3DCCD1}">
+              <a14:hiddenFill xmlns:a14="http://schemas.microsoft.com/office/drawing/2010/main">
+                <a:solidFill>
+                  <a:srgbClr val="FFFFFF"/>
+                </a:solidFill>
+              </a14:hiddenFill>
+            </a:ext>
+          </a:extLst>
+        </p:spPr>
+      </p:pic>
+      <p:pic>
+        <p:nvPicPr>
+          <p:cNvPr id="1038" name="Picture 14" descr="Picture background">
+            <a:extLst>
+              <a:ext uri="{FF2B5EF4-FFF2-40B4-BE49-F238E27FC236}">
+                <a16:creationId xmlns:a16="http://schemas.microsoft.com/office/drawing/2014/main" id="{56A00DD1-6DEC-2ED3-2ECC-A70C200901C3}"/>
+              </a:ext>
+            </a:extLst>
+          </p:cNvPr>
+          <p:cNvPicPr>
+            <a:picLocks noChangeAspect="1" noChangeArrowheads="1"/>
+          </p:cNvPicPr>
+          <p:nvPr/>
+        </p:nvPicPr>
+        <p:blipFill>
+          <a:blip r:embed="rId6">
+            <a:extLst>
+              <a:ext uri="{28A0092B-C50C-407E-A947-70E740481C1C}">
+                <a14:useLocalDpi xmlns:a14="http://schemas.microsoft.com/office/drawing/2010/main" val="0"/>
+              </a:ext>
+            </a:extLst>
+          </a:blip>
+          <a:srcRect/>
+          <a:stretch>
+            <a:fillRect/>
+          </a:stretch>
+        </p:blipFill>
+        <p:spPr bwMode="auto">
+          <a:xfrm>
+            <a:off x="1000411" y="1328398"/>
+            <a:ext cx="2278570" cy="2100602"/>
+          </a:xfrm>
+          <a:prstGeom prst="rect">
+            <a:avLst/>
+          </a:prstGeom>
+          <a:noFill/>
+          <a:extLst>
+            <a:ext uri="{909E8E84-426E-40DD-AFC4-6F175D3DCCD1}">
+              <a14:hiddenFill xmlns:a14="http://schemas.microsoft.com/office/drawing/2010/main">
+                <a:solidFill>
+                  <a:srgbClr val="FFFFFF"/>
+                </a:solidFill>
+              </a14:hiddenFill>
+            </a:ext>
+          </a:extLst>
+        </p:spPr>
+      </p:pic>
+      <p:sp>
+        <p:nvSpPr>
+          <p:cNvPr id="3" name="Номер слайда 2">
+            <a:extLst>
+              <a:ext uri="{FF2B5EF4-FFF2-40B4-BE49-F238E27FC236}">
+                <a16:creationId xmlns:a16="http://schemas.microsoft.com/office/drawing/2014/main" id="{703019EF-FE78-BCB1-DCCA-2ABAD4584841}"/>
+              </a:ext>
+            </a:extLst>
+          </p:cNvPr>
+          <p:cNvSpPr>
+            <a:spLocks noGrp="1"/>
+          </p:cNvSpPr>
+          <p:nvPr>
+            <p:ph type="sldNum" sz="quarter" idx="12"/>
+          </p:nvPr>
+        </p:nvSpPr>
         <p:spPr/>
         <p:txBody>
           <a:bodyPr/>
           <a:lstStyle/>
           <a:p>
-            <a:r>
-              <a:rPr lang="ru-RU" dirty="0"/>
-              <a:t>Актуальность</a:t>
-            </a:r>
-          </a:p>
-        </p:txBody>
-      </p:sp>
-      <p:sp>
-        <p:nvSpPr>
-          <p:cNvPr id="3" name="Объект 2">
-            <a:extLst>
-              <a:ext uri="{FF2B5EF4-FFF2-40B4-BE49-F238E27FC236}">
-                <a16:creationId xmlns:a16="http://schemas.microsoft.com/office/drawing/2014/main" id="{3AB45B11-023A-5E91-C879-41A1B312C944}"/>
-              </a:ext>
-            </a:extLst>
-          </p:cNvPr>
-          <p:cNvSpPr>
-            <a:spLocks noGrp="1"/>
-          </p:cNvSpPr>
-          <p:nvPr>
-            <p:ph idx="1"/>
-          </p:nvPr>
-        </p:nvSpPr>
-        <p:spPr/>
-        <p:txBody>
-          <a:bodyPr/>
-          <a:lstStyle/>
-          <a:p>
-            <a:r>
-              <a:rPr lang="ru-RU" dirty="0"/>
-              <a:t>Картинка: найти нормальную или удалить </a:t>
-            </a:r>
+            <a:fld id="{5F9DB6E4-81A8-48FA-A111-413E3E85E768}" type="slidenum">
+              <a:rPr lang="ru-RU" smtClean="0"/>
+              <a:t>4</a:t>
+            </a:fld>
+            <a:endParaRPr lang="ru-RU"/>
           </a:p>
         </p:txBody>
       </p:sp>
     </p:spTree>
     <p:extLst>
       <p:ext uri="{BB962C8B-B14F-4D97-AF65-F5344CB8AC3E}">
-        <p14:creationId xmlns:p14="http://schemas.microsoft.com/office/powerpoint/2010/main" val="3614981585"/>
+        <p14:creationId xmlns:p14="http://schemas.microsoft.com/office/powerpoint/2010/main" val="4278982381"/>
       </p:ext>
     </p:extLst>
   </p:cSld>
@@ -6275,7 +6307,7 @@
           <p:cNvPr id="2" name="Заголовок 1">
             <a:extLst>
               <a:ext uri="{FF2B5EF4-FFF2-40B4-BE49-F238E27FC236}">
-                <a16:creationId xmlns:a16="http://schemas.microsoft.com/office/drawing/2014/main" id="{6E8DEFDC-A437-4C47-B07D-6342E196D0E9}"/>
+                <a16:creationId xmlns:a16="http://schemas.microsoft.com/office/drawing/2014/main" id="{9F89600A-14F2-4F8C-96F2-69CA1CCBAC5E}"/>
               </a:ext>
             </a:extLst>
           </p:cNvPr>
@@ -6286,293 +6318,118 @@
             <p:ph type="title"/>
           </p:nvPr>
         </p:nvSpPr>
+        <p:spPr>
+          <a:xfrm>
+            <a:off x="394317" y="68231"/>
+            <a:ext cx="10515600" cy="1325563"/>
+          </a:xfrm>
+        </p:spPr>
+        <p:txBody>
+          <a:bodyPr/>
+          <a:lstStyle/>
+          <a:p>
+            <a:r>
+              <a:rPr lang="ru-RU" sz="4400" dirty="0"/>
+              <a:t>Средства и технологии разработки</a:t>
+            </a:r>
+            <a:endParaRPr lang="ru-RU" dirty="0"/>
+          </a:p>
+        </p:txBody>
+      </p:sp>
+      <p:sp>
+        <p:nvSpPr>
+          <p:cNvPr id="3" name="Объект 2">
+            <a:extLst>
+              <a:ext uri="{FF2B5EF4-FFF2-40B4-BE49-F238E27FC236}">
+                <a16:creationId xmlns:a16="http://schemas.microsoft.com/office/drawing/2014/main" id="{A0F3E649-ADA8-4250-87FF-0757785BBB12}"/>
+              </a:ext>
+            </a:extLst>
+          </p:cNvPr>
+          <p:cNvSpPr>
+            <a:spLocks noGrp="1"/>
+          </p:cNvSpPr>
+          <p:nvPr>
+            <p:ph idx="1"/>
+          </p:nvPr>
+        </p:nvSpPr>
+        <p:spPr>
+          <a:xfrm>
+            <a:off x="523783" y="1118586"/>
+            <a:ext cx="10830017" cy="5513033"/>
+          </a:xfrm>
+        </p:spPr>
+        <p:txBody>
+          <a:bodyPr>
+            <a:normAutofit fontScale="92500" lnSpcReduction="20000"/>
+          </a:bodyPr>
+          <a:lstStyle/>
+          <a:p>
+            <a:pPr algn="just"/>
+            <a:r>
+              <a:rPr lang="ru-RU" dirty="0"/>
+              <a:t>Искусственный интеллект (ИИ) – раздел информатики, занимающийся созданием систем, способных выполнять задачи, требующие человеческого интеллекта: распознавание образов, понимание естественного языка и принятие решений на основе данных.</a:t>
+            </a:r>
+          </a:p>
+          <a:p>
+            <a:pPr algn="just"/>
+            <a:r>
+              <a:rPr lang="ru-RU" dirty="0" err="1"/>
+              <a:t>Свёрточные</a:t>
+            </a:r>
+            <a:r>
+              <a:rPr lang="ru-RU" dirty="0"/>
+              <a:t> нейронные сети (CNN) – архитектура глубокого обучения, автоматически извлекающая иерархические признаки из изображений. Идеально подходит для анализа мимики и детекции объектов в видеопотоке без ручного выделения характеристик.</a:t>
+            </a:r>
+          </a:p>
+          <a:p>
+            <a:pPr algn="just"/>
+            <a:r>
+              <a:rPr lang="ru-RU" dirty="0"/>
+              <a:t>Рекуррентные нейронные сети и трансформеры – модели, оптимизированные для работы с последовательностями данных. Применяются для анализа аудиопотока, распознавания речи и выявления просодических маркеров эмоционального состояния.</a:t>
+            </a:r>
+          </a:p>
+          <a:p>
+            <a:pPr algn="just"/>
+            <a:r>
+              <a:rPr lang="ru-RU" dirty="0"/>
+              <a:t>Мультимодальный анализ – методология совместной обработки разнородных данных (видео, аудио, текст), позволяющая компенсировать ограничения отдельных модальностей и повысить надёжность классификации в реальных условиях.</a:t>
+            </a:r>
+          </a:p>
+        </p:txBody>
+      </p:sp>
+      <p:sp>
+        <p:nvSpPr>
+          <p:cNvPr id="5" name="Номер слайда 4">
+            <a:extLst>
+              <a:ext uri="{FF2B5EF4-FFF2-40B4-BE49-F238E27FC236}">
+                <a16:creationId xmlns:a16="http://schemas.microsoft.com/office/drawing/2014/main" id="{05FBF554-F197-8F3F-ACC5-5580642F6229}"/>
+              </a:ext>
+            </a:extLst>
+          </p:cNvPr>
+          <p:cNvSpPr>
+            <a:spLocks noGrp="1"/>
+          </p:cNvSpPr>
+          <p:nvPr>
+            <p:ph type="sldNum" sz="quarter" idx="12"/>
+          </p:nvPr>
+        </p:nvSpPr>
         <p:spPr/>
         <p:txBody>
           <a:bodyPr/>
           <a:lstStyle/>
           <a:p>
-            <a:r>
-              <a:rPr lang="ru-RU" dirty="0"/>
-              <a:t>Средства и технологии разработки</a:t>
-            </a:r>
-          </a:p>
-        </p:txBody>
-      </p:sp>
-      <p:sp>
-        <p:nvSpPr>
-          <p:cNvPr id="7" name="TextBox 6">
-            <a:extLst>
-              <a:ext uri="{FF2B5EF4-FFF2-40B4-BE49-F238E27FC236}">
-                <a16:creationId xmlns:a16="http://schemas.microsoft.com/office/drawing/2014/main" id="{4621D1AC-E48E-40DF-94EA-D6449A28C51C}"/>
-              </a:ext>
-            </a:extLst>
-          </p:cNvPr>
-          <p:cNvSpPr txBox="1"/>
-          <p:nvPr/>
-        </p:nvSpPr>
-        <p:spPr>
-          <a:xfrm>
-            <a:off x="10990555" y="6391922"/>
-            <a:ext cx="870012" cy="372862"/>
-          </a:xfrm>
-          <a:prstGeom prst="rect">
-            <a:avLst/>
-          </a:prstGeom>
-          <a:noFill/>
-        </p:spPr>
-        <p:txBody>
-          <a:bodyPr wrap="square" rtlCol="0">
-            <a:spAutoFit/>
-          </a:bodyPr>
-          <a:lstStyle/>
-          <a:p>
-            <a:r>
-              <a:rPr lang="en-US" dirty="0"/>
-              <a:t>4/22</a:t>
-            </a:r>
+            <a:fld id="{5F9DB6E4-81A8-48FA-A111-413E3E85E768}" type="slidenum">
+              <a:rPr lang="ru-RU" smtClean="0"/>
+              <a:t>5</a:t>
+            </a:fld>
             <a:endParaRPr lang="ru-RU" dirty="0"/>
           </a:p>
         </p:txBody>
       </p:sp>
-      <p:pic>
-        <p:nvPicPr>
-          <p:cNvPr id="1028" name="Picture 4" descr="Picture background">
-            <a:extLst>
-              <a:ext uri="{FF2B5EF4-FFF2-40B4-BE49-F238E27FC236}">
-                <a16:creationId xmlns:a16="http://schemas.microsoft.com/office/drawing/2014/main" id="{82F14302-1BF2-E1DF-19A8-0E74AB6A70B2}"/>
-              </a:ext>
-            </a:extLst>
-          </p:cNvPr>
-          <p:cNvPicPr>
-            <a:picLocks noChangeAspect="1" noChangeArrowheads="1"/>
-          </p:cNvPicPr>
-          <p:nvPr/>
-        </p:nvPicPr>
-        <p:blipFill>
-          <a:blip r:embed="rId2">
-            <a:extLst>
-              <a:ext uri="{28A0092B-C50C-407E-A947-70E740481C1C}">
-                <a14:useLocalDpi xmlns:a14="http://schemas.microsoft.com/office/drawing/2010/main" val="0"/>
-              </a:ext>
-            </a:extLst>
-          </a:blip>
-          <a:srcRect/>
-          <a:stretch>
-            <a:fillRect/>
-          </a:stretch>
-        </p:blipFill>
-        <p:spPr bwMode="auto">
-          <a:xfrm>
-            <a:off x="3779663" y="2120804"/>
-            <a:ext cx="3699318" cy="1381464"/>
-          </a:xfrm>
-          <a:prstGeom prst="rect">
-            <a:avLst/>
-          </a:prstGeom>
-          <a:noFill/>
-          <a:extLst>
-            <a:ext uri="{909E8E84-426E-40DD-AFC4-6F175D3DCCD1}">
-              <a14:hiddenFill xmlns:a14="http://schemas.microsoft.com/office/drawing/2010/main">
-                <a:solidFill>
-                  <a:srgbClr val="FFFFFF"/>
-                </a:solidFill>
-              </a14:hiddenFill>
-            </a:ext>
-          </a:extLst>
-        </p:spPr>
-      </p:pic>
-      <p:pic>
-        <p:nvPicPr>
-          <p:cNvPr id="1030" name="Picture 6" descr="Picture background">
-            <a:extLst>
-              <a:ext uri="{FF2B5EF4-FFF2-40B4-BE49-F238E27FC236}">
-                <a16:creationId xmlns:a16="http://schemas.microsoft.com/office/drawing/2014/main" id="{A339DE64-170F-3267-C6E5-0C47E9D9367C}"/>
-              </a:ext>
-            </a:extLst>
-          </p:cNvPr>
-          <p:cNvPicPr>
-            <a:picLocks noChangeAspect="1" noChangeArrowheads="1"/>
-          </p:cNvPicPr>
-          <p:nvPr/>
-        </p:nvPicPr>
-        <p:blipFill>
-          <a:blip r:embed="rId3">
-            <a:extLst>
-              <a:ext uri="{28A0092B-C50C-407E-A947-70E740481C1C}">
-                <a14:useLocalDpi xmlns:a14="http://schemas.microsoft.com/office/drawing/2010/main" val="0"/>
-              </a:ext>
-            </a:extLst>
-          </a:blip>
-          <a:srcRect/>
-          <a:stretch>
-            <a:fillRect/>
-          </a:stretch>
-        </p:blipFill>
-        <p:spPr bwMode="auto">
-          <a:xfrm>
-            <a:off x="8647176" y="1445684"/>
-            <a:ext cx="1871472" cy="1871472"/>
-          </a:xfrm>
-          <a:prstGeom prst="rect">
-            <a:avLst/>
-          </a:prstGeom>
-          <a:noFill/>
-          <a:extLst>
-            <a:ext uri="{909E8E84-426E-40DD-AFC4-6F175D3DCCD1}">
-              <a14:hiddenFill xmlns:a14="http://schemas.microsoft.com/office/drawing/2010/main">
-                <a:solidFill>
-                  <a:srgbClr val="FFFFFF"/>
-                </a:solidFill>
-              </a14:hiddenFill>
-            </a:ext>
-          </a:extLst>
-        </p:spPr>
-      </p:pic>
-      <p:pic>
-        <p:nvPicPr>
-          <p:cNvPr id="1032" name="Picture 8" descr="Picture background">
-            <a:extLst>
-              <a:ext uri="{FF2B5EF4-FFF2-40B4-BE49-F238E27FC236}">
-                <a16:creationId xmlns:a16="http://schemas.microsoft.com/office/drawing/2014/main" id="{28767BEC-E43E-ABAE-D052-1CD818E5D755}"/>
-              </a:ext>
-            </a:extLst>
-          </p:cNvPr>
-          <p:cNvPicPr>
-            <a:picLocks noChangeAspect="1" noChangeArrowheads="1"/>
-          </p:cNvPicPr>
-          <p:nvPr/>
-        </p:nvPicPr>
-        <p:blipFill>
-          <a:blip r:embed="rId4">
-            <a:extLst>
-              <a:ext uri="{28A0092B-C50C-407E-A947-70E740481C1C}">
-                <a14:useLocalDpi xmlns:a14="http://schemas.microsoft.com/office/drawing/2010/main" val="0"/>
-              </a:ext>
-            </a:extLst>
-          </a:blip>
-          <a:srcRect/>
-          <a:stretch>
-            <a:fillRect/>
-          </a:stretch>
-        </p:blipFill>
-        <p:spPr bwMode="auto">
-          <a:xfrm>
-            <a:off x="1913382" y="3575536"/>
-            <a:ext cx="2035466" cy="2100601"/>
-          </a:xfrm>
-          <a:prstGeom prst="rect">
-            <a:avLst/>
-          </a:prstGeom>
-          <a:noFill/>
-          <a:extLst>
-            <a:ext uri="{909E8E84-426E-40DD-AFC4-6F175D3DCCD1}">
-              <a14:hiddenFill xmlns:a14="http://schemas.microsoft.com/office/drawing/2010/main">
-                <a:solidFill>
-                  <a:srgbClr val="FFFFFF"/>
-                </a:solidFill>
-              </a14:hiddenFill>
-            </a:ext>
-          </a:extLst>
-        </p:spPr>
-      </p:pic>
-      <p:pic>
-        <p:nvPicPr>
-          <p:cNvPr id="1036" name="Picture 12" descr="Picture background">
-            <a:extLst>
-              <a:ext uri="{FF2B5EF4-FFF2-40B4-BE49-F238E27FC236}">
-                <a16:creationId xmlns:a16="http://schemas.microsoft.com/office/drawing/2014/main" id="{809F2891-D9F2-175C-53BA-BE3D9B227152}"/>
-              </a:ext>
-            </a:extLst>
-          </p:cNvPr>
-          <p:cNvPicPr>
-            <a:picLocks noChangeAspect="1" noChangeArrowheads="1"/>
-          </p:cNvPicPr>
-          <p:nvPr/>
-        </p:nvPicPr>
-        <p:blipFill>
-          <a:blip r:embed="rId5">
-            <a:extLst>
-              <a:ext uri="{28A0092B-C50C-407E-A947-70E740481C1C}">
-                <a14:useLocalDpi xmlns:a14="http://schemas.microsoft.com/office/drawing/2010/main" val="0"/>
-              </a:ext>
-            </a:extLst>
-          </a:blip>
-          <a:srcRect/>
-          <a:stretch>
-            <a:fillRect/>
-          </a:stretch>
-        </p:blipFill>
-        <p:spPr bwMode="auto">
-          <a:xfrm>
-            <a:off x="7596875" y="3575535"/>
-            <a:ext cx="2100602" cy="2100602"/>
-          </a:xfrm>
-          <a:prstGeom prst="rect">
-            <a:avLst/>
-          </a:prstGeom>
-          <a:noFill/>
-          <a:extLst>
-            <a:ext uri="{909E8E84-426E-40DD-AFC4-6F175D3DCCD1}">
-              <a14:hiddenFill xmlns:a14="http://schemas.microsoft.com/office/drawing/2010/main">
-                <a:solidFill>
-                  <a:srgbClr val="FFFFFF"/>
-                </a:solidFill>
-              </a14:hiddenFill>
-            </a:ext>
-          </a:extLst>
-        </p:spPr>
-      </p:pic>
-      <p:pic>
-        <p:nvPicPr>
-          <p:cNvPr id="1038" name="Picture 14" descr="Picture background">
-            <a:extLst>
-              <a:ext uri="{FF2B5EF4-FFF2-40B4-BE49-F238E27FC236}">
-                <a16:creationId xmlns:a16="http://schemas.microsoft.com/office/drawing/2014/main" id="{56A00DD1-6DEC-2ED3-2ECC-A70C200901C3}"/>
-              </a:ext>
-            </a:extLst>
-          </p:cNvPr>
-          <p:cNvPicPr>
-            <a:picLocks noChangeAspect="1" noChangeArrowheads="1"/>
-          </p:cNvPicPr>
-          <p:nvPr/>
-        </p:nvPicPr>
-        <p:blipFill>
-          <a:blip r:embed="rId6">
-            <a:extLst>
-              <a:ext uri="{28A0092B-C50C-407E-A947-70E740481C1C}">
-                <a14:useLocalDpi xmlns:a14="http://schemas.microsoft.com/office/drawing/2010/main" val="0"/>
-              </a:ext>
-            </a:extLst>
-          </a:blip>
-          <a:srcRect/>
-          <a:stretch>
-            <a:fillRect/>
-          </a:stretch>
-        </p:blipFill>
-        <p:spPr bwMode="auto">
-          <a:xfrm>
-            <a:off x="1000411" y="1328398"/>
-            <a:ext cx="2278570" cy="2100602"/>
-          </a:xfrm>
-          <a:prstGeom prst="rect">
-            <a:avLst/>
-          </a:prstGeom>
-          <a:noFill/>
-          <a:extLst>
-            <a:ext uri="{909E8E84-426E-40DD-AFC4-6F175D3DCCD1}">
-              <a14:hiddenFill xmlns:a14="http://schemas.microsoft.com/office/drawing/2010/main">
-                <a:solidFill>
-                  <a:srgbClr val="FFFFFF"/>
-                </a:solidFill>
-              </a14:hiddenFill>
-            </a:ext>
-          </a:extLst>
-        </p:spPr>
-      </p:pic>
     </p:spTree>
     <p:extLst>
       <p:ext uri="{BB962C8B-B14F-4D97-AF65-F5344CB8AC3E}">
-        <p14:creationId xmlns:p14="http://schemas.microsoft.com/office/powerpoint/2010/main" val="4278982381"/>
+        <p14:creationId xmlns:p14="http://schemas.microsoft.com/office/powerpoint/2010/main" val="1289578842"/>
       </p:ext>
     </p:extLst>
   </p:cSld>
@@ -6617,8 +6474,8 @@
         </p:nvSpPr>
         <p:spPr>
           <a:xfrm>
-            <a:off x="838200" y="969118"/>
-            <a:ext cx="10515600" cy="5839612"/>
+            <a:off x="200635" y="991102"/>
+            <a:ext cx="10616717" cy="2803658"/>
           </a:xfrm>
         </p:spPr>
         <p:txBody>
@@ -6627,67 +6484,41 @@
           </a:bodyPr>
           <a:lstStyle/>
           <a:p>
-            <a:pPr marL="0" indent="0">
-              <a:buNone/>
-            </a:pPr>
+            <a:pPr algn="just"/>
             <a:r>
               <a:rPr lang="ru-RU" sz="1800" dirty="0"/>
-              <a:t>Детекция лица:</a:t>
-            </a:r>
-          </a:p>
-          <a:p>
+              <a:t>В HR-процессах модуль анализа лица выполняет задачу объективной фиксации эмоциональных реакций участников встреч и собеседований. Технология позволяет оценивать вовлечённость, выявлять признаки стресса и формировать доказательную базу для принятия решений.</a:t>
+            </a:r>
+          </a:p>
+          <a:p>
+            <a:pPr algn="just"/>
             <a:r>
               <a:rPr lang="ru-RU" sz="1800" dirty="0"/>
-              <a:t>Применяется каскадная архитектура MTCNN из трёх нейронных сетей</a:t>
-            </a:r>
-          </a:p>
-          <a:p>
+              <a:t>Модуль работает в автоматическом режиме: захватывает кадры с веб-камеры, локализует область лица, нормализует геометрию и классифицирует текущее эмоциональное состояние на основе </a:t>
+            </a:r>
+            <a:r>
+              <a:rPr lang="ru-RU" sz="1800" dirty="0" err="1"/>
+              <a:t>предобученных</a:t>
+            </a:r>
             <a:r>
               <a:rPr lang="ru-RU" sz="1800" dirty="0"/>
-              <a:t>P-Net генерирует кандидаты, R-Net уточняет границы, O-Net определяет 5 ключевых точек</a:t>
-            </a:r>
-          </a:p>
-          <a:p>
+              <a:t> </a:t>
+            </a:r>
+            <a:r>
+              <a:rPr lang="ru-RU" sz="1800" dirty="0" err="1"/>
+              <a:t>сверточных</a:t>
+            </a:r>
             <a:r>
               <a:rPr lang="ru-RU" sz="1800" dirty="0"/>
-              <a:t>Выравнивание лица повышает точность последующей классификации</a:t>
-            </a:r>
-          </a:p>
-        </p:txBody>
-      </p:sp>
-      <p:sp>
-        <p:nvSpPr>
-          <p:cNvPr id="4" name="TextBox 3">
-            <a:extLst>
-              <a:ext uri="{FF2B5EF4-FFF2-40B4-BE49-F238E27FC236}">
-                <a16:creationId xmlns:a16="http://schemas.microsoft.com/office/drawing/2014/main" id="{64686E8C-5C6E-4C73-90BC-84349D9F5C1C}"/>
-              </a:ext>
-            </a:extLst>
-          </p:cNvPr>
-          <p:cNvSpPr txBox="1"/>
-          <p:nvPr/>
-        </p:nvSpPr>
-        <p:spPr>
-          <a:xfrm>
-            <a:off x="10990555" y="6391922"/>
-            <a:ext cx="870012" cy="372862"/>
-          </a:xfrm>
-          <a:prstGeom prst="rect">
-            <a:avLst/>
-          </a:prstGeom>
-          <a:noFill/>
-        </p:spPr>
-        <p:txBody>
-          <a:bodyPr wrap="square" rtlCol="0">
-            <a:spAutoFit/>
-          </a:bodyPr>
-          <a:lstStyle/>
-          <a:p>
-            <a:r>
-              <a:rPr lang="en-US" dirty="0"/>
-              <a:t>5/22</a:t>
-            </a:r>
-            <a:endParaRPr lang="ru-RU" dirty="0"/>
+              <a:t> сетей.</a:t>
+            </a:r>
+          </a:p>
+          <a:p>
+            <a:pPr algn="just"/>
+            <a:r>
+              <a:rPr lang="ru-RU" sz="1800" dirty="0"/>
+              <a:t>Система способна обрабатывать несколько лиц одновременно, отслеживать динамику изменений в течение сессии и агрегировать результаты в структурированные метрики без участия оператора.</a:t>
+            </a:r>
           </a:p>
         </p:txBody>
       </p:sp>
@@ -6709,7 +6540,7 @@
         </p:nvSpPr>
         <p:spPr>
           <a:xfrm>
-            <a:off x="474955" y="-189056"/>
+            <a:off x="374371" y="103552"/>
             <a:ext cx="10515600" cy="1325563"/>
           </a:xfrm>
         </p:spPr>
@@ -6726,36 +6557,35 @@
           </a:p>
         </p:txBody>
       </p:sp>
-      <p:pic>
-        <p:nvPicPr>
-          <p:cNvPr id="5" name="Рисунок 4">
-            <a:extLst>
-              <a:ext uri="{FF2B5EF4-FFF2-40B4-BE49-F238E27FC236}">
-                <a16:creationId xmlns:a16="http://schemas.microsoft.com/office/drawing/2014/main" id="{4B00B286-9A87-B124-779F-59DF1D8877D8}"/>
-              </a:ext>
-            </a:extLst>
-          </p:cNvPr>
-          <p:cNvPicPr>
-            <a:picLocks noChangeAspect="1"/>
-          </p:cNvPicPr>
-          <p:nvPr/>
-        </p:nvPicPr>
-        <p:blipFill>
-          <a:blip r:embed="rId2"/>
-          <a:stretch>
-            <a:fillRect/>
-          </a:stretch>
-        </p:blipFill>
-        <p:spPr>
-          <a:xfrm>
-            <a:off x="293333" y="2459336"/>
-            <a:ext cx="10515600" cy="4119017"/>
-          </a:xfrm>
-          <a:prstGeom prst="rect">
-            <a:avLst/>
-          </a:prstGeom>
-        </p:spPr>
-      </p:pic>
+      <p:sp>
+        <p:nvSpPr>
+          <p:cNvPr id="5" name="Номер слайда 4">
+            <a:extLst>
+              <a:ext uri="{FF2B5EF4-FFF2-40B4-BE49-F238E27FC236}">
+                <a16:creationId xmlns:a16="http://schemas.microsoft.com/office/drawing/2014/main" id="{6AC9E070-DAEE-B241-0A58-56DA4A87F8B3}"/>
+              </a:ext>
+            </a:extLst>
+          </p:cNvPr>
+          <p:cNvSpPr>
+            <a:spLocks noGrp="1"/>
+          </p:cNvSpPr>
+          <p:nvPr>
+            <p:ph type="sldNum" sz="quarter" idx="12"/>
+          </p:nvPr>
+        </p:nvSpPr>
+        <p:spPr/>
+        <p:txBody>
+          <a:bodyPr/>
+          <a:lstStyle/>
+          <a:p>
+            <a:fld id="{5F9DB6E4-81A8-48FA-A111-413E3E85E768}" type="slidenum">
+              <a:rPr lang="ru-RU" smtClean="0"/>
+              <a:t>6</a:t>
+            </a:fld>
+            <a:endParaRPr lang="ru-RU" dirty="0"/>
+          </a:p>
+        </p:txBody>
+      </p:sp>
     </p:spTree>
     <p:extLst>
       <p:ext uri="{BB962C8B-B14F-4D97-AF65-F5344CB8AC3E}">
@@ -6814,95 +6644,80 @@
           </a:bodyPr>
           <a:lstStyle/>
           <a:p>
-            <a:pPr marL="0" indent="0">
+            <a:pPr marL="0" indent="0" algn="just">
               <a:buNone/>
             </a:pPr>
             <a:r>
               <a:rPr lang="ru-RU" sz="1800" dirty="0"/>
-              <a:t>Классификация эмоций:</a:t>
-            </a:r>
-          </a:p>
-          <a:p>
+              <a:t>MTCNN (Multi-</a:t>
+            </a:r>
+            <a:r>
+              <a:rPr lang="ru-RU" sz="1800" dirty="0" err="1"/>
+              <a:t>task</a:t>
+            </a:r>
             <a:r>
               <a:rPr lang="ru-RU" sz="1800" dirty="0"/>
-              <a:t>Используется библиотека </a:t>
-            </a:r>
+              <a:t> </a:t>
+            </a:r>
+            <a:r>
+              <a:rPr lang="ru-RU" sz="1800" dirty="0" err="1"/>
+              <a:t>Cascaded</a:t>
+            </a:r>
+            <a:r>
+              <a:rPr lang="ru-RU" sz="1800" dirty="0"/>
+              <a:t> CNN) – каскадная архитектура из трёх сетей, последовательно уточняющих положение лица и определяющих 5 ключевых точек. Обеспечивает высокую скорость детекции при сохранении точности &gt;95% даже при частичных перекрытиях.</a:t>
+            </a:r>
+          </a:p>
+          <a:p>
+            <a:pPr marL="0" indent="0" algn="just">
+              <a:buNone/>
+            </a:pPr>
             <a:r>
               <a:rPr lang="ru-RU" sz="1800" dirty="0" err="1"/>
               <a:t>DeepFace</a:t>
             </a:r>
             <a:r>
               <a:rPr lang="ru-RU" sz="1800" dirty="0"/>
-              <a:t> с </a:t>
+              <a:t> – мета-библиотека, предоставляющая доступ к </a:t>
             </a:r>
             <a:r>
               <a:rPr lang="ru-RU" sz="1800" dirty="0" err="1"/>
-              <a:t>предобученными</a:t>
+              <a:t>предобученным</a:t>
             </a:r>
             <a:r>
               <a:rPr lang="ru-RU" sz="1800" dirty="0"/>
-              <a:t> моделями</a:t>
-            </a:r>
-          </a:p>
-          <a:p>
-            <a:r>
-              <a:rPr lang="ru-RU" sz="1800" dirty="0"/>
-              <a:t>VGG-Face: 16–19 </a:t>
-            </a:r>
-            <a:r>
-              <a:rPr lang="ru-RU" sz="1800" dirty="0" err="1"/>
-              <a:t>свёрточных</a:t>
-            </a:r>
-            <a:r>
-              <a:rPr lang="ru-RU" sz="1800" dirty="0"/>
-              <a:t> слоёв для глубокого извлечения признаков</a:t>
-            </a:r>
-          </a:p>
-          <a:p>
+              <a:t> моделям (VGG-Face, Facenet512, </a:t>
+            </a:r>
             <a:r>
               <a:rPr lang="ru-RU" sz="1800" dirty="0" err="1"/>
               <a:t>EfficientNet</a:t>
             </a:r>
             <a:r>
               <a:rPr lang="ru-RU" sz="1800" dirty="0"/>
-              <a:t>: оптимизированное соотношение точности и скорости</a:t>
-            </a:r>
-          </a:p>
-        </p:txBody>
-      </p:sp>
-      <p:sp>
-        <p:nvSpPr>
-          <p:cNvPr id="4" name="TextBox 3">
-            <a:extLst>
-              <a:ext uri="{FF2B5EF4-FFF2-40B4-BE49-F238E27FC236}">
-                <a16:creationId xmlns:a16="http://schemas.microsoft.com/office/drawing/2014/main" id="{64686E8C-5C6E-4C73-90BC-84349D9F5C1C}"/>
-              </a:ext>
-            </a:extLst>
-          </p:cNvPr>
-          <p:cNvSpPr txBox="1"/>
-          <p:nvPr/>
-        </p:nvSpPr>
-        <p:spPr>
-          <a:xfrm>
-            <a:off x="10990555" y="6391922"/>
-            <a:ext cx="870012" cy="372862"/>
-          </a:xfrm>
-          <a:prstGeom prst="rect">
-            <a:avLst/>
-          </a:prstGeom>
-          <a:noFill/>
-        </p:spPr>
-        <p:txBody>
-          <a:bodyPr wrap="square" rtlCol="0">
-            <a:spAutoFit/>
-          </a:bodyPr>
-          <a:lstStyle/>
-          <a:p>
-            <a:r>
-              <a:rPr lang="en-US" dirty="0"/>
-              <a:t>5/22</a:t>
-            </a:r>
-            <a:endParaRPr lang="ru-RU" dirty="0"/>
+              <a:t>). Позволяет гибко выбирать архитектуру в зависимости от требований к точности и вычислительной нагрузке.</a:t>
+            </a:r>
+          </a:p>
+          <a:p>
+            <a:pPr marL="0" indent="0" algn="just">
+              <a:buNone/>
+            </a:pPr>
+            <a:r>
+              <a:rPr lang="ru-RU" sz="1800" dirty="0" err="1"/>
+              <a:t>OpenCV</a:t>
+            </a:r>
+            <a:r>
+              <a:rPr lang="ru-RU" sz="1800" dirty="0"/>
+              <a:t> – библиотека компьютерного зрения, используемая для предобработки кадров, изменения размера, конвертации форматов и наложения результатов анализа на видеопоток в реальном времени.</a:t>
+            </a:r>
+          </a:p>
+          <a:p>
+            <a:pPr marL="0" indent="0" algn="just">
+              <a:buNone/>
+            </a:pPr>
+            <a:r>
+              <a:rPr lang="ru-RU" sz="1800" dirty="0"/>
+              <a:t>Комбинация данных инструментов позволяет реализовать конвейер обработки: детекция → выравнивание → извлечение признаков → классификация, полностью автоматизированный на стороне AI-шлюза.</a:t>
+            </a:r>
           </a:p>
         </p:txBody>
       </p:sp>
@@ -6924,7 +6739,7 @@
         </p:nvSpPr>
         <p:spPr>
           <a:xfrm>
-            <a:off x="474955" y="-189056"/>
+            <a:off x="474955" y="93216"/>
             <a:ext cx="10515600" cy="1325563"/>
           </a:xfrm>
         </p:spPr>
@@ -6936,17 +6751,17 @@
           <a:p>
             <a:r>
               <a:rPr lang="ru-RU" sz="4000" dirty="0"/>
-              <a:t>Модуль анализа лица и эмоций</a:t>
+              <a:t>Библиотеки и модели компьютерного зрения</a:t>
             </a:r>
           </a:p>
         </p:txBody>
       </p:sp>
       <p:pic>
         <p:nvPicPr>
-          <p:cNvPr id="5" name="Рисунок 4">
-            <a:extLst>
-              <a:ext uri="{FF2B5EF4-FFF2-40B4-BE49-F238E27FC236}">
-                <a16:creationId xmlns:a16="http://schemas.microsoft.com/office/drawing/2014/main" id="{71DA179A-E911-4403-8C4E-5C33367F0B7C}"/>
+          <p:cNvPr id="6" name="Рисунок 5">
+            <a:extLst>
+              <a:ext uri="{FF2B5EF4-FFF2-40B4-BE49-F238E27FC236}">
+                <a16:creationId xmlns:a16="http://schemas.microsoft.com/office/drawing/2014/main" id="{D3333754-CF45-0E50-8B8C-EF42D0C2032D}"/>
               </a:ext>
             </a:extLst>
           </p:cNvPr>
@@ -6956,32 +6771,50 @@
           <p:nvPr/>
         </p:nvPicPr>
         <p:blipFill>
-          <a:blip r:embed="rId2">
-            <a:extLst>
-              <a:ext uri="{28A0092B-C50C-407E-A947-70E740481C1C}">
-                <a14:useLocalDpi xmlns:a14="http://schemas.microsoft.com/office/drawing/2010/main" val="0"/>
-              </a:ext>
-            </a:extLst>
-          </a:blip>
-          <a:srcRect/>
+          <a:blip r:embed="rId2"/>
           <a:stretch>
             <a:fillRect/>
           </a:stretch>
         </p:blipFill>
-        <p:spPr bwMode="auto">
-          <a:xfrm>
-            <a:off x="373838" y="2801492"/>
-            <a:ext cx="10616717" cy="2814964"/>
+        <p:spPr>
+          <a:xfrm>
+            <a:off x="1623686" y="4147518"/>
+            <a:ext cx="8218138" cy="2617266"/>
           </a:xfrm>
           <a:prstGeom prst="rect">
             <a:avLst/>
           </a:prstGeom>
-          <a:noFill/>
-          <a:ln>
-            <a:noFill/>
-          </a:ln>
         </p:spPr>
       </p:pic>
+      <p:sp>
+        <p:nvSpPr>
+          <p:cNvPr id="5" name="Номер слайда 4">
+            <a:extLst>
+              <a:ext uri="{FF2B5EF4-FFF2-40B4-BE49-F238E27FC236}">
+                <a16:creationId xmlns:a16="http://schemas.microsoft.com/office/drawing/2014/main" id="{03BC27D8-DE64-58D4-3124-30AD9D6185D3}"/>
+              </a:ext>
+            </a:extLst>
+          </p:cNvPr>
+          <p:cNvSpPr>
+            <a:spLocks noGrp="1"/>
+          </p:cNvSpPr>
+          <p:nvPr>
+            <p:ph type="sldNum" sz="quarter" idx="12"/>
+          </p:nvPr>
+        </p:nvSpPr>
+        <p:spPr/>
+        <p:txBody>
+          <a:bodyPr/>
+          <a:lstStyle/>
+          <a:p>
+            <a:fld id="{5F9DB6E4-81A8-48FA-A111-413E3E85E768}" type="slidenum">
+              <a:rPr lang="ru-RU" smtClean="0"/>
+              <a:t>7</a:t>
+            </a:fld>
+            <a:endParaRPr lang="ru-RU"/>
+          </a:p>
+        </p:txBody>
+      </p:sp>
     </p:spTree>
     <p:extLst>
       <p:ext uri="{BB962C8B-B14F-4D97-AF65-F5344CB8AC3E}">
@@ -7030,8 +6863,8 @@
         </p:nvSpPr>
         <p:spPr>
           <a:xfrm>
-            <a:off x="419164" y="969118"/>
-            <a:ext cx="4856924" cy="5839612"/>
+            <a:off x="838200" y="969118"/>
+            <a:ext cx="10515600" cy="5839612"/>
           </a:xfrm>
         </p:spPr>
         <p:txBody>
@@ -7040,142 +6873,71 @@
           </a:bodyPr>
           <a:lstStyle/>
           <a:p>
-            <a:pPr marL="0" indent="0">
+            <a:pPr marL="0" indent="0" algn="just">
               <a:buNone/>
             </a:pPr>
             <a:r>
               <a:rPr lang="ru-RU" sz="1800" dirty="0"/>
-              <a:t>Назначение: Построение плотной сетки из 468 трёхмерных ключевых точек на лице</a:t>
-            </a:r>
-          </a:p>
-          <a:p>
-            <a:pPr marL="0" indent="0">
+              <a:t>Основные функции:</a:t>
+            </a:r>
+          </a:p>
+          <a:p>
+            <a:pPr algn="just"/>
+            <a:r>
+              <a:rPr lang="ru-RU" sz="1800" dirty="0"/>
+              <a:t>Захват видеопотока через браузерные API без установки дополнительных плагинов</a:t>
+            </a:r>
+          </a:p>
+          <a:p>
+            <a:pPr algn="just"/>
+            <a:r>
+              <a:rPr lang="ru-RU" sz="1800" dirty="0"/>
+              <a:t>Детекция лиц и классификация базовых эмоций в реальном времени</a:t>
+            </a:r>
+          </a:p>
+          <a:p>
+            <a:pPr algn="just"/>
+            <a:r>
+              <a:rPr lang="ru-RU" sz="1800" dirty="0"/>
+              <a:t>Отслеживание изменения эмоционального состояния в течение сессии с фиксацией временных меток</a:t>
+            </a:r>
+          </a:p>
+          <a:p>
+            <a:pPr algn="just"/>
+            <a:r>
+              <a:rPr lang="ru-RU" sz="1800" dirty="0"/>
+              <a:t>Адаптивная частота отправки кадров для балансировки нагрузки на сеть и сервер</a:t>
+            </a:r>
+          </a:p>
+          <a:p>
+            <a:pPr marL="0" indent="0" algn="just">
               <a:buNone/>
             </a:pPr>
             <a:r>
               <a:rPr lang="ru-RU" sz="1800" dirty="0"/>
-              <a:t>Возможности:</a:t>
-            </a:r>
-          </a:p>
-          <a:p>
+              <a:t>Дополнительные функции:</a:t>
+            </a:r>
+          </a:p>
+          <a:p>
+            <a:pPr algn="just"/>
             <a:r>
               <a:rPr lang="ru-RU" sz="1800" dirty="0"/>
-              <a:t>Оценка </a:t>
-            </a:r>
-            <a:r>
-              <a:rPr lang="ru-RU" sz="1800" dirty="0" err="1"/>
-              <a:t>blendshape</a:t>
-            </a:r>
+              <a:t>Вычисление метрик вовлечённости на основе частоты и интенсивности эмоциональных проявлений</a:t>
+            </a:r>
+          </a:p>
+          <a:p>
+            <a:pPr algn="just"/>
             <a:r>
               <a:rPr lang="ru-RU" sz="1800" dirty="0"/>
-              <a:t>-коэффициентов для анализа активности лицевых мышц</a:t>
-            </a:r>
-          </a:p>
-          <a:p>
+              <a:t>Фильтрация ложных срабатываний при отсутствии лиц в кадре или при низком качестве освещения</a:t>
+            </a:r>
+          </a:p>
+          <a:p>
+            <a:pPr algn="just"/>
             <a:r>
               <a:rPr lang="ru-RU" sz="1800" dirty="0"/>
-              <a:t>Вычисление углов поворота головы (</a:t>
-            </a:r>
-            <a:r>
-              <a:rPr lang="ru-RU" sz="1800" dirty="0" err="1"/>
-              <a:t>yaw</a:t>
-            </a:r>
-            <a:r>
-              <a:rPr lang="ru-RU" sz="1800" dirty="0"/>
-              <a:t>, </a:t>
-            </a:r>
-            <a:r>
-              <a:rPr lang="ru-RU" sz="1800" dirty="0" err="1"/>
-              <a:t>pitch</a:t>
-            </a:r>
-            <a:r>
-              <a:rPr lang="ru-RU" sz="1800" dirty="0"/>
-              <a:t>, </a:t>
-            </a:r>
-            <a:r>
-              <a:rPr lang="ru-RU" sz="1800" dirty="0" err="1"/>
-              <a:t>roll</a:t>
-            </a:r>
-            <a:r>
-              <a:rPr lang="ru-RU" sz="1800" dirty="0"/>
-              <a:t>)</a:t>
-            </a:r>
-          </a:p>
-          <a:p>
-            <a:r>
-              <a:rPr lang="ru-RU" sz="1800" dirty="0"/>
-              <a:t>Отслеживание </a:t>
-            </a:r>
-            <a:r>
-              <a:rPr lang="ru-RU" sz="1800" dirty="0" err="1"/>
-              <a:t>микровыражений</a:t>
-            </a:r>
-            <a:r>
-              <a:rPr lang="ru-RU" sz="1800" dirty="0"/>
-              <a:t> длительностью 1/25–1/5 секунды</a:t>
-            </a:r>
-          </a:p>
-          <a:p>
-            <a:pPr marL="0" indent="0">
-              <a:buNone/>
-            </a:pPr>
-            <a:r>
-              <a:rPr lang="ru-RU" sz="1800" dirty="0"/>
-              <a:t>Архитектура: </a:t>
-            </a:r>
-            <a:r>
-              <a:rPr lang="ru-RU" sz="1800" dirty="0" err="1"/>
-              <a:t>Encoder-decoder</a:t>
-            </a:r>
-            <a:r>
-              <a:rPr lang="ru-RU" sz="1800" dirty="0"/>
-              <a:t> на базе трансформеров обеспечивает детальную 3D-модель лица</a:t>
-            </a:r>
-          </a:p>
-          <a:p>
-            <a:pPr marL="0" indent="0">
-              <a:buNone/>
-            </a:pPr>
-            <a:r>
-              <a:rPr lang="ru-RU" sz="1800" dirty="0"/>
-              <a:t>Преимущества: Устойчивость к перекрытиям, различным ракурсам, работа в реальном времени</a:t>
-            </a:r>
-          </a:p>
-        </p:txBody>
-      </p:sp>
-      <p:sp>
-        <p:nvSpPr>
-          <p:cNvPr id="4" name="TextBox 3">
-            <a:extLst>
-              <a:ext uri="{FF2B5EF4-FFF2-40B4-BE49-F238E27FC236}">
-                <a16:creationId xmlns:a16="http://schemas.microsoft.com/office/drawing/2014/main" id="{64686E8C-5C6E-4C73-90BC-84349D9F5C1C}"/>
-              </a:ext>
-            </a:extLst>
-          </p:cNvPr>
-          <p:cNvSpPr txBox="1"/>
-          <p:nvPr/>
-        </p:nvSpPr>
-        <p:spPr>
-          <a:xfrm>
-            <a:off x="10990555" y="6391922"/>
-            <a:ext cx="870012" cy="372862"/>
-          </a:xfrm>
-          <a:prstGeom prst="rect">
-            <a:avLst/>
-          </a:prstGeom>
-          <a:noFill/>
-        </p:spPr>
-        <p:txBody>
-          <a:bodyPr wrap="square" rtlCol="0">
-            <a:spAutoFit/>
-          </a:bodyPr>
-          <a:lstStyle/>
-          <a:p>
-            <a:r>
-              <a:rPr lang="en-US" dirty="0"/>
-              <a:t>5/22</a:t>
-            </a:r>
-            <a:endParaRPr lang="ru-RU" dirty="0"/>
+              <a:t>Экспорт сырых данных анализа в формате JSON для последующей агрегации в отчётах</a:t>
+            </a:r>
           </a:p>
         </p:txBody>
       </p:sp>
@@ -7197,7 +6959,7 @@
         </p:nvSpPr>
         <p:spPr>
           <a:xfrm>
-            <a:off x="474955" y="-189056"/>
+            <a:off x="465811" y="176704"/>
             <a:ext cx="10515600" cy="1325563"/>
           </a:xfrm>
         </p:spPr>
@@ -7209,61 +6971,44 @@
           <a:p>
             <a:r>
               <a:rPr lang="ru-RU" sz="4000" dirty="0"/>
-              <a:t>Модель </a:t>
-            </a:r>
-            <a:r>
-              <a:rPr lang="en-US" sz="4000" dirty="0" err="1"/>
-              <a:t>MediaPipe</a:t>
-            </a:r>
-            <a:endParaRPr lang="ru-RU" sz="4000" dirty="0"/>
-          </a:p>
-        </p:txBody>
-      </p:sp>
-      <p:pic>
-        <p:nvPicPr>
-          <p:cNvPr id="7" name="Рисунок 6" descr="Задача &quot;Опорный знак на лице&quot;">
-            <a:extLst>
-              <a:ext uri="{FF2B5EF4-FFF2-40B4-BE49-F238E27FC236}">
-                <a16:creationId xmlns:a16="http://schemas.microsoft.com/office/drawing/2014/main" id="{AC6A1973-8F20-E21C-8984-347E22110987}"/>
-              </a:ext>
-            </a:extLst>
-          </p:cNvPr>
-          <p:cNvPicPr>
-            <a:picLocks noChangeAspect="1"/>
-          </p:cNvPicPr>
-          <p:nvPr/>
-        </p:nvPicPr>
-        <p:blipFill>
-          <a:blip r:embed="rId2">
-            <a:extLst>
-              <a:ext uri="{28A0092B-C50C-407E-A947-70E740481C1C}">
-                <a14:useLocalDpi xmlns:a14="http://schemas.microsoft.com/office/drawing/2010/main" val="0"/>
-              </a:ext>
-            </a:extLst>
-          </a:blip>
-          <a:srcRect/>
-          <a:stretch>
-            <a:fillRect/>
-          </a:stretch>
-        </p:blipFill>
-        <p:spPr bwMode="auto">
-          <a:xfrm>
-            <a:off x="5832411" y="1429115"/>
-            <a:ext cx="5940425" cy="3256280"/>
-          </a:xfrm>
-          <a:prstGeom prst="rect">
-            <a:avLst/>
-          </a:prstGeom>
-          <a:noFill/>
-          <a:ln>
-            <a:noFill/>
-          </a:ln>
-        </p:spPr>
-      </p:pic>
+              <a:t>Функции модуля анализа видео</a:t>
+            </a:r>
+          </a:p>
+        </p:txBody>
+      </p:sp>
+      <p:sp>
+        <p:nvSpPr>
+          <p:cNvPr id="5" name="Номер слайда 4">
+            <a:extLst>
+              <a:ext uri="{FF2B5EF4-FFF2-40B4-BE49-F238E27FC236}">
+                <a16:creationId xmlns:a16="http://schemas.microsoft.com/office/drawing/2014/main" id="{20F5E886-65AE-3D29-A128-93D0A6C755B6}"/>
+              </a:ext>
+            </a:extLst>
+          </p:cNvPr>
+          <p:cNvSpPr>
+            <a:spLocks noGrp="1"/>
+          </p:cNvSpPr>
+          <p:nvPr>
+            <p:ph type="sldNum" sz="quarter" idx="12"/>
+          </p:nvPr>
+        </p:nvSpPr>
+        <p:spPr/>
+        <p:txBody>
+          <a:bodyPr/>
+          <a:lstStyle/>
+          <a:p>
+            <a:fld id="{5F9DB6E4-81A8-48FA-A111-413E3E85E768}" type="slidenum">
+              <a:rPr lang="ru-RU" smtClean="0"/>
+              <a:t>8</a:t>
+            </a:fld>
+            <a:endParaRPr lang="ru-RU"/>
+          </a:p>
+        </p:txBody>
+      </p:sp>
     </p:spTree>
     <p:extLst>
       <p:ext uri="{BB962C8B-B14F-4D97-AF65-F5344CB8AC3E}">
-        <p14:creationId xmlns:p14="http://schemas.microsoft.com/office/powerpoint/2010/main" val="441378147"/>
+        <p14:creationId xmlns:p14="http://schemas.microsoft.com/office/powerpoint/2010/main" val="281831545"/>
       </p:ext>
     </p:extLst>
   </p:cSld>
@@ -7292,38 +7037,10 @@
       </p:grpSpPr>
       <p:sp>
         <p:nvSpPr>
-          <p:cNvPr id="2" name="Заголовок 1">
-            <a:extLst>
-              <a:ext uri="{FF2B5EF4-FFF2-40B4-BE49-F238E27FC236}">
-                <a16:creationId xmlns:a16="http://schemas.microsoft.com/office/drawing/2014/main" id="{66339CDE-94C1-4EB4-9224-7DA92A27428A}"/>
-              </a:ext>
-            </a:extLst>
-          </p:cNvPr>
-          <p:cNvSpPr>
-            <a:spLocks noGrp="1"/>
-          </p:cNvSpPr>
-          <p:nvPr>
-            <p:ph type="title"/>
-          </p:nvPr>
-        </p:nvSpPr>
-        <p:spPr/>
-        <p:txBody>
-          <a:bodyPr/>
-          <a:lstStyle/>
-          <a:p>
-            <a:r>
-              <a:rPr lang="ru-RU" dirty="0"/>
-              <a:t>Функции системы</a:t>
-            </a:r>
-          </a:p>
-        </p:txBody>
-      </p:sp>
-      <p:sp>
-        <p:nvSpPr>
           <p:cNvPr id="3" name="Объект 2">
             <a:extLst>
               <a:ext uri="{FF2B5EF4-FFF2-40B4-BE49-F238E27FC236}">
-                <a16:creationId xmlns:a16="http://schemas.microsoft.com/office/drawing/2014/main" id="{CEC388F7-4FCC-4EBE-9E97-E7A0CDF59B9F}"/>
+                <a16:creationId xmlns:a16="http://schemas.microsoft.com/office/drawing/2014/main" id="{C9F7A7BF-345D-4464-BA61-1943803CE2E9}"/>
               </a:ext>
             </a:extLst>
           </p:cNvPr>
@@ -7334,139 +7051,176 @@
             <p:ph idx="1"/>
           </p:nvPr>
         </p:nvSpPr>
-        <p:spPr/>
+        <p:spPr>
+          <a:xfrm>
+            <a:off x="838200" y="969118"/>
+            <a:ext cx="10515600" cy="5839612"/>
+          </a:xfrm>
+        </p:spPr>
         <p:txBody>
           <a:bodyPr>
-            <a:normAutofit fontScale="77500" lnSpcReduction="20000"/>
+            <a:normAutofit/>
           </a:bodyPr>
           <a:lstStyle/>
           <a:p>
-            <a:pPr marL="0" indent="0">
+            <a:pPr marL="0" indent="0" algn="just">
               <a:buNone/>
             </a:pPr>
             <a:r>
-              <a:rPr lang="ru-RU" dirty="0"/>
-              <a:t>Анализ видеопотока:</a:t>
-            </a:r>
-          </a:p>
-          <a:p>
-            <a:r>
-              <a:rPr lang="ru-RU" dirty="0"/>
-              <a:t>Захват видео через браузерные API без плагинов</a:t>
-            </a:r>
-          </a:p>
-          <a:p>
-            <a:r>
-              <a:rPr lang="ru-RU" dirty="0"/>
-              <a:t>Детекция лиц и классификация эмоций в реальном времени</a:t>
-            </a:r>
-          </a:p>
-          <a:p>
-            <a:r>
-              <a:rPr lang="ru-RU" dirty="0"/>
-              <a:t>Отслеживание изменения эмоционального состояния в течение сессии</a:t>
-            </a:r>
-          </a:p>
-          <a:p>
-            <a:pPr marL="0" indent="0">
+              <a:rPr lang="ru-RU" sz="1800" dirty="0"/>
+              <a:t>Основные функции:</a:t>
+            </a:r>
+          </a:p>
+          <a:p>
+            <a:pPr marL="0" indent="0" algn="just">
               <a:buNone/>
             </a:pPr>
             <a:r>
-              <a:rPr lang="ru-RU" dirty="0"/>
-              <a:t>Анализ аудиопотока:</a:t>
-            </a:r>
-          </a:p>
-          <a:p>
-            <a:r>
-              <a:rPr lang="ru-RU" dirty="0"/>
-              <a:t>Запись аудио с частотой 16 кГц</a:t>
-            </a:r>
-          </a:p>
-          <a:p>
-            <a:r>
-              <a:rPr lang="ru-RU" dirty="0" err="1"/>
-              <a:t>Транскрибация</a:t>
-            </a:r>
-            <a:r>
-              <a:rPr lang="ru-RU" dirty="0"/>
-              <a:t> речи и анализ голосовых характеристик</a:t>
-            </a:r>
-          </a:p>
-          <a:p>
-            <a:r>
-              <a:rPr lang="ru-RU" dirty="0"/>
-              <a:t>Определение эмоциональной окраски и выделение ключевых фраз</a:t>
-            </a:r>
-          </a:p>
-          <a:p>
-            <a:pPr marL="0" indent="0">
+              <a:rPr lang="ru-RU" sz="1800" dirty="0"/>
+              <a:t>• Захват аудиопотока с микрофона в режиме реального времени</a:t>
+            </a:r>
+          </a:p>
+          <a:p>
+            <a:pPr marL="0" indent="0" algn="just">
               <a:buNone/>
             </a:pPr>
             <a:r>
-              <a:rPr lang="ru-RU" dirty="0"/>
-              <a:t>Формирование отчётности:</a:t>
-            </a:r>
-          </a:p>
-          <a:p>
-            <a:r>
-              <a:rPr lang="ru-RU" dirty="0"/>
-              <a:t>Аналитический отчёт с распределением эмоций по времени</a:t>
-            </a:r>
-          </a:p>
-          <a:p>
-            <a:r>
-              <a:rPr lang="ru-RU" dirty="0"/>
-              <a:t>Карточки участников с индивидуальной статистикой</a:t>
-            </a:r>
-          </a:p>
-          <a:p>
-            <a:r>
-              <a:rPr lang="ru-RU" dirty="0"/>
-              <a:t>Экспорт результатов в форматах JSON и PDF</a:t>
-            </a:r>
-          </a:p>
-        </p:txBody>
-      </p:sp>
-      <p:sp>
-        <p:nvSpPr>
-          <p:cNvPr id="4" name="TextBox 3">
-            <a:extLst>
-              <a:ext uri="{FF2B5EF4-FFF2-40B4-BE49-F238E27FC236}">
-                <a16:creationId xmlns:a16="http://schemas.microsoft.com/office/drawing/2014/main" id="{55E45F7B-423C-432A-AB30-10FB23DEFF5A}"/>
-              </a:ext>
-            </a:extLst>
-          </p:cNvPr>
-          <p:cNvSpPr txBox="1"/>
-          <p:nvPr/>
-        </p:nvSpPr>
-        <p:spPr>
-          <a:xfrm>
-            <a:off x="10990555" y="6391922"/>
-            <a:ext cx="870012" cy="372862"/>
-          </a:xfrm>
-          <a:prstGeom prst="rect">
-            <a:avLst/>
-          </a:prstGeom>
-          <a:noFill/>
-        </p:spPr>
-        <p:txBody>
-          <a:bodyPr wrap="square" rtlCol="0">
-            <a:spAutoFit/>
+              <a:rPr lang="ru-RU" sz="1800" dirty="0"/>
+              <a:t>• Преобразование речевого сигнала в текстовое представление</a:t>
+            </a:r>
+          </a:p>
+          <a:p>
+            <a:pPr marL="0" indent="0" algn="just">
+              <a:buNone/>
+            </a:pPr>
+            <a:r>
+              <a:rPr lang="ru-RU" sz="1800" dirty="0"/>
+              <a:t>• Разделение реплик по участникам встречи с сохранением временных меток</a:t>
+            </a:r>
+          </a:p>
+          <a:p>
+            <a:pPr marL="0" indent="0" algn="just">
+              <a:buNone/>
+            </a:pPr>
+            <a:r>
+              <a:rPr lang="ru-RU" sz="1800" dirty="0"/>
+              <a:t>• Передача промежуточных и финальных результатов </a:t>
+            </a:r>
+            <a:r>
+              <a:rPr lang="ru-RU" sz="1800" dirty="0" err="1"/>
+              <a:t>транскрибации</a:t>
+            </a:r>
+            <a:r>
+              <a:rPr lang="ru-RU" sz="1800" dirty="0"/>
+              <a:t> в интерфейс</a:t>
+            </a:r>
+          </a:p>
+          <a:p>
+            <a:pPr marL="0" indent="0" algn="just">
+              <a:buNone/>
+            </a:pPr>
+            <a:r>
+              <a:rPr lang="ru-RU" sz="1800" dirty="0"/>
+              <a:t>Дополнительные функции:</a:t>
+            </a:r>
+          </a:p>
+          <a:p>
+            <a:pPr marL="0" indent="0" algn="just">
+              <a:buNone/>
+            </a:pPr>
+            <a:r>
+              <a:rPr lang="ru-RU" sz="1800" dirty="0"/>
+              <a:t>• Оценка уверенности распознавания и определение языка речи</a:t>
+            </a:r>
+          </a:p>
+          <a:p>
+            <a:pPr marL="0" indent="0" algn="just">
+              <a:buNone/>
+            </a:pPr>
+            <a:r>
+              <a:rPr lang="ru-RU" sz="1800" dirty="0"/>
+              <a:t>• Фильтрация фоновых шумов и адаптация к качеству аудиосигнала</a:t>
+            </a:r>
+          </a:p>
+          <a:p>
+            <a:pPr marL="0" indent="0" algn="just">
+              <a:buNone/>
+            </a:pPr>
+            <a:r>
+              <a:rPr lang="ru-RU" sz="1800" dirty="0"/>
+              <a:t>• Экспорт текстовых данных для последующей агрегации в аналитических отчётах</a:t>
+            </a:r>
+          </a:p>
+        </p:txBody>
+      </p:sp>
+      <p:sp>
+        <p:nvSpPr>
+          <p:cNvPr id="2" name="Заголовок 1">
+            <a:extLst>
+              <a:ext uri="{FF2B5EF4-FFF2-40B4-BE49-F238E27FC236}">
+                <a16:creationId xmlns:a16="http://schemas.microsoft.com/office/drawing/2014/main" id="{1B58CB9A-86AF-B0B7-3E9B-73D490908836}"/>
+              </a:ext>
+            </a:extLst>
+          </p:cNvPr>
+          <p:cNvSpPr>
+            <a:spLocks noGrp="1"/>
+          </p:cNvSpPr>
+          <p:nvPr>
+            <p:ph type="title"/>
+          </p:nvPr>
+        </p:nvSpPr>
+        <p:spPr>
+          <a:xfrm>
+            <a:off x="447523" y="49270"/>
+            <a:ext cx="10515600" cy="1325563"/>
+          </a:xfrm>
+        </p:spPr>
+        <p:txBody>
+          <a:bodyPr>
+            <a:normAutofit/>
           </a:bodyPr>
           <a:lstStyle/>
           <a:p>
             <a:r>
-              <a:rPr lang="en-US" dirty="0"/>
-              <a:t>7/22</a:t>
-            </a:r>
-            <a:endParaRPr lang="ru-RU" dirty="0"/>
+              <a:rPr lang="ru-RU" sz="4000" dirty="0"/>
+              <a:t>Функции модуля распознавания речи</a:t>
+            </a:r>
+          </a:p>
+        </p:txBody>
+      </p:sp>
+      <p:sp>
+        <p:nvSpPr>
+          <p:cNvPr id="5" name="Номер слайда 4">
+            <a:extLst>
+              <a:ext uri="{FF2B5EF4-FFF2-40B4-BE49-F238E27FC236}">
+                <a16:creationId xmlns:a16="http://schemas.microsoft.com/office/drawing/2014/main" id="{EAFAD4C5-9485-CAD1-9E76-C0411C6184D0}"/>
+              </a:ext>
+            </a:extLst>
+          </p:cNvPr>
+          <p:cNvSpPr>
+            <a:spLocks noGrp="1"/>
+          </p:cNvSpPr>
+          <p:nvPr>
+            <p:ph type="sldNum" sz="quarter" idx="12"/>
+          </p:nvPr>
+        </p:nvSpPr>
+        <p:spPr/>
+        <p:txBody>
+          <a:bodyPr/>
+          <a:lstStyle/>
+          <a:p>
+            <a:fld id="{5F9DB6E4-81A8-48FA-A111-413E3E85E768}" type="slidenum">
+              <a:rPr lang="ru-RU" smtClean="0"/>
+              <a:t>9</a:t>
+            </a:fld>
+            <a:endParaRPr lang="ru-RU"/>
           </a:p>
         </p:txBody>
       </p:sp>
     </p:spTree>
     <p:extLst>
       <p:ext uri="{BB962C8B-B14F-4D97-AF65-F5344CB8AC3E}">
-        <p14:creationId xmlns:p14="http://schemas.microsoft.com/office/powerpoint/2010/main" val="2854395773"/>
+        <p14:creationId xmlns:p14="http://schemas.microsoft.com/office/powerpoint/2010/main" val="159339337"/>
       </p:ext>
     </p:extLst>
   </p:cSld>
@@ -7769,4 +7523,634 @@
     </a:ext>
   </a:extLst>
 </a:theme>
+</file>
+
+<file path=ppt/theme/theme2.xml><?xml version="1.0" encoding="utf-8"?>
+<a:theme xmlns:a="http://schemas.openxmlformats.org/drawingml/2006/main" name="Тема Office">
+  <a:themeElements>
+    <a:clrScheme name="Стандартная">
+      <a:dk1>
+        <a:sysClr val="windowText" lastClr="000000"/>
+      </a:dk1>
+      <a:lt1>
+        <a:sysClr val="window" lastClr="FFFFFF"/>
+      </a:lt1>
+      <a:dk2>
+        <a:srgbClr val="0E2841"/>
+      </a:dk2>
+      <a:lt2>
+        <a:srgbClr val="E8E8E8"/>
+      </a:lt2>
+      <a:accent1>
+        <a:srgbClr val="156082"/>
+      </a:accent1>
+      <a:accent2>
+        <a:srgbClr val="E97132"/>
+      </a:accent2>
+      <a:accent3>
+        <a:srgbClr val="196B24"/>
+      </a:accent3>
+      <a:accent4>
+        <a:srgbClr val="0F9ED5"/>
+      </a:accent4>
+      <a:accent5>
+        <a:srgbClr val="A02B93"/>
+      </a:accent5>
+      <a:accent6>
+        <a:srgbClr val="4EA72E"/>
+      </a:accent6>
+      <a:hlink>
+        <a:srgbClr val="467886"/>
+      </a:hlink>
+      <a:folHlink>
+        <a:srgbClr val="96607D"/>
+      </a:folHlink>
+    </a:clrScheme>
+    <a:fontScheme name="Стандартная">
+      <a:majorFont>
+        <a:latin typeface="Aptos Display" panose="02110004020202020204"/>
+        <a:ea typeface=""/>
+        <a:cs typeface=""/>
+        <a:font script="Jpan" typeface="游ゴシック Light"/>
+        <a:font script="Hang" typeface="맑은 고딕"/>
+        <a:font script="Hans" typeface="等线 Light"/>
+        <a:font script="Hant" typeface="新細明體"/>
+        <a:font script="Arab" typeface="Times New Roman"/>
+        <a:font script="Hebr" typeface="Times New Roman"/>
+        <a:font script="Thai" typeface="Angsana New"/>
+        <a:font script="Ethi" typeface="Nyala"/>
+        <a:font script="Beng" typeface="Vrinda"/>
+        <a:font script="Gujr" typeface="Shruti"/>
+        <a:font script="Khmr" typeface="MoolBoran"/>
+        <a:font script="Knda" typeface="Tunga"/>
+        <a:font script="Guru" typeface="Raavi"/>
+        <a:font script="Cans" typeface="Euphemia"/>
+        <a:font script="Cher" typeface="Plantagenet Cherokee"/>
+        <a:font script="Yiii" typeface="Microsoft Yi Baiti"/>
+        <a:font script="Tibt" typeface="Microsoft Himalaya"/>
+        <a:font script="Thaa" typeface="MV Boli"/>
+        <a:font script="Deva" typeface="Mangal"/>
+        <a:font script="Telu" typeface="Gautami"/>
+        <a:font script="Taml" typeface="Latha"/>
+        <a:font script="Syrc" typeface="Estrangelo Edessa"/>
+        <a:font script="Orya" typeface="Kalinga"/>
+        <a:font script="Mlym" typeface="Kartika"/>
+        <a:font script="Laoo" typeface="DokChampa"/>
+        <a:font script="Sinh" typeface="Iskoola Pota"/>
+        <a:font script="Mong" typeface="Mongolian Baiti"/>
+        <a:font script="Viet" typeface="Times New Roman"/>
+        <a:font script="Uigh" typeface="Microsoft Uighur"/>
+        <a:font script="Geor" typeface="Sylfaen"/>
+        <a:font script="Armn" typeface="Arial"/>
+        <a:font script="Bugi" typeface="Leelawadee UI"/>
+        <a:font script="Bopo" typeface="Microsoft JhengHei"/>
+        <a:font script="Java" typeface="Javanese Text"/>
+        <a:font script="Lisu" typeface="Segoe UI"/>
+        <a:font script="Mymr" typeface="Myanmar Text"/>
+        <a:font script="Nkoo" typeface="Ebrima"/>
+        <a:font script="Olck" typeface="Nirmala UI"/>
+        <a:font script="Osma" typeface="Ebrima"/>
+        <a:font script="Phag" typeface="Phagspa"/>
+        <a:font script="Syrn" typeface="Estrangelo Edessa"/>
+        <a:font script="Syrj" typeface="Estrangelo Edessa"/>
+        <a:font script="Syre" typeface="Estrangelo Edessa"/>
+        <a:font script="Sora" typeface="Nirmala UI"/>
+        <a:font script="Tale" typeface="Microsoft Tai Le"/>
+        <a:font script="Talu" typeface="Microsoft New Tai Lue"/>
+        <a:font script="Tfng" typeface="Ebrima"/>
+      </a:majorFont>
+      <a:minorFont>
+        <a:latin typeface="Aptos" panose="02110004020202020204"/>
+        <a:ea typeface=""/>
+        <a:cs typeface=""/>
+        <a:font script="Jpan" typeface="游ゴシック"/>
+        <a:font script="Hang" typeface="맑은 고딕"/>
+        <a:font script="Hans" typeface="等线"/>
+        <a:font script="Hant" typeface="新細明體"/>
+        <a:font script="Arab" typeface="Arial"/>
+        <a:font script="Hebr" typeface="Arial"/>
+        <a:font script="Thai" typeface="Cordia New"/>
+        <a:font script="Ethi" typeface="Nyala"/>
+        <a:font script="Beng" typeface="Vrinda"/>
+        <a:font script="Gujr" typeface="Shruti"/>
+        <a:font script="Khmr" typeface="DaunPenh"/>
+        <a:font script="Knda" typeface="Tunga"/>
+        <a:font script="Guru" typeface="Raavi"/>
+        <a:font script="Cans" typeface="Euphemia"/>
+        <a:font script="Cher" typeface="Plantagenet Cherokee"/>
+        <a:font script="Yiii" typeface="Microsoft Yi Baiti"/>
+        <a:font script="Tibt" typeface="Microsoft Himalaya"/>
+        <a:font script="Thaa" typeface="MV Boli"/>
+        <a:font script="Deva" typeface="Mangal"/>
+        <a:font script="Telu" typeface="Gautami"/>
+        <a:font script="Taml" typeface="Latha"/>
+        <a:font script="Syrc" typeface="Estrangelo Edessa"/>
+        <a:font script="Orya" typeface="Kalinga"/>
+        <a:font script="Mlym" typeface="Kartika"/>
+        <a:font script="Laoo" typeface="DokChampa"/>
+        <a:font script="Sinh" typeface="Iskoola Pota"/>
+        <a:font script="Mong" typeface="Mongolian Baiti"/>
+        <a:font script="Viet" typeface="Arial"/>
+        <a:font script="Uigh" typeface="Microsoft Uighur"/>
+        <a:font script="Geor" typeface="Sylfaen"/>
+        <a:font script="Armn" typeface="Arial"/>
+        <a:font script="Bugi" typeface="Leelawadee UI"/>
+        <a:font script="Bopo" typeface="Microsoft JhengHei"/>
+        <a:font script="Java" typeface="Javanese Text"/>
+        <a:font script="Lisu" typeface="Segoe UI"/>
+        <a:font script="Mymr" typeface="Myanmar Text"/>
+        <a:font script="Nkoo" typeface="Ebrima"/>
+        <a:font script="Olck" typeface="Nirmala UI"/>
+        <a:font script="Osma" typeface="Ebrima"/>
+        <a:font script="Phag" typeface="Phagspa"/>
+        <a:font script="Syrn" typeface="Estrangelo Edessa"/>
+        <a:font script="Syrj" typeface="Estrangelo Edessa"/>
+        <a:font script="Syre" typeface="Estrangelo Edessa"/>
+        <a:font script="Sora" typeface="Nirmala UI"/>
+        <a:font script="Tale" typeface="Microsoft Tai Le"/>
+        <a:font script="Talu" typeface="Microsoft New Tai Lue"/>
+        <a:font script="Tfng" typeface="Ebrima"/>
+      </a:minorFont>
+    </a:fontScheme>
+    <a:fmtScheme name="Стандартная">
+      <a:fillStyleLst>
+        <a:solidFill>
+          <a:schemeClr val="phClr"/>
+        </a:solidFill>
+        <a:gradFill rotWithShape="1">
+          <a:gsLst>
+            <a:gs pos="0">
+              <a:schemeClr val="phClr">
+                <a:lumMod val="110000"/>
+                <a:satMod val="105000"/>
+                <a:tint val="67000"/>
+              </a:schemeClr>
+            </a:gs>
+            <a:gs pos="50000">
+              <a:schemeClr val="phClr">
+                <a:lumMod val="105000"/>
+                <a:satMod val="103000"/>
+                <a:tint val="73000"/>
+              </a:schemeClr>
+            </a:gs>
+            <a:gs pos="100000">
+              <a:schemeClr val="phClr">
+                <a:lumMod val="105000"/>
+                <a:satMod val="109000"/>
+                <a:tint val="81000"/>
+              </a:schemeClr>
+            </a:gs>
+          </a:gsLst>
+          <a:lin ang="5400000" scaled="0"/>
+        </a:gradFill>
+        <a:gradFill rotWithShape="1">
+          <a:gsLst>
+            <a:gs pos="0">
+              <a:schemeClr val="phClr">
+                <a:satMod val="103000"/>
+                <a:lumMod val="102000"/>
+                <a:tint val="94000"/>
+              </a:schemeClr>
+            </a:gs>
+            <a:gs pos="50000">
+              <a:schemeClr val="phClr">
+                <a:satMod val="110000"/>
+                <a:lumMod val="100000"/>
+                <a:shade val="100000"/>
+              </a:schemeClr>
+            </a:gs>
+            <a:gs pos="100000">
+              <a:schemeClr val="phClr">
+                <a:lumMod val="99000"/>
+                <a:satMod val="120000"/>
+                <a:shade val="78000"/>
+              </a:schemeClr>
+            </a:gs>
+          </a:gsLst>
+          <a:lin ang="5400000" scaled="0"/>
+        </a:gradFill>
+      </a:fillStyleLst>
+      <a:lnStyleLst>
+        <a:ln w="12700" cap="flat" cmpd="sng" algn="ctr">
+          <a:solidFill>
+            <a:schemeClr val="phClr"/>
+          </a:solidFill>
+          <a:prstDash val="solid"/>
+          <a:miter lim="800000"/>
+        </a:ln>
+        <a:ln w="19050" cap="flat" cmpd="sng" algn="ctr">
+          <a:solidFill>
+            <a:schemeClr val="phClr"/>
+          </a:solidFill>
+          <a:prstDash val="solid"/>
+          <a:miter lim="800000"/>
+        </a:ln>
+        <a:ln w="25400" cap="flat" cmpd="sng" algn="ctr">
+          <a:solidFill>
+            <a:schemeClr val="phClr"/>
+          </a:solidFill>
+          <a:prstDash val="solid"/>
+          <a:miter lim="800000"/>
+        </a:ln>
+      </a:lnStyleLst>
+      <a:effectStyleLst>
+        <a:effectStyle>
+          <a:effectLst/>
+        </a:effectStyle>
+        <a:effectStyle>
+          <a:effectLst/>
+        </a:effectStyle>
+        <a:effectStyle>
+          <a:effectLst>
+            <a:outerShdw blurRad="57150" dist="19050" dir="5400000" algn="ctr" rotWithShape="0">
+              <a:srgbClr val="000000">
+                <a:alpha val="63000"/>
+              </a:srgbClr>
+            </a:outerShdw>
+          </a:effectLst>
+        </a:effectStyle>
+      </a:effectStyleLst>
+      <a:bgFillStyleLst>
+        <a:solidFill>
+          <a:schemeClr val="phClr"/>
+        </a:solidFill>
+        <a:solidFill>
+          <a:schemeClr val="phClr">
+            <a:tint val="95000"/>
+            <a:satMod val="170000"/>
+          </a:schemeClr>
+        </a:solidFill>
+        <a:gradFill rotWithShape="1">
+          <a:gsLst>
+            <a:gs pos="0">
+              <a:schemeClr val="phClr">
+                <a:tint val="93000"/>
+                <a:satMod val="150000"/>
+                <a:shade val="98000"/>
+                <a:lumMod val="102000"/>
+              </a:schemeClr>
+            </a:gs>
+            <a:gs pos="50000">
+              <a:schemeClr val="phClr">
+                <a:tint val="98000"/>
+                <a:satMod val="130000"/>
+                <a:shade val="90000"/>
+                <a:lumMod val="103000"/>
+              </a:schemeClr>
+            </a:gs>
+            <a:gs pos="100000">
+              <a:schemeClr val="phClr">
+                <a:shade val="63000"/>
+                <a:satMod val="120000"/>
+              </a:schemeClr>
+            </a:gs>
+          </a:gsLst>
+          <a:lin ang="5400000" scaled="0"/>
+        </a:gradFill>
+      </a:bgFillStyleLst>
+    </a:fmtScheme>
+  </a:themeElements>
+  <a:objectDefaults>
+    <a:lnDef>
+      <a:spPr/>
+      <a:bodyPr/>
+      <a:lstStyle/>
+      <a:style>
+        <a:lnRef idx="2">
+          <a:schemeClr val="accent1"/>
+        </a:lnRef>
+        <a:fillRef idx="0">
+          <a:schemeClr val="accent1"/>
+        </a:fillRef>
+        <a:effectRef idx="1">
+          <a:schemeClr val="accent1"/>
+        </a:effectRef>
+        <a:fontRef idx="minor">
+          <a:schemeClr val="tx1"/>
+        </a:fontRef>
+      </a:style>
+    </a:lnDef>
+  </a:objectDefaults>
+  <a:extraClrSchemeLst/>
+  <a:extLst>
+    <a:ext uri="{05A4C25C-085E-4340-85A3-A5531E510DB2}">
+      <thm15:themeFamily xmlns:thm15="http://schemas.microsoft.com/office/thememl/2012/main" name="Office Theme" id="{2E142A2C-CD16-42D6-873A-C26D2A0506FA}" vid="{1BDDFF52-6CD6-40A5-AB3C-68EB2F1E4D0A}"/>
+    </a:ext>
+  </a:extLst>
+</a:theme>
+</file>
+
+<file path=ppt/theme/theme3.xml><?xml version="1.0" encoding="utf-8"?>
+<a:theme xmlns:a="http://schemas.openxmlformats.org/drawingml/2006/main" name="Тема Office">
+  <a:themeElements>
+    <a:clrScheme name="Стандартная">
+      <a:dk1>
+        <a:sysClr val="windowText" lastClr="000000"/>
+      </a:dk1>
+      <a:lt1>
+        <a:sysClr val="window" lastClr="FFFFFF"/>
+      </a:lt1>
+      <a:dk2>
+        <a:srgbClr val="0E2841"/>
+      </a:dk2>
+      <a:lt2>
+        <a:srgbClr val="E8E8E8"/>
+      </a:lt2>
+      <a:accent1>
+        <a:srgbClr val="156082"/>
+      </a:accent1>
+      <a:accent2>
+        <a:srgbClr val="E97132"/>
+      </a:accent2>
+      <a:accent3>
+        <a:srgbClr val="196B24"/>
+      </a:accent3>
+      <a:accent4>
+        <a:srgbClr val="0F9ED5"/>
+      </a:accent4>
+      <a:accent5>
+        <a:srgbClr val="A02B93"/>
+      </a:accent5>
+      <a:accent6>
+        <a:srgbClr val="4EA72E"/>
+      </a:accent6>
+      <a:hlink>
+        <a:srgbClr val="467886"/>
+      </a:hlink>
+      <a:folHlink>
+        <a:srgbClr val="96607D"/>
+      </a:folHlink>
+    </a:clrScheme>
+    <a:fontScheme name="Стандартная">
+      <a:majorFont>
+        <a:latin typeface="Aptos Display" panose="02110004020202020204"/>
+        <a:ea typeface=""/>
+        <a:cs typeface=""/>
+        <a:font script="Jpan" typeface="游ゴシック Light"/>
+        <a:font script="Hang" typeface="맑은 고딕"/>
+        <a:font script="Hans" typeface="等线 Light"/>
+        <a:font script="Hant" typeface="新細明體"/>
+        <a:font script="Arab" typeface="Times New Roman"/>
+        <a:font script="Hebr" typeface="Times New Roman"/>
+        <a:font script="Thai" typeface="Angsana New"/>
+        <a:font script="Ethi" typeface="Nyala"/>
+        <a:font script="Beng" typeface="Vrinda"/>
+        <a:font script="Gujr" typeface="Shruti"/>
+        <a:font script="Khmr" typeface="MoolBoran"/>
+        <a:font script="Knda" typeface="Tunga"/>
+        <a:font script="Guru" typeface="Raavi"/>
+        <a:font script="Cans" typeface="Euphemia"/>
+        <a:font script="Cher" typeface="Plantagenet Cherokee"/>
+        <a:font script="Yiii" typeface="Microsoft Yi Baiti"/>
+        <a:font script="Tibt" typeface="Microsoft Himalaya"/>
+        <a:font script="Thaa" typeface="MV Boli"/>
+        <a:font script="Deva" typeface="Mangal"/>
+        <a:font script="Telu" typeface="Gautami"/>
+        <a:font script="Taml" typeface="Latha"/>
+        <a:font script="Syrc" typeface="Estrangelo Edessa"/>
+        <a:font script="Orya" typeface="Kalinga"/>
+        <a:font script="Mlym" typeface="Kartika"/>
+        <a:font script="Laoo" typeface="DokChampa"/>
+        <a:font script="Sinh" typeface="Iskoola Pota"/>
+        <a:font script="Mong" typeface="Mongolian Baiti"/>
+        <a:font script="Viet" typeface="Times New Roman"/>
+        <a:font script="Uigh" typeface="Microsoft Uighur"/>
+        <a:font script="Geor" typeface="Sylfaen"/>
+        <a:font script="Armn" typeface="Arial"/>
+        <a:font script="Bugi" typeface="Leelawadee UI"/>
+        <a:font script="Bopo" typeface="Microsoft JhengHei"/>
+        <a:font script="Java" typeface="Javanese Text"/>
+        <a:font script="Lisu" typeface="Segoe UI"/>
+        <a:font script="Mymr" typeface="Myanmar Text"/>
+        <a:font script="Nkoo" typeface="Ebrima"/>
+        <a:font script="Olck" typeface="Nirmala UI"/>
+        <a:font script="Osma" typeface="Ebrima"/>
+        <a:font script="Phag" typeface="Phagspa"/>
+        <a:font script="Syrn" typeface="Estrangelo Edessa"/>
+        <a:font script="Syrj" typeface="Estrangelo Edessa"/>
+        <a:font script="Syre" typeface="Estrangelo Edessa"/>
+        <a:font script="Sora" typeface="Nirmala UI"/>
+        <a:font script="Tale" typeface="Microsoft Tai Le"/>
+        <a:font script="Talu" typeface="Microsoft New Tai Lue"/>
+        <a:font script="Tfng" typeface="Ebrima"/>
+      </a:majorFont>
+      <a:minorFont>
+        <a:latin typeface="Aptos" panose="02110004020202020204"/>
+        <a:ea typeface=""/>
+        <a:cs typeface=""/>
+        <a:font script="Jpan" typeface="游ゴシック"/>
+        <a:font script="Hang" typeface="맑은 고딕"/>
+        <a:font script="Hans" typeface="等线"/>
+        <a:font script="Hant" typeface="新細明體"/>
+        <a:font script="Arab" typeface="Arial"/>
+        <a:font script="Hebr" typeface="Arial"/>
+        <a:font script="Thai" typeface="Cordia New"/>
+        <a:font script="Ethi" typeface="Nyala"/>
+        <a:font script="Beng" typeface="Vrinda"/>
+        <a:font script="Gujr" typeface="Shruti"/>
+        <a:font script="Khmr" typeface="DaunPenh"/>
+        <a:font script="Knda" typeface="Tunga"/>
+        <a:font script="Guru" typeface="Raavi"/>
+        <a:font script="Cans" typeface="Euphemia"/>
+        <a:font script="Cher" typeface="Plantagenet Cherokee"/>
+        <a:font script="Yiii" typeface="Microsoft Yi Baiti"/>
+        <a:font script="Tibt" typeface="Microsoft Himalaya"/>
+        <a:font script="Thaa" typeface="MV Boli"/>
+        <a:font script="Deva" typeface="Mangal"/>
+        <a:font script="Telu" typeface="Gautami"/>
+        <a:font script="Taml" typeface="Latha"/>
+        <a:font script="Syrc" typeface="Estrangelo Edessa"/>
+        <a:font script="Orya" typeface="Kalinga"/>
+        <a:font script="Mlym" typeface="Kartika"/>
+        <a:font script="Laoo" typeface="DokChampa"/>
+        <a:font script="Sinh" typeface="Iskoola Pota"/>
+        <a:font script="Mong" typeface="Mongolian Baiti"/>
+        <a:font script="Viet" typeface="Arial"/>
+        <a:font script="Uigh" typeface="Microsoft Uighur"/>
+        <a:font script="Geor" typeface="Sylfaen"/>
+        <a:font script="Armn" typeface="Arial"/>
+        <a:font script="Bugi" typeface="Leelawadee UI"/>
+        <a:font script="Bopo" typeface="Microsoft JhengHei"/>
+        <a:font script="Java" typeface="Javanese Text"/>
+        <a:font script="Lisu" typeface="Segoe UI"/>
+        <a:font script="Mymr" typeface="Myanmar Text"/>
+        <a:font script="Nkoo" typeface="Ebrima"/>
+        <a:font script="Olck" typeface="Nirmala UI"/>
+        <a:font script="Osma" typeface="Ebrima"/>
+        <a:font script="Phag" typeface="Phagspa"/>
+        <a:font script="Syrn" typeface="Estrangelo Edessa"/>
+        <a:font script="Syrj" typeface="Estrangelo Edessa"/>
+        <a:font script="Syre" typeface="Estrangelo Edessa"/>
+        <a:font script="Sora" typeface="Nirmala UI"/>
+        <a:font script="Tale" typeface="Microsoft Tai Le"/>
+        <a:font script="Talu" typeface="Microsoft New Tai Lue"/>
+        <a:font script="Tfng" typeface="Ebrima"/>
+      </a:minorFont>
+    </a:fontScheme>
+    <a:fmtScheme name="Стандартная">
+      <a:fillStyleLst>
+        <a:solidFill>
+          <a:schemeClr val="phClr"/>
+        </a:solidFill>
+        <a:gradFill rotWithShape="1">
+          <a:gsLst>
+            <a:gs pos="0">
+              <a:schemeClr val="phClr">
+                <a:lumMod val="110000"/>
+                <a:satMod val="105000"/>
+                <a:tint val="67000"/>
+              </a:schemeClr>
+            </a:gs>
+            <a:gs pos="50000">
+              <a:schemeClr val="phClr">
+                <a:lumMod val="105000"/>
+                <a:satMod val="103000"/>
+                <a:tint val="73000"/>
+              </a:schemeClr>
+            </a:gs>
+            <a:gs pos="100000">
+              <a:schemeClr val="phClr">
+                <a:lumMod val="105000"/>
+                <a:satMod val="109000"/>
+                <a:tint val="81000"/>
+              </a:schemeClr>
+            </a:gs>
+          </a:gsLst>
+          <a:lin ang="5400000" scaled="0"/>
+        </a:gradFill>
+        <a:gradFill rotWithShape="1">
+          <a:gsLst>
+            <a:gs pos="0">
+              <a:schemeClr val="phClr">
+                <a:satMod val="103000"/>
+                <a:lumMod val="102000"/>
+                <a:tint val="94000"/>
+              </a:schemeClr>
+            </a:gs>
+            <a:gs pos="50000">
+              <a:schemeClr val="phClr">
+                <a:satMod val="110000"/>
+                <a:lumMod val="100000"/>
+                <a:shade val="100000"/>
+              </a:schemeClr>
+            </a:gs>
+            <a:gs pos="100000">
+              <a:schemeClr val="phClr">
+                <a:lumMod val="99000"/>
+                <a:satMod val="120000"/>
+                <a:shade val="78000"/>
+              </a:schemeClr>
+            </a:gs>
+          </a:gsLst>
+          <a:lin ang="5400000" scaled="0"/>
+        </a:gradFill>
+      </a:fillStyleLst>
+      <a:lnStyleLst>
+        <a:ln w="12700" cap="flat" cmpd="sng" algn="ctr">
+          <a:solidFill>
+            <a:schemeClr val="phClr"/>
+          </a:solidFill>
+          <a:prstDash val="solid"/>
+          <a:miter lim="800000"/>
+        </a:ln>
+        <a:ln w="19050" cap="flat" cmpd="sng" algn="ctr">
+          <a:solidFill>
+            <a:schemeClr val="phClr"/>
+          </a:solidFill>
+          <a:prstDash val="solid"/>
+          <a:miter lim="800000"/>
+        </a:ln>
+        <a:ln w="25400" cap="flat" cmpd="sng" algn="ctr">
+          <a:solidFill>
+            <a:schemeClr val="phClr"/>
+          </a:solidFill>
+          <a:prstDash val="solid"/>
+          <a:miter lim="800000"/>
+        </a:ln>
+      </a:lnStyleLst>
+      <a:effectStyleLst>
+        <a:effectStyle>
+          <a:effectLst/>
+        </a:effectStyle>
+        <a:effectStyle>
+          <a:effectLst/>
+        </a:effectStyle>
+        <a:effectStyle>
+          <a:effectLst>
+            <a:outerShdw blurRad="57150" dist="19050" dir="5400000" algn="ctr" rotWithShape="0">
+              <a:srgbClr val="000000">
+                <a:alpha val="63000"/>
+              </a:srgbClr>
+            </a:outerShdw>
+          </a:effectLst>
+        </a:effectStyle>
+      </a:effectStyleLst>
+      <a:bgFillStyleLst>
+        <a:solidFill>
+          <a:schemeClr val="phClr"/>
+        </a:solidFill>
+        <a:solidFill>
+          <a:schemeClr val="phClr">
+            <a:tint val="95000"/>
+            <a:satMod val="170000"/>
+          </a:schemeClr>
+        </a:solidFill>
+        <a:gradFill rotWithShape="1">
+          <a:gsLst>
+            <a:gs pos="0">
+              <a:schemeClr val="phClr">
+                <a:tint val="93000"/>
+                <a:satMod val="150000"/>
+                <a:shade val="98000"/>
+                <a:lumMod val="102000"/>
+              </a:schemeClr>
+            </a:gs>
+            <a:gs pos="50000">
+              <a:schemeClr val="phClr">
+                <a:tint val="98000"/>
+                <a:satMod val="130000"/>
+                <a:shade val="90000"/>
+                <a:lumMod val="103000"/>
+              </a:schemeClr>
+            </a:gs>
+            <a:gs pos="100000">
+              <a:schemeClr val="phClr">
+                <a:shade val="63000"/>
+                <a:satMod val="120000"/>
+              </a:schemeClr>
+            </a:gs>
+          </a:gsLst>
+          <a:lin ang="5400000" scaled="0"/>
+        </a:gradFill>
+      </a:bgFillStyleLst>
+    </a:fmtScheme>
+  </a:themeElements>
+  <a:objectDefaults>
+    <a:lnDef>
+      <a:spPr/>
+      <a:bodyPr/>
+      <a:lstStyle/>
+      <a:style>
+        <a:lnRef idx="2">
+          <a:schemeClr val="accent1"/>
+        </a:lnRef>
+        <a:fillRef idx="0">
+          <a:schemeClr val="accent1"/>
+        </a:fillRef>
+        <a:effectRef idx="1">
+          <a:schemeClr val="accent1"/>
+        </a:effectRef>
+        <a:fontRef idx="minor">
+          <a:schemeClr val="tx1"/>
+        </a:fontRef>
+      </a:style>
+    </a:lnDef>
+  </a:objectDefaults>
+  <a:extraClrSchemeLst/>
+  <a:extLst>
+    <a:ext uri="{05A4C25C-085E-4340-85A3-A5531E510DB2}">
+      <thm15:themeFamily xmlns:thm15="http://schemas.microsoft.com/office/thememl/2012/main" name="Office Theme" id="{2E142A2C-CD16-42D6-873A-C26D2A0506FA}" vid="{1BDDFF52-6CD6-40A5-AB3C-68EB2F1E4D0A}"/>
+    </a:ext>
+  </a:extLst>
+</a:theme>
 </file>
--- a/вкр/практика/преза.pptx
+++ b/вкр/практика/преза.pptx
@@ -4052,7 +4052,7 @@
             <a:pPr algn="r"/>
             <a:r>
               <a:rPr lang="ru-RU" dirty="0"/>
-              <a:t>Научный руководитель: старший преподаватель </a:t>
+              <a:t>Руководитель практики: старший преподаватель </a:t>
             </a:r>
             <a:r>
               <a:rPr lang="ru-RU" dirty="0" err="1"/>
@@ -4060,7 +4060,15 @@
             </a:r>
             <a:r>
               <a:rPr lang="ru-RU" dirty="0"/>
-              <a:t> Горбунов Д.В.</a:t>
+              <a:t> </a:t>
+            </a:r>
+            <a:r>
+              <a:rPr lang="ru-RU" dirty="0" err="1"/>
+              <a:t>Бурдыко</a:t>
+            </a:r>
+            <a:r>
+              <a:rPr lang="ru-RU" dirty="0"/>
+              <a:t> Т.Г.</a:t>
             </a:r>
           </a:p>
         </p:txBody>

--- a/вкр/практика/преза.pptx
+++ b/вкр/практика/преза.pptx
@@ -6482,27 +6482,62 @@
         </p:nvSpPr>
         <p:spPr>
           <a:xfrm>
-            <a:off x="200635" y="991102"/>
-            <a:ext cx="10616717" cy="2803658"/>
+            <a:off x="374371" y="898762"/>
+            <a:ext cx="11339093" cy="4011565"/>
           </a:xfrm>
         </p:spPr>
         <p:txBody>
           <a:bodyPr>
-            <a:normAutofit/>
+            <a:noAutofit/>
           </a:bodyPr>
           <a:lstStyle/>
           <a:p>
-            <a:pPr algn="just"/>
+            <a:pPr marL="0" indent="0">
+              <a:buNone/>
+            </a:pPr>
             <a:r>
               <a:rPr lang="ru-RU" sz="1800" dirty="0"/>
-              <a:t>В HR-процессах модуль анализа лица выполняет задачу объективной фиксации эмоциональных реакций участников встреч и собеседований. Технология позволяет оценивать вовлечённость, выявлять признаки стресса и формировать доказательную базу для принятия решений.</a:t>
-            </a:r>
-          </a:p>
-          <a:p>
-            <a:pPr algn="just"/>
+              <a:t>Основные этапы работы модуля:</a:t>
+            </a:r>
+          </a:p>
+          <a:p>
+            <a:pPr>
+              <a:buFont typeface="Arial" panose="020B0604020202020204" pitchFamily="34" charset="0"/>
+              <a:buChar char="•"/>
+            </a:pPr>
             <a:r>
               <a:rPr lang="ru-RU" sz="1800" dirty="0"/>
-              <a:t>Модуль работает в автоматическом режиме: захватывает кадры с веб-камеры, локализует область лица, нормализует геометрию и классифицирует текущее эмоциональное состояние на основе </a:t>
+              <a:t>захват кадров с веб-камеры через браузерные API; </a:t>
+            </a:r>
+          </a:p>
+          <a:p>
+            <a:pPr>
+              <a:buFont typeface="Arial" panose="020B0604020202020204" pitchFamily="34" charset="0"/>
+              <a:buChar char="•"/>
+            </a:pPr>
+            <a:r>
+              <a:rPr lang="ru-RU" sz="1800" dirty="0"/>
+              <a:t>детекция и локализация лица на изображении; </a:t>
+            </a:r>
+          </a:p>
+          <a:p>
+            <a:pPr>
+              <a:buFont typeface="Arial" panose="020B0604020202020204" pitchFamily="34" charset="0"/>
+              <a:buChar char="•"/>
+            </a:pPr>
+            <a:r>
+              <a:rPr lang="ru-RU" sz="1800" dirty="0"/>
+              <a:t>выравнивание и нормализация области лица; </a:t>
+            </a:r>
+          </a:p>
+          <a:p>
+            <a:pPr>
+              <a:buFont typeface="Arial" panose="020B0604020202020204" pitchFamily="34" charset="0"/>
+              <a:buChar char="•"/>
+            </a:pPr>
+            <a:r>
+              <a:rPr lang="ru-RU" sz="1800" dirty="0"/>
+              <a:t>извлечение признаков с использованием </a:t>
             </a:r>
             <a:r>
               <a:rPr lang="ru-RU" sz="1800" dirty="0" err="1"/>
@@ -6510,22 +6545,74 @@
             </a:r>
             <a:r>
               <a:rPr lang="ru-RU" sz="1800" dirty="0"/>
-              <a:t> </a:t>
+              <a:t> CNN-моделей; </a:t>
+            </a:r>
+          </a:p>
+          <a:p>
+            <a:pPr>
+              <a:buFont typeface="Arial" panose="020B0604020202020204" pitchFamily="34" charset="0"/>
+              <a:buChar char="•"/>
+            </a:pPr>
+            <a:r>
+              <a:rPr lang="ru-RU" sz="1800" dirty="0"/>
+              <a:t>классификация эмоционального состояния; </a:t>
+            </a:r>
+          </a:p>
+          <a:p>
+            <a:pPr>
+              <a:buFont typeface="Arial" panose="020B0604020202020204" pitchFamily="34" charset="0"/>
+              <a:buChar char="•"/>
+            </a:pPr>
+            <a:r>
+              <a:rPr lang="ru-RU" sz="1800" dirty="0"/>
+              <a:t>передача результатов аналитики в систему через </a:t>
             </a:r>
             <a:r>
               <a:rPr lang="ru-RU" sz="1800" dirty="0" err="1"/>
-              <a:t>сверточных</a:t>
+              <a:t>WebSocket</a:t>
             </a:r>
             <a:r>
               <a:rPr lang="ru-RU" sz="1800" dirty="0"/>
-              <a:t> сетей.</a:t>
-            </a:r>
-          </a:p>
-          <a:p>
-            <a:pPr algn="just"/>
+              <a:t>. </a:t>
+            </a:r>
+          </a:p>
+          <a:p>
+            <a:pPr marL="0" indent="0">
+              <a:buNone/>
+            </a:pPr>
             <a:r>
               <a:rPr lang="ru-RU" sz="1800" dirty="0"/>
-              <a:t>Система способна обрабатывать несколько лиц одновременно, отслеживать динамику изменений в течение сессии и агрегировать результаты в структурированные метрики без участия оператора.</a:t>
+              <a:t>Дополнительно система поддерживает:</a:t>
+            </a:r>
+          </a:p>
+          <a:p>
+            <a:pPr>
+              <a:buFont typeface="Arial" panose="020B0604020202020204" pitchFamily="34" charset="0"/>
+              <a:buChar char="•"/>
+            </a:pPr>
+            <a:r>
+              <a:rPr lang="ru-RU" sz="1800" dirty="0"/>
+              <a:t>обработку нескольких лиц одновременно; </a:t>
+            </a:r>
+          </a:p>
+          <a:p>
+            <a:pPr>
+              <a:buFont typeface="Arial" panose="020B0604020202020204" pitchFamily="34" charset="0"/>
+              <a:buChar char="•"/>
+            </a:pPr>
+            <a:r>
+              <a:rPr lang="ru-RU" sz="1800" dirty="0"/>
+              <a:t>отслеживание изменений эмоций во времени; </a:t>
+            </a:r>
+          </a:p>
+          <a:p>
+            <a:pPr>
+              <a:buFont typeface="Arial" panose="020B0604020202020204" pitchFamily="34" charset="0"/>
+              <a:buChar char="•"/>
+            </a:pPr>
+            <a:r>
+              <a:rPr lang="ru-RU" sz="1800" dirty="0"/>
+              <a:t>агрегацию результатов в аналитические события и отчёты.</a:t>
             </a:r>
           </a:p>
         </p:txBody>
@@ -6548,8 +6635,8 @@
         </p:nvSpPr>
         <p:spPr>
           <a:xfrm>
-            <a:off x="374371" y="103552"/>
-            <a:ext cx="10515600" cy="1325563"/>
+            <a:off x="374371" y="103553"/>
+            <a:ext cx="10515600" cy="673688"/>
           </a:xfrm>
         </p:spPr>
         <p:txBody>
